--- a/crypto_07_wallets.pptx
+++ b/crypto_07_wallets.pptx
@@ -9,12 +9,12 @@
   </p:notesMasterIdLst>
   <p:sldIdLst>
     <p:sldId id="317" r:id="rId2"/>
-    <p:sldId id="316" r:id="rId3"/>
-    <p:sldId id="266" r:id="rId4"/>
-    <p:sldId id="282" r:id="rId5"/>
-    <p:sldId id="281" r:id="rId6"/>
-    <p:sldId id="264" r:id="rId7"/>
-    <p:sldId id="276" r:id="rId8"/>
+    <p:sldId id="282" r:id="rId3"/>
+    <p:sldId id="316" r:id="rId4"/>
+    <p:sldId id="276" r:id="rId5"/>
+    <p:sldId id="266" r:id="rId6"/>
+    <p:sldId id="281" r:id="rId7"/>
+    <p:sldId id="264" r:id="rId8"/>
     <p:sldId id="283" r:id="rId9"/>
   </p:sldIdLst>
   <p:sldSz cx="12192000" cy="6858000"/>
@@ -753,7 +753,7 @@
           <a:p>
             <a:fld id="{EB1FAE4C-5332-014D-8E1B-BB8DA73EF81D}" type="datetimeFigureOut">
               <a:rPr lang="en-US"/>
-              <a:t>4/29/22</a:t>
+              <a:t>4/30/22</a:t>
             </a:fld>
             <a:endParaRPr lang="en-US"/>
           </a:p>
@@ -923,7 +923,7 @@
           <a:p>
             <a:fld id="{EB1FAE4C-5332-014D-8E1B-BB8DA73EF81D}" type="datetimeFigureOut">
               <a:rPr lang="en-US"/>
-              <a:t>4/29/22</a:t>
+              <a:t>4/30/22</a:t>
             </a:fld>
             <a:endParaRPr lang="en-US"/>
           </a:p>
@@ -1103,7 +1103,7 @@
           <a:p>
             <a:fld id="{EB1FAE4C-5332-014D-8E1B-BB8DA73EF81D}" type="datetimeFigureOut">
               <a:rPr lang="en-US"/>
-              <a:t>4/29/22</a:t>
+              <a:t>4/30/22</a:t>
             </a:fld>
             <a:endParaRPr lang="en-US"/>
           </a:p>
@@ -1273,7 +1273,7 @@
           <a:p>
             <a:fld id="{EB1FAE4C-5332-014D-8E1B-BB8DA73EF81D}" type="datetimeFigureOut">
               <a:rPr lang="en-US"/>
-              <a:t>4/29/22</a:t>
+              <a:t>4/30/22</a:t>
             </a:fld>
             <a:endParaRPr lang="en-US"/>
           </a:p>
@@ -1520,7 +1520,7 @@
           <a:p>
             <a:fld id="{EB1FAE4C-5332-014D-8E1B-BB8DA73EF81D}" type="datetimeFigureOut">
               <a:rPr lang="en-US"/>
-              <a:t>4/29/22</a:t>
+              <a:t>4/30/22</a:t>
             </a:fld>
             <a:endParaRPr lang="en-US"/>
           </a:p>
@@ -1751,7 +1751,7 @@
           <a:p>
             <a:fld id="{EB1FAE4C-5332-014D-8E1B-BB8DA73EF81D}" type="datetimeFigureOut">
               <a:rPr lang="en-US"/>
-              <a:t>4/29/22</a:t>
+              <a:t>4/30/22</a:t>
             </a:fld>
             <a:endParaRPr lang="en-US"/>
           </a:p>
@@ -2117,7 +2117,7 @@
           <a:p>
             <a:fld id="{EB1FAE4C-5332-014D-8E1B-BB8DA73EF81D}" type="datetimeFigureOut">
               <a:rPr lang="en-US"/>
-              <a:t>4/29/22</a:t>
+              <a:t>4/30/22</a:t>
             </a:fld>
             <a:endParaRPr lang="en-US"/>
           </a:p>
@@ -2236,7 +2236,7 @@
           <a:p>
             <a:fld id="{EB1FAE4C-5332-014D-8E1B-BB8DA73EF81D}" type="datetimeFigureOut">
               <a:rPr lang="en-US"/>
-              <a:t>4/29/22</a:t>
+              <a:t>4/30/22</a:t>
             </a:fld>
             <a:endParaRPr lang="en-US"/>
           </a:p>
@@ -2333,7 +2333,7 @@
           <a:p>
             <a:fld id="{EB1FAE4C-5332-014D-8E1B-BB8DA73EF81D}" type="datetimeFigureOut">
               <a:rPr lang="en-US"/>
-              <a:t>4/29/22</a:t>
+              <a:t>4/30/22</a:t>
             </a:fld>
             <a:endParaRPr lang="en-US"/>
           </a:p>
@@ -2609,7 +2609,7 @@
           <a:p>
             <a:fld id="{EB1FAE4C-5332-014D-8E1B-BB8DA73EF81D}" type="datetimeFigureOut">
               <a:rPr lang="en-US"/>
-              <a:t>4/29/22</a:t>
+              <a:t>4/30/22</a:t>
             </a:fld>
             <a:endParaRPr lang="en-US"/>
           </a:p>
@@ -2866,7 +2866,7 @@
           <a:p>
             <a:fld id="{EB1FAE4C-5332-014D-8E1B-BB8DA73EF81D}" type="datetimeFigureOut">
               <a:rPr lang="en-US"/>
-              <a:t>4/29/22</a:t>
+              <a:t>4/30/22</a:t>
             </a:fld>
             <a:endParaRPr lang="en-US"/>
           </a:p>
@@ -3079,7 +3079,7 @@
           <a:p>
             <a:fld id="{EB1FAE4C-5332-014D-8E1B-BB8DA73EF81D}" type="datetimeFigureOut">
               <a:rPr lang="en-US"/>
-              <a:t>4/29/22</a:t>
+              <a:t>4/30/22</a:t>
             </a:fld>
             <a:endParaRPr lang="en-US"/>
           </a:p>
@@ -3505,7 +3505,7 @@
         </p:nvSpPr>
         <p:spPr>
           <a:xfrm>
-            <a:off x="2250831" y="2708030"/>
+            <a:off x="2297724" y="1606060"/>
             <a:ext cx="7233138" cy="1200329"/>
           </a:xfrm>
           <a:prstGeom prst="rect">
@@ -3523,6 +3523,42 @@
             <a:r>
               <a:rPr lang="en-US" sz="7200" b="1"/>
               <a:t>Crypto Wallets</a:t>
+            </a:r>
+          </a:p>
+        </p:txBody>
+      </p:sp>
+      <p:sp>
+        <p:nvSpPr>
+          <p:cNvPr id="3" name="TextBox 2">
+            <a:extLst>
+              <a:ext uri="{FF2B5EF4-FFF2-40B4-BE49-F238E27FC236}">
+                <a16:creationId xmlns:a16="http://schemas.microsoft.com/office/drawing/2014/main" id="{C6514E65-4631-19E6-58C2-7B31DA00A25E}"/>
+              </a:ext>
+            </a:extLst>
+          </p:cNvPr>
+          <p:cNvSpPr txBox="1"/>
+          <p:nvPr/>
+        </p:nvSpPr>
+        <p:spPr>
+          <a:xfrm>
+            <a:off x="2297724" y="3118337"/>
+            <a:ext cx="7233138" cy="584775"/>
+          </a:xfrm>
+          <a:prstGeom prst="rect">
+            <a:avLst/>
+          </a:prstGeom>
+          <a:noFill/>
+        </p:spPr>
+        <p:txBody>
+          <a:bodyPr wrap="square" rtlCol="0">
+            <a:spAutoFit/>
+          </a:bodyPr>
+          <a:lstStyle/>
+          <a:p>
+            <a:pPr algn="ctr"/>
+            <a:r>
+              <a:rPr lang="en-US" sz="3200" b="1"/>
+              <a:t>Send/Receive Crypto Tokens</a:t>
             </a:r>
           </a:p>
         </p:txBody>
@@ -3562,7 +3598,7 @@
           <p:cNvPr id="2" name="TextBox 1">
             <a:extLst>
               <a:ext uri="{FF2B5EF4-FFF2-40B4-BE49-F238E27FC236}">
-                <a16:creationId xmlns:a16="http://schemas.microsoft.com/office/drawing/2014/main" id="{0575C187-42F0-97C5-A7D3-9794D52E83B8}"/>
+                <a16:creationId xmlns:a16="http://schemas.microsoft.com/office/drawing/2014/main" id="{360843F1-39FC-B446-BCF9-38C04967543B}"/>
               </a:ext>
             </a:extLst>
           </p:cNvPr>
@@ -3571,8 +3607,8 @@
         </p:nvSpPr>
         <p:spPr>
           <a:xfrm>
-            <a:off x="101600" y="822960"/>
-            <a:ext cx="4348480" cy="954107"/>
+            <a:off x="2" y="1"/>
+            <a:ext cx="4930344" cy="523220"/>
           </a:xfrm>
           <a:prstGeom prst="rect">
             <a:avLst/>
@@ -3585,19 +3621,58 @@
           </a:bodyPr>
           <a:lstStyle/>
           <a:p>
+            <a:r>
+              <a:rPr lang="en-US" sz="2800" b="1"/>
+              <a:t>Types of Crypto Wallets</a:t>
+            </a:r>
+          </a:p>
+        </p:txBody>
+      </p:sp>
+      <p:sp>
+        <p:nvSpPr>
+          <p:cNvPr id="5" name="TextBox 4">
+            <a:extLst>
+              <a:ext uri="{FF2B5EF4-FFF2-40B4-BE49-F238E27FC236}">
+                <a16:creationId xmlns:a16="http://schemas.microsoft.com/office/drawing/2014/main" id="{817DA55C-C2D6-A2D4-DB7A-8AA34B531775}"/>
+              </a:ext>
+            </a:extLst>
+          </p:cNvPr>
+          <p:cNvSpPr txBox="1"/>
+          <p:nvPr/>
+        </p:nvSpPr>
+        <p:spPr>
+          <a:xfrm>
+            <a:off x="269631" y="1777272"/>
+            <a:ext cx="3809999" cy="1446550"/>
+          </a:xfrm>
+          <a:prstGeom prst="rect">
+            <a:avLst/>
+          </a:prstGeom>
+          <a:noFill/>
+        </p:spPr>
+        <p:txBody>
+          <a:bodyPr wrap="square" rtlCol="0">
+            <a:spAutoFit/>
+          </a:bodyPr>
+          <a:lstStyle/>
+          <a:p>
+            <a:r>
+              <a:rPr lang="en-US" b="1">
+                <a:solidFill>
+                  <a:srgbClr val="00B050"/>
+                </a:solidFill>
+              </a:rPr>
+              <a:t>There are different types of wallets:</a:t>
+            </a:r>
+          </a:p>
+          <a:p>
             <a:pPr marL="285750" indent="-285750">
               <a:buFont typeface="Arial" panose="020B0604020202020204" pitchFamily="34" charset="0"/>
               <a:buChar char="•"/>
             </a:pPr>
             <a:r>
-              <a:rPr lang="en-US" sz="1400">
-                <a:hlinkClick r:id="rId3"/>
-              </a:rPr>
-              <a:t>https://github.com/bitcoin</a:t>
-            </a:r>
-            <a:r>
               <a:rPr lang="en-US" sz="1400"/>
-              <a:t> – bitcoin source code</a:t>
+              <a:t>Desktop App</a:t>
             </a:r>
           </a:p>
           <a:p>
@@ -3606,14 +3681,8 @@
               <a:buChar char="•"/>
             </a:pPr>
             <a:r>
-              <a:rPr lang="en-US" sz="1400">
-                <a:hlinkClick r:id="rId4"/>
-              </a:rPr>
-              <a:t>https://bitcoincore.org/</a:t>
-            </a:r>
-            <a:r>
               <a:rPr lang="en-US" sz="1400"/>
-              <a:t> - downloadable binaries</a:t>
+              <a:t>Mobile App</a:t>
             </a:r>
           </a:p>
           <a:p>
@@ -3622,14 +3691,8 @@
               <a:buChar char="•"/>
             </a:pPr>
             <a:r>
-              <a:rPr lang="en-US" sz="1400">
-                <a:hlinkClick r:id="rId5"/>
-              </a:rPr>
-              <a:t>https://bitcoin.org</a:t>
-            </a:r>
-            <a:r>
               <a:rPr lang="en-US" sz="1400"/>
-              <a:t> </a:t>
+              <a:t>Browser plugin</a:t>
             </a:r>
           </a:p>
           <a:p>
@@ -3638,59 +3701,75 @@
               <a:buChar char="•"/>
             </a:pPr>
             <a:r>
-              <a:rPr lang="en-US" sz="1400">
-                <a:hlinkClick r:id="rId6"/>
-              </a:rPr>
-              <a:t>https://bitcoin.org/en/choose-your-wallet</a:t>
-            </a:r>
-            <a:r>
               <a:rPr lang="en-US" sz="1400"/>
-              <a:t> - </a:t>
-            </a:r>
-          </a:p>
-        </p:txBody>
-      </p:sp>
-      <p:sp>
-        <p:nvSpPr>
-          <p:cNvPr id="3" name="TextBox 2">
+              <a:t>Hardware (usb, ...)</a:t>
+            </a:r>
+          </a:p>
+          <a:p>
+            <a:pPr marL="285750" indent="-285750">
+              <a:buFont typeface="Arial" panose="020B0604020202020204" pitchFamily="34" charset="0"/>
+              <a:buChar char="•"/>
+            </a:pPr>
+            <a:r>
+              <a:rPr lang="en-US" sz="1400"/>
+              <a:t>Paper (address, keys, QR-code)</a:t>
+            </a:r>
+          </a:p>
+        </p:txBody>
+      </p:sp>
+      <p:pic>
+        <p:nvPicPr>
+          <p:cNvPr id="4" name="Picture 32" descr="17 Best Hardware Wallets In 2022!">
             <a:extLst>
               <a:ext uri="{FF2B5EF4-FFF2-40B4-BE49-F238E27FC236}">
-                <a16:creationId xmlns:a16="http://schemas.microsoft.com/office/drawing/2014/main" id="{8C47D106-328D-1E16-FF20-B27EE1128845}"/>
+                <a16:creationId xmlns:a16="http://schemas.microsoft.com/office/drawing/2014/main" id="{DE0B52E5-6D68-44E1-2AD8-0F0F79C55BBD}"/>
               </a:ext>
             </a:extLst>
           </p:cNvPr>
-          <p:cNvSpPr txBox="1"/>
+          <p:cNvPicPr>
+            <a:picLocks noChangeAspect="1" noChangeArrowheads="1"/>
+          </p:cNvPicPr>
           <p:nvPr/>
-        </p:nvSpPr>
-        <p:spPr>
-          <a:xfrm>
-            <a:off x="0" y="0"/>
-            <a:ext cx="2672080" cy="523220"/>
+        </p:nvPicPr>
+        <p:blipFill>
+          <a:blip r:embed="rId2" cstate="email">
+            <a:extLst>
+              <a:ext uri="{28A0092B-C50C-407E-A947-70E740481C1C}">
+                <a14:useLocalDpi xmlns:a14="http://schemas.microsoft.com/office/drawing/2010/main"/>
+              </a:ext>
+            </a:extLst>
+          </a:blip>
+          <a:srcRect/>
+          <a:stretch>
+            <a:fillRect/>
+          </a:stretch>
+        </p:blipFill>
+        <p:spPr bwMode="auto">
+          <a:xfrm>
+            <a:off x="4598685" y="2579261"/>
+            <a:ext cx="1766393" cy="1324795"/>
           </a:xfrm>
           <a:prstGeom prst="rect">
             <a:avLst/>
           </a:prstGeom>
           <a:noFill/>
-        </p:spPr>
-        <p:txBody>
-          <a:bodyPr wrap="square" rtlCol="0">
-            <a:spAutoFit/>
-          </a:bodyPr>
-          <a:lstStyle/>
-          <a:p>
-            <a:r>
-              <a:rPr lang="en-US" sz="2800" b="1"/>
-              <a:t>Bitcoin Wallets</a:t>
-            </a:r>
-          </a:p>
-        </p:txBody>
-      </p:sp>
-      <p:sp>
-        <p:nvSpPr>
-          <p:cNvPr id="4" name="TextBox 3">
+          <a:extLst>
+            <a:ext uri="{909E8E84-426E-40DD-AFC4-6F175D3DCCD1}">
+              <a14:hiddenFill xmlns:a14="http://schemas.microsoft.com/office/drawing/2010/main">
+                <a:solidFill>
+                  <a:srgbClr val="FFFFFF"/>
+                </a:solidFill>
+              </a14:hiddenFill>
+            </a:ext>
+          </a:extLst>
+        </p:spPr>
+      </p:pic>
+      <p:sp>
+        <p:nvSpPr>
+          <p:cNvPr id="3" name="TextBox 2">
             <a:extLst>
               <a:ext uri="{FF2B5EF4-FFF2-40B4-BE49-F238E27FC236}">
-                <a16:creationId xmlns:a16="http://schemas.microsoft.com/office/drawing/2014/main" id="{56565DC5-E2D9-F61B-A567-16E87971217E}"/>
+                <a16:creationId xmlns:a16="http://schemas.microsoft.com/office/drawing/2014/main" id="{9F1715C1-CDFA-5BFA-A877-9C3C0C2EB98B}"/>
               </a:ext>
             </a:extLst>
           </p:cNvPr>
@@ -3699,8 +3778,8 @@
         </p:nvSpPr>
         <p:spPr>
           <a:xfrm>
-            <a:off x="196950" y="2305615"/>
-            <a:ext cx="5899050" cy="3323987"/>
+            <a:off x="269631" y="3537137"/>
+            <a:ext cx="4423719" cy="2154436"/>
           </a:xfrm>
           <a:prstGeom prst="rect">
             <a:avLst/>
@@ -3714,52 +3793,13 @@
           <a:lstStyle/>
           <a:p>
             <a:r>
-              <a:rPr lang="en-US" sz="1400"/>
-              <a:t>To send/receive bitcoin on bitcoin network you need a wallet. </a:t>
-            </a:r>
-            <a:br>
-              <a:rPr lang="en-US" sz="1400"/>
-            </a:br>
-            <a:r>
-              <a:rPr lang="en-US" sz="1400"/>
-              <a:t>Bitcoin provides its own wallet called "</a:t>
-            </a:r>
-            <a:r>
-              <a:rPr lang="en-US" sz="1400" b="1">
+              <a:rPr lang="en-US" b="1" dirty="0">
                 <a:solidFill>
-                  <a:srgbClr val="FF0000"/>
+                  <a:srgbClr val="00B050"/>
                 </a:solidFill>
               </a:rPr>
-              <a:t>Bitcoin Core</a:t>
-            </a:r>
-            <a:r>
-              <a:rPr lang="en-US" sz="1400"/>
-              <a:t>". </a:t>
-            </a:r>
-            <a:br>
-              <a:rPr lang="en-US" sz="1400"/>
-            </a:br>
-            <a:r>
-              <a:rPr lang="en-US" sz="1400"/>
-              <a:t>You can download it from:</a:t>
-            </a:r>
-            <a:br>
-              <a:rPr lang="en-US" sz="1400"/>
-            </a:br>
-            <a:r>
-              <a:rPr lang="en-US" sz="1400"/>
-              <a:t>     </a:t>
-            </a:r>
-            <a:r>
-              <a:rPr lang="en-US" sz="1400">
-                <a:hlinkClick r:id="rId7"/>
-              </a:rPr>
-              <a:t>https://bitcoincore.org/en/download/</a:t>
-            </a:r>
-            <a:endParaRPr lang="en-US" sz="1400"/>
-          </a:p>
-          <a:p>
-            <a:endParaRPr lang="en-US" sz="1400"/>
+              <a:t>Hot Wallets:</a:t>
+            </a:r>
           </a:p>
           <a:p>
             <a:pPr marL="285750" indent="-285750">
@@ -3767,16 +3807,8 @@
               <a:buChar char="•"/>
             </a:pPr>
             <a:r>
-              <a:rPr lang="en-US" sz="1400" b="1">
-                <a:solidFill>
-                  <a:srgbClr val="FF0000"/>
-                </a:solidFill>
-              </a:rPr>
-              <a:t>Bitcoin Core</a:t>
-            </a:r>
-            <a:r>
-              <a:rPr lang="en-US" sz="1400"/>
-              <a:t> is an application that provides a personal Bitcoin wallet and allows a user to send and receive bitcoins.</a:t>
+              <a:rPr lang="en-US" sz="1400" dirty="0"/>
+              <a:t>Connected to internet</a:t>
             </a:r>
           </a:p>
           <a:p>
@@ -3784,7 +3816,10 @@
               <a:buFont typeface="Arial" panose="020B0604020202020204" pitchFamily="34" charset="0"/>
               <a:buChar char="•"/>
             </a:pPr>
-            <a:endParaRPr lang="en-US" sz="1400"/>
+            <a:r>
+              <a:rPr lang="en-US" sz="1400" dirty="0"/>
+              <a:t>Can be accessed online or through application</a:t>
+            </a:r>
           </a:p>
           <a:p>
             <a:pPr marL="285750" indent="-285750">
@@ -3792,32 +3827,22 @@
               <a:buChar char="•"/>
             </a:pPr>
             <a:r>
-              <a:rPr lang="en-US" sz="1400" b="1">
-                <a:solidFill>
-                  <a:srgbClr val="FF0000"/>
-                </a:solidFill>
-              </a:rPr>
-              <a:t>Bitcoin Core</a:t>
-            </a:r>
-            <a:r>
-              <a:rPr lang="en-US" sz="1400"/>
-              <a:t> is a </a:t>
-            </a:r>
-            <a:r>
-              <a:rPr lang="en-US" sz="1400" b="1">
+              <a:rPr lang="en-US" sz="1400" dirty="0"/>
+              <a:t>More susceptible to hacking attacks</a:t>
+            </a:r>
+          </a:p>
+          <a:p>
+            <a:endParaRPr lang="en-US" sz="1400"/>
+          </a:p>
+          <a:p>
+            <a:r>
+              <a:rPr lang="en-US" b="1">
                 <a:solidFill>
                   <a:srgbClr val="00B050"/>
                 </a:solidFill>
               </a:rPr>
-              <a:t>full Bitcoin client</a:t>
-            </a:r>
-            <a:r>
-              <a:rPr lang="en-US" sz="1400"/>
-              <a:t> and can download the whole bitcoin blockchain from the beginning of times (~200 GB).</a:t>
-            </a:r>
-          </a:p>
-          <a:p>
-            <a:endParaRPr lang="en-US" sz="1400"/>
+              <a:t>Cold Wallets:</a:t>
+            </a:r>
           </a:p>
           <a:p>
             <a:pPr marL="285750" indent="-285750">
@@ -3825,20 +3850,9 @@
               <a:buChar char="•"/>
             </a:pPr>
             <a:r>
-              <a:rPr lang="en-US" sz="1400" b="1">
-                <a:solidFill>
-                  <a:srgbClr val="FF0000"/>
-                </a:solidFill>
-              </a:rPr>
-              <a:t>Bitcoin Core</a:t>
-            </a:r>
-            <a:r>
-              <a:rPr lang="en-US" sz="1400"/>
-              <a:t> nodes build the backbone of the network</a:t>
-            </a:r>
-          </a:p>
-          <a:p>
-            <a:endParaRPr lang="en-US" sz="1400"/>
+              <a:rPr lang="en-US" sz="1400" dirty="0"/>
+              <a:t>Wallets that has to be connected to computer first</a:t>
+            </a:r>
           </a:p>
           <a:p>
             <a:pPr marL="285750" indent="-285750">
@@ -3846,33 +3860,69 @@
               <a:buChar char="•"/>
             </a:pPr>
             <a:r>
-              <a:rPr lang="en-US" sz="1400" b="1">
-                <a:solidFill>
-                  <a:srgbClr val="FF0000"/>
-                </a:solidFill>
-              </a:rPr>
-              <a:t>Bitcoin Core</a:t>
-            </a:r>
-            <a:r>
-              <a:rPr lang="en-US" sz="1400"/>
-              <a:t> offers high levels of security, privacy, and stability. </a:t>
-            </a:r>
-            <a:br>
-              <a:rPr lang="en-US" sz="1400"/>
-            </a:br>
-            <a:r>
-              <a:rPr lang="en-US" sz="1400"/>
-              <a:t>However, it has fewer features and it takes a lot of space and memory</a:t>
+              <a:rPr lang="en-US" sz="1400" dirty="0"/>
+              <a:t>Also called "offline" wallets</a:t>
+            </a:r>
+          </a:p>
+          <a:p>
+            <a:pPr marL="285750" indent="-285750">
+              <a:buFont typeface="Arial" panose="020B0604020202020204" pitchFamily="34" charset="0"/>
+              <a:buChar char="•"/>
+            </a:pPr>
+            <a:r>
+              <a:rPr lang="en-US" sz="1400" dirty="0"/>
+              <a:t>Loosing it or forgetting passwords are biggest risks</a:t>
+            </a:r>
+          </a:p>
+        </p:txBody>
+      </p:sp>
+      <p:sp>
+        <p:nvSpPr>
+          <p:cNvPr id="6" name="TextBox 5">
+            <a:extLst>
+              <a:ext uri="{FF2B5EF4-FFF2-40B4-BE49-F238E27FC236}">
+                <a16:creationId xmlns:a16="http://schemas.microsoft.com/office/drawing/2014/main" id="{B32813DE-ACF4-04AA-7FC5-B259CD6DA664}"/>
+              </a:ext>
+            </a:extLst>
+          </p:cNvPr>
+          <p:cNvSpPr txBox="1"/>
+          <p:nvPr/>
+        </p:nvSpPr>
+        <p:spPr>
+          <a:xfrm>
+            <a:off x="269632" y="668215"/>
+            <a:ext cx="4841630" cy="646331"/>
+          </a:xfrm>
+          <a:prstGeom prst="rect">
+            <a:avLst/>
+          </a:prstGeom>
+          <a:noFill/>
+        </p:spPr>
+        <p:txBody>
+          <a:bodyPr wrap="square" rtlCol="0">
+            <a:spAutoFit/>
+          </a:bodyPr>
+          <a:lstStyle/>
+          <a:p>
+            <a:r>
+              <a:rPr lang="en-US" b="1"/>
+              <a:t>There are many different blockchain networks.</a:t>
+            </a:r>
+          </a:p>
+          <a:p>
+            <a:r>
+              <a:rPr lang="en-US" b="1"/>
+              <a:t>They have their own "native" wallets.</a:t>
             </a:r>
           </a:p>
         </p:txBody>
       </p:sp>
       <p:pic>
         <p:nvPicPr>
-          <p:cNvPr id="5" name="Picture 4">
+          <p:cNvPr id="7" name="Picture 6">
             <a:extLst>
               <a:ext uri="{FF2B5EF4-FFF2-40B4-BE49-F238E27FC236}">
-                <a16:creationId xmlns:a16="http://schemas.microsoft.com/office/drawing/2014/main" id="{A0C92002-0C3B-CB92-51EB-BAFE3187F797}"/>
+                <a16:creationId xmlns:a16="http://schemas.microsoft.com/office/drawing/2014/main" id="{22DD5DD3-7BCB-F4CB-C716-7DD6BDFC66FF}"/>
               </a:ext>
             </a:extLst>
           </p:cNvPr>
@@ -3882,7 +3932,7 @@
           <p:nvPr/>
         </p:nvPicPr>
         <p:blipFill>
-          <a:blip r:embed="rId8" cstate="email">
+          <a:blip r:embed="rId3" cstate="email">
             <a:extLst>
               <a:ext uri="{28A0092B-C50C-407E-A947-70E740481C1C}">
                 <a14:useLocalDpi xmlns:a14="http://schemas.microsoft.com/office/drawing/2010/main"/>
@@ -3895,8 +3945,8 @@
         </p:blipFill>
         <p:spPr>
           <a:xfrm>
-            <a:off x="6222482" y="1019908"/>
-            <a:ext cx="5867918" cy="5735559"/>
+            <a:off x="5038687" y="1418643"/>
+            <a:ext cx="886387" cy="832339"/>
           </a:xfrm>
           <a:prstGeom prst="rect">
             <a:avLst/>
@@ -3905,10 +3955,10 @@
       </p:pic>
       <p:sp>
         <p:nvSpPr>
-          <p:cNvPr id="7" name="TextBox 6">
+          <p:cNvPr id="8" name="TextBox 7">
             <a:extLst>
               <a:ext uri="{FF2B5EF4-FFF2-40B4-BE49-F238E27FC236}">
-                <a16:creationId xmlns:a16="http://schemas.microsoft.com/office/drawing/2014/main" id="{152A9575-F217-4A40-7E1E-C40A76B5548A}"/>
+                <a16:creationId xmlns:a16="http://schemas.microsoft.com/office/drawing/2014/main" id="{F964371B-D36A-EF07-6D73-C4F12FADDCD7}"/>
               </a:ext>
             </a:extLst>
           </p:cNvPr>
@@ -3917,8 +3967,8 @@
         </p:nvSpPr>
         <p:spPr>
           <a:xfrm>
-            <a:off x="7405858" y="292387"/>
-            <a:ext cx="3830320" cy="461665"/>
+            <a:off x="7756886" y="336474"/>
+            <a:ext cx="4106869" cy="2954655"/>
           </a:xfrm>
           <a:prstGeom prst="rect">
             <a:avLst/>
@@ -3932,29 +3982,266 @@
           <a:lstStyle/>
           <a:p>
             <a:r>
-              <a:rPr lang="en-US" sz="1400" b="1">
+              <a:rPr lang="en-US" b="1">
                 <a:solidFill>
                   <a:srgbClr val="00B050"/>
                 </a:solidFill>
               </a:rPr>
-              <a:t>Choose your wallet – on bitcoin.org:</a:t>
-            </a:r>
-          </a:p>
-          <a:p>
-            <a:r>
-              <a:rPr lang="en-US" sz="1000">
-                <a:hlinkClick r:id="rId9"/>
-              </a:rPr>
-              <a:t>https://bitcoin.org/en/choose-your-wallet?step=5&amp;platform=mac</a:t>
-            </a:r>
-            <a:endParaRPr lang="en-US" sz="1000"/>
-          </a:p>
-        </p:txBody>
-      </p:sp>
+              <a:t>Account vs Wallet</a:t>
+            </a:r>
+          </a:p>
+          <a:p>
+            <a:endParaRPr lang="en-US" sz="1400"/>
+          </a:p>
+          <a:p>
+            <a:r>
+              <a:rPr lang="en-US" sz="1400"/>
+              <a:t>Companies like crypto exchanges or payment services give users accounts or wallets which may contain different types of crypto. </a:t>
+            </a:r>
+          </a:p>
+          <a:p>
+            <a:endParaRPr lang="en-US" sz="1400"/>
+          </a:p>
+          <a:p>
+            <a:r>
+              <a:rPr lang="en-US" sz="1400"/>
+              <a:t>Typically what they call a wallet is not an actual wallet on a decentralized blockchain, but rather an account which is connected with several wallets owned by the company.</a:t>
+            </a:r>
+          </a:p>
+          <a:p>
+            <a:endParaRPr lang="en-US" sz="1400"/>
+          </a:p>
+          <a:p>
+            <a:r>
+              <a:rPr lang="en-US" sz="1400"/>
+              <a:t>The transactions and storage is done using company's own wallets – for which they charge extra fees.</a:t>
+            </a:r>
+          </a:p>
+        </p:txBody>
+      </p:sp>
+      <p:graphicFrame>
+        <p:nvGraphicFramePr>
+          <p:cNvPr id="9" name="Table 9">
+            <a:extLst>
+              <a:ext uri="{FF2B5EF4-FFF2-40B4-BE49-F238E27FC236}">
+                <a16:creationId xmlns:a16="http://schemas.microsoft.com/office/drawing/2014/main" id="{DB420DCC-A901-7BA4-A279-4205C6EF0E56}"/>
+              </a:ext>
+            </a:extLst>
+          </p:cNvPr>
+          <p:cNvGraphicFramePr>
+            <a:graphicFrameLocks noGrp="1"/>
+          </p:cNvGraphicFramePr>
+          <p:nvPr>
+            <p:extLst>
+              <p:ext uri="{D42A27DB-BD31-4B8C-83A1-F6EECF244321}">
+                <p14:modId xmlns:p14="http://schemas.microsoft.com/office/powerpoint/2010/main" val="238828613"/>
+              </p:ext>
+            </p:extLst>
+          </p:nvPr>
+        </p:nvGraphicFramePr>
+        <p:xfrm>
+          <a:off x="7702149" y="3558088"/>
+          <a:ext cx="4161606" cy="2884472"/>
+        </p:xfrm>
+        <a:graphic>
+          <a:graphicData uri="http://schemas.openxmlformats.org/drawingml/2006/table">
+            <a:tbl>
+              <a:tblPr firstRow="1" bandRow="1">
+                <a:tableStyleId>{5C22544A-7EE6-4342-B048-85BDC9FD1C3A}</a:tableStyleId>
+              </a:tblPr>
+              <a:tblGrid>
+                <a:gridCol w="2080803">
+                  <a:extLst>
+                    <a:ext uri="{9D8B030D-6E8A-4147-A177-3AD203B41FA5}">
+                      <a16:colId xmlns:a16="http://schemas.microsoft.com/office/drawing/2014/main" val="2086661908"/>
+                    </a:ext>
+                  </a:extLst>
+                </a:gridCol>
+                <a:gridCol w="2080803">
+                  <a:extLst>
+                    <a:ext uri="{9D8B030D-6E8A-4147-A177-3AD203B41FA5}">
+                      <a16:colId xmlns:a16="http://schemas.microsoft.com/office/drawing/2014/main" val="3863954687"/>
+                    </a:ext>
+                  </a:extLst>
+                </a:gridCol>
+              </a:tblGrid>
+              <a:tr h="710716">
+                <a:tc>
+                  <a:txBody>
+                    <a:bodyPr/>
+                    <a:lstStyle/>
+                    <a:p>
+                      <a:r>
+                        <a:rPr lang="en-US" sz="1400"/>
+                        <a:t>Crypto Wallet</a:t>
+                      </a:r>
+                    </a:p>
+                  </a:txBody>
+                  <a:tcPr/>
+                </a:tc>
+                <a:tc>
+                  <a:txBody>
+                    <a:bodyPr/>
+                    <a:lstStyle/>
+                    <a:p>
+                      <a:r>
+                        <a:rPr lang="en-US" sz="1400"/>
+                        <a:t>Crypto Exchange</a:t>
+                      </a:r>
+                    </a:p>
+                  </a:txBody>
+                  <a:tcPr/>
+                </a:tc>
+                <a:extLst>
+                  <a:ext uri="{0D108BD9-81ED-4DB2-BD59-A6C34878D82A}">
+                    <a16:rowId xmlns:a16="http://schemas.microsoft.com/office/drawing/2014/main" val="2009365682"/>
+                  </a:ext>
+                </a:extLst>
+              </a:tr>
+              <a:tr h="710716">
+                <a:tc>
+                  <a:txBody>
+                    <a:bodyPr/>
+                    <a:lstStyle/>
+                    <a:p>
+                      <a:r>
+                        <a:rPr lang="en-US" sz="1400"/>
+                        <a:t>A program to store crypto and do transactions</a:t>
+                      </a:r>
+                    </a:p>
+                  </a:txBody>
+                  <a:tcPr/>
+                </a:tc>
+                <a:tc>
+                  <a:txBody>
+                    <a:bodyPr/>
+                    <a:lstStyle/>
+                    <a:p>
+                      <a:r>
+                        <a:rPr lang="en-US" sz="1400"/>
+                        <a:t>A (web) service to buy/sell/convert crypto currency</a:t>
+                      </a:r>
+                    </a:p>
+                  </a:txBody>
+                  <a:tcPr/>
+                </a:tc>
+                <a:extLst>
+                  <a:ext uri="{0D108BD9-81ED-4DB2-BD59-A6C34878D82A}">
+                    <a16:rowId xmlns:a16="http://schemas.microsoft.com/office/drawing/2014/main" val="2212530650"/>
+                  </a:ext>
+                </a:extLst>
+              </a:tr>
+              <a:tr h="710716">
+                <a:tc>
+                  <a:txBody>
+                    <a:bodyPr/>
+                    <a:lstStyle/>
+                    <a:p>
+                      <a:r>
+                        <a:rPr lang="en-US" sz="1400"/>
+                        <a:t>Full control over your private key</a:t>
+                      </a:r>
+                    </a:p>
+                  </a:txBody>
+                  <a:tcPr/>
+                </a:tc>
+                <a:tc>
+                  <a:txBody>
+                    <a:bodyPr/>
+                    <a:lstStyle/>
+                    <a:p>
+                      <a:r>
+                        <a:rPr lang="en-US" sz="1400"/>
+                        <a:t>Does NOT allow full access over your private key</a:t>
+                      </a:r>
+                    </a:p>
+                  </a:txBody>
+                  <a:tcPr/>
+                </a:tc>
+                <a:extLst>
+                  <a:ext uri="{0D108BD9-81ED-4DB2-BD59-A6C34878D82A}">
+                    <a16:rowId xmlns:a16="http://schemas.microsoft.com/office/drawing/2014/main" val="362317685"/>
+                  </a:ext>
+                </a:extLst>
+              </a:tr>
+              <a:tr h="710716">
+                <a:tc>
+                  <a:txBody>
+                    <a:bodyPr/>
+                    <a:lstStyle/>
+                    <a:p>
+                      <a:r>
+                        <a:rPr lang="en-US" sz="1400"/>
+                        <a:t>Do NOT offer features like selling / buying</a:t>
+                      </a:r>
+                    </a:p>
+                  </a:txBody>
+                  <a:tcPr/>
+                </a:tc>
+                <a:tc>
+                  <a:txBody>
+                    <a:bodyPr/>
+                    <a:lstStyle/>
+                    <a:p>
+                      <a:r>
+                        <a:rPr lang="en-US" sz="1400"/>
+                        <a:t>Offers crypto selling / buying / trading</a:t>
+                      </a:r>
+                    </a:p>
+                  </a:txBody>
+                  <a:tcPr/>
+                </a:tc>
+                <a:extLst>
+                  <a:ext uri="{0D108BD9-81ED-4DB2-BD59-A6C34878D82A}">
+                    <a16:rowId xmlns:a16="http://schemas.microsoft.com/office/drawing/2014/main" val="1998058201"/>
+                  </a:ext>
+                </a:extLst>
+              </a:tr>
+            </a:tbl>
+          </a:graphicData>
+        </a:graphic>
+      </p:graphicFrame>
+      <p:cxnSp>
+        <p:nvCxnSpPr>
+          <p:cNvPr id="11" name="Straight Connector 10">
+            <a:extLst>
+              <a:ext uri="{FF2B5EF4-FFF2-40B4-BE49-F238E27FC236}">
+                <a16:creationId xmlns:a16="http://schemas.microsoft.com/office/drawing/2014/main" id="{7B10B5BD-2015-DD9A-5205-7EDD416464B9}"/>
+              </a:ext>
+            </a:extLst>
+          </p:cNvPr>
+          <p:cNvCxnSpPr/>
+          <p:nvPr/>
+        </p:nvCxnSpPr>
+        <p:spPr>
+          <a:xfrm>
+            <a:off x="7057292" y="234462"/>
+            <a:ext cx="0" cy="6412523"/>
+          </a:xfrm>
+          <a:prstGeom prst="line">
+            <a:avLst/>
+          </a:prstGeom>
+          <a:ln w="38100"/>
+        </p:spPr>
+        <p:style>
+          <a:lnRef idx="1">
+            <a:schemeClr val="accent1"/>
+          </a:lnRef>
+          <a:fillRef idx="0">
+            <a:schemeClr val="accent1"/>
+          </a:fillRef>
+          <a:effectRef idx="0">
+            <a:schemeClr val="accent1"/>
+          </a:effectRef>
+          <a:fontRef idx="minor">
+            <a:schemeClr val="tx1"/>
+          </a:fontRef>
+        </p:style>
+      </p:cxnSp>
     </p:spTree>
     <p:extLst>
       <p:ext uri="{BB962C8B-B14F-4D97-AF65-F5344CB8AC3E}">
-        <p14:creationId xmlns:p14="http://schemas.microsoft.com/office/powerpoint/2010/main" val="3518343222"/>
+        <p14:creationId xmlns:p14="http://schemas.microsoft.com/office/powerpoint/2010/main" val="1146069536"/>
       </p:ext>
     </p:extLst>
   </p:cSld>
@@ -3981,12 +4268,322 @@
           <a:chExt cx="0" cy="0"/>
         </a:xfrm>
       </p:grpSpPr>
+      <p:sp>
+        <p:nvSpPr>
+          <p:cNvPr id="2" name="TextBox 1">
+            <a:extLst>
+              <a:ext uri="{FF2B5EF4-FFF2-40B4-BE49-F238E27FC236}">
+                <a16:creationId xmlns:a16="http://schemas.microsoft.com/office/drawing/2014/main" id="{0575C187-42F0-97C5-A7D3-9794D52E83B8}"/>
+              </a:ext>
+            </a:extLst>
+          </p:cNvPr>
+          <p:cNvSpPr txBox="1"/>
+          <p:nvPr/>
+        </p:nvSpPr>
+        <p:spPr>
+          <a:xfrm>
+            <a:off x="101600" y="822960"/>
+            <a:ext cx="4348480" cy="954107"/>
+          </a:xfrm>
+          <a:prstGeom prst="rect">
+            <a:avLst/>
+          </a:prstGeom>
+          <a:noFill/>
+        </p:spPr>
+        <p:txBody>
+          <a:bodyPr wrap="square" rtlCol="0">
+            <a:spAutoFit/>
+          </a:bodyPr>
+          <a:lstStyle/>
+          <a:p>
+            <a:pPr marL="285750" indent="-285750">
+              <a:buFont typeface="Arial" panose="020B0604020202020204" pitchFamily="34" charset="0"/>
+              <a:buChar char="•"/>
+            </a:pPr>
+            <a:r>
+              <a:rPr lang="en-US" sz="1400">
+                <a:hlinkClick r:id="rId3"/>
+              </a:rPr>
+              <a:t>https://github.com/bitcoin</a:t>
+            </a:r>
+            <a:r>
+              <a:rPr lang="en-US" sz="1400"/>
+              <a:t> – bitcoin source code</a:t>
+            </a:r>
+          </a:p>
+          <a:p>
+            <a:pPr marL="285750" indent="-285750">
+              <a:buFont typeface="Arial" panose="020B0604020202020204" pitchFamily="34" charset="0"/>
+              <a:buChar char="•"/>
+            </a:pPr>
+            <a:r>
+              <a:rPr lang="en-US" sz="1400">
+                <a:hlinkClick r:id="rId4"/>
+              </a:rPr>
+              <a:t>https://bitcoincore.org/</a:t>
+            </a:r>
+            <a:r>
+              <a:rPr lang="en-US" sz="1400"/>
+              <a:t> - downloadable binaries</a:t>
+            </a:r>
+          </a:p>
+          <a:p>
+            <a:pPr marL="285750" indent="-285750">
+              <a:buFont typeface="Arial" panose="020B0604020202020204" pitchFamily="34" charset="0"/>
+              <a:buChar char="•"/>
+            </a:pPr>
+            <a:r>
+              <a:rPr lang="en-US" sz="1400">
+                <a:hlinkClick r:id="rId5"/>
+              </a:rPr>
+              <a:t>https://bitcoin.org</a:t>
+            </a:r>
+            <a:r>
+              <a:rPr lang="en-US" sz="1400"/>
+              <a:t> </a:t>
+            </a:r>
+          </a:p>
+          <a:p>
+            <a:pPr marL="285750" indent="-285750">
+              <a:buFont typeface="Arial" panose="020B0604020202020204" pitchFamily="34" charset="0"/>
+              <a:buChar char="•"/>
+            </a:pPr>
+            <a:r>
+              <a:rPr lang="en-US" sz="1400">
+                <a:hlinkClick r:id="rId6"/>
+              </a:rPr>
+              <a:t>https://bitcoin.org/en/choose-your-wallet</a:t>
+            </a:r>
+            <a:r>
+              <a:rPr lang="en-US" sz="1400"/>
+              <a:t> - </a:t>
+            </a:r>
+          </a:p>
+        </p:txBody>
+      </p:sp>
+      <p:sp>
+        <p:nvSpPr>
+          <p:cNvPr id="3" name="TextBox 2">
+            <a:extLst>
+              <a:ext uri="{FF2B5EF4-FFF2-40B4-BE49-F238E27FC236}">
+                <a16:creationId xmlns:a16="http://schemas.microsoft.com/office/drawing/2014/main" id="{8C47D106-328D-1E16-FF20-B27EE1128845}"/>
+              </a:ext>
+            </a:extLst>
+          </p:cNvPr>
+          <p:cNvSpPr txBox="1"/>
+          <p:nvPr/>
+        </p:nvSpPr>
+        <p:spPr>
+          <a:xfrm>
+            <a:off x="0" y="0"/>
+            <a:ext cx="2672080" cy="523220"/>
+          </a:xfrm>
+          <a:prstGeom prst="rect">
+            <a:avLst/>
+          </a:prstGeom>
+          <a:noFill/>
+        </p:spPr>
+        <p:txBody>
+          <a:bodyPr wrap="square" rtlCol="0">
+            <a:spAutoFit/>
+          </a:bodyPr>
+          <a:lstStyle/>
+          <a:p>
+            <a:r>
+              <a:rPr lang="en-US" sz="2800" b="1"/>
+              <a:t>Bitcoin Wallets</a:t>
+            </a:r>
+          </a:p>
+        </p:txBody>
+      </p:sp>
+      <p:sp>
+        <p:nvSpPr>
+          <p:cNvPr id="4" name="TextBox 3">
+            <a:extLst>
+              <a:ext uri="{FF2B5EF4-FFF2-40B4-BE49-F238E27FC236}">
+                <a16:creationId xmlns:a16="http://schemas.microsoft.com/office/drawing/2014/main" id="{56565DC5-E2D9-F61B-A567-16E87971217E}"/>
+              </a:ext>
+            </a:extLst>
+          </p:cNvPr>
+          <p:cNvSpPr txBox="1"/>
+          <p:nvPr/>
+        </p:nvSpPr>
+        <p:spPr>
+          <a:xfrm>
+            <a:off x="196950" y="2305615"/>
+            <a:ext cx="5899050" cy="3323987"/>
+          </a:xfrm>
+          <a:prstGeom prst="rect">
+            <a:avLst/>
+          </a:prstGeom>
+          <a:noFill/>
+        </p:spPr>
+        <p:txBody>
+          <a:bodyPr wrap="square" rtlCol="0">
+            <a:spAutoFit/>
+          </a:bodyPr>
+          <a:lstStyle/>
+          <a:p>
+            <a:r>
+              <a:rPr lang="en-US" sz="1400"/>
+              <a:t>To send/receive bitcoin on bitcoin network you need a wallet. </a:t>
+            </a:r>
+            <a:br>
+              <a:rPr lang="en-US" sz="1400"/>
+            </a:br>
+            <a:r>
+              <a:rPr lang="en-US" sz="1400"/>
+              <a:t>Bitcoin provides its own wallet called "</a:t>
+            </a:r>
+            <a:r>
+              <a:rPr lang="en-US" sz="1400" b="1">
+                <a:solidFill>
+                  <a:srgbClr val="FF0000"/>
+                </a:solidFill>
+              </a:rPr>
+              <a:t>Bitcoin Core</a:t>
+            </a:r>
+            <a:r>
+              <a:rPr lang="en-US" sz="1400"/>
+              <a:t>". </a:t>
+            </a:r>
+            <a:br>
+              <a:rPr lang="en-US" sz="1400"/>
+            </a:br>
+            <a:r>
+              <a:rPr lang="en-US" sz="1400"/>
+              <a:t>You can download it from:</a:t>
+            </a:r>
+            <a:br>
+              <a:rPr lang="en-US" sz="1400"/>
+            </a:br>
+            <a:r>
+              <a:rPr lang="en-US" sz="1400"/>
+              <a:t>     </a:t>
+            </a:r>
+            <a:r>
+              <a:rPr lang="en-US" sz="1400">
+                <a:hlinkClick r:id="rId7"/>
+              </a:rPr>
+              <a:t>https://bitcoincore.org/en/download/</a:t>
+            </a:r>
+            <a:endParaRPr lang="en-US" sz="1400"/>
+          </a:p>
+          <a:p>
+            <a:endParaRPr lang="en-US" sz="1400"/>
+          </a:p>
+          <a:p>
+            <a:pPr marL="285750" indent="-285750">
+              <a:buFont typeface="Arial" panose="020B0604020202020204" pitchFamily="34" charset="0"/>
+              <a:buChar char="•"/>
+            </a:pPr>
+            <a:r>
+              <a:rPr lang="en-US" sz="1400" b="1">
+                <a:solidFill>
+                  <a:srgbClr val="FF0000"/>
+                </a:solidFill>
+              </a:rPr>
+              <a:t>Bitcoin Core</a:t>
+            </a:r>
+            <a:r>
+              <a:rPr lang="en-US" sz="1400"/>
+              <a:t> is an application that provides a personal Bitcoin wallet and allows a user to send and receive bitcoins.</a:t>
+            </a:r>
+          </a:p>
+          <a:p>
+            <a:pPr marL="285750" indent="-285750">
+              <a:buFont typeface="Arial" panose="020B0604020202020204" pitchFamily="34" charset="0"/>
+              <a:buChar char="•"/>
+            </a:pPr>
+            <a:endParaRPr lang="en-US" sz="1400"/>
+          </a:p>
+          <a:p>
+            <a:pPr marL="285750" indent="-285750">
+              <a:buFont typeface="Arial" panose="020B0604020202020204" pitchFamily="34" charset="0"/>
+              <a:buChar char="•"/>
+            </a:pPr>
+            <a:r>
+              <a:rPr lang="en-US" sz="1400" b="1">
+                <a:solidFill>
+                  <a:srgbClr val="FF0000"/>
+                </a:solidFill>
+              </a:rPr>
+              <a:t>Bitcoin Core</a:t>
+            </a:r>
+            <a:r>
+              <a:rPr lang="en-US" sz="1400"/>
+              <a:t> is a </a:t>
+            </a:r>
+            <a:r>
+              <a:rPr lang="en-US" sz="1400" b="1">
+                <a:solidFill>
+                  <a:srgbClr val="00B050"/>
+                </a:solidFill>
+              </a:rPr>
+              <a:t>full Bitcoin client</a:t>
+            </a:r>
+            <a:r>
+              <a:rPr lang="en-US" sz="1400"/>
+              <a:t> and can download the whole bitcoin blockchain from the beginning of times (~200 GB).</a:t>
+            </a:r>
+          </a:p>
+          <a:p>
+            <a:endParaRPr lang="en-US" sz="1400"/>
+          </a:p>
+          <a:p>
+            <a:pPr marL="285750" indent="-285750">
+              <a:buFont typeface="Arial" panose="020B0604020202020204" pitchFamily="34" charset="0"/>
+              <a:buChar char="•"/>
+            </a:pPr>
+            <a:r>
+              <a:rPr lang="en-US" sz="1400" b="1">
+                <a:solidFill>
+                  <a:srgbClr val="FF0000"/>
+                </a:solidFill>
+              </a:rPr>
+              <a:t>Bitcoin Core</a:t>
+            </a:r>
+            <a:r>
+              <a:rPr lang="en-US" sz="1400"/>
+              <a:t> nodes build the backbone of the network</a:t>
+            </a:r>
+          </a:p>
+          <a:p>
+            <a:endParaRPr lang="en-US" sz="1400"/>
+          </a:p>
+          <a:p>
+            <a:pPr marL="285750" indent="-285750">
+              <a:buFont typeface="Arial" panose="020B0604020202020204" pitchFamily="34" charset="0"/>
+              <a:buChar char="•"/>
+            </a:pPr>
+            <a:r>
+              <a:rPr lang="en-US" sz="1400" b="1">
+                <a:solidFill>
+                  <a:srgbClr val="FF0000"/>
+                </a:solidFill>
+              </a:rPr>
+              <a:t>Bitcoin Core</a:t>
+            </a:r>
+            <a:r>
+              <a:rPr lang="en-US" sz="1400"/>
+              <a:t> offers high levels of security, privacy, and stability. </a:t>
+            </a:r>
+            <a:br>
+              <a:rPr lang="en-US" sz="1400"/>
+            </a:br>
+            <a:r>
+              <a:rPr lang="en-US" sz="1400"/>
+              <a:t>However, it has fewer features and it takes a lot of space and memory</a:t>
+            </a:r>
+          </a:p>
+        </p:txBody>
+      </p:sp>
       <p:pic>
         <p:nvPicPr>
-          <p:cNvPr id="4" name="Picture 3">
+          <p:cNvPr id="5" name="Picture 4">
             <a:extLst>
               <a:ext uri="{FF2B5EF4-FFF2-40B4-BE49-F238E27FC236}">
-                <a16:creationId xmlns:a16="http://schemas.microsoft.com/office/drawing/2014/main" id="{796507CB-39E8-0348-90FA-E4E49712669F}"/>
+                <a16:creationId xmlns:a16="http://schemas.microsoft.com/office/drawing/2014/main" id="{A0C92002-0C3B-CB92-51EB-BAFE3187F797}"/>
               </a:ext>
             </a:extLst>
           </p:cNvPr>
@@ -3995,21 +4592,22 @@
           </p:cNvPicPr>
           <p:nvPr/>
         </p:nvPicPr>
-        <p:blipFill rotWithShape="1">
-          <a:blip r:embed="rId2" cstate="email">
+        <p:blipFill>
+          <a:blip r:embed="rId8" cstate="email">
             <a:extLst>
               <a:ext uri="{28A0092B-C50C-407E-A947-70E740481C1C}">
                 <a14:useLocalDpi xmlns:a14="http://schemas.microsoft.com/office/drawing/2010/main"/>
               </a:ext>
             </a:extLst>
           </a:blip>
-          <a:srcRect/>
-          <a:stretch/>
+          <a:stretch>
+            <a:fillRect/>
+          </a:stretch>
         </p:blipFill>
         <p:spPr>
           <a:xfrm>
-            <a:off x="416537" y="1069741"/>
-            <a:ext cx="11358925" cy="4718518"/>
+            <a:off x="6222482" y="1019908"/>
+            <a:ext cx="5867918" cy="5735559"/>
           </a:xfrm>
           <a:prstGeom prst="rect">
             <a:avLst/>
@@ -4018,10 +4616,10 @@
       </p:pic>
       <p:sp>
         <p:nvSpPr>
-          <p:cNvPr id="5" name="TextBox 4">
+          <p:cNvPr id="7" name="TextBox 6">
             <a:extLst>
               <a:ext uri="{FF2B5EF4-FFF2-40B4-BE49-F238E27FC236}">
-                <a16:creationId xmlns:a16="http://schemas.microsoft.com/office/drawing/2014/main" id="{0CF475CF-2613-4840-95C2-352246822EC8}"/>
+                <a16:creationId xmlns:a16="http://schemas.microsoft.com/office/drawing/2014/main" id="{152A9575-F217-4A40-7E1E-C40A76B5548A}"/>
               </a:ext>
             </a:extLst>
           </p:cNvPr>
@@ -4030,8 +4628,8 @@
         </p:nvSpPr>
         <p:spPr>
           <a:xfrm>
-            <a:off x="2547257" y="6841671"/>
-            <a:ext cx="184731" cy="369332"/>
+            <a:off x="7405858" y="292387"/>
+            <a:ext cx="3830320" cy="461665"/>
           </a:xfrm>
           <a:prstGeom prst="rect">
             <a:avLst/>
@@ -4039,206 +4637,35 @@
           <a:noFill/>
         </p:spPr>
         <p:txBody>
-          <a:bodyPr wrap="none" rtlCol="0">
-            <a:spAutoFit/>
-          </a:bodyPr>
-          <a:lstStyle/>
-          <a:p>
-            <a:endParaRPr lang="en-US" dirty="0"/>
-          </a:p>
-        </p:txBody>
-      </p:sp>
-      <p:sp>
-        <p:nvSpPr>
-          <p:cNvPr id="6" name="TextBox 5">
-            <a:extLst>
-              <a:ext uri="{FF2B5EF4-FFF2-40B4-BE49-F238E27FC236}">
-                <a16:creationId xmlns:a16="http://schemas.microsoft.com/office/drawing/2014/main" id="{1C7F0B1C-221D-B845-9C05-E49E881FC13D}"/>
-              </a:ext>
-            </a:extLst>
-          </p:cNvPr>
-          <p:cNvSpPr txBox="1"/>
-          <p:nvPr/>
-        </p:nvSpPr>
-        <p:spPr>
-          <a:xfrm>
-            <a:off x="3885288" y="5991263"/>
-            <a:ext cx="3827330" cy="492443"/>
-          </a:xfrm>
-          <a:prstGeom prst="rect">
-            <a:avLst/>
-          </a:prstGeom>
-          <a:noFill/>
-        </p:spPr>
-        <p:txBody>
-          <a:bodyPr wrap="none" rtlCol="0">
-            <a:spAutoFit/>
-          </a:bodyPr>
-          <a:lstStyle/>
-          <a:p>
-            <a:r>
-              <a:rPr lang="en-US" sz="1400" dirty="0"/>
-              <a:t>Analysis done by </a:t>
-            </a:r>
-            <a:r>
-              <a:rPr lang="en-US" sz="1400" dirty="0" err="1"/>
-              <a:t>Veriphi</a:t>
-            </a:r>
-            <a:r>
-              <a:rPr lang="en-US" sz="1400" dirty="0"/>
-              <a:t>: </a:t>
-            </a:r>
-            <a:br>
-              <a:rPr lang="en-US" dirty="0"/>
-            </a:br>
-            <a:r>
-              <a:rPr lang="en-US" sz="1200" dirty="0"/>
-              <a:t>.. </a:t>
-            </a:r>
-            <a:r>
-              <a:rPr lang="en-US" sz="1200" dirty="0">
-                <a:hlinkClick r:id="rId3"/>
-              </a:rPr>
-              <a:t>https://</a:t>
-            </a:r>
-            <a:r>
-              <a:rPr lang="en-US" sz="1200" dirty="0" err="1">
-                <a:hlinkClick r:id="rId3"/>
-              </a:rPr>
-              <a:t>www.veriphi.io</a:t>
-            </a:r>
-            <a:r>
-              <a:rPr lang="en-US" sz="1200" dirty="0">
-                <a:hlinkClick r:id="rId3"/>
-              </a:rPr>
-              <a:t>/</a:t>
-            </a:r>
-            <a:r>
-              <a:rPr lang="en-US" sz="1200" dirty="0" err="1">
-                <a:hlinkClick r:id="rId3"/>
-              </a:rPr>
-              <a:t>en</a:t>
-            </a:r>
-            <a:r>
-              <a:rPr lang="en-US" sz="1200" dirty="0">
-                <a:hlinkClick r:id="rId3"/>
-              </a:rPr>
-              <a:t>/blog/software-wallet-analysis</a:t>
-            </a:r>
-            <a:endParaRPr lang="en-US" sz="1200" dirty="0"/>
-          </a:p>
-        </p:txBody>
-      </p:sp>
-      <p:sp>
-        <p:nvSpPr>
-          <p:cNvPr id="2" name="TextBox 1">
-            <a:extLst>
-              <a:ext uri="{FF2B5EF4-FFF2-40B4-BE49-F238E27FC236}">
-                <a16:creationId xmlns:a16="http://schemas.microsoft.com/office/drawing/2014/main" id="{4C398E17-E066-E0FC-7BD7-020BC9A6F35C}"/>
-              </a:ext>
-            </a:extLst>
-          </p:cNvPr>
-          <p:cNvSpPr txBox="1"/>
-          <p:nvPr/>
-        </p:nvSpPr>
-        <p:spPr>
-          <a:xfrm>
-            <a:off x="98854" y="0"/>
-            <a:ext cx="4349578" cy="523220"/>
-          </a:xfrm>
-          <a:prstGeom prst="rect">
-            <a:avLst/>
-          </a:prstGeom>
-          <a:noFill/>
-        </p:spPr>
-        <p:txBody>
           <a:bodyPr wrap="square" rtlCol="0">
             <a:spAutoFit/>
           </a:bodyPr>
           <a:lstStyle/>
           <a:p>
             <a:r>
-              <a:rPr lang="en-US" sz="2800" b="1"/>
-              <a:t>Wallet Comparisons</a:t>
-            </a:r>
-          </a:p>
-        </p:txBody>
-      </p:sp>
-      <p:sp>
-        <p:nvSpPr>
-          <p:cNvPr id="3" name="TextBox 2">
-            <a:extLst>
-              <a:ext uri="{FF2B5EF4-FFF2-40B4-BE49-F238E27FC236}">
-                <a16:creationId xmlns:a16="http://schemas.microsoft.com/office/drawing/2014/main" id="{F5FD4B5B-6802-2D92-635D-5C5EB1559385}"/>
-              </a:ext>
-            </a:extLst>
-          </p:cNvPr>
-          <p:cNvSpPr txBox="1"/>
-          <p:nvPr/>
-        </p:nvSpPr>
-        <p:spPr>
-          <a:xfrm>
-            <a:off x="10309813" y="645117"/>
-            <a:ext cx="897450" cy="369332"/>
-          </a:xfrm>
-          <a:prstGeom prst="rect">
-            <a:avLst/>
-          </a:prstGeom>
-          <a:noFill/>
-        </p:spPr>
-        <p:txBody>
-          <a:bodyPr wrap="square" rtlCol="0">
-            <a:spAutoFit/>
-          </a:bodyPr>
-          <a:lstStyle/>
-          <a:p>
-            <a:pPr algn="r"/>
-            <a:r>
-              <a:rPr lang="en-US"/>
-              <a:t>Worst</a:t>
-            </a:r>
-          </a:p>
-        </p:txBody>
-      </p:sp>
-      <p:sp>
-        <p:nvSpPr>
-          <p:cNvPr id="7" name="TextBox 6">
-            <a:extLst>
-              <a:ext uri="{FF2B5EF4-FFF2-40B4-BE49-F238E27FC236}">
-                <a16:creationId xmlns:a16="http://schemas.microsoft.com/office/drawing/2014/main" id="{A64CD484-5760-B321-64A1-BC13B89A02B9}"/>
-              </a:ext>
-            </a:extLst>
-          </p:cNvPr>
-          <p:cNvSpPr txBox="1"/>
-          <p:nvPr/>
-        </p:nvSpPr>
-        <p:spPr>
-          <a:xfrm>
-            <a:off x="2190897" y="678071"/>
-            <a:ext cx="897450" cy="369332"/>
-          </a:xfrm>
-          <a:prstGeom prst="rect">
-            <a:avLst/>
-          </a:prstGeom>
-          <a:noFill/>
-        </p:spPr>
-        <p:txBody>
-          <a:bodyPr wrap="square" rtlCol="0">
-            <a:spAutoFit/>
-          </a:bodyPr>
-          <a:lstStyle/>
-          <a:p>
-            <a:r>
-              <a:rPr lang="en-US"/>
-              <a:t>Best</a:t>
-            </a:r>
+              <a:rPr lang="en-US" sz="1400" b="1">
+                <a:solidFill>
+                  <a:srgbClr val="00B050"/>
+                </a:solidFill>
+              </a:rPr>
+              <a:t>Choose your wallet – on bitcoin.org:</a:t>
+            </a:r>
+          </a:p>
+          <a:p>
+            <a:r>
+              <a:rPr lang="en-US" sz="1000">
+                <a:hlinkClick r:id="rId9"/>
+              </a:rPr>
+              <a:t>https://bitcoin.org/en/choose-your-wallet?step=5&amp;platform=mac</a:t>
+            </a:r>
+            <a:endParaRPr lang="en-US" sz="1000"/>
           </a:p>
         </p:txBody>
       </p:sp>
     </p:spTree>
     <p:extLst>
       <p:ext uri="{BB962C8B-B14F-4D97-AF65-F5344CB8AC3E}">
-        <p14:creationId xmlns:p14="http://schemas.microsoft.com/office/powerpoint/2010/main" val="2522971255"/>
+        <p14:creationId xmlns:p14="http://schemas.microsoft.com/office/powerpoint/2010/main" val="3518343222"/>
       </p:ext>
     </p:extLst>
   </p:cSld>
@@ -4270,7 +4697,7 @@
           <p:cNvPr id="2" name="TextBox 1">
             <a:extLst>
               <a:ext uri="{FF2B5EF4-FFF2-40B4-BE49-F238E27FC236}">
-                <a16:creationId xmlns:a16="http://schemas.microsoft.com/office/drawing/2014/main" id="{360843F1-39FC-B446-BCF9-38C04967543B}"/>
+                <a16:creationId xmlns:a16="http://schemas.microsoft.com/office/drawing/2014/main" id="{210D5B8D-BE4D-BB41-ABFF-EFE774092AF5}"/>
               </a:ext>
             </a:extLst>
           </p:cNvPr>
@@ -4279,8 +4706,8 @@
         </p:nvSpPr>
         <p:spPr>
           <a:xfrm>
-            <a:off x="2" y="1"/>
-            <a:ext cx="4930344" cy="523220"/>
+            <a:off x="6754809" y="161226"/>
+            <a:ext cx="5440919" cy="3108543"/>
           </a:xfrm>
           <a:prstGeom prst="rect">
             <a:avLst/>
@@ -4293,19 +4720,132 @@
           </a:bodyPr>
           <a:lstStyle/>
           <a:p>
-            <a:r>
-              <a:rPr lang="en-US" sz="2800" b="1"/>
-              <a:t>Types of Crypto Wallets</a:t>
-            </a:r>
-          </a:p>
-        </p:txBody>
-      </p:sp>
-      <p:sp>
-        <p:nvSpPr>
-          <p:cNvPr id="5" name="TextBox 4">
+            <a:pPr marL="380990" indent="-380990">
+              <a:buFont typeface="Arial" panose="020B0604020202020204" pitchFamily="34" charset="0"/>
+              <a:buChar char="•"/>
+            </a:pPr>
+            <a:r>
+              <a:rPr lang="en-US" sz="1400">
+                <a:hlinkClick r:id="rId2"/>
+              </a:rPr>
+              <a:t>https://metamask.io/</a:t>
+            </a:r>
+            <a:endParaRPr lang="en-US" sz="1400"/>
+          </a:p>
+          <a:p>
+            <a:pPr marL="380990" indent="-380990">
+              <a:buFont typeface="Arial" panose="020B0604020202020204" pitchFamily="34" charset="0"/>
+              <a:buChar char="•"/>
+            </a:pPr>
+            <a:r>
+              <a:rPr lang="en-US" sz="1400">
+                <a:hlinkClick r:id="rId3"/>
+              </a:rPr>
+              <a:t>https://en.wikipedia.org/wiki/MetaMask</a:t>
+            </a:r>
+            <a:endParaRPr lang="en-US" sz="1400"/>
+          </a:p>
+          <a:p>
+            <a:pPr marL="380990" indent="-380990">
+              <a:buFont typeface="Arial" panose="020B0604020202020204" pitchFamily="34" charset="0"/>
+              <a:buChar char="•"/>
+            </a:pPr>
+            <a:r>
+              <a:rPr lang="en-US" sz="1400" b="1">
+                <a:solidFill>
+                  <a:srgbClr val="00B050"/>
+                </a:solidFill>
+              </a:rPr>
+              <a:t>A software cryptocurrency wallet for Etherium blockchain</a:t>
+            </a:r>
+          </a:p>
+          <a:p>
+            <a:pPr marL="380990" indent="-380990">
+              <a:buFont typeface="Arial" panose="020B0604020202020204" pitchFamily="34" charset="0"/>
+              <a:buChar char="•"/>
+            </a:pPr>
+            <a:r>
+              <a:rPr lang="en-US" sz="1400"/>
+              <a:t>A secure browser extension or mobile app </a:t>
+            </a:r>
+            <a:br>
+              <a:rPr lang="en-US" sz="1400"/>
+            </a:br>
+            <a:r>
+              <a:rPr lang="en-US" sz="1400"/>
+              <a:t>(iOS, Android)</a:t>
+            </a:r>
+          </a:p>
+          <a:p>
+            <a:pPr marL="380990" indent="-380990">
+              <a:buFont typeface="Arial" panose="020B0604020202020204" pitchFamily="34" charset="0"/>
+              <a:buChar char="•"/>
+            </a:pPr>
+            <a:r>
+              <a:rPr lang="en-US" sz="1400"/>
+              <a:t>Allows to interact with decentralized applications</a:t>
+            </a:r>
+          </a:p>
+          <a:p>
+            <a:pPr marL="380990" indent="-380990">
+              <a:buFont typeface="Arial" panose="020B0604020202020204" pitchFamily="34" charset="0"/>
+              <a:buChar char="•"/>
+            </a:pPr>
+            <a:r>
+              <a:rPr lang="en-US" sz="1400"/>
+              <a:t>Since 2016 </a:t>
+            </a:r>
+          </a:p>
+          <a:p>
+            <a:pPr marL="380990" indent="-380990">
+              <a:buFont typeface="Arial" panose="020B0604020202020204" pitchFamily="34" charset="0"/>
+              <a:buChar char="•"/>
+            </a:pPr>
+            <a:r>
+              <a:rPr lang="en-US" sz="1400"/>
+              <a:t>More than 20 Mln users</a:t>
+            </a:r>
+          </a:p>
+          <a:p>
+            <a:pPr marL="380990" indent="-380990">
+              <a:buFont typeface="Arial" panose="020B0604020202020204" pitchFamily="34" charset="0"/>
+              <a:buChar char="•"/>
+            </a:pPr>
+            <a:r>
+              <a:rPr lang="en-US" sz="1400"/>
+              <a:t>Developed by ConsenSys - a blockchain software technology company founded by </a:t>
+            </a:r>
+            <a:r>
+              <a:rPr lang="en-US" sz="1400" b="1">
+                <a:solidFill>
+                  <a:srgbClr val="0070C0"/>
+                </a:solidFill>
+              </a:rPr>
+              <a:t>Joseph Lubin</a:t>
+            </a:r>
+            <a:r>
+              <a:rPr lang="en-US" sz="1400"/>
+              <a:t> with headquarters in Brooklyn, New York</a:t>
+            </a:r>
+          </a:p>
+          <a:p>
+            <a:pPr marL="380990" indent="-380990">
+              <a:buFont typeface="Arial" panose="020B0604020202020204" pitchFamily="34" charset="0"/>
+              <a:buChar char="•"/>
+            </a:pPr>
+            <a:r>
+              <a:rPr lang="en-US" sz="1400"/>
+              <a:t>Bitcoin cannot be stored on MetaMask, but you can store a "Wrapped Bitcoin" (WBTC) – which is an ERC-20 token that represents Bitcoin on the Ethereum blockchain</a:t>
+            </a:r>
+          </a:p>
+        </p:txBody>
+      </p:sp>
+      <p:sp>
+        <p:nvSpPr>
+          <p:cNvPr id="3" name="TextBox 2">
             <a:extLst>
               <a:ext uri="{FF2B5EF4-FFF2-40B4-BE49-F238E27FC236}">
-                <a16:creationId xmlns:a16="http://schemas.microsoft.com/office/drawing/2014/main" id="{817DA55C-C2D6-A2D4-DB7A-8AA34B531775}"/>
+                <a16:creationId xmlns:a16="http://schemas.microsoft.com/office/drawing/2014/main" id="{E6BD177C-95D2-6D49-ABE7-6DD29457A006}"/>
               </a:ext>
             </a:extLst>
           </p:cNvPr>
@@ -4314,8 +4854,8 @@
         </p:nvSpPr>
         <p:spPr>
           <a:xfrm>
-            <a:off x="269632" y="1777272"/>
-            <a:ext cx="3188044" cy="1169551"/>
+            <a:off x="-23443" y="1"/>
+            <a:ext cx="2157622" cy="523220"/>
           </a:xfrm>
           <a:prstGeom prst="rect">
             <a:avLst/>
@@ -4328,63 +4868,150 @@
           </a:bodyPr>
           <a:lstStyle/>
           <a:p>
-            <a:pPr marL="285750" indent="-285750">
-              <a:buFont typeface="Arial" panose="020B0604020202020204" pitchFamily="34" charset="0"/>
-              <a:buChar char="•"/>
-            </a:pPr>
-            <a:r>
-              <a:rPr lang="en-US" sz="1400"/>
-              <a:t>Desktop App</a:t>
-            </a:r>
-          </a:p>
-          <a:p>
-            <a:pPr marL="285750" indent="-285750">
-              <a:buFont typeface="Arial" panose="020B0604020202020204" pitchFamily="34" charset="0"/>
-              <a:buChar char="•"/>
-            </a:pPr>
-            <a:r>
-              <a:rPr lang="en-US" sz="1400"/>
-              <a:t>Mobile App</a:t>
-            </a:r>
-          </a:p>
-          <a:p>
-            <a:pPr marL="285750" indent="-285750">
-              <a:buFont typeface="Arial" panose="020B0604020202020204" pitchFamily="34" charset="0"/>
-              <a:buChar char="•"/>
-            </a:pPr>
-            <a:r>
-              <a:rPr lang="en-US" sz="1400"/>
-              <a:t>Browser plugin</a:t>
-            </a:r>
-          </a:p>
-          <a:p>
-            <a:pPr marL="285750" indent="-285750">
-              <a:buFont typeface="Arial" panose="020B0604020202020204" pitchFamily="34" charset="0"/>
-              <a:buChar char="•"/>
-            </a:pPr>
-            <a:r>
-              <a:rPr lang="en-US" sz="1400"/>
-              <a:t>Hardware (usb, ...)</a:t>
-            </a:r>
-          </a:p>
-          <a:p>
-            <a:pPr marL="285750" indent="-285750">
-              <a:buFont typeface="Arial" panose="020B0604020202020204" pitchFamily="34" charset="0"/>
-              <a:buChar char="•"/>
-            </a:pPr>
-            <a:r>
-              <a:rPr lang="en-US" sz="1400"/>
-              <a:t>Paper (address, keys, QR-code)</a:t>
+            <a:r>
+              <a:rPr lang="en-US" sz="2800" b="1"/>
+              <a:t>MetaMask</a:t>
             </a:r>
           </a:p>
         </p:txBody>
       </p:sp>
       <p:pic>
         <p:nvPicPr>
-          <p:cNvPr id="4" name="Picture 32" descr="17 Best Hardware Wallets In 2022!">
+          <p:cNvPr id="4" name="Picture 3">
             <a:extLst>
               <a:ext uri="{FF2B5EF4-FFF2-40B4-BE49-F238E27FC236}">
-                <a16:creationId xmlns:a16="http://schemas.microsoft.com/office/drawing/2014/main" id="{DE0B52E5-6D68-44E1-2AD8-0F0F79C55BBD}"/>
+                <a16:creationId xmlns:a16="http://schemas.microsoft.com/office/drawing/2014/main" id="{5D282DCE-4D06-3D4E-A1E4-19542DA67CA6}"/>
+              </a:ext>
+            </a:extLst>
+          </p:cNvPr>
+          <p:cNvPicPr>
+            <a:picLocks noChangeAspect="1"/>
+          </p:cNvPicPr>
+          <p:nvPr/>
+        </p:nvPicPr>
+        <p:blipFill>
+          <a:blip r:embed="rId4" cstate="email">
+            <a:extLst>
+              <a:ext uri="{28A0092B-C50C-407E-A947-70E740481C1C}">
+                <a14:useLocalDpi xmlns:a14="http://schemas.microsoft.com/office/drawing/2010/main"/>
+              </a:ext>
+            </a:extLst>
+          </a:blip>
+          <a:stretch>
+            <a:fillRect/>
+          </a:stretch>
+        </p:blipFill>
+        <p:spPr>
+          <a:xfrm>
+            <a:off x="2541308" y="161226"/>
+            <a:ext cx="1443357" cy="1355348"/>
+          </a:xfrm>
+          <a:prstGeom prst="rect">
+            <a:avLst/>
+          </a:prstGeom>
+        </p:spPr>
+      </p:pic>
+      <p:pic>
+        <p:nvPicPr>
+          <p:cNvPr id="5" name="Picture 4">
+            <a:extLst>
+              <a:ext uri="{FF2B5EF4-FFF2-40B4-BE49-F238E27FC236}">
+                <a16:creationId xmlns:a16="http://schemas.microsoft.com/office/drawing/2014/main" id="{43A3DE9F-6EE5-A747-B064-3CB275CD9991}"/>
+              </a:ext>
+            </a:extLst>
+          </p:cNvPr>
+          <p:cNvPicPr>
+            <a:picLocks noChangeAspect="1"/>
+          </p:cNvPicPr>
+          <p:nvPr/>
+        </p:nvPicPr>
+        <p:blipFill>
+          <a:blip r:embed="rId5" cstate="email">
+            <a:extLst>
+              <a:ext uri="{28A0092B-C50C-407E-A947-70E740481C1C}">
+                <a14:useLocalDpi xmlns:a14="http://schemas.microsoft.com/office/drawing/2010/main"/>
+              </a:ext>
+            </a:extLst>
+          </a:blip>
+          <a:stretch>
+            <a:fillRect/>
+          </a:stretch>
+        </p:blipFill>
+        <p:spPr>
+          <a:xfrm>
+            <a:off x="4434043" y="161226"/>
+            <a:ext cx="1811892" cy="2353377"/>
+          </a:xfrm>
+          <a:prstGeom prst="rect">
+            <a:avLst/>
+          </a:prstGeom>
+        </p:spPr>
+      </p:pic>
+      <p:sp>
+        <p:nvSpPr>
+          <p:cNvPr id="9" name="TextBox 8">
+            <a:extLst>
+              <a:ext uri="{FF2B5EF4-FFF2-40B4-BE49-F238E27FC236}">
+                <a16:creationId xmlns:a16="http://schemas.microsoft.com/office/drawing/2014/main" id="{BE060BD8-457B-0F41-9E84-E2B164D8C94E}"/>
+              </a:ext>
+            </a:extLst>
+          </p:cNvPr>
+          <p:cNvSpPr txBox="1"/>
+          <p:nvPr/>
+        </p:nvSpPr>
+        <p:spPr>
+          <a:xfrm>
+            <a:off x="4158188" y="2514603"/>
+            <a:ext cx="2310064" cy="738664"/>
+          </a:xfrm>
+          <a:prstGeom prst="rect">
+            <a:avLst/>
+          </a:prstGeom>
+          <a:noFill/>
+        </p:spPr>
+        <p:txBody>
+          <a:bodyPr wrap="square" rtlCol="0">
+            <a:spAutoFit/>
+          </a:bodyPr>
+          <a:lstStyle/>
+          <a:p>
+            <a:pPr algn="ctr"/>
+            <a:r>
+              <a:rPr lang="en-US" sz="1400"/>
+              <a:t> </a:t>
+            </a:r>
+            <a:r>
+              <a:rPr lang="en-US" sz="1400" b="1">
+                <a:solidFill>
+                  <a:srgbClr val="0070C0"/>
+                </a:solidFill>
+              </a:rPr>
+              <a:t>Joseph Lubin</a:t>
+            </a:r>
+            <a:endParaRPr lang="en-US" sz="1400"/>
+          </a:p>
+          <a:p>
+            <a:pPr algn="ctr"/>
+            <a:r>
+              <a:rPr lang="en-US" sz="1400"/>
+              <a:t>ConsenSys</a:t>
+            </a:r>
+          </a:p>
+          <a:p>
+            <a:pPr algn="ctr"/>
+            <a:r>
+              <a:rPr lang="en-US" sz="1400"/>
+              <a:t>Brooklyn, New York</a:t>
+            </a:r>
+          </a:p>
+        </p:txBody>
+      </p:sp>
+      <p:pic>
+        <p:nvPicPr>
+          <p:cNvPr id="1032" name="Picture 8" descr="MetaMask – Get this Extension for 🦊 Firefox (en-US)">
+            <a:extLst>
+              <a:ext uri="{FF2B5EF4-FFF2-40B4-BE49-F238E27FC236}">
+                <a16:creationId xmlns:a16="http://schemas.microsoft.com/office/drawing/2014/main" id="{2D8924E9-3506-C949-A240-5CF490D28C07}"/>
               </a:ext>
             </a:extLst>
           </p:cNvPr>
@@ -4394,7 +5021,7 @@
           <p:nvPr/>
         </p:nvPicPr>
         <p:blipFill>
-          <a:blip r:embed="rId2" cstate="email">
+          <a:blip r:embed="rId6" cstate="email">
             <a:extLst>
               <a:ext uri="{28A0092B-C50C-407E-A947-70E740481C1C}">
                 <a14:useLocalDpi xmlns:a14="http://schemas.microsoft.com/office/drawing/2010/main"/>
@@ -4408,13 +5035,18 @@
         </p:blipFill>
         <p:spPr bwMode="auto">
           <a:xfrm>
-            <a:off x="5537084" y="2602025"/>
-            <a:ext cx="1766393" cy="1324795"/>
+            <a:off x="98297" y="1758016"/>
+            <a:ext cx="3766817" cy="2353377"/>
           </a:xfrm>
           <a:prstGeom prst="rect">
             <a:avLst/>
           </a:prstGeom>
           <a:noFill/>
+          <a:ln>
+            <a:solidFill>
+              <a:schemeClr val="accent1"/>
+            </a:solidFill>
+          </a:ln>
           <a:extLst>
             <a:ext uri="{909E8E84-426E-40DD-AFC4-6F175D3DCCD1}">
               <a14:hiddenFill xmlns:a14="http://schemas.microsoft.com/office/drawing/2010/main">
@@ -4426,171 +5058,12 @@
           </a:extLst>
         </p:spPr>
       </p:pic>
-      <p:sp>
-        <p:nvSpPr>
-          <p:cNvPr id="3" name="TextBox 2">
-            <a:extLst>
-              <a:ext uri="{FF2B5EF4-FFF2-40B4-BE49-F238E27FC236}">
-                <a16:creationId xmlns:a16="http://schemas.microsoft.com/office/drawing/2014/main" id="{9F1715C1-CDFA-5BFA-A877-9C3C0C2EB98B}"/>
-              </a:ext>
-            </a:extLst>
-          </p:cNvPr>
-          <p:cNvSpPr txBox="1"/>
-          <p:nvPr/>
-        </p:nvSpPr>
-        <p:spPr>
-          <a:xfrm>
-            <a:off x="253314" y="4158460"/>
-            <a:ext cx="4423719" cy="2154436"/>
-          </a:xfrm>
-          <a:prstGeom prst="rect">
-            <a:avLst/>
-          </a:prstGeom>
-          <a:noFill/>
-        </p:spPr>
-        <p:txBody>
-          <a:bodyPr wrap="square" rtlCol="0">
-            <a:spAutoFit/>
-          </a:bodyPr>
-          <a:lstStyle/>
-          <a:p>
-            <a:r>
-              <a:rPr lang="en-US" b="1" dirty="0">
-                <a:solidFill>
-                  <a:srgbClr val="00B050"/>
-                </a:solidFill>
-              </a:rPr>
-              <a:t>Hot Wallets:</a:t>
-            </a:r>
-          </a:p>
-          <a:p>
-            <a:pPr marL="285750" indent="-285750">
-              <a:buFont typeface="Arial" panose="020B0604020202020204" pitchFamily="34" charset="0"/>
-              <a:buChar char="•"/>
-            </a:pPr>
-            <a:r>
-              <a:rPr lang="en-US" sz="1400" dirty="0"/>
-              <a:t>Connected to internet</a:t>
-            </a:r>
-          </a:p>
-          <a:p>
-            <a:pPr marL="285750" indent="-285750">
-              <a:buFont typeface="Arial" panose="020B0604020202020204" pitchFamily="34" charset="0"/>
-              <a:buChar char="•"/>
-            </a:pPr>
-            <a:r>
-              <a:rPr lang="en-US" sz="1400" dirty="0"/>
-              <a:t>Can be accessed online or through application</a:t>
-            </a:r>
-          </a:p>
-          <a:p>
-            <a:pPr marL="285750" indent="-285750">
-              <a:buFont typeface="Arial" panose="020B0604020202020204" pitchFamily="34" charset="0"/>
-              <a:buChar char="•"/>
-            </a:pPr>
-            <a:r>
-              <a:rPr lang="en-US" sz="1400" dirty="0"/>
-              <a:t>More susceptible to hacking attacks</a:t>
-            </a:r>
-          </a:p>
-          <a:p>
-            <a:endParaRPr lang="en-US" sz="1400"/>
-          </a:p>
-          <a:p>
-            <a:r>
-              <a:rPr lang="en-US" b="1">
-                <a:solidFill>
-                  <a:srgbClr val="00B050"/>
-                </a:solidFill>
-              </a:rPr>
-              <a:t>Cold Wallets:</a:t>
-            </a:r>
-          </a:p>
-          <a:p>
-            <a:pPr marL="285750" indent="-285750">
-              <a:buFont typeface="Arial" panose="020B0604020202020204" pitchFamily="34" charset="0"/>
-              <a:buChar char="•"/>
-            </a:pPr>
-            <a:r>
-              <a:rPr lang="en-US" sz="1400" dirty="0"/>
-              <a:t>Wallets that has to be connected to computer first</a:t>
-            </a:r>
-          </a:p>
-          <a:p>
-            <a:pPr marL="285750" indent="-285750">
-              <a:buFont typeface="Arial" panose="020B0604020202020204" pitchFamily="34" charset="0"/>
-              <a:buChar char="•"/>
-            </a:pPr>
-            <a:r>
-              <a:rPr lang="en-US" sz="1400" dirty="0"/>
-              <a:t>Also called "offline" wallets</a:t>
-            </a:r>
-          </a:p>
-          <a:p>
-            <a:pPr marL="285750" indent="-285750">
-              <a:buFont typeface="Arial" panose="020B0604020202020204" pitchFamily="34" charset="0"/>
-              <a:buChar char="•"/>
-            </a:pPr>
-            <a:r>
-              <a:rPr lang="en-US" sz="1400" dirty="0"/>
-              <a:t>Loosing it or forgetting passwords are biggest risks</a:t>
-            </a:r>
-          </a:p>
-        </p:txBody>
-      </p:sp>
-      <p:sp>
-        <p:nvSpPr>
-          <p:cNvPr id="6" name="TextBox 5">
-            <a:extLst>
-              <a:ext uri="{FF2B5EF4-FFF2-40B4-BE49-F238E27FC236}">
-                <a16:creationId xmlns:a16="http://schemas.microsoft.com/office/drawing/2014/main" id="{B32813DE-ACF4-04AA-7FC5-B259CD6DA664}"/>
-              </a:ext>
-            </a:extLst>
-          </p:cNvPr>
-          <p:cNvSpPr txBox="1"/>
-          <p:nvPr/>
-        </p:nvSpPr>
-        <p:spPr>
-          <a:xfrm>
-            <a:off x="269632" y="668215"/>
-            <a:ext cx="3810000" cy="738664"/>
-          </a:xfrm>
-          <a:prstGeom prst="rect">
-            <a:avLst/>
-          </a:prstGeom>
-          <a:noFill/>
-        </p:spPr>
-        <p:txBody>
-          <a:bodyPr wrap="square" rtlCol="0">
-            <a:spAutoFit/>
-          </a:bodyPr>
-          <a:lstStyle/>
-          <a:p>
-            <a:r>
-              <a:rPr lang="en-US" sz="1400"/>
-              <a:t>There are many different blockchain networks.</a:t>
-            </a:r>
-          </a:p>
-          <a:p>
-            <a:r>
-              <a:rPr lang="en-US" sz="1400"/>
-              <a:t>They have their own wallets.</a:t>
-            </a:r>
-          </a:p>
-          <a:p>
-            <a:r>
-              <a:rPr lang="en-US" sz="1400"/>
-              <a:t>There are different types of wallets.</a:t>
-            </a:r>
-          </a:p>
-        </p:txBody>
-      </p:sp>
       <p:pic>
         <p:nvPicPr>
-          <p:cNvPr id="7" name="Picture 6">
+          <p:cNvPr id="6" name="Picture 5">
             <a:extLst>
               <a:ext uri="{FF2B5EF4-FFF2-40B4-BE49-F238E27FC236}">
-                <a16:creationId xmlns:a16="http://schemas.microsoft.com/office/drawing/2014/main" id="{22DD5DD3-7BCB-F4CB-C716-7DD6BDFC66FF}"/>
+                <a16:creationId xmlns:a16="http://schemas.microsoft.com/office/drawing/2014/main" id="{DA629FB8-3D9E-CA44-9067-60F4B592AA53}"/>
               </a:ext>
             </a:extLst>
           </p:cNvPr>
@@ -4600,7 +5073,7 @@
           <p:nvPr/>
         </p:nvPicPr>
         <p:blipFill>
-          <a:blip r:embed="rId3" cstate="email">
+          <a:blip r:embed="rId7" cstate="email">
             <a:extLst>
               <a:ext uri="{28A0092B-C50C-407E-A947-70E740481C1C}">
                 <a14:useLocalDpi xmlns:a14="http://schemas.microsoft.com/office/drawing/2010/main"/>
@@ -4613,18 +5086,57 @@
         </p:blipFill>
         <p:spPr>
           <a:xfrm>
-            <a:off x="4779050" y="1406879"/>
-            <a:ext cx="886387" cy="832339"/>
+            <a:off x="134536" y="4481654"/>
+            <a:ext cx="3645952" cy="2106441"/>
           </a:xfrm>
           <a:prstGeom prst="rect">
             <a:avLst/>
           </a:prstGeom>
         </p:spPr>
       </p:pic>
+      <p:sp>
+        <p:nvSpPr>
+          <p:cNvPr id="7" name="TextBox 6">
+            <a:extLst>
+              <a:ext uri="{FF2B5EF4-FFF2-40B4-BE49-F238E27FC236}">
+                <a16:creationId xmlns:a16="http://schemas.microsoft.com/office/drawing/2014/main" id="{EF72CAD9-D640-5044-99D2-CF1C8DF2F0A2}"/>
+              </a:ext>
+            </a:extLst>
+          </p:cNvPr>
+          <p:cNvSpPr txBox="1"/>
+          <p:nvPr/>
+        </p:nvSpPr>
+        <p:spPr>
+          <a:xfrm>
+            <a:off x="10738" y="588610"/>
+            <a:ext cx="2462023" cy="523220"/>
+          </a:xfrm>
+          <a:prstGeom prst="rect">
+            <a:avLst/>
+          </a:prstGeom>
+          <a:noFill/>
+        </p:spPr>
+        <p:txBody>
+          <a:bodyPr wrap="square" rtlCol="0">
+            <a:spAutoFit/>
+          </a:bodyPr>
+          <a:lstStyle/>
+          <a:p>
+            <a:r>
+              <a:rPr lang="en-US" sz="1400" b="1">
+                <a:solidFill>
+                  <a:srgbClr val="00B050"/>
+                </a:solidFill>
+              </a:rPr>
+              <a:t>A software cryptocurrency wallet for Etherium blockchain</a:t>
+            </a:r>
+          </a:p>
+        </p:txBody>
+      </p:sp>
     </p:spTree>
     <p:extLst>
       <p:ext uri="{BB962C8B-B14F-4D97-AF65-F5344CB8AC3E}">
-        <p14:creationId xmlns:p14="http://schemas.microsoft.com/office/powerpoint/2010/main" val="1146069536"/>
+        <p14:creationId xmlns:p14="http://schemas.microsoft.com/office/powerpoint/2010/main" val="3657471056"/>
       </p:ext>
     </p:extLst>
   </p:cSld>
@@ -4651,12 +5163,47 @@
           <a:chExt cx="0" cy="0"/>
         </a:xfrm>
       </p:grpSpPr>
-      <p:sp>
-        <p:nvSpPr>
-          <p:cNvPr id="2" name="TextBox 1">
+      <p:pic>
+        <p:nvPicPr>
+          <p:cNvPr id="4" name="Picture 3">
             <a:extLst>
               <a:ext uri="{FF2B5EF4-FFF2-40B4-BE49-F238E27FC236}">
-                <a16:creationId xmlns:a16="http://schemas.microsoft.com/office/drawing/2014/main" id="{360843F1-39FC-B446-BCF9-38C04967543B}"/>
+                <a16:creationId xmlns:a16="http://schemas.microsoft.com/office/drawing/2014/main" id="{796507CB-39E8-0348-90FA-E4E49712669F}"/>
+              </a:ext>
+            </a:extLst>
+          </p:cNvPr>
+          <p:cNvPicPr>
+            <a:picLocks noChangeAspect="1"/>
+          </p:cNvPicPr>
+          <p:nvPr/>
+        </p:nvPicPr>
+        <p:blipFill rotWithShape="1">
+          <a:blip r:embed="rId2" cstate="email">
+            <a:extLst>
+              <a:ext uri="{28A0092B-C50C-407E-A947-70E740481C1C}">
+                <a14:useLocalDpi xmlns:a14="http://schemas.microsoft.com/office/drawing/2010/main"/>
+              </a:ext>
+            </a:extLst>
+          </a:blip>
+          <a:srcRect/>
+          <a:stretch/>
+        </p:blipFill>
+        <p:spPr>
+          <a:xfrm>
+            <a:off x="416537" y="1069741"/>
+            <a:ext cx="11358925" cy="4718518"/>
+          </a:xfrm>
+          <a:prstGeom prst="rect">
+            <a:avLst/>
+          </a:prstGeom>
+        </p:spPr>
+      </p:pic>
+      <p:sp>
+        <p:nvSpPr>
+          <p:cNvPr id="5" name="TextBox 4">
+            <a:extLst>
+              <a:ext uri="{FF2B5EF4-FFF2-40B4-BE49-F238E27FC236}">
+                <a16:creationId xmlns:a16="http://schemas.microsoft.com/office/drawing/2014/main" id="{0CF475CF-2613-4840-95C2-352246822EC8}"/>
               </a:ext>
             </a:extLst>
           </p:cNvPr>
@@ -4665,8 +5212,8 @@
         </p:nvSpPr>
         <p:spPr>
           <a:xfrm>
-            <a:off x="2" y="1"/>
-            <a:ext cx="4841629" cy="523220"/>
+            <a:off x="2547257" y="6841671"/>
+            <a:ext cx="184731" cy="369332"/>
           </a:xfrm>
           <a:prstGeom prst="rect">
             <a:avLst/>
@@ -4674,24 +5221,21 @@
           <a:noFill/>
         </p:spPr>
         <p:txBody>
-          <a:bodyPr wrap="square" rtlCol="0">
+          <a:bodyPr wrap="none" rtlCol="0">
             <a:spAutoFit/>
           </a:bodyPr>
           <a:lstStyle/>
           <a:p>
-            <a:r>
-              <a:rPr lang="en-US" sz="2800" b="1"/>
-              <a:t>Wallet – address, keys, signing</a:t>
-            </a:r>
-          </a:p>
-        </p:txBody>
-      </p:sp>
-      <p:sp>
-        <p:nvSpPr>
-          <p:cNvPr id="5" name="TextBox 4">
+            <a:endParaRPr lang="en-US" dirty="0"/>
+          </a:p>
+        </p:txBody>
+      </p:sp>
+      <p:sp>
+        <p:nvSpPr>
+          <p:cNvPr id="6" name="TextBox 5">
             <a:extLst>
               <a:ext uri="{FF2B5EF4-FFF2-40B4-BE49-F238E27FC236}">
-                <a16:creationId xmlns:a16="http://schemas.microsoft.com/office/drawing/2014/main" id="{817DA55C-C2D6-A2D4-DB7A-8AA34B531775}"/>
+                <a16:creationId xmlns:a16="http://schemas.microsoft.com/office/drawing/2014/main" id="{1C7F0B1C-221D-B845-9C05-E49E881FC13D}"/>
               </a:ext>
             </a:extLst>
           </p:cNvPr>
@@ -4700,8 +5244,8 @@
         </p:nvSpPr>
         <p:spPr>
           <a:xfrm>
-            <a:off x="185351" y="1025611"/>
-            <a:ext cx="11318789" cy="4401205"/>
+            <a:off x="3885288" y="5991263"/>
+            <a:ext cx="3827330" cy="492443"/>
           </a:xfrm>
           <a:prstGeom prst="rect">
             <a:avLst/>
@@ -4709,128 +5253,174 @@
           <a:noFill/>
         </p:spPr>
         <p:txBody>
+          <a:bodyPr wrap="none" rtlCol="0">
+            <a:spAutoFit/>
+          </a:bodyPr>
+          <a:lstStyle/>
+          <a:p>
+            <a:r>
+              <a:rPr lang="en-US" sz="1400" dirty="0"/>
+              <a:t>Analysis done by </a:t>
+            </a:r>
+            <a:r>
+              <a:rPr lang="en-US" sz="1400" dirty="0" err="1"/>
+              <a:t>Veriphi</a:t>
+            </a:r>
+            <a:r>
+              <a:rPr lang="en-US" sz="1400" dirty="0"/>
+              <a:t>: </a:t>
+            </a:r>
+            <a:br>
+              <a:rPr lang="en-US" dirty="0"/>
+            </a:br>
+            <a:r>
+              <a:rPr lang="en-US" sz="1200" dirty="0"/>
+              <a:t>.. </a:t>
+            </a:r>
+            <a:r>
+              <a:rPr lang="en-US" sz="1200" dirty="0">
+                <a:hlinkClick r:id="rId3"/>
+              </a:rPr>
+              <a:t>https://</a:t>
+            </a:r>
+            <a:r>
+              <a:rPr lang="en-US" sz="1200" dirty="0" err="1">
+                <a:hlinkClick r:id="rId3"/>
+              </a:rPr>
+              <a:t>www.veriphi.io</a:t>
+            </a:r>
+            <a:r>
+              <a:rPr lang="en-US" sz="1200" dirty="0">
+                <a:hlinkClick r:id="rId3"/>
+              </a:rPr>
+              <a:t>/</a:t>
+            </a:r>
+            <a:r>
+              <a:rPr lang="en-US" sz="1200" dirty="0" err="1">
+                <a:hlinkClick r:id="rId3"/>
+              </a:rPr>
+              <a:t>en</a:t>
+            </a:r>
+            <a:r>
+              <a:rPr lang="en-US" sz="1200" dirty="0">
+                <a:hlinkClick r:id="rId3"/>
+              </a:rPr>
+              <a:t>/blog/software-wallet-analysis</a:t>
+            </a:r>
+            <a:endParaRPr lang="en-US" sz="1200" dirty="0"/>
+          </a:p>
+        </p:txBody>
+      </p:sp>
+      <p:sp>
+        <p:nvSpPr>
+          <p:cNvPr id="2" name="TextBox 1">
+            <a:extLst>
+              <a:ext uri="{FF2B5EF4-FFF2-40B4-BE49-F238E27FC236}">
+                <a16:creationId xmlns:a16="http://schemas.microsoft.com/office/drawing/2014/main" id="{4C398E17-E066-E0FC-7BD7-020BC9A6F35C}"/>
+              </a:ext>
+            </a:extLst>
+          </p:cNvPr>
+          <p:cNvSpPr txBox="1"/>
+          <p:nvPr/>
+        </p:nvSpPr>
+        <p:spPr>
+          <a:xfrm>
+            <a:off x="98854" y="0"/>
+            <a:ext cx="4349578" cy="523220"/>
+          </a:xfrm>
+          <a:prstGeom prst="rect">
+            <a:avLst/>
+          </a:prstGeom>
+          <a:noFill/>
+        </p:spPr>
+        <p:txBody>
           <a:bodyPr wrap="square" rtlCol="0">
             <a:spAutoFit/>
           </a:bodyPr>
           <a:lstStyle/>
           <a:p>
             <a:r>
-              <a:rPr lang="en-US" sz="1400"/>
-              <a:t>Bitcoin address and keys:</a:t>
-            </a:r>
-          </a:p>
-          <a:p>
-            <a:r>
-              <a:rPr lang="en-US" sz="1400"/>
-              <a:t>.. https://www.dummies.com/article/business-careers-money/personal-finance/cryptocurrency/bitcoin-public-private-keys-223627/</a:t>
-            </a:r>
-          </a:p>
-          <a:p>
-            <a:endParaRPr lang="en-US" sz="1400"/>
-          </a:p>
-          <a:p>
-            <a:r>
-              <a:rPr lang="en-US" sz="1400"/>
-              <a:t>Explanation: </a:t>
-            </a:r>
-          </a:p>
-          <a:p>
-            <a:r>
-              <a:rPr lang="en-US" sz="1400"/>
-              <a:t>.. private key</a:t>
-            </a:r>
-          </a:p>
-          <a:p>
-            <a:r>
-              <a:rPr lang="en-US" sz="1400"/>
-              <a:t>.. public key (256 bits)</a:t>
-            </a:r>
-          </a:p>
-          <a:p>
-            <a:r>
-              <a:rPr lang="en-US" sz="1400"/>
-              <a:t>.. wallet address (hashed public key, 160 bits)</a:t>
-            </a:r>
-          </a:p>
-          <a:p>
-            <a:endParaRPr lang="en-US" sz="1400"/>
-          </a:p>
-          <a:p>
-            <a:r>
-              <a:rPr lang="en-US" sz="1400"/>
-              <a:t>Signing a message with your bitcoin address</a:t>
-            </a:r>
-          </a:p>
-          <a:p>
-            <a:r>
-              <a:rPr lang="en-US" sz="1400"/>
-              <a:t>.. https://academy.bit2me.com/en/firmar-mensajes-bitcoin/</a:t>
-            </a:r>
-          </a:p>
-          <a:p>
-            <a:endParaRPr lang="en-US" sz="1400"/>
-          </a:p>
-          <a:p>
-            <a:r>
-              <a:rPr lang="en-US" sz="1400"/>
-              <a:t>Most of the encryption in modern cryptocurrencies are built on elliptic curve cryptography rather than RSA, </a:t>
-            </a:r>
-          </a:p>
-          <a:p>
-            <a:r>
-              <a:rPr lang="en-US" sz="1400"/>
-              <a:t>especially in the generation of signatures in bitcoin which requires ECDSA.</a:t>
-            </a:r>
-          </a:p>
-          <a:p>
-            <a:r>
-              <a:rPr lang="en-US" sz="1400"/>
-              <a:t>.. https://www.forbes.com/sites/rogerhuang/2020/12/21/heres-why-quantum-computing-will-not-break-cryptocurrencies/?sh=6d34a72a167b</a:t>
-            </a:r>
-          </a:p>
-          <a:p>
-            <a:endParaRPr lang="en-US" sz="1400"/>
-          </a:p>
-          <a:p>
-            <a:r>
-              <a:rPr lang="en-US" sz="1400" dirty="0"/>
-              <a:t>Elliptical Digital Signature Algorithm</a:t>
-            </a:r>
-            <a:endParaRPr lang="en-US" sz="1400"/>
-          </a:p>
-          <a:p>
-            <a:r>
-              <a:rPr lang="en-US" sz="1400"/>
-              <a:t>.. </a:t>
-            </a:r>
-            <a:r>
-              <a:rPr lang="en-US" sz="1400" dirty="0"/>
-              <a:t>https://en.wikipedia.org/wiki/</a:t>
-            </a:r>
-            <a:r>
-              <a:rPr lang="en-US" sz="1400" dirty="0" err="1"/>
-              <a:t>Elliptic_Curve_Digital_Signature_Algorithm</a:t>
-            </a:r>
-            <a:endParaRPr lang="en-US" sz="1400" dirty="0"/>
-          </a:p>
-          <a:p>
-            <a:endParaRPr lang="en-US" sz="1400"/>
-          </a:p>
-          <a:p>
-            <a:r>
-              <a:rPr lang="en-US" sz="1400"/>
-              <a:t>”Burning Coins”</a:t>
-            </a:r>
-          </a:p>
-          <a:p>
-            <a:endParaRPr lang="en-US" sz="1400"/>
+              <a:rPr lang="en-US" sz="2800" b="1"/>
+              <a:t>Wallet Comparisons</a:t>
+            </a:r>
+          </a:p>
+        </p:txBody>
+      </p:sp>
+      <p:sp>
+        <p:nvSpPr>
+          <p:cNvPr id="3" name="TextBox 2">
+            <a:extLst>
+              <a:ext uri="{FF2B5EF4-FFF2-40B4-BE49-F238E27FC236}">
+                <a16:creationId xmlns:a16="http://schemas.microsoft.com/office/drawing/2014/main" id="{F5FD4B5B-6802-2D92-635D-5C5EB1559385}"/>
+              </a:ext>
+            </a:extLst>
+          </p:cNvPr>
+          <p:cNvSpPr txBox="1"/>
+          <p:nvPr/>
+        </p:nvSpPr>
+        <p:spPr>
+          <a:xfrm>
+            <a:off x="10309813" y="645117"/>
+            <a:ext cx="897450" cy="369332"/>
+          </a:xfrm>
+          <a:prstGeom prst="rect">
+            <a:avLst/>
+          </a:prstGeom>
+          <a:noFill/>
+        </p:spPr>
+        <p:txBody>
+          <a:bodyPr wrap="square" rtlCol="0">
+            <a:spAutoFit/>
+          </a:bodyPr>
+          <a:lstStyle/>
+          <a:p>
+            <a:pPr algn="r"/>
+            <a:r>
+              <a:rPr lang="en-US"/>
+              <a:t>Worst</a:t>
+            </a:r>
+          </a:p>
+        </p:txBody>
+      </p:sp>
+      <p:sp>
+        <p:nvSpPr>
+          <p:cNvPr id="7" name="TextBox 6">
+            <a:extLst>
+              <a:ext uri="{FF2B5EF4-FFF2-40B4-BE49-F238E27FC236}">
+                <a16:creationId xmlns:a16="http://schemas.microsoft.com/office/drawing/2014/main" id="{A64CD484-5760-B321-64A1-BC13B89A02B9}"/>
+              </a:ext>
+            </a:extLst>
+          </p:cNvPr>
+          <p:cNvSpPr txBox="1"/>
+          <p:nvPr/>
+        </p:nvSpPr>
+        <p:spPr>
+          <a:xfrm>
+            <a:off x="2190897" y="678071"/>
+            <a:ext cx="897450" cy="369332"/>
+          </a:xfrm>
+          <a:prstGeom prst="rect">
+            <a:avLst/>
+          </a:prstGeom>
+          <a:noFill/>
+        </p:spPr>
+        <p:txBody>
+          <a:bodyPr wrap="square" rtlCol="0">
+            <a:spAutoFit/>
+          </a:bodyPr>
+          <a:lstStyle/>
+          <a:p>
+            <a:r>
+              <a:rPr lang="en-US"/>
+              <a:t>Best</a:t>
+            </a:r>
           </a:p>
         </p:txBody>
       </p:sp>
     </p:spTree>
     <p:extLst>
       <p:ext uri="{BB962C8B-B14F-4D97-AF65-F5344CB8AC3E}">
-        <p14:creationId xmlns:p14="http://schemas.microsoft.com/office/powerpoint/2010/main" val="1027086850"/>
+        <p14:creationId xmlns:p14="http://schemas.microsoft.com/office/powerpoint/2010/main" val="2522971255"/>
       </p:ext>
     </p:extLst>
   </p:cSld>
@@ -4859,321 +5449,10 @@
       </p:grpSpPr>
       <p:sp>
         <p:nvSpPr>
-          <p:cNvPr id="2" name="Title 1">
+          <p:cNvPr id="2" name="TextBox 1">
             <a:extLst>
               <a:ext uri="{FF2B5EF4-FFF2-40B4-BE49-F238E27FC236}">
-                <a16:creationId xmlns:a16="http://schemas.microsoft.com/office/drawing/2014/main" id="{59CD814F-0488-4942-8BF6-DC490A8C6AA1}"/>
-              </a:ext>
-            </a:extLst>
-          </p:cNvPr>
-          <p:cNvSpPr>
-            <a:spLocks noGrp="1"/>
-          </p:cNvSpPr>
-          <p:nvPr>
-            <p:ph type="title"/>
-          </p:nvPr>
-        </p:nvSpPr>
-        <p:spPr/>
-        <p:txBody>
-          <a:bodyPr/>
-          <a:lstStyle/>
-          <a:p>
-            <a:r>
-              <a:rPr lang="en-US" dirty="0"/>
-              <a:t>2. Public vs Private Key</a:t>
-            </a:r>
-          </a:p>
-        </p:txBody>
-      </p:sp>
-      <p:pic>
-        <p:nvPicPr>
-          <p:cNvPr id="5" name="Graphic 4" descr="Old Key with solid fill">
-            <a:extLst>
-              <a:ext uri="{FF2B5EF4-FFF2-40B4-BE49-F238E27FC236}">
-                <a16:creationId xmlns:a16="http://schemas.microsoft.com/office/drawing/2014/main" id="{6FC820C6-7F2A-1649-AA6A-0DE2E659E5FA}"/>
-              </a:ext>
-            </a:extLst>
-          </p:cNvPr>
-          <p:cNvPicPr>
-            <a:picLocks noChangeAspect="1"/>
-          </p:cNvPicPr>
-          <p:nvPr/>
-        </p:nvPicPr>
-        <p:blipFill>
-          <a:blip r:embed="rId2" cstate="email">
-            <a:extLst>
-              <a:ext uri="{28A0092B-C50C-407E-A947-70E740481C1C}">
-                <a14:useLocalDpi xmlns:a14="http://schemas.microsoft.com/office/drawing/2010/main"/>
-              </a:ext>
-              <a:ext uri="{96DAC541-7B7A-43D3-8B79-37D633B846F1}">
-                <asvg:svgBlip xmlns:asvg="http://schemas.microsoft.com/office/drawing/2016/SVG/main" r:embed="rId3"/>
-              </a:ext>
-            </a:extLst>
-          </a:blip>
-          <a:stretch>
-            <a:fillRect/>
-          </a:stretch>
-        </p:blipFill>
-        <p:spPr>
-          <a:xfrm>
-            <a:off x="7532339" y="2147332"/>
-            <a:ext cx="538166" cy="538166"/>
-          </a:xfrm>
-          <a:prstGeom prst="rect">
-            <a:avLst/>
-          </a:prstGeom>
-        </p:spPr>
-      </p:pic>
-      <p:pic>
-        <p:nvPicPr>
-          <p:cNvPr id="6" name="Graphic 5" descr="Old Key outline">
-            <a:extLst>
-              <a:ext uri="{FF2B5EF4-FFF2-40B4-BE49-F238E27FC236}">
-                <a16:creationId xmlns:a16="http://schemas.microsoft.com/office/drawing/2014/main" id="{416A130C-B6D0-0C47-87B6-7BE24CE1B653}"/>
-              </a:ext>
-            </a:extLst>
-          </p:cNvPr>
-          <p:cNvPicPr>
-            <a:picLocks noChangeAspect="1"/>
-          </p:cNvPicPr>
-          <p:nvPr/>
-        </p:nvPicPr>
-        <p:blipFill>
-          <a:blip r:embed="rId4" cstate="email">
-            <a:extLst>
-              <a:ext uri="{28A0092B-C50C-407E-A947-70E740481C1C}">
-                <a14:useLocalDpi xmlns:a14="http://schemas.microsoft.com/office/drawing/2010/main"/>
-              </a:ext>
-              <a:ext uri="{96DAC541-7B7A-43D3-8B79-37D633B846F1}">
-                <asvg:svgBlip xmlns:asvg="http://schemas.microsoft.com/office/drawing/2016/SVG/main" r:embed="rId5"/>
-              </a:ext>
-            </a:extLst>
-          </a:blip>
-          <a:stretch>
-            <a:fillRect/>
-          </a:stretch>
-        </p:blipFill>
-        <p:spPr>
-          <a:xfrm>
-            <a:off x="9265892" y="2147332"/>
-            <a:ext cx="538166" cy="538166"/>
-          </a:xfrm>
-          <a:prstGeom prst="rect">
-            <a:avLst/>
-          </a:prstGeom>
-        </p:spPr>
-      </p:pic>
-      <p:cxnSp>
-        <p:nvCxnSpPr>
-          <p:cNvPr id="7" name="Straight Arrow Connector 6">
-            <a:extLst>
-              <a:ext uri="{FF2B5EF4-FFF2-40B4-BE49-F238E27FC236}">
-                <a16:creationId xmlns:a16="http://schemas.microsoft.com/office/drawing/2014/main" id="{30B2A087-0A52-9440-9E45-F31E5F617841}"/>
-              </a:ext>
-            </a:extLst>
-          </p:cNvPr>
-          <p:cNvCxnSpPr>
-            <a:stCxn id="5" idx="3"/>
-            <a:endCxn id="6" idx="1"/>
-          </p:cNvCxnSpPr>
-          <p:nvPr/>
-        </p:nvCxnSpPr>
-        <p:spPr>
-          <a:xfrm>
-            <a:off x="8070505" y="2416415"/>
-            <a:ext cx="1195387" cy="0"/>
-          </a:xfrm>
-          <a:prstGeom prst="straightConnector1">
-            <a:avLst/>
-          </a:prstGeom>
-          <a:ln w="38100">
-            <a:headEnd type="triangle"/>
-            <a:tailEnd type="triangle"/>
-          </a:ln>
-        </p:spPr>
-        <p:style>
-          <a:lnRef idx="1">
-            <a:schemeClr val="dk1"/>
-          </a:lnRef>
-          <a:fillRef idx="0">
-            <a:schemeClr val="dk1"/>
-          </a:fillRef>
-          <a:effectRef idx="0">
-            <a:schemeClr val="dk1"/>
-          </a:effectRef>
-          <a:fontRef idx="minor">
-            <a:schemeClr val="tx1"/>
-          </a:fontRef>
-        </p:style>
-      </p:cxnSp>
-      <p:pic>
-        <p:nvPicPr>
-          <p:cNvPr id="8" name="Graphic 7" descr="Mailbox with solid fill">
-            <a:extLst>
-              <a:ext uri="{FF2B5EF4-FFF2-40B4-BE49-F238E27FC236}">
-                <a16:creationId xmlns:a16="http://schemas.microsoft.com/office/drawing/2014/main" id="{D9E3BCAF-D57D-2E44-9402-8F77AAD0E88C}"/>
-              </a:ext>
-            </a:extLst>
-          </p:cNvPr>
-          <p:cNvPicPr>
-            <a:picLocks noChangeAspect="1"/>
-          </p:cNvPicPr>
-          <p:nvPr/>
-        </p:nvPicPr>
-        <p:blipFill>
-          <a:blip r:embed="rId6" cstate="email">
-            <a:extLst>
-              <a:ext uri="{28A0092B-C50C-407E-A947-70E740481C1C}">
-                <a14:useLocalDpi xmlns:a14="http://schemas.microsoft.com/office/drawing/2010/main"/>
-              </a:ext>
-              <a:ext uri="{96DAC541-7B7A-43D3-8B79-37D633B846F1}">
-                <asvg:svgBlip xmlns:asvg="http://schemas.microsoft.com/office/drawing/2016/SVG/main" r:embed="rId7"/>
-              </a:ext>
-            </a:extLst>
-          </a:blip>
-          <a:stretch>
-            <a:fillRect/>
-          </a:stretch>
-        </p:blipFill>
-        <p:spPr>
-          <a:xfrm>
-            <a:off x="7580756" y="3258072"/>
-            <a:ext cx="430719" cy="430719"/>
-          </a:xfrm>
-          <a:prstGeom prst="rect">
-            <a:avLst/>
-          </a:prstGeom>
-        </p:spPr>
-      </p:pic>
-      <p:pic>
-        <p:nvPicPr>
-          <p:cNvPr id="9" name="Graphic 8" descr="Employee badge outline">
-            <a:extLst>
-              <a:ext uri="{FF2B5EF4-FFF2-40B4-BE49-F238E27FC236}">
-                <a16:creationId xmlns:a16="http://schemas.microsoft.com/office/drawing/2014/main" id="{C9353079-AB35-E14A-9C24-0DB177CD6FED}"/>
-              </a:ext>
-            </a:extLst>
-          </p:cNvPr>
-          <p:cNvPicPr>
-            <a:picLocks noChangeAspect="1"/>
-          </p:cNvPicPr>
-          <p:nvPr/>
-        </p:nvPicPr>
-        <p:blipFill>
-          <a:blip r:embed="rId8" cstate="email">
-            <a:extLst>
-              <a:ext uri="{28A0092B-C50C-407E-A947-70E740481C1C}">
-                <a14:useLocalDpi xmlns:a14="http://schemas.microsoft.com/office/drawing/2010/main"/>
-              </a:ext>
-              <a:ext uri="{96DAC541-7B7A-43D3-8B79-37D633B846F1}">
-                <asvg:svgBlip xmlns:asvg="http://schemas.microsoft.com/office/drawing/2016/SVG/main" r:embed="rId9"/>
-              </a:ext>
-            </a:extLst>
-          </a:blip>
-          <a:stretch>
-            <a:fillRect/>
-          </a:stretch>
-        </p:blipFill>
-        <p:spPr>
-          <a:xfrm>
-            <a:off x="9328730" y="3257137"/>
-            <a:ext cx="431654" cy="431654"/>
-          </a:xfrm>
-          <a:prstGeom prst="rect">
-            <a:avLst/>
-          </a:prstGeom>
-        </p:spPr>
-      </p:pic>
-      <p:cxnSp>
-        <p:nvCxnSpPr>
-          <p:cNvPr id="10" name="Straight Arrow Connector 9">
-            <a:extLst>
-              <a:ext uri="{FF2B5EF4-FFF2-40B4-BE49-F238E27FC236}">
-                <a16:creationId xmlns:a16="http://schemas.microsoft.com/office/drawing/2014/main" id="{F631E980-EEA0-AD45-9DC8-2EE705A20563}"/>
-              </a:ext>
-            </a:extLst>
-          </p:cNvPr>
-          <p:cNvCxnSpPr>
-            <a:stCxn id="5" idx="2"/>
-            <a:endCxn id="8" idx="0"/>
-          </p:cNvCxnSpPr>
-          <p:nvPr/>
-        </p:nvCxnSpPr>
-        <p:spPr>
-          <a:xfrm flipH="1">
-            <a:off x="7796116" y="2685498"/>
-            <a:ext cx="5306" cy="572574"/>
-          </a:xfrm>
-          <a:prstGeom prst="straightConnector1">
-            <a:avLst/>
-          </a:prstGeom>
-          <a:ln w="38100">
-            <a:tailEnd type="triangle"/>
-          </a:ln>
-        </p:spPr>
-        <p:style>
-          <a:lnRef idx="1">
-            <a:schemeClr val="dk1"/>
-          </a:lnRef>
-          <a:fillRef idx="0">
-            <a:schemeClr val="dk1"/>
-          </a:fillRef>
-          <a:effectRef idx="0">
-            <a:schemeClr val="dk1"/>
-          </a:effectRef>
-          <a:fontRef idx="minor">
-            <a:schemeClr val="tx1"/>
-          </a:fontRef>
-        </p:style>
-      </p:cxnSp>
-      <p:cxnSp>
-        <p:nvCxnSpPr>
-          <p:cNvPr id="11" name="Straight Arrow Connector 10">
-            <a:extLst>
-              <a:ext uri="{FF2B5EF4-FFF2-40B4-BE49-F238E27FC236}">
-                <a16:creationId xmlns:a16="http://schemas.microsoft.com/office/drawing/2014/main" id="{C1CBDA0D-2E00-4849-9D6D-DD0446FA7BC4}"/>
-              </a:ext>
-            </a:extLst>
-          </p:cNvPr>
-          <p:cNvCxnSpPr>
-            <a:stCxn id="6" idx="2"/>
-            <a:endCxn id="9" idx="0"/>
-          </p:cNvCxnSpPr>
-          <p:nvPr/>
-        </p:nvCxnSpPr>
-        <p:spPr>
-          <a:xfrm>
-            <a:off x="9534975" y="2685498"/>
-            <a:ext cx="9582" cy="571639"/>
-          </a:xfrm>
-          <a:prstGeom prst="straightConnector1">
-            <a:avLst/>
-          </a:prstGeom>
-          <a:ln w="38100">
-            <a:tailEnd type="triangle"/>
-          </a:ln>
-        </p:spPr>
-        <p:style>
-          <a:lnRef idx="1">
-            <a:schemeClr val="dk1"/>
-          </a:lnRef>
-          <a:fillRef idx="0">
-            <a:schemeClr val="dk1"/>
-          </a:fillRef>
-          <a:effectRef idx="0">
-            <a:schemeClr val="dk1"/>
-          </a:effectRef>
-          <a:fontRef idx="minor">
-            <a:schemeClr val="tx1"/>
-          </a:fontRef>
-        </p:style>
-      </p:cxnSp>
-      <p:sp>
-        <p:nvSpPr>
-          <p:cNvPr id="4" name="TextBox 3">
-            <a:extLst>
-              <a:ext uri="{FF2B5EF4-FFF2-40B4-BE49-F238E27FC236}">
-                <a16:creationId xmlns:a16="http://schemas.microsoft.com/office/drawing/2014/main" id="{363089A5-F958-7E4B-B562-F7C474EDDB06}"/>
+                <a16:creationId xmlns:a16="http://schemas.microsoft.com/office/drawing/2014/main" id="{360843F1-39FC-B446-BCF9-38C04967543B}"/>
               </a:ext>
             </a:extLst>
           </p:cNvPr>
@@ -5182,8 +5461,8 @@
         </p:nvSpPr>
         <p:spPr>
           <a:xfrm>
-            <a:off x="7496094" y="1690688"/>
-            <a:ext cx="750526" cy="369332"/>
+            <a:off x="2" y="1"/>
+            <a:ext cx="4841629" cy="523220"/>
           </a:xfrm>
           <a:prstGeom prst="rect">
             <a:avLst/>
@@ -5191,24 +5470,24 @@
           <a:noFill/>
         </p:spPr>
         <p:txBody>
-          <a:bodyPr wrap="none" rtlCol="0">
+          <a:bodyPr wrap="square" rtlCol="0">
             <a:spAutoFit/>
           </a:bodyPr>
           <a:lstStyle/>
           <a:p>
             <a:r>
-              <a:rPr lang="en-US" dirty="0"/>
-              <a:t>Public</a:t>
-            </a:r>
-          </a:p>
-        </p:txBody>
-      </p:sp>
-      <p:sp>
-        <p:nvSpPr>
-          <p:cNvPr id="13" name="TextBox 12">
+              <a:rPr lang="en-US" sz="2800" b="1"/>
+              <a:t>Wallet – address, keys, signing</a:t>
+            </a:r>
+          </a:p>
+        </p:txBody>
+      </p:sp>
+      <p:sp>
+        <p:nvSpPr>
+          <p:cNvPr id="5" name="TextBox 4">
             <a:extLst>
               <a:ext uri="{FF2B5EF4-FFF2-40B4-BE49-F238E27FC236}">
-                <a16:creationId xmlns:a16="http://schemas.microsoft.com/office/drawing/2014/main" id="{D53AE619-26D9-534C-BDD3-B2FDD674062E}"/>
+                <a16:creationId xmlns:a16="http://schemas.microsoft.com/office/drawing/2014/main" id="{817DA55C-C2D6-A2D4-DB7A-8AA34B531775}"/>
               </a:ext>
             </a:extLst>
           </p:cNvPr>
@@ -5217,8 +5496,8 @@
         </p:nvSpPr>
         <p:spPr>
           <a:xfrm>
-            <a:off x="9117232" y="1695590"/>
-            <a:ext cx="835485" cy="369332"/>
+            <a:off x="185351" y="1025611"/>
+            <a:ext cx="11318789" cy="4401205"/>
           </a:xfrm>
           <a:prstGeom prst="rect">
             <a:avLst/>
@@ -5226,920 +5505,128 @@
           <a:noFill/>
         </p:spPr>
         <p:txBody>
-          <a:bodyPr wrap="none" rtlCol="0">
+          <a:bodyPr wrap="square" rtlCol="0">
             <a:spAutoFit/>
           </a:bodyPr>
           <a:lstStyle/>
           <a:p>
             <a:r>
-              <a:rPr lang="en-US" dirty="0"/>
-              <a:t>Private</a:t>
-            </a:r>
-          </a:p>
-        </p:txBody>
-      </p:sp>
-      <p:sp>
-        <p:nvSpPr>
-          <p:cNvPr id="14" name="TextBox 13">
-            <a:extLst>
-              <a:ext uri="{FF2B5EF4-FFF2-40B4-BE49-F238E27FC236}">
-                <a16:creationId xmlns:a16="http://schemas.microsoft.com/office/drawing/2014/main" id="{5C1800A6-7E7C-2345-9A41-61EADE78D4DC}"/>
-              </a:ext>
-            </a:extLst>
-          </p:cNvPr>
-          <p:cNvSpPr txBox="1"/>
-          <p:nvPr/>
-        </p:nvSpPr>
-        <p:spPr>
-          <a:xfrm>
-            <a:off x="7244489" y="3796238"/>
-            <a:ext cx="1103251" cy="369332"/>
-          </a:xfrm>
-          <a:prstGeom prst="rect">
-            <a:avLst/>
-          </a:prstGeom>
-          <a:noFill/>
-        </p:spPr>
-        <p:txBody>
-          <a:bodyPr wrap="none" rtlCol="0">
-            <a:spAutoFit/>
-          </a:bodyPr>
-          <a:lstStyle/>
-          <a:p>
-            <a:r>
-              <a:rPr lang="en-US" dirty="0"/>
-              <a:t>“Address”</a:t>
-            </a:r>
-          </a:p>
-        </p:txBody>
-      </p:sp>
-      <p:sp>
-        <p:nvSpPr>
-          <p:cNvPr id="15" name="TextBox 14">
-            <a:extLst>
-              <a:ext uri="{FF2B5EF4-FFF2-40B4-BE49-F238E27FC236}">
-                <a16:creationId xmlns:a16="http://schemas.microsoft.com/office/drawing/2014/main" id="{37121F2A-6C02-9548-B423-89AB267A0D46}"/>
-              </a:ext>
-            </a:extLst>
-          </p:cNvPr>
-          <p:cNvSpPr txBox="1"/>
-          <p:nvPr/>
-        </p:nvSpPr>
-        <p:spPr>
-          <a:xfrm>
-            <a:off x="8852864" y="3828776"/>
-            <a:ext cx="1364220" cy="369332"/>
-          </a:xfrm>
-          <a:prstGeom prst="rect">
-            <a:avLst/>
-          </a:prstGeom>
-          <a:noFill/>
-        </p:spPr>
-        <p:txBody>
-          <a:bodyPr wrap="none" rtlCol="0">
-            <a:spAutoFit/>
-          </a:bodyPr>
-          <a:lstStyle/>
-          <a:p>
-            <a:r>
-              <a:rPr lang="en-US" dirty="0"/>
-              <a:t>“House Key”</a:t>
-            </a:r>
-          </a:p>
-        </p:txBody>
-      </p:sp>
-      <p:sp>
-        <p:nvSpPr>
-          <p:cNvPr id="12" name="TextBox 11">
-            <a:extLst>
-              <a:ext uri="{FF2B5EF4-FFF2-40B4-BE49-F238E27FC236}">
-                <a16:creationId xmlns:a16="http://schemas.microsoft.com/office/drawing/2014/main" id="{F391AC64-BFA1-184A-BA49-BF2D2BB4C6CE}"/>
-              </a:ext>
-            </a:extLst>
-          </p:cNvPr>
-          <p:cNvSpPr txBox="1"/>
-          <p:nvPr/>
-        </p:nvSpPr>
-        <p:spPr>
-          <a:xfrm>
-            <a:off x="671991" y="2039167"/>
-            <a:ext cx="5650906" cy="923330"/>
-          </a:xfrm>
-          <a:prstGeom prst="rect">
-            <a:avLst/>
-          </a:prstGeom>
-          <a:noFill/>
-        </p:spPr>
-        <p:txBody>
-          <a:bodyPr wrap="none" rtlCol="0">
-            <a:spAutoFit/>
-          </a:bodyPr>
-          <a:lstStyle/>
-          <a:p>
-            <a:pPr marL="285750" indent="-285750">
-              <a:buFont typeface="Arial" panose="020B0604020202020204" pitchFamily="34" charset="0"/>
-              <a:buChar char="•"/>
-            </a:pPr>
-            <a:r>
-              <a:rPr lang="en-US" dirty="0"/>
-              <a:t>Symmetric vs Asymmetric encryption</a:t>
-            </a:r>
-          </a:p>
-          <a:p>
-            <a:pPr marL="285750" indent="-285750">
-              <a:buFont typeface="Arial" panose="020B0604020202020204" pitchFamily="34" charset="0"/>
-              <a:buChar char="•"/>
-            </a:pPr>
-            <a:r>
-              <a:rPr lang="en-US" dirty="0"/>
-              <a:t>Private key enables send &amp; Public key enables receiving</a:t>
-            </a:r>
-          </a:p>
-          <a:p>
-            <a:pPr marL="285750" indent="-285750">
-              <a:buFont typeface="Arial" panose="020B0604020202020204" pitchFamily="34" charset="0"/>
-              <a:buChar char="•"/>
-            </a:pPr>
-            <a:r>
-              <a:rPr lang="en-US" dirty="0"/>
-              <a:t>Public key generates from private key. No vice versa</a:t>
-            </a:r>
-          </a:p>
-        </p:txBody>
-      </p:sp>
-      <p:sp>
-        <p:nvSpPr>
-          <p:cNvPr id="16" name="TextBox 15">
-            <a:extLst>
-              <a:ext uri="{FF2B5EF4-FFF2-40B4-BE49-F238E27FC236}">
-                <a16:creationId xmlns:a16="http://schemas.microsoft.com/office/drawing/2014/main" id="{19112EFC-66A8-7147-9611-1CE15DBED304}"/>
-              </a:ext>
-            </a:extLst>
-          </p:cNvPr>
-          <p:cNvSpPr txBox="1"/>
-          <p:nvPr/>
-        </p:nvSpPr>
-        <p:spPr>
-          <a:xfrm>
-            <a:off x="1759147" y="4557009"/>
-            <a:ext cx="4563750" cy="369332"/>
-          </a:xfrm>
-          <a:prstGeom prst="rect">
-            <a:avLst/>
-          </a:prstGeom>
-          <a:noFill/>
-        </p:spPr>
-        <p:txBody>
-          <a:bodyPr wrap="none" rtlCol="0">
-            <a:spAutoFit/>
-          </a:bodyPr>
-          <a:lstStyle/>
-          <a:p>
-            <a:r>
-              <a:rPr lang="en-US" dirty="0"/>
-              <a:t>01- </a:t>
-            </a:r>
-            <a:r>
-              <a:rPr lang="en-US" dirty="0">
-                <a:solidFill>
-                  <a:schemeClr val="accent1">
-                    <a:lumMod val="50000"/>
-                  </a:schemeClr>
-                </a:solidFill>
-                <a:highlight>
-                  <a:srgbClr val="FFFF00"/>
-                </a:highlight>
-              </a:rPr>
-              <a:t>Malte sends 1 BTC to Martin</a:t>
-            </a:r>
-            <a:r>
-              <a:rPr lang="en-US" dirty="0"/>
-              <a:t>-</a:t>
-            </a:r>
-            <a:r>
-              <a:rPr lang="en-US" dirty="0">
-                <a:solidFill>
-                  <a:srgbClr val="C00000"/>
-                </a:solidFill>
-              </a:rPr>
-              <a:t>473ms22akkq</a:t>
-            </a:r>
-          </a:p>
-        </p:txBody>
-      </p:sp>
-      <p:cxnSp>
-        <p:nvCxnSpPr>
-          <p:cNvPr id="18" name="Straight Arrow Connector 17">
-            <a:extLst>
-              <a:ext uri="{FF2B5EF4-FFF2-40B4-BE49-F238E27FC236}">
-                <a16:creationId xmlns:a16="http://schemas.microsoft.com/office/drawing/2014/main" id="{4B5F7D46-66E7-EE4E-8FFA-91BB1BC6089F}"/>
-              </a:ext>
-            </a:extLst>
-          </p:cNvPr>
-          <p:cNvCxnSpPr/>
-          <p:nvPr/>
-        </p:nvCxnSpPr>
-        <p:spPr>
-          <a:xfrm flipV="1">
-            <a:off x="1759147" y="4926341"/>
-            <a:ext cx="174584" cy="784911"/>
-          </a:xfrm>
-          <a:prstGeom prst="straightConnector1">
-            <a:avLst/>
-          </a:prstGeom>
-          <a:ln>
-            <a:tailEnd type="triangle"/>
-          </a:ln>
-        </p:spPr>
-        <p:style>
-          <a:lnRef idx="1">
-            <a:schemeClr val="accent1"/>
-          </a:lnRef>
-          <a:fillRef idx="0">
-            <a:schemeClr val="accent1"/>
-          </a:fillRef>
-          <a:effectRef idx="0">
-            <a:schemeClr val="accent1"/>
-          </a:effectRef>
-          <a:fontRef idx="minor">
-            <a:schemeClr val="tx1"/>
-          </a:fontRef>
-        </p:style>
-      </p:cxnSp>
-      <p:cxnSp>
-        <p:nvCxnSpPr>
-          <p:cNvPr id="20" name="Straight Arrow Connector 19">
-            <a:extLst>
-              <a:ext uri="{FF2B5EF4-FFF2-40B4-BE49-F238E27FC236}">
-                <a16:creationId xmlns:a16="http://schemas.microsoft.com/office/drawing/2014/main" id="{C14761E8-67C6-D843-AD68-63B980694FC9}"/>
-              </a:ext>
-            </a:extLst>
-          </p:cNvPr>
-          <p:cNvCxnSpPr/>
-          <p:nvPr/>
-        </p:nvCxnSpPr>
-        <p:spPr>
-          <a:xfrm flipV="1">
-            <a:off x="3612630" y="4926341"/>
-            <a:ext cx="119921" cy="784911"/>
-          </a:xfrm>
-          <a:prstGeom prst="straightConnector1">
-            <a:avLst/>
-          </a:prstGeom>
-          <a:ln>
-            <a:tailEnd type="triangle"/>
-          </a:ln>
-        </p:spPr>
-        <p:style>
-          <a:lnRef idx="1">
-            <a:schemeClr val="accent1"/>
-          </a:lnRef>
-          <a:fillRef idx="0">
-            <a:schemeClr val="accent1"/>
-          </a:fillRef>
-          <a:effectRef idx="0">
-            <a:schemeClr val="accent1"/>
-          </a:effectRef>
-          <a:fontRef idx="minor">
-            <a:schemeClr val="tx1"/>
-          </a:fontRef>
-        </p:style>
-      </p:cxnSp>
-      <p:cxnSp>
-        <p:nvCxnSpPr>
-          <p:cNvPr id="22" name="Straight Arrow Connector 21">
-            <a:extLst>
-              <a:ext uri="{FF2B5EF4-FFF2-40B4-BE49-F238E27FC236}">
-                <a16:creationId xmlns:a16="http://schemas.microsoft.com/office/drawing/2014/main" id="{16662B9F-7BC2-CE48-903B-F00807619D59}"/>
-              </a:ext>
-            </a:extLst>
-          </p:cNvPr>
-          <p:cNvCxnSpPr/>
-          <p:nvPr/>
-        </p:nvCxnSpPr>
-        <p:spPr>
-          <a:xfrm flipV="1">
-            <a:off x="5411450" y="4926341"/>
-            <a:ext cx="119921" cy="784911"/>
-          </a:xfrm>
-          <a:prstGeom prst="straightConnector1">
-            <a:avLst/>
-          </a:prstGeom>
-          <a:ln>
-            <a:tailEnd type="triangle"/>
-          </a:ln>
-        </p:spPr>
-        <p:style>
-          <a:lnRef idx="1">
-            <a:schemeClr val="accent1"/>
-          </a:lnRef>
-          <a:fillRef idx="0">
-            <a:schemeClr val="accent1"/>
-          </a:fillRef>
-          <a:effectRef idx="0">
-            <a:schemeClr val="accent1"/>
-          </a:effectRef>
-          <a:fontRef idx="minor">
-            <a:schemeClr val="tx1"/>
-          </a:fontRef>
-        </p:style>
-      </p:cxnSp>
-      <p:sp>
-        <p:nvSpPr>
-          <p:cNvPr id="21" name="TextBox 20">
-            <a:extLst>
-              <a:ext uri="{FF2B5EF4-FFF2-40B4-BE49-F238E27FC236}">
-                <a16:creationId xmlns:a16="http://schemas.microsoft.com/office/drawing/2014/main" id="{8298E2C6-E805-C24D-9AB6-A71DC5C08D63}"/>
-              </a:ext>
-            </a:extLst>
-          </p:cNvPr>
-          <p:cNvSpPr txBox="1"/>
-          <p:nvPr/>
-        </p:nvSpPr>
-        <p:spPr>
-          <a:xfrm>
-            <a:off x="744738" y="5895918"/>
-            <a:ext cx="1777538" cy="369332"/>
-          </a:xfrm>
-          <a:prstGeom prst="rect">
-            <a:avLst/>
-          </a:prstGeom>
-          <a:noFill/>
-        </p:spPr>
-        <p:txBody>
-          <a:bodyPr wrap="none" rtlCol="0">
-            <a:spAutoFit/>
-          </a:bodyPr>
-          <a:lstStyle/>
-          <a:p>
-            <a:r>
-              <a:rPr lang="en-US" dirty="0"/>
-              <a:t>Unique identifier</a:t>
-            </a:r>
-          </a:p>
-        </p:txBody>
-      </p:sp>
-      <p:sp>
-        <p:nvSpPr>
-          <p:cNvPr id="24" name="TextBox 23">
-            <a:extLst>
-              <a:ext uri="{FF2B5EF4-FFF2-40B4-BE49-F238E27FC236}">
-                <a16:creationId xmlns:a16="http://schemas.microsoft.com/office/drawing/2014/main" id="{DD693D81-F26A-2F4C-B366-C8BE792D3410}"/>
-              </a:ext>
-            </a:extLst>
-          </p:cNvPr>
-          <p:cNvSpPr txBox="1"/>
-          <p:nvPr/>
-        </p:nvSpPr>
-        <p:spPr>
-          <a:xfrm>
-            <a:off x="3077296" y="5921115"/>
-            <a:ext cx="1241109" cy="369332"/>
-          </a:xfrm>
-          <a:prstGeom prst="rect">
-            <a:avLst/>
-          </a:prstGeom>
-          <a:noFill/>
-        </p:spPr>
-        <p:txBody>
-          <a:bodyPr wrap="none" rtlCol="0">
-            <a:spAutoFit/>
-          </a:bodyPr>
-          <a:lstStyle/>
-          <a:p>
-            <a:r>
-              <a:rPr lang="en-US" dirty="0">
-                <a:highlight>
-                  <a:srgbClr val="FFFF00"/>
-                </a:highlight>
-              </a:rPr>
-              <a:t>transaction</a:t>
-            </a:r>
-          </a:p>
-        </p:txBody>
-      </p:sp>
-      <p:sp>
-        <p:nvSpPr>
-          <p:cNvPr id="25" name="TextBox 24">
-            <a:extLst>
-              <a:ext uri="{FF2B5EF4-FFF2-40B4-BE49-F238E27FC236}">
-                <a16:creationId xmlns:a16="http://schemas.microsoft.com/office/drawing/2014/main" id="{F8B25983-DCCF-8C44-9508-E19A15A8DC5E}"/>
-              </a:ext>
-            </a:extLst>
-          </p:cNvPr>
-          <p:cNvSpPr txBox="1"/>
-          <p:nvPr/>
-        </p:nvSpPr>
-        <p:spPr>
-          <a:xfrm>
-            <a:off x="4850855" y="5921115"/>
-            <a:ext cx="762773" cy="369332"/>
-          </a:xfrm>
-          <a:prstGeom prst="rect">
-            <a:avLst/>
-          </a:prstGeom>
-          <a:noFill/>
-        </p:spPr>
-        <p:txBody>
-          <a:bodyPr wrap="none" rtlCol="0">
-            <a:spAutoFit/>
-          </a:bodyPr>
-          <a:lstStyle/>
-          <a:p>
-            <a:r>
-              <a:rPr lang="en-US" dirty="0">
-                <a:solidFill>
-                  <a:srgbClr val="C00000"/>
-                </a:solidFill>
-              </a:rPr>
-              <a:t>stamp</a:t>
-            </a:r>
-          </a:p>
-        </p:txBody>
-      </p:sp>
-      <p:cxnSp>
-        <p:nvCxnSpPr>
-          <p:cNvPr id="26" name="Straight Arrow Connector 25">
-            <a:extLst>
-              <a:ext uri="{FF2B5EF4-FFF2-40B4-BE49-F238E27FC236}">
-                <a16:creationId xmlns:a16="http://schemas.microsoft.com/office/drawing/2014/main" id="{7DA55EA8-940B-C142-8619-CFD889578CDB}"/>
-              </a:ext>
-            </a:extLst>
-          </p:cNvPr>
-          <p:cNvCxnSpPr>
-            <a:cxnSpLocks/>
-          </p:cNvCxnSpPr>
-          <p:nvPr/>
-        </p:nvCxnSpPr>
-        <p:spPr>
-          <a:xfrm>
-            <a:off x="5662572" y="6107854"/>
-            <a:ext cx="433428" cy="0"/>
-          </a:xfrm>
-          <a:prstGeom prst="straightConnector1">
-            <a:avLst/>
-          </a:prstGeom>
-          <a:ln>
-            <a:tailEnd type="triangle"/>
-          </a:ln>
-        </p:spPr>
-        <p:style>
-          <a:lnRef idx="1">
-            <a:schemeClr val="accent1"/>
-          </a:lnRef>
-          <a:fillRef idx="0">
-            <a:schemeClr val="accent1"/>
-          </a:fillRef>
-          <a:effectRef idx="0">
-            <a:schemeClr val="accent1"/>
-          </a:effectRef>
-          <a:fontRef idx="minor">
-            <a:schemeClr val="tx1"/>
-          </a:fontRef>
-        </p:style>
-      </p:cxnSp>
-      <p:sp>
-        <p:nvSpPr>
-          <p:cNvPr id="27" name="TextBox 26">
-            <a:extLst>
-              <a:ext uri="{FF2B5EF4-FFF2-40B4-BE49-F238E27FC236}">
-                <a16:creationId xmlns:a16="http://schemas.microsoft.com/office/drawing/2014/main" id="{41F6604F-6D88-974C-8C4E-6AA69DA5E0AB}"/>
-              </a:ext>
-            </a:extLst>
-          </p:cNvPr>
-          <p:cNvSpPr txBox="1"/>
-          <p:nvPr/>
-        </p:nvSpPr>
-        <p:spPr>
-          <a:xfrm>
-            <a:off x="6322897" y="5955880"/>
-            <a:ext cx="2936253" cy="369332"/>
-          </a:xfrm>
-          <a:prstGeom prst="rect">
-            <a:avLst/>
-          </a:prstGeom>
-          <a:noFill/>
-        </p:spPr>
-        <p:txBody>
-          <a:bodyPr wrap="none" rtlCol="0">
-            <a:spAutoFit/>
-          </a:bodyPr>
-          <a:lstStyle/>
-          <a:p>
-            <a:r>
-              <a:rPr lang="en-US" dirty="0" err="1"/>
-              <a:t>PrivateKey</a:t>
-            </a:r>
-            <a:r>
-              <a:rPr lang="en-US" dirty="0"/>
-              <a:t>(UID + transaction)</a:t>
-            </a:r>
-          </a:p>
-        </p:txBody>
-      </p:sp>
-      <p:pic>
-        <p:nvPicPr>
-          <p:cNvPr id="29" name="Graphic 28" descr="Old Key with solid fill">
-            <a:extLst>
-              <a:ext uri="{FF2B5EF4-FFF2-40B4-BE49-F238E27FC236}">
-                <a16:creationId xmlns:a16="http://schemas.microsoft.com/office/drawing/2014/main" id="{2333B70C-50DE-2E44-A79B-EB013737E8AE}"/>
-              </a:ext>
-            </a:extLst>
-          </p:cNvPr>
-          <p:cNvPicPr>
-            <a:picLocks noChangeAspect="1"/>
-          </p:cNvPicPr>
-          <p:nvPr/>
-        </p:nvPicPr>
-        <p:blipFill>
-          <a:blip r:embed="rId2" cstate="email">
-            <a:extLst>
-              <a:ext uri="{28A0092B-C50C-407E-A947-70E740481C1C}">
-                <a14:useLocalDpi xmlns:a14="http://schemas.microsoft.com/office/drawing/2010/main"/>
-              </a:ext>
-              <a:ext uri="{96DAC541-7B7A-43D3-8B79-37D633B846F1}">
-                <asvg:svgBlip xmlns:asvg="http://schemas.microsoft.com/office/drawing/2016/SVG/main" r:embed="rId3"/>
-              </a:ext>
-            </a:extLst>
-          </a:blip>
-          <a:stretch>
-            <a:fillRect/>
-          </a:stretch>
-        </p:blipFill>
-        <p:spPr>
-          <a:xfrm>
-            <a:off x="9805096" y="5173086"/>
-            <a:ext cx="538166" cy="538166"/>
-          </a:xfrm>
-          <a:prstGeom prst="rect">
-            <a:avLst/>
-          </a:prstGeom>
-        </p:spPr>
-      </p:pic>
-      <p:pic>
-        <p:nvPicPr>
-          <p:cNvPr id="30" name="Graphic 29" descr="Users with solid fill">
-            <a:extLst>
-              <a:ext uri="{FF2B5EF4-FFF2-40B4-BE49-F238E27FC236}">
-                <a16:creationId xmlns:a16="http://schemas.microsoft.com/office/drawing/2014/main" id="{C948B39E-ECC7-034B-9C00-D1AA6BDD5626}"/>
-              </a:ext>
-            </a:extLst>
-          </p:cNvPr>
-          <p:cNvPicPr>
-            <a:picLocks noChangeAspect="1"/>
-          </p:cNvPicPr>
-          <p:nvPr/>
-        </p:nvPicPr>
-        <p:blipFill>
-          <a:blip r:embed="rId10">
-            <a:extLst>
-              <a:ext uri="{96DAC541-7B7A-43D3-8B79-37D633B846F1}">
-                <asvg:svgBlip xmlns:asvg="http://schemas.microsoft.com/office/drawing/2016/SVG/main" r:embed="rId11"/>
-              </a:ext>
-            </a:extLst>
-          </a:blip>
-          <a:stretch>
-            <a:fillRect/>
-          </a:stretch>
-        </p:blipFill>
-        <p:spPr>
-          <a:xfrm>
-            <a:off x="10392114" y="5041480"/>
-            <a:ext cx="914400" cy="914400"/>
-          </a:xfrm>
-          <a:prstGeom prst="rect">
-            <a:avLst/>
-          </a:prstGeom>
-        </p:spPr>
-      </p:pic>
-      <p:cxnSp>
-        <p:nvCxnSpPr>
-          <p:cNvPr id="32" name="Straight Arrow Connector 31">
-            <a:extLst>
-              <a:ext uri="{FF2B5EF4-FFF2-40B4-BE49-F238E27FC236}">
-                <a16:creationId xmlns:a16="http://schemas.microsoft.com/office/drawing/2014/main" id="{67AD8ED7-F7DD-6440-A712-E200BAD56D09}"/>
-              </a:ext>
-            </a:extLst>
-          </p:cNvPr>
-          <p:cNvCxnSpPr>
-            <a:cxnSpLocks/>
-            <a:stCxn id="29" idx="2"/>
-            <a:endCxn id="27" idx="3"/>
-          </p:cNvCxnSpPr>
-          <p:nvPr/>
-        </p:nvCxnSpPr>
-        <p:spPr>
-          <a:xfrm flipH="1">
-            <a:off x="9259150" y="5711252"/>
-            <a:ext cx="815029" cy="429294"/>
-          </a:xfrm>
-          <a:prstGeom prst="straightConnector1">
-            <a:avLst/>
-          </a:prstGeom>
-          <a:ln>
-            <a:tailEnd type="triangle"/>
-          </a:ln>
-        </p:spPr>
-        <p:style>
-          <a:lnRef idx="1">
-            <a:schemeClr val="accent1"/>
-          </a:lnRef>
-          <a:fillRef idx="0">
-            <a:schemeClr val="accent1"/>
-          </a:fillRef>
-          <a:effectRef idx="0">
-            <a:schemeClr val="accent1"/>
-          </a:effectRef>
-          <a:fontRef idx="minor">
-            <a:schemeClr val="tx1"/>
-          </a:fontRef>
-        </p:style>
-      </p:cxnSp>
-      <p:sp>
-        <p:nvSpPr>
-          <p:cNvPr id="34" name="TextBox 33">
-            <a:extLst>
-              <a:ext uri="{FF2B5EF4-FFF2-40B4-BE49-F238E27FC236}">
-                <a16:creationId xmlns:a16="http://schemas.microsoft.com/office/drawing/2014/main" id="{7669DC17-CE2B-E64C-9935-706CD126CDD5}"/>
-              </a:ext>
-            </a:extLst>
-          </p:cNvPr>
-          <p:cNvSpPr txBox="1"/>
-          <p:nvPr/>
-        </p:nvSpPr>
-        <p:spPr>
-          <a:xfrm rot="19843804">
-            <a:off x="9548549" y="5851623"/>
-            <a:ext cx="922047" cy="369332"/>
-          </a:xfrm>
-          <a:prstGeom prst="rect">
-            <a:avLst/>
-          </a:prstGeom>
-          <a:noFill/>
-        </p:spPr>
-        <p:txBody>
-          <a:bodyPr wrap="none" rtlCol="0">
-            <a:spAutoFit/>
-          </a:bodyPr>
-          <a:lstStyle/>
-          <a:p>
-            <a:r>
-              <a:rPr lang="en-US" dirty="0"/>
-              <a:t>validate</a:t>
-            </a:r>
-          </a:p>
-        </p:txBody>
-      </p:sp>
-      <p:sp>
-        <p:nvSpPr>
-          <p:cNvPr id="35" name="TextBox 34">
-            <a:extLst>
-              <a:ext uri="{FF2B5EF4-FFF2-40B4-BE49-F238E27FC236}">
-                <a16:creationId xmlns:a16="http://schemas.microsoft.com/office/drawing/2014/main" id="{937094D4-C58C-9844-B226-17B63D0EE261}"/>
-              </a:ext>
-            </a:extLst>
-          </p:cNvPr>
-          <p:cNvSpPr txBox="1"/>
-          <p:nvPr/>
-        </p:nvSpPr>
-        <p:spPr>
-          <a:xfrm>
-            <a:off x="934192" y="4014653"/>
-            <a:ext cx="3057184" cy="369332"/>
-          </a:xfrm>
-          <a:prstGeom prst="rect">
-            <a:avLst/>
-          </a:prstGeom>
-          <a:noFill/>
-        </p:spPr>
-        <p:txBody>
-          <a:bodyPr wrap="none" rtlCol="0">
-            <a:spAutoFit/>
-          </a:bodyPr>
-          <a:lstStyle/>
-          <a:p>
-            <a:r>
-              <a:rPr lang="en-US" dirty="0"/>
-              <a:t>Example transaction structure:</a:t>
-            </a:r>
-          </a:p>
-        </p:txBody>
-      </p:sp>
-      <p:cxnSp>
-        <p:nvCxnSpPr>
-          <p:cNvPr id="37" name="Straight Arrow Connector 36">
-            <a:extLst>
-              <a:ext uri="{FF2B5EF4-FFF2-40B4-BE49-F238E27FC236}">
-                <a16:creationId xmlns:a16="http://schemas.microsoft.com/office/drawing/2014/main" id="{094C86D8-5894-2840-86B0-7D72E9B55C91}"/>
-              </a:ext>
-            </a:extLst>
-          </p:cNvPr>
-          <p:cNvCxnSpPr>
-            <a:cxnSpLocks/>
-          </p:cNvCxnSpPr>
-          <p:nvPr/>
-        </p:nvCxnSpPr>
-        <p:spPr>
-          <a:xfrm flipV="1">
-            <a:off x="9534974" y="852974"/>
-            <a:ext cx="0" cy="568130"/>
-          </a:xfrm>
-          <a:prstGeom prst="straightConnector1">
-            <a:avLst/>
-          </a:prstGeom>
-          <a:ln w="38100">
-            <a:tailEnd type="triangle"/>
-          </a:ln>
-        </p:spPr>
-        <p:style>
-          <a:lnRef idx="1">
-            <a:schemeClr val="dk1"/>
-          </a:lnRef>
-          <a:fillRef idx="0">
-            <a:schemeClr val="dk1"/>
-          </a:fillRef>
-          <a:effectRef idx="0">
-            <a:schemeClr val="dk1"/>
-          </a:effectRef>
-          <a:fontRef idx="minor">
-            <a:schemeClr val="tx1"/>
-          </a:fontRef>
-        </p:style>
-      </p:cxnSp>
-      <p:cxnSp>
-        <p:nvCxnSpPr>
-          <p:cNvPr id="39" name="Straight Arrow Connector 38">
-            <a:extLst>
-              <a:ext uri="{FF2B5EF4-FFF2-40B4-BE49-F238E27FC236}">
-                <a16:creationId xmlns:a16="http://schemas.microsoft.com/office/drawing/2014/main" id="{3CFFA514-D14B-A948-AB40-1F8EA2A13B00}"/>
-              </a:ext>
-            </a:extLst>
-          </p:cNvPr>
-          <p:cNvCxnSpPr>
-            <a:cxnSpLocks/>
-          </p:cNvCxnSpPr>
-          <p:nvPr/>
-        </p:nvCxnSpPr>
-        <p:spPr>
-          <a:xfrm flipV="1">
-            <a:off x="7786080" y="852974"/>
-            <a:ext cx="0" cy="568130"/>
-          </a:xfrm>
-          <a:prstGeom prst="straightConnector1">
-            <a:avLst/>
-          </a:prstGeom>
-          <a:ln w="38100">
-            <a:tailEnd type="triangle"/>
-          </a:ln>
-        </p:spPr>
-        <p:style>
-          <a:lnRef idx="1">
-            <a:schemeClr val="dk1"/>
-          </a:lnRef>
-          <a:fillRef idx="0">
-            <a:schemeClr val="dk1"/>
-          </a:fillRef>
-          <a:effectRef idx="0">
-            <a:schemeClr val="dk1"/>
-          </a:effectRef>
-          <a:fontRef idx="minor">
-            <a:schemeClr val="tx1"/>
-          </a:fontRef>
-        </p:style>
-      </p:cxnSp>
-      <p:sp>
-        <p:nvSpPr>
-          <p:cNvPr id="40" name="TextBox 39">
-            <a:extLst>
-              <a:ext uri="{FF2B5EF4-FFF2-40B4-BE49-F238E27FC236}">
-                <a16:creationId xmlns:a16="http://schemas.microsoft.com/office/drawing/2014/main" id="{01C089D3-CA54-AB41-BFD4-CE556B55C9B2}"/>
-              </a:ext>
-            </a:extLst>
-          </p:cNvPr>
-          <p:cNvSpPr txBox="1"/>
-          <p:nvPr/>
-        </p:nvSpPr>
-        <p:spPr>
-          <a:xfrm>
-            <a:off x="7469358" y="462017"/>
-            <a:ext cx="653512" cy="369332"/>
-          </a:xfrm>
-          <a:prstGeom prst="rect">
-            <a:avLst/>
-          </a:prstGeom>
-          <a:noFill/>
-        </p:spPr>
-        <p:txBody>
-          <a:bodyPr wrap="none" rtlCol="0">
-            <a:spAutoFit/>
-          </a:bodyPr>
-          <a:lstStyle/>
-          <a:p>
-            <a:r>
-              <a:rPr lang="en-US" dirty="0"/>
-              <a:t>Read</a:t>
-            </a:r>
-          </a:p>
-        </p:txBody>
-      </p:sp>
-      <p:sp>
-        <p:nvSpPr>
-          <p:cNvPr id="41" name="TextBox 40">
-            <a:extLst>
-              <a:ext uri="{FF2B5EF4-FFF2-40B4-BE49-F238E27FC236}">
-                <a16:creationId xmlns:a16="http://schemas.microsoft.com/office/drawing/2014/main" id="{D46DFD0B-2435-194A-AC9E-D5FE3D84EEF6}"/>
-              </a:ext>
-            </a:extLst>
-          </p:cNvPr>
-          <p:cNvSpPr txBox="1"/>
-          <p:nvPr/>
-        </p:nvSpPr>
-        <p:spPr>
-          <a:xfrm>
-            <a:off x="9208218" y="434263"/>
-            <a:ext cx="706027" cy="369332"/>
-          </a:xfrm>
-          <a:prstGeom prst="rect">
-            <a:avLst/>
-          </a:prstGeom>
-          <a:noFill/>
-        </p:spPr>
-        <p:txBody>
-          <a:bodyPr wrap="none" rtlCol="0">
-            <a:spAutoFit/>
-          </a:bodyPr>
-          <a:lstStyle/>
-          <a:p>
-            <a:r>
-              <a:rPr lang="en-US" dirty="0"/>
-              <a:t>Write</a:t>
-            </a:r>
-          </a:p>
-        </p:txBody>
-      </p:sp>
-      <p:sp>
-        <p:nvSpPr>
-          <p:cNvPr id="38" name="TextBox 37">
-            <a:extLst>
-              <a:ext uri="{FF2B5EF4-FFF2-40B4-BE49-F238E27FC236}">
-                <a16:creationId xmlns:a16="http://schemas.microsoft.com/office/drawing/2014/main" id="{CDDE0C2A-7806-324F-BD36-6751C0204289}"/>
-              </a:ext>
-            </a:extLst>
-          </p:cNvPr>
-          <p:cNvSpPr txBox="1"/>
-          <p:nvPr/>
-        </p:nvSpPr>
-        <p:spPr>
-          <a:xfrm>
-            <a:off x="8418579" y="6447147"/>
-            <a:ext cx="3803605" cy="584775"/>
-          </a:xfrm>
-          <a:prstGeom prst="rect">
-            <a:avLst/>
-          </a:prstGeom>
-          <a:noFill/>
-        </p:spPr>
-        <p:txBody>
-          <a:bodyPr wrap="none" rtlCol="0">
-            <a:spAutoFit/>
-          </a:bodyPr>
-          <a:lstStyle/>
+              <a:rPr lang="en-US" sz="1400"/>
+              <a:t>Bitcoin address and keys:</a:t>
+            </a:r>
+          </a:p>
+          <a:p>
+            <a:r>
+              <a:rPr lang="en-US" sz="1400"/>
+              <a:t>.. https://www.dummies.com/article/business-careers-money/personal-finance/cryptocurrency/bitcoin-public-private-keys-223627/</a:t>
+            </a:r>
+          </a:p>
+          <a:p>
+            <a:endParaRPr lang="en-US" sz="1400"/>
+          </a:p>
+          <a:p>
+            <a:r>
+              <a:rPr lang="en-US" sz="1400"/>
+              <a:t>Explanation: </a:t>
+            </a:r>
+          </a:p>
+          <a:p>
+            <a:r>
+              <a:rPr lang="en-US" sz="1400"/>
+              <a:t>.. private key</a:t>
+            </a:r>
+          </a:p>
+          <a:p>
+            <a:r>
+              <a:rPr lang="en-US" sz="1400"/>
+              <a:t>.. public key (256 bits)</a:t>
+            </a:r>
+          </a:p>
+          <a:p>
+            <a:r>
+              <a:rPr lang="en-US" sz="1400"/>
+              <a:t>.. wallet address (hashed public key, 160 bits)</a:t>
+            </a:r>
+          </a:p>
+          <a:p>
+            <a:endParaRPr lang="en-US" sz="1400"/>
+          </a:p>
+          <a:p>
+            <a:r>
+              <a:rPr lang="en-US" sz="1400"/>
+              <a:t>Signing a message with your bitcoin address</a:t>
+            </a:r>
+          </a:p>
+          <a:p>
+            <a:r>
+              <a:rPr lang="en-US" sz="1400"/>
+              <a:t>.. https://academy.bit2me.com/en/firmar-mensajes-bitcoin/</a:t>
+            </a:r>
+          </a:p>
+          <a:p>
+            <a:endParaRPr lang="en-US" sz="1400"/>
+          </a:p>
+          <a:p>
+            <a:r>
+              <a:rPr lang="en-US" sz="1400"/>
+              <a:t>Most of the encryption in modern cryptocurrencies are built on elliptic curve cryptography rather than RSA, </a:t>
+            </a:r>
+          </a:p>
+          <a:p>
+            <a:r>
+              <a:rPr lang="en-US" sz="1400"/>
+              <a:t>especially in the generation of signatures in bitcoin which requires ECDSA.</a:t>
+            </a:r>
+          </a:p>
+          <a:p>
+            <a:r>
+              <a:rPr lang="en-US" sz="1400"/>
+              <a:t>.. https://www.forbes.com/sites/rogerhuang/2020/12/21/heres-why-quantum-computing-will-not-break-cryptocurrencies/?sh=6d34a72a167b</a:t>
+            </a:r>
+          </a:p>
+          <a:p>
+            <a:endParaRPr lang="en-US" sz="1400"/>
+          </a:p>
           <a:p>
             <a:r>
               <a:rPr lang="en-US" sz="1400" dirty="0"/>
-              <a:t>02- </a:t>
-            </a:r>
-            <a:r>
-              <a:rPr lang="en-US" sz="1400" dirty="0">
-                <a:solidFill>
-                  <a:schemeClr val="accent1">
-                    <a:lumMod val="50000"/>
-                  </a:schemeClr>
-                </a:solidFill>
-                <a:highlight>
-                  <a:srgbClr val="FFFF00"/>
-                </a:highlight>
-              </a:rPr>
-              <a:t>Malte sends 1 BTC to Martin-</a:t>
-            </a:r>
-            <a:r>
-              <a:rPr lang="en-US" sz="1400" dirty="0">
-                <a:solidFill>
-                  <a:srgbClr val="C00000"/>
-                </a:solidFill>
-              </a:rPr>
-              <a:t>df3mfssfak7dfd</a:t>
-            </a:r>
-          </a:p>
-          <a:p>
-            <a:endParaRPr lang="en-US" dirty="0"/>
+              <a:t>Elliptical Digital Signature Algorithm</a:t>
+            </a:r>
+            <a:endParaRPr lang="en-US" sz="1400"/>
+          </a:p>
+          <a:p>
+            <a:r>
+              <a:rPr lang="en-US" sz="1400"/>
+              <a:t>.. </a:t>
+            </a:r>
+            <a:r>
+              <a:rPr lang="en-US" sz="1400" dirty="0"/>
+              <a:t>https://en.wikipedia.org/wiki/</a:t>
+            </a:r>
+            <a:r>
+              <a:rPr lang="en-US" sz="1400" dirty="0" err="1"/>
+              <a:t>Elliptic_Curve_Digital_Signature_Algorithm</a:t>
+            </a:r>
+            <a:endParaRPr lang="en-US" sz="1400" dirty="0"/>
+          </a:p>
+          <a:p>
+            <a:endParaRPr lang="en-US" sz="1400"/>
+          </a:p>
+          <a:p>
+            <a:r>
+              <a:rPr lang="en-US" sz="1400"/>
+              <a:t>”Burning Coins”</a:t>
+            </a:r>
+          </a:p>
+          <a:p>
+            <a:endParaRPr lang="en-US" sz="1400"/>
           </a:p>
         </p:txBody>
       </p:sp>
     </p:spTree>
     <p:extLst>
       <p:ext uri="{BB962C8B-B14F-4D97-AF65-F5344CB8AC3E}">
-        <p14:creationId xmlns:p14="http://schemas.microsoft.com/office/powerpoint/2010/main" val="3493101456"/>
+        <p14:creationId xmlns:p14="http://schemas.microsoft.com/office/powerpoint/2010/main" val="1027086850"/>
       </p:ext>
     </p:extLst>
   </p:cSld>
@@ -6168,193 +5655,77 @@
       </p:grpSpPr>
       <p:sp>
         <p:nvSpPr>
-          <p:cNvPr id="2" name="TextBox 1">
+          <p:cNvPr id="2" name="Title 1">
             <a:extLst>
               <a:ext uri="{FF2B5EF4-FFF2-40B4-BE49-F238E27FC236}">
-                <a16:creationId xmlns:a16="http://schemas.microsoft.com/office/drawing/2014/main" id="{210D5B8D-BE4D-BB41-ABFF-EFE774092AF5}"/>
+                <a16:creationId xmlns:a16="http://schemas.microsoft.com/office/drawing/2014/main" id="{59CD814F-0488-4942-8BF6-DC490A8C6AA1}"/>
               </a:ext>
             </a:extLst>
           </p:cNvPr>
-          <p:cNvSpPr txBox="1"/>
+          <p:cNvSpPr>
+            <a:spLocks noGrp="1"/>
+          </p:cNvSpPr>
+          <p:nvPr>
+            <p:ph type="title"/>
+          </p:nvPr>
+        </p:nvSpPr>
+        <p:spPr/>
+        <p:txBody>
+          <a:bodyPr/>
+          <a:lstStyle/>
+          <a:p>
+            <a:r>
+              <a:rPr lang="en-US" dirty="0"/>
+              <a:t>2. Public vs Private Key</a:t>
+            </a:r>
+          </a:p>
+        </p:txBody>
+      </p:sp>
+      <p:pic>
+        <p:nvPicPr>
+          <p:cNvPr id="5" name="Graphic 4" descr="Old Key with solid fill">
+            <a:extLst>
+              <a:ext uri="{FF2B5EF4-FFF2-40B4-BE49-F238E27FC236}">
+                <a16:creationId xmlns:a16="http://schemas.microsoft.com/office/drawing/2014/main" id="{6FC820C6-7F2A-1649-AA6A-0DE2E659E5FA}"/>
+              </a:ext>
+            </a:extLst>
+          </p:cNvPr>
+          <p:cNvPicPr>
+            <a:picLocks noChangeAspect="1"/>
+          </p:cNvPicPr>
           <p:nvPr/>
-        </p:nvSpPr>
-        <p:spPr>
-          <a:xfrm>
-            <a:off x="6754809" y="161226"/>
-            <a:ext cx="5440919" cy="3108543"/>
+        </p:nvPicPr>
+        <p:blipFill>
+          <a:blip r:embed="rId2" cstate="email">
+            <a:extLst>
+              <a:ext uri="{28A0092B-C50C-407E-A947-70E740481C1C}">
+                <a14:useLocalDpi xmlns:a14="http://schemas.microsoft.com/office/drawing/2010/main"/>
+              </a:ext>
+              <a:ext uri="{96DAC541-7B7A-43D3-8B79-37D633B846F1}">
+                <asvg:svgBlip xmlns:asvg="http://schemas.microsoft.com/office/drawing/2016/SVG/main" r:embed="rId3"/>
+              </a:ext>
+            </a:extLst>
+          </a:blip>
+          <a:stretch>
+            <a:fillRect/>
+          </a:stretch>
+        </p:blipFill>
+        <p:spPr>
+          <a:xfrm>
+            <a:off x="7532339" y="2147332"/>
+            <a:ext cx="538166" cy="538166"/>
           </a:xfrm>
           <a:prstGeom prst="rect">
             <a:avLst/>
           </a:prstGeom>
-          <a:noFill/>
-        </p:spPr>
-        <p:txBody>
-          <a:bodyPr wrap="square" rtlCol="0">
-            <a:spAutoFit/>
-          </a:bodyPr>
-          <a:lstStyle/>
-          <a:p>
-            <a:pPr marL="380990" indent="-380990">
-              <a:buFont typeface="Arial" panose="020B0604020202020204" pitchFamily="34" charset="0"/>
-              <a:buChar char="•"/>
-            </a:pPr>
-            <a:r>
-              <a:rPr lang="en-US" sz="1400">
-                <a:hlinkClick r:id="rId2"/>
-              </a:rPr>
-              <a:t>https://metamask.io/</a:t>
-            </a:r>
-            <a:endParaRPr lang="en-US" sz="1400"/>
-          </a:p>
-          <a:p>
-            <a:pPr marL="380990" indent="-380990">
-              <a:buFont typeface="Arial" panose="020B0604020202020204" pitchFamily="34" charset="0"/>
-              <a:buChar char="•"/>
-            </a:pPr>
-            <a:r>
-              <a:rPr lang="en-US" sz="1400">
-                <a:hlinkClick r:id="rId3"/>
-              </a:rPr>
-              <a:t>https://en.wikipedia.org/wiki/MetaMask</a:t>
-            </a:r>
-            <a:endParaRPr lang="en-US" sz="1400"/>
-          </a:p>
-          <a:p>
-            <a:pPr marL="380990" indent="-380990">
-              <a:buFont typeface="Arial" panose="020B0604020202020204" pitchFamily="34" charset="0"/>
-              <a:buChar char="•"/>
-            </a:pPr>
-            <a:r>
-              <a:rPr lang="en-US" sz="1400" b="1">
-                <a:solidFill>
-                  <a:srgbClr val="00B050"/>
-                </a:solidFill>
-              </a:rPr>
-              <a:t>A software cryptocurrency wallet for Etherium blockchain</a:t>
-            </a:r>
-          </a:p>
-          <a:p>
-            <a:pPr marL="380990" indent="-380990">
-              <a:buFont typeface="Arial" panose="020B0604020202020204" pitchFamily="34" charset="0"/>
-              <a:buChar char="•"/>
-            </a:pPr>
-            <a:r>
-              <a:rPr lang="en-US" sz="1400"/>
-              <a:t>A secure browser extension or mobile app </a:t>
-            </a:r>
-            <a:br>
-              <a:rPr lang="en-US" sz="1400"/>
-            </a:br>
-            <a:r>
-              <a:rPr lang="en-US" sz="1400"/>
-              <a:t>(iOS, Android)</a:t>
-            </a:r>
-          </a:p>
-          <a:p>
-            <a:pPr marL="380990" indent="-380990">
-              <a:buFont typeface="Arial" panose="020B0604020202020204" pitchFamily="34" charset="0"/>
-              <a:buChar char="•"/>
-            </a:pPr>
-            <a:r>
-              <a:rPr lang="en-US" sz="1400"/>
-              <a:t>Allows to interact with decentralized applications</a:t>
-            </a:r>
-          </a:p>
-          <a:p>
-            <a:pPr marL="380990" indent="-380990">
-              <a:buFont typeface="Arial" panose="020B0604020202020204" pitchFamily="34" charset="0"/>
-              <a:buChar char="•"/>
-            </a:pPr>
-            <a:r>
-              <a:rPr lang="en-US" sz="1400"/>
-              <a:t>Since 2016 </a:t>
-            </a:r>
-          </a:p>
-          <a:p>
-            <a:pPr marL="380990" indent="-380990">
-              <a:buFont typeface="Arial" panose="020B0604020202020204" pitchFamily="34" charset="0"/>
-              <a:buChar char="•"/>
-            </a:pPr>
-            <a:r>
-              <a:rPr lang="en-US" sz="1400"/>
-              <a:t>More than 20 Mln users</a:t>
-            </a:r>
-          </a:p>
-          <a:p>
-            <a:pPr marL="380990" indent="-380990">
-              <a:buFont typeface="Arial" panose="020B0604020202020204" pitchFamily="34" charset="0"/>
-              <a:buChar char="•"/>
-            </a:pPr>
-            <a:r>
-              <a:rPr lang="en-US" sz="1400"/>
-              <a:t>Developed by ConsenSys - a blockchain software technology company founded by </a:t>
-            </a:r>
-            <a:r>
-              <a:rPr lang="en-US" sz="1400" b="1">
-                <a:solidFill>
-                  <a:srgbClr val="0070C0"/>
-                </a:solidFill>
-              </a:rPr>
-              <a:t>Joseph Lubin</a:t>
-            </a:r>
-            <a:r>
-              <a:rPr lang="en-US" sz="1400"/>
-              <a:t> with headquarters in Brooklyn, New York</a:t>
-            </a:r>
-          </a:p>
-          <a:p>
-            <a:pPr marL="380990" indent="-380990">
-              <a:buFont typeface="Arial" panose="020B0604020202020204" pitchFamily="34" charset="0"/>
-              <a:buChar char="•"/>
-            </a:pPr>
-            <a:r>
-              <a:rPr lang="en-US" sz="1400"/>
-              <a:t>Bitcoin cannot be stored on MetaMask, but you can store a "Wrapped Bitcoin" (WBTC) – which is an ERC-20 token that represents Bitcoin on the Ethereum blockchain</a:t>
-            </a:r>
-          </a:p>
-        </p:txBody>
-      </p:sp>
-      <p:sp>
-        <p:nvSpPr>
-          <p:cNvPr id="3" name="TextBox 2">
-            <a:extLst>
-              <a:ext uri="{FF2B5EF4-FFF2-40B4-BE49-F238E27FC236}">
-                <a16:creationId xmlns:a16="http://schemas.microsoft.com/office/drawing/2014/main" id="{E6BD177C-95D2-6D49-ABE7-6DD29457A006}"/>
-              </a:ext>
-            </a:extLst>
-          </p:cNvPr>
-          <p:cNvSpPr txBox="1"/>
-          <p:nvPr/>
-        </p:nvSpPr>
-        <p:spPr>
-          <a:xfrm>
-            <a:off x="-23443" y="1"/>
-            <a:ext cx="2157622" cy="523220"/>
-          </a:xfrm>
-          <a:prstGeom prst="rect">
-            <a:avLst/>
-          </a:prstGeom>
-          <a:noFill/>
-        </p:spPr>
-        <p:txBody>
-          <a:bodyPr wrap="square" rtlCol="0">
-            <a:spAutoFit/>
-          </a:bodyPr>
-          <a:lstStyle/>
-          <a:p>
-            <a:r>
-              <a:rPr lang="en-US" sz="2800" b="1"/>
-              <a:t>MetaMask</a:t>
-            </a:r>
-          </a:p>
-        </p:txBody>
-      </p:sp>
+        </p:spPr>
+      </p:pic>
       <p:pic>
         <p:nvPicPr>
-          <p:cNvPr id="4" name="Picture 3">
+          <p:cNvPr id="6" name="Graphic 5" descr="Old Key outline">
             <a:extLst>
               <a:ext uri="{FF2B5EF4-FFF2-40B4-BE49-F238E27FC236}">
-                <a16:creationId xmlns:a16="http://schemas.microsoft.com/office/drawing/2014/main" id="{5D282DCE-4D06-3D4E-A1E4-19542DA67CA6}"/>
+                <a16:creationId xmlns:a16="http://schemas.microsoft.com/office/drawing/2014/main" id="{416A130C-B6D0-0C47-87B6-7BE24CE1B653}"/>
               </a:ext>
             </a:extLst>
           </p:cNvPr>
@@ -6369,6 +5740,9 @@
               <a:ext uri="{28A0092B-C50C-407E-A947-70E740481C1C}">
                 <a14:useLocalDpi xmlns:a14="http://schemas.microsoft.com/office/drawing/2010/main"/>
               </a:ext>
+              <a:ext uri="{96DAC541-7B7A-43D3-8B79-37D633B846F1}">
+                <asvg:svgBlip xmlns:asvg="http://schemas.microsoft.com/office/drawing/2016/SVG/main" r:embed="rId5"/>
+              </a:ext>
             </a:extLst>
           </a:blip>
           <a:stretch>
@@ -6377,20 +5751,63 @@
         </p:blipFill>
         <p:spPr>
           <a:xfrm>
-            <a:off x="2541308" y="161226"/>
-            <a:ext cx="1443357" cy="1355348"/>
+            <a:off x="9265892" y="2147332"/>
+            <a:ext cx="538166" cy="538166"/>
           </a:xfrm>
           <a:prstGeom prst="rect">
             <a:avLst/>
           </a:prstGeom>
         </p:spPr>
       </p:pic>
+      <p:cxnSp>
+        <p:nvCxnSpPr>
+          <p:cNvPr id="7" name="Straight Arrow Connector 6">
+            <a:extLst>
+              <a:ext uri="{FF2B5EF4-FFF2-40B4-BE49-F238E27FC236}">
+                <a16:creationId xmlns:a16="http://schemas.microsoft.com/office/drawing/2014/main" id="{30B2A087-0A52-9440-9E45-F31E5F617841}"/>
+              </a:ext>
+            </a:extLst>
+          </p:cNvPr>
+          <p:cNvCxnSpPr>
+            <a:stCxn id="5" idx="3"/>
+            <a:endCxn id="6" idx="1"/>
+          </p:cNvCxnSpPr>
+          <p:nvPr/>
+        </p:nvCxnSpPr>
+        <p:spPr>
+          <a:xfrm>
+            <a:off x="8070505" y="2416415"/>
+            <a:ext cx="1195387" cy="0"/>
+          </a:xfrm>
+          <a:prstGeom prst="straightConnector1">
+            <a:avLst/>
+          </a:prstGeom>
+          <a:ln w="38100">
+            <a:headEnd type="triangle"/>
+            <a:tailEnd type="triangle"/>
+          </a:ln>
+        </p:spPr>
+        <p:style>
+          <a:lnRef idx="1">
+            <a:schemeClr val="dk1"/>
+          </a:lnRef>
+          <a:fillRef idx="0">
+            <a:schemeClr val="dk1"/>
+          </a:fillRef>
+          <a:effectRef idx="0">
+            <a:schemeClr val="dk1"/>
+          </a:effectRef>
+          <a:fontRef idx="minor">
+            <a:schemeClr val="tx1"/>
+          </a:fontRef>
+        </p:style>
+      </p:cxnSp>
       <p:pic>
         <p:nvPicPr>
-          <p:cNvPr id="5" name="Picture 4">
+          <p:cNvPr id="8" name="Graphic 7" descr="Mailbox with solid fill">
             <a:extLst>
               <a:ext uri="{FF2B5EF4-FFF2-40B4-BE49-F238E27FC236}">
-                <a16:creationId xmlns:a16="http://schemas.microsoft.com/office/drawing/2014/main" id="{43A3DE9F-6EE5-A747-B064-3CB275CD9991}"/>
+                <a16:creationId xmlns:a16="http://schemas.microsoft.com/office/drawing/2014/main" id="{D9E3BCAF-D57D-2E44-9402-8F77AAD0E88C}"/>
               </a:ext>
             </a:extLst>
           </p:cNvPr>
@@ -6400,10 +5817,13 @@
           <p:nvPr/>
         </p:nvPicPr>
         <p:blipFill>
-          <a:blip r:embed="rId5" cstate="email">
+          <a:blip r:embed="rId6" cstate="email">
             <a:extLst>
               <a:ext uri="{28A0092B-C50C-407E-A947-70E740481C1C}">
                 <a14:useLocalDpi xmlns:a14="http://schemas.microsoft.com/office/drawing/2010/main"/>
+              </a:ext>
+              <a:ext uri="{96DAC541-7B7A-43D3-8B79-37D633B846F1}">
+                <asvg:svgBlip xmlns:asvg="http://schemas.microsoft.com/office/drawing/2016/SVG/main" r:embed="rId7"/>
               </a:ext>
             </a:extLst>
           </a:blip>
@@ -6413,131 +5833,20 @@
         </p:blipFill>
         <p:spPr>
           <a:xfrm>
-            <a:off x="4152691" y="161226"/>
-            <a:ext cx="1811892" cy="2353377"/>
+            <a:off x="7580756" y="3258072"/>
+            <a:ext cx="430719" cy="430719"/>
           </a:xfrm>
           <a:prstGeom prst="rect">
             <a:avLst/>
           </a:prstGeom>
         </p:spPr>
       </p:pic>
-      <p:sp>
-        <p:nvSpPr>
-          <p:cNvPr id="9" name="TextBox 8">
-            <a:extLst>
-              <a:ext uri="{FF2B5EF4-FFF2-40B4-BE49-F238E27FC236}">
-                <a16:creationId xmlns:a16="http://schemas.microsoft.com/office/drawing/2014/main" id="{BE060BD8-457B-0F41-9E84-E2B164D8C94E}"/>
-              </a:ext>
-            </a:extLst>
-          </p:cNvPr>
-          <p:cNvSpPr txBox="1"/>
-          <p:nvPr/>
-        </p:nvSpPr>
-        <p:spPr>
-          <a:xfrm>
-            <a:off x="3865113" y="2514603"/>
-            <a:ext cx="2310064" cy="738664"/>
-          </a:xfrm>
-          <a:prstGeom prst="rect">
-            <a:avLst/>
-          </a:prstGeom>
-          <a:noFill/>
-        </p:spPr>
-        <p:txBody>
-          <a:bodyPr wrap="square" rtlCol="0">
-            <a:spAutoFit/>
-          </a:bodyPr>
-          <a:lstStyle/>
-          <a:p>
-            <a:pPr algn="ctr"/>
-            <a:r>
-              <a:rPr lang="en-US" sz="1400"/>
-              <a:t> </a:t>
-            </a:r>
-            <a:r>
-              <a:rPr lang="en-US" sz="1400" b="1">
-                <a:solidFill>
-                  <a:srgbClr val="0070C0"/>
-                </a:solidFill>
-              </a:rPr>
-              <a:t>Joseph Lubin</a:t>
-            </a:r>
-            <a:endParaRPr lang="en-US" sz="1400"/>
-          </a:p>
-          <a:p>
-            <a:pPr algn="ctr"/>
-            <a:r>
-              <a:rPr lang="en-US" sz="1400"/>
-              <a:t>ConsenSys</a:t>
-            </a:r>
-          </a:p>
-          <a:p>
-            <a:pPr algn="ctr"/>
-            <a:r>
-              <a:rPr lang="en-US" sz="1400"/>
-              <a:t>Brooklyn, New York</a:t>
-            </a:r>
-          </a:p>
-        </p:txBody>
-      </p:sp>
       <p:pic>
         <p:nvPicPr>
-          <p:cNvPr id="1032" name="Picture 8" descr="MetaMask – Get this Extension for 🦊 Firefox (en-US)">
+          <p:cNvPr id="9" name="Graphic 8" descr="Employee badge outline">
             <a:extLst>
               <a:ext uri="{FF2B5EF4-FFF2-40B4-BE49-F238E27FC236}">
-                <a16:creationId xmlns:a16="http://schemas.microsoft.com/office/drawing/2014/main" id="{2D8924E9-3506-C949-A240-5CF490D28C07}"/>
-              </a:ext>
-            </a:extLst>
-          </p:cNvPr>
-          <p:cNvPicPr>
-            <a:picLocks noChangeAspect="1" noChangeArrowheads="1"/>
-          </p:cNvPicPr>
-          <p:nvPr/>
-        </p:nvPicPr>
-        <p:blipFill>
-          <a:blip r:embed="rId6" cstate="email">
-            <a:extLst>
-              <a:ext uri="{28A0092B-C50C-407E-A947-70E740481C1C}">
-                <a14:useLocalDpi xmlns:a14="http://schemas.microsoft.com/office/drawing/2010/main"/>
-              </a:ext>
-            </a:extLst>
-          </a:blip>
-          <a:srcRect/>
-          <a:stretch>
-            <a:fillRect/>
-          </a:stretch>
-        </p:blipFill>
-        <p:spPr bwMode="auto">
-          <a:xfrm>
-            <a:off x="98297" y="1758016"/>
-            <a:ext cx="3766817" cy="2353377"/>
-          </a:xfrm>
-          <a:prstGeom prst="rect">
-            <a:avLst/>
-          </a:prstGeom>
-          <a:noFill/>
-          <a:ln>
-            <a:solidFill>
-              <a:schemeClr val="accent1"/>
-            </a:solidFill>
-          </a:ln>
-          <a:extLst>
-            <a:ext uri="{909E8E84-426E-40DD-AFC4-6F175D3DCCD1}">
-              <a14:hiddenFill xmlns:a14="http://schemas.microsoft.com/office/drawing/2010/main">
-                <a:solidFill>
-                  <a:srgbClr val="FFFFFF"/>
-                </a:solidFill>
-              </a14:hiddenFill>
-            </a:ext>
-          </a:extLst>
-        </p:spPr>
-      </p:pic>
-      <p:pic>
-        <p:nvPicPr>
-          <p:cNvPr id="6" name="Picture 5">
-            <a:extLst>
-              <a:ext uri="{FF2B5EF4-FFF2-40B4-BE49-F238E27FC236}">
-                <a16:creationId xmlns:a16="http://schemas.microsoft.com/office/drawing/2014/main" id="{DA629FB8-3D9E-CA44-9067-60F4B592AA53}"/>
+                <a16:creationId xmlns:a16="http://schemas.microsoft.com/office/drawing/2014/main" id="{C9353079-AB35-E14A-9C24-0DB177CD6FED}"/>
               </a:ext>
             </a:extLst>
           </p:cNvPr>
@@ -6547,10 +5856,13 @@
           <p:nvPr/>
         </p:nvPicPr>
         <p:blipFill>
-          <a:blip r:embed="rId7" cstate="email">
+          <a:blip r:embed="rId8" cstate="email">
             <a:extLst>
               <a:ext uri="{28A0092B-C50C-407E-A947-70E740481C1C}">
                 <a14:useLocalDpi xmlns:a14="http://schemas.microsoft.com/office/drawing/2010/main"/>
+              </a:ext>
+              <a:ext uri="{96DAC541-7B7A-43D3-8B79-37D633B846F1}">
+                <asvg:svgBlip xmlns:asvg="http://schemas.microsoft.com/office/drawing/2016/SVG/main" r:embed="rId9"/>
               </a:ext>
             </a:extLst>
           </a:blip>
@@ -6560,20 +5872,104 @@
         </p:blipFill>
         <p:spPr>
           <a:xfrm>
-            <a:off x="134536" y="4481654"/>
-            <a:ext cx="3645952" cy="2106441"/>
+            <a:off x="9328730" y="3257137"/>
+            <a:ext cx="431654" cy="431654"/>
           </a:xfrm>
           <a:prstGeom prst="rect">
             <a:avLst/>
           </a:prstGeom>
         </p:spPr>
       </p:pic>
-      <p:sp>
-        <p:nvSpPr>
-          <p:cNvPr id="7" name="TextBox 6">
+      <p:cxnSp>
+        <p:nvCxnSpPr>
+          <p:cNvPr id="10" name="Straight Arrow Connector 9">
             <a:extLst>
               <a:ext uri="{FF2B5EF4-FFF2-40B4-BE49-F238E27FC236}">
-                <a16:creationId xmlns:a16="http://schemas.microsoft.com/office/drawing/2014/main" id="{EF72CAD9-D640-5044-99D2-CF1C8DF2F0A2}"/>
+                <a16:creationId xmlns:a16="http://schemas.microsoft.com/office/drawing/2014/main" id="{F631E980-EEA0-AD45-9DC8-2EE705A20563}"/>
+              </a:ext>
+            </a:extLst>
+          </p:cNvPr>
+          <p:cNvCxnSpPr>
+            <a:stCxn id="5" idx="2"/>
+            <a:endCxn id="8" idx="0"/>
+          </p:cNvCxnSpPr>
+          <p:nvPr/>
+        </p:nvCxnSpPr>
+        <p:spPr>
+          <a:xfrm flipH="1">
+            <a:off x="7796116" y="2685498"/>
+            <a:ext cx="5306" cy="572574"/>
+          </a:xfrm>
+          <a:prstGeom prst="straightConnector1">
+            <a:avLst/>
+          </a:prstGeom>
+          <a:ln w="38100">
+            <a:tailEnd type="triangle"/>
+          </a:ln>
+        </p:spPr>
+        <p:style>
+          <a:lnRef idx="1">
+            <a:schemeClr val="dk1"/>
+          </a:lnRef>
+          <a:fillRef idx="0">
+            <a:schemeClr val="dk1"/>
+          </a:fillRef>
+          <a:effectRef idx="0">
+            <a:schemeClr val="dk1"/>
+          </a:effectRef>
+          <a:fontRef idx="minor">
+            <a:schemeClr val="tx1"/>
+          </a:fontRef>
+        </p:style>
+      </p:cxnSp>
+      <p:cxnSp>
+        <p:nvCxnSpPr>
+          <p:cNvPr id="11" name="Straight Arrow Connector 10">
+            <a:extLst>
+              <a:ext uri="{FF2B5EF4-FFF2-40B4-BE49-F238E27FC236}">
+                <a16:creationId xmlns:a16="http://schemas.microsoft.com/office/drawing/2014/main" id="{C1CBDA0D-2E00-4849-9D6D-DD0446FA7BC4}"/>
+              </a:ext>
+            </a:extLst>
+          </p:cNvPr>
+          <p:cNvCxnSpPr>
+            <a:stCxn id="6" idx="2"/>
+            <a:endCxn id="9" idx="0"/>
+          </p:cNvCxnSpPr>
+          <p:nvPr/>
+        </p:nvCxnSpPr>
+        <p:spPr>
+          <a:xfrm>
+            <a:off x="9534975" y="2685498"/>
+            <a:ext cx="9582" cy="571639"/>
+          </a:xfrm>
+          <a:prstGeom prst="straightConnector1">
+            <a:avLst/>
+          </a:prstGeom>
+          <a:ln w="38100">
+            <a:tailEnd type="triangle"/>
+          </a:ln>
+        </p:spPr>
+        <p:style>
+          <a:lnRef idx="1">
+            <a:schemeClr val="dk1"/>
+          </a:lnRef>
+          <a:fillRef idx="0">
+            <a:schemeClr val="dk1"/>
+          </a:fillRef>
+          <a:effectRef idx="0">
+            <a:schemeClr val="dk1"/>
+          </a:effectRef>
+          <a:fontRef idx="minor">
+            <a:schemeClr val="tx1"/>
+          </a:fontRef>
+        </p:style>
+      </p:cxnSp>
+      <p:sp>
+        <p:nvSpPr>
+          <p:cNvPr id="4" name="TextBox 3">
+            <a:extLst>
+              <a:ext uri="{FF2B5EF4-FFF2-40B4-BE49-F238E27FC236}">
+                <a16:creationId xmlns:a16="http://schemas.microsoft.com/office/drawing/2014/main" id="{363089A5-F958-7E4B-B562-F7C474EDDB06}"/>
               </a:ext>
             </a:extLst>
           </p:cNvPr>
@@ -6582,8 +5978,8 @@
         </p:nvSpPr>
         <p:spPr>
           <a:xfrm>
-            <a:off x="10738" y="588610"/>
-            <a:ext cx="2462023" cy="523220"/>
+            <a:off x="7496094" y="1690688"/>
+            <a:ext cx="750526" cy="369332"/>
           </a:xfrm>
           <a:prstGeom prst="rect">
             <a:avLst/>
@@ -6591,26 +5987,955 @@
           <a:noFill/>
         </p:spPr>
         <p:txBody>
-          <a:bodyPr wrap="square" rtlCol="0">
+          <a:bodyPr wrap="none" rtlCol="0">
             <a:spAutoFit/>
           </a:bodyPr>
           <a:lstStyle/>
           <a:p>
             <a:r>
-              <a:rPr lang="en-US" sz="1400" b="1">
+              <a:rPr lang="en-US" dirty="0"/>
+              <a:t>Public</a:t>
+            </a:r>
+          </a:p>
+        </p:txBody>
+      </p:sp>
+      <p:sp>
+        <p:nvSpPr>
+          <p:cNvPr id="13" name="TextBox 12">
+            <a:extLst>
+              <a:ext uri="{FF2B5EF4-FFF2-40B4-BE49-F238E27FC236}">
+                <a16:creationId xmlns:a16="http://schemas.microsoft.com/office/drawing/2014/main" id="{D53AE619-26D9-534C-BDD3-B2FDD674062E}"/>
+              </a:ext>
+            </a:extLst>
+          </p:cNvPr>
+          <p:cNvSpPr txBox="1"/>
+          <p:nvPr/>
+        </p:nvSpPr>
+        <p:spPr>
+          <a:xfrm>
+            <a:off x="9117232" y="1695590"/>
+            <a:ext cx="835485" cy="369332"/>
+          </a:xfrm>
+          <a:prstGeom prst="rect">
+            <a:avLst/>
+          </a:prstGeom>
+          <a:noFill/>
+        </p:spPr>
+        <p:txBody>
+          <a:bodyPr wrap="none" rtlCol="0">
+            <a:spAutoFit/>
+          </a:bodyPr>
+          <a:lstStyle/>
+          <a:p>
+            <a:r>
+              <a:rPr lang="en-US" dirty="0"/>
+              <a:t>Private</a:t>
+            </a:r>
+          </a:p>
+        </p:txBody>
+      </p:sp>
+      <p:sp>
+        <p:nvSpPr>
+          <p:cNvPr id="14" name="TextBox 13">
+            <a:extLst>
+              <a:ext uri="{FF2B5EF4-FFF2-40B4-BE49-F238E27FC236}">
+                <a16:creationId xmlns:a16="http://schemas.microsoft.com/office/drawing/2014/main" id="{5C1800A6-7E7C-2345-9A41-61EADE78D4DC}"/>
+              </a:ext>
+            </a:extLst>
+          </p:cNvPr>
+          <p:cNvSpPr txBox="1"/>
+          <p:nvPr/>
+        </p:nvSpPr>
+        <p:spPr>
+          <a:xfrm>
+            <a:off x="7244489" y="3796238"/>
+            <a:ext cx="1103251" cy="369332"/>
+          </a:xfrm>
+          <a:prstGeom prst="rect">
+            <a:avLst/>
+          </a:prstGeom>
+          <a:noFill/>
+        </p:spPr>
+        <p:txBody>
+          <a:bodyPr wrap="none" rtlCol="0">
+            <a:spAutoFit/>
+          </a:bodyPr>
+          <a:lstStyle/>
+          <a:p>
+            <a:r>
+              <a:rPr lang="en-US" dirty="0"/>
+              <a:t>“Address”</a:t>
+            </a:r>
+          </a:p>
+        </p:txBody>
+      </p:sp>
+      <p:sp>
+        <p:nvSpPr>
+          <p:cNvPr id="15" name="TextBox 14">
+            <a:extLst>
+              <a:ext uri="{FF2B5EF4-FFF2-40B4-BE49-F238E27FC236}">
+                <a16:creationId xmlns:a16="http://schemas.microsoft.com/office/drawing/2014/main" id="{37121F2A-6C02-9548-B423-89AB267A0D46}"/>
+              </a:ext>
+            </a:extLst>
+          </p:cNvPr>
+          <p:cNvSpPr txBox="1"/>
+          <p:nvPr/>
+        </p:nvSpPr>
+        <p:spPr>
+          <a:xfrm>
+            <a:off x="8852864" y="3828776"/>
+            <a:ext cx="1364220" cy="369332"/>
+          </a:xfrm>
+          <a:prstGeom prst="rect">
+            <a:avLst/>
+          </a:prstGeom>
+          <a:noFill/>
+        </p:spPr>
+        <p:txBody>
+          <a:bodyPr wrap="none" rtlCol="0">
+            <a:spAutoFit/>
+          </a:bodyPr>
+          <a:lstStyle/>
+          <a:p>
+            <a:r>
+              <a:rPr lang="en-US" dirty="0"/>
+              <a:t>“House Key”</a:t>
+            </a:r>
+          </a:p>
+        </p:txBody>
+      </p:sp>
+      <p:sp>
+        <p:nvSpPr>
+          <p:cNvPr id="12" name="TextBox 11">
+            <a:extLst>
+              <a:ext uri="{FF2B5EF4-FFF2-40B4-BE49-F238E27FC236}">
+                <a16:creationId xmlns:a16="http://schemas.microsoft.com/office/drawing/2014/main" id="{F391AC64-BFA1-184A-BA49-BF2D2BB4C6CE}"/>
+              </a:ext>
+            </a:extLst>
+          </p:cNvPr>
+          <p:cNvSpPr txBox="1"/>
+          <p:nvPr/>
+        </p:nvSpPr>
+        <p:spPr>
+          <a:xfrm>
+            <a:off x="671991" y="2039167"/>
+            <a:ext cx="5650906" cy="923330"/>
+          </a:xfrm>
+          <a:prstGeom prst="rect">
+            <a:avLst/>
+          </a:prstGeom>
+          <a:noFill/>
+        </p:spPr>
+        <p:txBody>
+          <a:bodyPr wrap="none" rtlCol="0">
+            <a:spAutoFit/>
+          </a:bodyPr>
+          <a:lstStyle/>
+          <a:p>
+            <a:pPr marL="285750" indent="-285750">
+              <a:buFont typeface="Arial" panose="020B0604020202020204" pitchFamily="34" charset="0"/>
+              <a:buChar char="•"/>
+            </a:pPr>
+            <a:r>
+              <a:rPr lang="en-US" dirty="0"/>
+              <a:t>Symmetric vs Asymmetric encryption</a:t>
+            </a:r>
+          </a:p>
+          <a:p>
+            <a:pPr marL="285750" indent="-285750">
+              <a:buFont typeface="Arial" panose="020B0604020202020204" pitchFamily="34" charset="0"/>
+              <a:buChar char="•"/>
+            </a:pPr>
+            <a:r>
+              <a:rPr lang="en-US" dirty="0"/>
+              <a:t>Private key enables send &amp; Public key enables receiving</a:t>
+            </a:r>
+          </a:p>
+          <a:p>
+            <a:pPr marL="285750" indent="-285750">
+              <a:buFont typeface="Arial" panose="020B0604020202020204" pitchFamily="34" charset="0"/>
+              <a:buChar char="•"/>
+            </a:pPr>
+            <a:r>
+              <a:rPr lang="en-US" dirty="0"/>
+              <a:t>Public key generates from private key. No vice versa</a:t>
+            </a:r>
+          </a:p>
+        </p:txBody>
+      </p:sp>
+      <p:sp>
+        <p:nvSpPr>
+          <p:cNvPr id="16" name="TextBox 15">
+            <a:extLst>
+              <a:ext uri="{FF2B5EF4-FFF2-40B4-BE49-F238E27FC236}">
+                <a16:creationId xmlns:a16="http://schemas.microsoft.com/office/drawing/2014/main" id="{19112EFC-66A8-7147-9611-1CE15DBED304}"/>
+              </a:ext>
+            </a:extLst>
+          </p:cNvPr>
+          <p:cNvSpPr txBox="1"/>
+          <p:nvPr/>
+        </p:nvSpPr>
+        <p:spPr>
+          <a:xfrm>
+            <a:off x="1759147" y="4557009"/>
+            <a:ext cx="4563750" cy="369332"/>
+          </a:xfrm>
+          <a:prstGeom prst="rect">
+            <a:avLst/>
+          </a:prstGeom>
+          <a:noFill/>
+        </p:spPr>
+        <p:txBody>
+          <a:bodyPr wrap="none" rtlCol="0">
+            <a:spAutoFit/>
+          </a:bodyPr>
+          <a:lstStyle/>
+          <a:p>
+            <a:r>
+              <a:rPr lang="en-US" dirty="0"/>
+              <a:t>01- </a:t>
+            </a:r>
+            <a:r>
+              <a:rPr lang="en-US" dirty="0">
                 <a:solidFill>
-                  <a:srgbClr val="00B050"/>
+                  <a:schemeClr val="accent1">
+                    <a:lumMod val="50000"/>
+                  </a:schemeClr>
+                </a:solidFill>
+                <a:highlight>
+                  <a:srgbClr val="FFFF00"/>
+                </a:highlight>
+              </a:rPr>
+              <a:t>Malte sends 1 BTC to Martin</a:t>
+            </a:r>
+            <a:r>
+              <a:rPr lang="en-US" dirty="0"/>
+              <a:t>-</a:t>
+            </a:r>
+            <a:r>
+              <a:rPr lang="en-US" dirty="0">
+                <a:solidFill>
+                  <a:srgbClr val="C00000"/>
                 </a:solidFill>
               </a:rPr>
-              <a:t>A software cryptocurrency wallet for Etherium blockchain</a:t>
-            </a:r>
+              <a:t>473ms22akkq</a:t>
+            </a:r>
+          </a:p>
+        </p:txBody>
+      </p:sp>
+      <p:cxnSp>
+        <p:nvCxnSpPr>
+          <p:cNvPr id="18" name="Straight Arrow Connector 17">
+            <a:extLst>
+              <a:ext uri="{FF2B5EF4-FFF2-40B4-BE49-F238E27FC236}">
+                <a16:creationId xmlns:a16="http://schemas.microsoft.com/office/drawing/2014/main" id="{4B5F7D46-66E7-EE4E-8FFA-91BB1BC6089F}"/>
+              </a:ext>
+            </a:extLst>
+          </p:cNvPr>
+          <p:cNvCxnSpPr/>
+          <p:nvPr/>
+        </p:nvCxnSpPr>
+        <p:spPr>
+          <a:xfrm flipV="1">
+            <a:off x="1759147" y="4926341"/>
+            <a:ext cx="174584" cy="784911"/>
+          </a:xfrm>
+          <a:prstGeom prst="straightConnector1">
+            <a:avLst/>
+          </a:prstGeom>
+          <a:ln>
+            <a:tailEnd type="triangle"/>
+          </a:ln>
+        </p:spPr>
+        <p:style>
+          <a:lnRef idx="1">
+            <a:schemeClr val="accent1"/>
+          </a:lnRef>
+          <a:fillRef idx="0">
+            <a:schemeClr val="accent1"/>
+          </a:fillRef>
+          <a:effectRef idx="0">
+            <a:schemeClr val="accent1"/>
+          </a:effectRef>
+          <a:fontRef idx="minor">
+            <a:schemeClr val="tx1"/>
+          </a:fontRef>
+        </p:style>
+      </p:cxnSp>
+      <p:cxnSp>
+        <p:nvCxnSpPr>
+          <p:cNvPr id="20" name="Straight Arrow Connector 19">
+            <a:extLst>
+              <a:ext uri="{FF2B5EF4-FFF2-40B4-BE49-F238E27FC236}">
+                <a16:creationId xmlns:a16="http://schemas.microsoft.com/office/drawing/2014/main" id="{C14761E8-67C6-D843-AD68-63B980694FC9}"/>
+              </a:ext>
+            </a:extLst>
+          </p:cNvPr>
+          <p:cNvCxnSpPr/>
+          <p:nvPr/>
+        </p:nvCxnSpPr>
+        <p:spPr>
+          <a:xfrm flipV="1">
+            <a:off x="3612630" y="4926341"/>
+            <a:ext cx="119921" cy="784911"/>
+          </a:xfrm>
+          <a:prstGeom prst="straightConnector1">
+            <a:avLst/>
+          </a:prstGeom>
+          <a:ln>
+            <a:tailEnd type="triangle"/>
+          </a:ln>
+        </p:spPr>
+        <p:style>
+          <a:lnRef idx="1">
+            <a:schemeClr val="accent1"/>
+          </a:lnRef>
+          <a:fillRef idx="0">
+            <a:schemeClr val="accent1"/>
+          </a:fillRef>
+          <a:effectRef idx="0">
+            <a:schemeClr val="accent1"/>
+          </a:effectRef>
+          <a:fontRef idx="minor">
+            <a:schemeClr val="tx1"/>
+          </a:fontRef>
+        </p:style>
+      </p:cxnSp>
+      <p:cxnSp>
+        <p:nvCxnSpPr>
+          <p:cNvPr id="22" name="Straight Arrow Connector 21">
+            <a:extLst>
+              <a:ext uri="{FF2B5EF4-FFF2-40B4-BE49-F238E27FC236}">
+                <a16:creationId xmlns:a16="http://schemas.microsoft.com/office/drawing/2014/main" id="{16662B9F-7BC2-CE48-903B-F00807619D59}"/>
+              </a:ext>
+            </a:extLst>
+          </p:cNvPr>
+          <p:cNvCxnSpPr/>
+          <p:nvPr/>
+        </p:nvCxnSpPr>
+        <p:spPr>
+          <a:xfrm flipV="1">
+            <a:off x="5411450" y="4926341"/>
+            <a:ext cx="119921" cy="784911"/>
+          </a:xfrm>
+          <a:prstGeom prst="straightConnector1">
+            <a:avLst/>
+          </a:prstGeom>
+          <a:ln>
+            <a:tailEnd type="triangle"/>
+          </a:ln>
+        </p:spPr>
+        <p:style>
+          <a:lnRef idx="1">
+            <a:schemeClr val="accent1"/>
+          </a:lnRef>
+          <a:fillRef idx="0">
+            <a:schemeClr val="accent1"/>
+          </a:fillRef>
+          <a:effectRef idx="0">
+            <a:schemeClr val="accent1"/>
+          </a:effectRef>
+          <a:fontRef idx="minor">
+            <a:schemeClr val="tx1"/>
+          </a:fontRef>
+        </p:style>
+      </p:cxnSp>
+      <p:sp>
+        <p:nvSpPr>
+          <p:cNvPr id="21" name="TextBox 20">
+            <a:extLst>
+              <a:ext uri="{FF2B5EF4-FFF2-40B4-BE49-F238E27FC236}">
+                <a16:creationId xmlns:a16="http://schemas.microsoft.com/office/drawing/2014/main" id="{8298E2C6-E805-C24D-9AB6-A71DC5C08D63}"/>
+              </a:ext>
+            </a:extLst>
+          </p:cNvPr>
+          <p:cNvSpPr txBox="1"/>
+          <p:nvPr/>
+        </p:nvSpPr>
+        <p:spPr>
+          <a:xfrm>
+            <a:off x="744738" y="5895918"/>
+            <a:ext cx="1777538" cy="369332"/>
+          </a:xfrm>
+          <a:prstGeom prst="rect">
+            <a:avLst/>
+          </a:prstGeom>
+          <a:noFill/>
+        </p:spPr>
+        <p:txBody>
+          <a:bodyPr wrap="none" rtlCol="0">
+            <a:spAutoFit/>
+          </a:bodyPr>
+          <a:lstStyle/>
+          <a:p>
+            <a:r>
+              <a:rPr lang="en-US" dirty="0"/>
+              <a:t>Unique identifier</a:t>
+            </a:r>
+          </a:p>
+        </p:txBody>
+      </p:sp>
+      <p:sp>
+        <p:nvSpPr>
+          <p:cNvPr id="24" name="TextBox 23">
+            <a:extLst>
+              <a:ext uri="{FF2B5EF4-FFF2-40B4-BE49-F238E27FC236}">
+                <a16:creationId xmlns:a16="http://schemas.microsoft.com/office/drawing/2014/main" id="{DD693D81-F26A-2F4C-B366-C8BE792D3410}"/>
+              </a:ext>
+            </a:extLst>
+          </p:cNvPr>
+          <p:cNvSpPr txBox="1"/>
+          <p:nvPr/>
+        </p:nvSpPr>
+        <p:spPr>
+          <a:xfrm>
+            <a:off x="3077296" y="5921115"/>
+            <a:ext cx="1241109" cy="369332"/>
+          </a:xfrm>
+          <a:prstGeom prst="rect">
+            <a:avLst/>
+          </a:prstGeom>
+          <a:noFill/>
+        </p:spPr>
+        <p:txBody>
+          <a:bodyPr wrap="none" rtlCol="0">
+            <a:spAutoFit/>
+          </a:bodyPr>
+          <a:lstStyle/>
+          <a:p>
+            <a:r>
+              <a:rPr lang="en-US" dirty="0">
+                <a:highlight>
+                  <a:srgbClr val="FFFF00"/>
+                </a:highlight>
+              </a:rPr>
+              <a:t>transaction</a:t>
+            </a:r>
+          </a:p>
+        </p:txBody>
+      </p:sp>
+      <p:sp>
+        <p:nvSpPr>
+          <p:cNvPr id="25" name="TextBox 24">
+            <a:extLst>
+              <a:ext uri="{FF2B5EF4-FFF2-40B4-BE49-F238E27FC236}">
+                <a16:creationId xmlns:a16="http://schemas.microsoft.com/office/drawing/2014/main" id="{F8B25983-DCCF-8C44-9508-E19A15A8DC5E}"/>
+              </a:ext>
+            </a:extLst>
+          </p:cNvPr>
+          <p:cNvSpPr txBox="1"/>
+          <p:nvPr/>
+        </p:nvSpPr>
+        <p:spPr>
+          <a:xfrm>
+            <a:off x="4850855" y="5921115"/>
+            <a:ext cx="762773" cy="369332"/>
+          </a:xfrm>
+          <a:prstGeom prst="rect">
+            <a:avLst/>
+          </a:prstGeom>
+          <a:noFill/>
+        </p:spPr>
+        <p:txBody>
+          <a:bodyPr wrap="none" rtlCol="0">
+            <a:spAutoFit/>
+          </a:bodyPr>
+          <a:lstStyle/>
+          <a:p>
+            <a:r>
+              <a:rPr lang="en-US" dirty="0">
+                <a:solidFill>
+                  <a:srgbClr val="C00000"/>
+                </a:solidFill>
+              </a:rPr>
+              <a:t>stamp</a:t>
+            </a:r>
+          </a:p>
+        </p:txBody>
+      </p:sp>
+      <p:cxnSp>
+        <p:nvCxnSpPr>
+          <p:cNvPr id="26" name="Straight Arrow Connector 25">
+            <a:extLst>
+              <a:ext uri="{FF2B5EF4-FFF2-40B4-BE49-F238E27FC236}">
+                <a16:creationId xmlns:a16="http://schemas.microsoft.com/office/drawing/2014/main" id="{7DA55EA8-940B-C142-8619-CFD889578CDB}"/>
+              </a:ext>
+            </a:extLst>
+          </p:cNvPr>
+          <p:cNvCxnSpPr>
+            <a:cxnSpLocks/>
+          </p:cNvCxnSpPr>
+          <p:nvPr/>
+        </p:nvCxnSpPr>
+        <p:spPr>
+          <a:xfrm>
+            <a:off x="5662572" y="6107854"/>
+            <a:ext cx="433428" cy="0"/>
+          </a:xfrm>
+          <a:prstGeom prst="straightConnector1">
+            <a:avLst/>
+          </a:prstGeom>
+          <a:ln>
+            <a:tailEnd type="triangle"/>
+          </a:ln>
+        </p:spPr>
+        <p:style>
+          <a:lnRef idx="1">
+            <a:schemeClr val="accent1"/>
+          </a:lnRef>
+          <a:fillRef idx="0">
+            <a:schemeClr val="accent1"/>
+          </a:fillRef>
+          <a:effectRef idx="0">
+            <a:schemeClr val="accent1"/>
+          </a:effectRef>
+          <a:fontRef idx="minor">
+            <a:schemeClr val="tx1"/>
+          </a:fontRef>
+        </p:style>
+      </p:cxnSp>
+      <p:sp>
+        <p:nvSpPr>
+          <p:cNvPr id="27" name="TextBox 26">
+            <a:extLst>
+              <a:ext uri="{FF2B5EF4-FFF2-40B4-BE49-F238E27FC236}">
+                <a16:creationId xmlns:a16="http://schemas.microsoft.com/office/drawing/2014/main" id="{41F6604F-6D88-974C-8C4E-6AA69DA5E0AB}"/>
+              </a:ext>
+            </a:extLst>
+          </p:cNvPr>
+          <p:cNvSpPr txBox="1"/>
+          <p:nvPr/>
+        </p:nvSpPr>
+        <p:spPr>
+          <a:xfrm>
+            <a:off x="6322897" y="5955880"/>
+            <a:ext cx="2936253" cy="369332"/>
+          </a:xfrm>
+          <a:prstGeom prst="rect">
+            <a:avLst/>
+          </a:prstGeom>
+          <a:noFill/>
+        </p:spPr>
+        <p:txBody>
+          <a:bodyPr wrap="none" rtlCol="0">
+            <a:spAutoFit/>
+          </a:bodyPr>
+          <a:lstStyle/>
+          <a:p>
+            <a:r>
+              <a:rPr lang="en-US" dirty="0" err="1"/>
+              <a:t>PrivateKey</a:t>
+            </a:r>
+            <a:r>
+              <a:rPr lang="en-US" dirty="0"/>
+              <a:t>(UID + transaction)</a:t>
+            </a:r>
+          </a:p>
+        </p:txBody>
+      </p:sp>
+      <p:pic>
+        <p:nvPicPr>
+          <p:cNvPr id="29" name="Graphic 28" descr="Old Key with solid fill">
+            <a:extLst>
+              <a:ext uri="{FF2B5EF4-FFF2-40B4-BE49-F238E27FC236}">
+                <a16:creationId xmlns:a16="http://schemas.microsoft.com/office/drawing/2014/main" id="{2333B70C-50DE-2E44-A79B-EB013737E8AE}"/>
+              </a:ext>
+            </a:extLst>
+          </p:cNvPr>
+          <p:cNvPicPr>
+            <a:picLocks noChangeAspect="1"/>
+          </p:cNvPicPr>
+          <p:nvPr/>
+        </p:nvPicPr>
+        <p:blipFill>
+          <a:blip r:embed="rId2" cstate="email">
+            <a:extLst>
+              <a:ext uri="{28A0092B-C50C-407E-A947-70E740481C1C}">
+                <a14:useLocalDpi xmlns:a14="http://schemas.microsoft.com/office/drawing/2010/main"/>
+              </a:ext>
+              <a:ext uri="{96DAC541-7B7A-43D3-8B79-37D633B846F1}">
+                <asvg:svgBlip xmlns:asvg="http://schemas.microsoft.com/office/drawing/2016/SVG/main" r:embed="rId3"/>
+              </a:ext>
+            </a:extLst>
+          </a:blip>
+          <a:stretch>
+            <a:fillRect/>
+          </a:stretch>
+        </p:blipFill>
+        <p:spPr>
+          <a:xfrm>
+            <a:off x="9805096" y="5173086"/>
+            <a:ext cx="538166" cy="538166"/>
+          </a:xfrm>
+          <a:prstGeom prst="rect">
+            <a:avLst/>
+          </a:prstGeom>
+        </p:spPr>
+      </p:pic>
+      <p:pic>
+        <p:nvPicPr>
+          <p:cNvPr id="30" name="Graphic 29" descr="Users with solid fill">
+            <a:extLst>
+              <a:ext uri="{FF2B5EF4-FFF2-40B4-BE49-F238E27FC236}">
+                <a16:creationId xmlns:a16="http://schemas.microsoft.com/office/drawing/2014/main" id="{C948B39E-ECC7-034B-9C00-D1AA6BDD5626}"/>
+              </a:ext>
+            </a:extLst>
+          </p:cNvPr>
+          <p:cNvPicPr>
+            <a:picLocks noChangeAspect="1"/>
+          </p:cNvPicPr>
+          <p:nvPr/>
+        </p:nvPicPr>
+        <p:blipFill>
+          <a:blip r:embed="rId10">
+            <a:extLst>
+              <a:ext uri="{96DAC541-7B7A-43D3-8B79-37D633B846F1}">
+                <asvg:svgBlip xmlns:asvg="http://schemas.microsoft.com/office/drawing/2016/SVG/main" r:embed="rId11"/>
+              </a:ext>
+            </a:extLst>
+          </a:blip>
+          <a:stretch>
+            <a:fillRect/>
+          </a:stretch>
+        </p:blipFill>
+        <p:spPr>
+          <a:xfrm>
+            <a:off x="10392114" y="5041480"/>
+            <a:ext cx="914400" cy="914400"/>
+          </a:xfrm>
+          <a:prstGeom prst="rect">
+            <a:avLst/>
+          </a:prstGeom>
+        </p:spPr>
+      </p:pic>
+      <p:cxnSp>
+        <p:nvCxnSpPr>
+          <p:cNvPr id="32" name="Straight Arrow Connector 31">
+            <a:extLst>
+              <a:ext uri="{FF2B5EF4-FFF2-40B4-BE49-F238E27FC236}">
+                <a16:creationId xmlns:a16="http://schemas.microsoft.com/office/drawing/2014/main" id="{67AD8ED7-F7DD-6440-A712-E200BAD56D09}"/>
+              </a:ext>
+            </a:extLst>
+          </p:cNvPr>
+          <p:cNvCxnSpPr>
+            <a:cxnSpLocks/>
+            <a:stCxn id="29" idx="2"/>
+            <a:endCxn id="27" idx="3"/>
+          </p:cNvCxnSpPr>
+          <p:nvPr/>
+        </p:nvCxnSpPr>
+        <p:spPr>
+          <a:xfrm flipH="1">
+            <a:off x="9259150" y="5711252"/>
+            <a:ext cx="815029" cy="429294"/>
+          </a:xfrm>
+          <a:prstGeom prst="straightConnector1">
+            <a:avLst/>
+          </a:prstGeom>
+          <a:ln>
+            <a:tailEnd type="triangle"/>
+          </a:ln>
+        </p:spPr>
+        <p:style>
+          <a:lnRef idx="1">
+            <a:schemeClr val="accent1"/>
+          </a:lnRef>
+          <a:fillRef idx="0">
+            <a:schemeClr val="accent1"/>
+          </a:fillRef>
+          <a:effectRef idx="0">
+            <a:schemeClr val="accent1"/>
+          </a:effectRef>
+          <a:fontRef idx="minor">
+            <a:schemeClr val="tx1"/>
+          </a:fontRef>
+        </p:style>
+      </p:cxnSp>
+      <p:sp>
+        <p:nvSpPr>
+          <p:cNvPr id="34" name="TextBox 33">
+            <a:extLst>
+              <a:ext uri="{FF2B5EF4-FFF2-40B4-BE49-F238E27FC236}">
+                <a16:creationId xmlns:a16="http://schemas.microsoft.com/office/drawing/2014/main" id="{7669DC17-CE2B-E64C-9935-706CD126CDD5}"/>
+              </a:ext>
+            </a:extLst>
+          </p:cNvPr>
+          <p:cNvSpPr txBox="1"/>
+          <p:nvPr/>
+        </p:nvSpPr>
+        <p:spPr>
+          <a:xfrm rot="19843804">
+            <a:off x="9548549" y="5851623"/>
+            <a:ext cx="922047" cy="369332"/>
+          </a:xfrm>
+          <a:prstGeom prst="rect">
+            <a:avLst/>
+          </a:prstGeom>
+          <a:noFill/>
+        </p:spPr>
+        <p:txBody>
+          <a:bodyPr wrap="none" rtlCol="0">
+            <a:spAutoFit/>
+          </a:bodyPr>
+          <a:lstStyle/>
+          <a:p>
+            <a:r>
+              <a:rPr lang="en-US" dirty="0"/>
+              <a:t>validate</a:t>
+            </a:r>
+          </a:p>
+        </p:txBody>
+      </p:sp>
+      <p:sp>
+        <p:nvSpPr>
+          <p:cNvPr id="35" name="TextBox 34">
+            <a:extLst>
+              <a:ext uri="{FF2B5EF4-FFF2-40B4-BE49-F238E27FC236}">
+                <a16:creationId xmlns:a16="http://schemas.microsoft.com/office/drawing/2014/main" id="{937094D4-C58C-9844-B226-17B63D0EE261}"/>
+              </a:ext>
+            </a:extLst>
+          </p:cNvPr>
+          <p:cNvSpPr txBox="1"/>
+          <p:nvPr/>
+        </p:nvSpPr>
+        <p:spPr>
+          <a:xfrm>
+            <a:off x="934192" y="4014653"/>
+            <a:ext cx="3057184" cy="369332"/>
+          </a:xfrm>
+          <a:prstGeom prst="rect">
+            <a:avLst/>
+          </a:prstGeom>
+          <a:noFill/>
+        </p:spPr>
+        <p:txBody>
+          <a:bodyPr wrap="none" rtlCol="0">
+            <a:spAutoFit/>
+          </a:bodyPr>
+          <a:lstStyle/>
+          <a:p>
+            <a:r>
+              <a:rPr lang="en-US" dirty="0"/>
+              <a:t>Example transaction structure:</a:t>
+            </a:r>
+          </a:p>
+        </p:txBody>
+      </p:sp>
+      <p:cxnSp>
+        <p:nvCxnSpPr>
+          <p:cNvPr id="37" name="Straight Arrow Connector 36">
+            <a:extLst>
+              <a:ext uri="{FF2B5EF4-FFF2-40B4-BE49-F238E27FC236}">
+                <a16:creationId xmlns:a16="http://schemas.microsoft.com/office/drawing/2014/main" id="{094C86D8-5894-2840-86B0-7D72E9B55C91}"/>
+              </a:ext>
+            </a:extLst>
+          </p:cNvPr>
+          <p:cNvCxnSpPr>
+            <a:cxnSpLocks/>
+          </p:cNvCxnSpPr>
+          <p:nvPr/>
+        </p:nvCxnSpPr>
+        <p:spPr>
+          <a:xfrm flipV="1">
+            <a:off x="9534974" y="852974"/>
+            <a:ext cx="0" cy="568130"/>
+          </a:xfrm>
+          <a:prstGeom prst="straightConnector1">
+            <a:avLst/>
+          </a:prstGeom>
+          <a:ln w="38100">
+            <a:tailEnd type="triangle"/>
+          </a:ln>
+        </p:spPr>
+        <p:style>
+          <a:lnRef idx="1">
+            <a:schemeClr val="dk1"/>
+          </a:lnRef>
+          <a:fillRef idx="0">
+            <a:schemeClr val="dk1"/>
+          </a:fillRef>
+          <a:effectRef idx="0">
+            <a:schemeClr val="dk1"/>
+          </a:effectRef>
+          <a:fontRef idx="minor">
+            <a:schemeClr val="tx1"/>
+          </a:fontRef>
+        </p:style>
+      </p:cxnSp>
+      <p:cxnSp>
+        <p:nvCxnSpPr>
+          <p:cNvPr id="39" name="Straight Arrow Connector 38">
+            <a:extLst>
+              <a:ext uri="{FF2B5EF4-FFF2-40B4-BE49-F238E27FC236}">
+                <a16:creationId xmlns:a16="http://schemas.microsoft.com/office/drawing/2014/main" id="{3CFFA514-D14B-A948-AB40-1F8EA2A13B00}"/>
+              </a:ext>
+            </a:extLst>
+          </p:cNvPr>
+          <p:cNvCxnSpPr>
+            <a:cxnSpLocks/>
+          </p:cNvCxnSpPr>
+          <p:nvPr/>
+        </p:nvCxnSpPr>
+        <p:spPr>
+          <a:xfrm flipV="1">
+            <a:off x="7786080" y="852974"/>
+            <a:ext cx="0" cy="568130"/>
+          </a:xfrm>
+          <a:prstGeom prst="straightConnector1">
+            <a:avLst/>
+          </a:prstGeom>
+          <a:ln w="38100">
+            <a:tailEnd type="triangle"/>
+          </a:ln>
+        </p:spPr>
+        <p:style>
+          <a:lnRef idx="1">
+            <a:schemeClr val="dk1"/>
+          </a:lnRef>
+          <a:fillRef idx="0">
+            <a:schemeClr val="dk1"/>
+          </a:fillRef>
+          <a:effectRef idx="0">
+            <a:schemeClr val="dk1"/>
+          </a:effectRef>
+          <a:fontRef idx="minor">
+            <a:schemeClr val="tx1"/>
+          </a:fontRef>
+        </p:style>
+      </p:cxnSp>
+      <p:sp>
+        <p:nvSpPr>
+          <p:cNvPr id="40" name="TextBox 39">
+            <a:extLst>
+              <a:ext uri="{FF2B5EF4-FFF2-40B4-BE49-F238E27FC236}">
+                <a16:creationId xmlns:a16="http://schemas.microsoft.com/office/drawing/2014/main" id="{01C089D3-CA54-AB41-BFD4-CE556B55C9B2}"/>
+              </a:ext>
+            </a:extLst>
+          </p:cNvPr>
+          <p:cNvSpPr txBox="1"/>
+          <p:nvPr/>
+        </p:nvSpPr>
+        <p:spPr>
+          <a:xfrm>
+            <a:off x="7469358" y="462017"/>
+            <a:ext cx="653512" cy="369332"/>
+          </a:xfrm>
+          <a:prstGeom prst="rect">
+            <a:avLst/>
+          </a:prstGeom>
+          <a:noFill/>
+        </p:spPr>
+        <p:txBody>
+          <a:bodyPr wrap="none" rtlCol="0">
+            <a:spAutoFit/>
+          </a:bodyPr>
+          <a:lstStyle/>
+          <a:p>
+            <a:r>
+              <a:rPr lang="en-US" dirty="0"/>
+              <a:t>Read</a:t>
+            </a:r>
+          </a:p>
+        </p:txBody>
+      </p:sp>
+      <p:sp>
+        <p:nvSpPr>
+          <p:cNvPr id="41" name="TextBox 40">
+            <a:extLst>
+              <a:ext uri="{FF2B5EF4-FFF2-40B4-BE49-F238E27FC236}">
+                <a16:creationId xmlns:a16="http://schemas.microsoft.com/office/drawing/2014/main" id="{D46DFD0B-2435-194A-AC9E-D5FE3D84EEF6}"/>
+              </a:ext>
+            </a:extLst>
+          </p:cNvPr>
+          <p:cNvSpPr txBox="1"/>
+          <p:nvPr/>
+        </p:nvSpPr>
+        <p:spPr>
+          <a:xfrm>
+            <a:off x="9208218" y="434263"/>
+            <a:ext cx="706027" cy="369332"/>
+          </a:xfrm>
+          <a:prstGeom prst="rect">
+            <a:avLst/>
+          </a:prstGeom>
+          <a:noFill/>
+        </p:spPr>
+        <p:txBody>
+          <a:bodyPr wrap="none" rtlCol="0">
+            <a:spAutoFit/>
+          </a:bodyPr>
+          <a:lstStyle/>
+          <a:p>
+            <a:r>
+              <a:rPr lang="en-US" dirty="0"/>
+              <a:t>Write</a:t>
+            </a:r>
+          </a:p>
+        </p:txBody>
+      </p:sp>
+      <p:sp>
+        <p:nvSpPr>
+          <p:cNvPr id="38" name="TextBox 37">
+            <a:extLst>
+              <a:ext uri="{FF2B5EF4-FFF2-40B4-BE49-F238E27FC236}">
+                <a16:creationId xmlns:a16="http://schemas.microsoft.com/office/drawing/2014/main" id="{CDDE0C2A-7806-324F-BD36-6751C0204289}"/>
+              </a:ext>
+            </a:extLst>
+          </p:cNvPr>
+          <p:cNvSpPr txBox="1"/>
+          <p:nvPr/>
+        </p:nvSpPr>
+        <p:spPr>
+          <a:xfrm>
+            <a:off x="8418579" y="6447147"/>
+            <a:ext cx="3803605" cy="584775"/>
+          </a:xfrm>
+          <a:prstGeom prst="rect">
+            <a:avLst/>
+          </a:prstGeom>
+          <a:noFill/>
+        </p:spPr>
+        <p:txBody>
+          <a:bodyPr wrap="none" rtlCol="0">
+            <a:spAutoFit/>
+          </a:bodyPr>
+          <a:lstStyle/>
+          <a:p>
+            <a:r>
+              <a:rPr lang="en-US" sz="1400" dirty="0"/>
+              <a:t>02- </a:t>
+            </a:r>
+            <a:r>
+              <a:rPr lang="en-US" sz="1400" dirty="0">
+                <a:solidFill>
+                  <a:schemeClr val="accent1">
+                    <a:lumMod val="50000"/>
+                  </a:schemeClr>
+                </a:solidFill>
+                <a:highlight>
+                  <a:srgbClr val="FFFF00"/>
+                </a:highlight>
+              </a:rPr>
+              <a:t>Malte sends 1 BTC to Martin-</a:t>
+            </a:r>
+            <a:r>
+              <a:rPr lang="en-US" sz="1400" dirty="0">
+                <a:solidFill>
+                  <a:srgbClr val="C00000"/>
+                </a:solidFill>
+              </a:rPr>
+              <a:t>df3mfssfak7dfd</a:t>
+            </a:r>
+          </a:p>
+          <a:p>
+            <a:endParaRPr lang="en-US" dirty="0"/>
           </a:p>
         </p:txBody>
       </p:sp>
     </p:spTree>
     <p:extLst>
       <p:ext uri="{BB962C8B-B14F-4D97-AF65-F5344CB8AC3E}">
-        <p14:creationId xmlns:p14="http://schemas.microsoft.com/office/powerpoint/2010/main" val="3657471056"/>
+        <p14:creationId xmlns:p14="http://schemas.microsoft.com/office/powerpoint/2010/main" val="3493101456"/>
       </p:ext>
     </p:extLst>
   </p:cSld>

--- a/crypto_07_wallets.pptx
+++ b/crypto_07_wallets.pptx
@@ -5,17 +5,20 @@
     <p:sldMasterId id="2147483834" r:id="rId1"/>
   </p:sldMasterIdLst>
   <p:notesMasterIdLst>
-    <p:notesMasterId r:id="rId10"/>
+    <p:notesMasterId r:id="rId13"/>
   </p:notesMasterIdLst>
   <p:sldIdLst>
     <p:sldId id="317" r:id="rId2"/>
     <p:sldId id="282" r:id="rId3"/>
     <p:sldId id="316" r:id="rId4"/>
-    <p:sldId id="276" r:id="rId5"/>
-    <p:sldId id="266" r:id="rId6"/>
-    <p:sldId id="281" r:id="rId7"/>
-    <p:sldId id="264" r:id="rId8"/>
-    <p:sldId id="283" r:id="rId9"/>
+    <p:sldId id="319" r:id="rId5"/>
+    <p:sldId id="320" r:id="rId6"/>
+    <p:sldId id="276" r:id="rId7"/>
+    <p:sldId id="266" r:id="rId8"/>
+    <p:sldId id="318" r:id="rId9"/>
+    <p:sldId id="281" r:id="rId10"/>
+    <p:sldId id="264" r:id="rId11"/>
+    <p:sldId id="283" r:id="rId12"/>
   </p:sldIdLst>
   <p:sldSz cx="12192000" cy="6858000"/>
   <p:notesSz cx="6858000" cy="9144000"/>
@@ -624,6 +627,67 @@
 </p:notes>
 </file>
 
+<file path=ppt/notesSlides/notesSlide2.xml><?xml version="1.0" encoding="utf-8"?>
+<p:notes xmlns:a="http://schemas.openxmlformats.org/drawingml/2006/main" xmlns:r="http://schemas.openxmlformats.org/officeDocument/2006/relationships" xmlns:p="http://schemas.openxmlformats.org/presentationml/2006/main">
+  <p:cSld>
+    <p:spTree>
+      <p:nvGrpSpPr>
+        <p:cNvPr id="1" name=""/>
+        <p:cNvGrpSpPr/>
+        <p:nvPr/>
+      </p:nvGrpSpPr>
+      <p:grpSpPr>
+        <a:xfrm>
+          <a:off x="0" y="0"/>
+          <a:ext cx="0" cy="0"/>
+          <a:chOff x="0" y="0"/>
+          <a:chExt cx="0" cy="0"/>
+        </a:xfrm>
+      </p:grpSpPr>
+      <p:sp>
+        <p:nvSpPr>
+          <p:cNvPr id="2" name="Slide Image Placeholder 1"/>
+          <p:cNvSpPr>
+            <a:spLocks noGrp="1" noRot="1" noChangeAspect="1"/>
+          </p:cNvSpPr>
+          <p:nvPr>
+            <p:ph type="sldImg"/>
+          </p:nvPr>
+        </p:nvSpPr>
+        <p:spPr/>
+      </p:sp>
+      <p:sp>
+        <p:nvSpPr>
+          <p:cNvPr id="3" name="Notes Placeholder 2"/>
+          <p:cNvSpPr>
+            <a:spLocks noGrp="1"/>
+          </p:cNvSpPr>
+          <p:nvPr>
+            <p:ph type="body" idx="1"/>
+          </p:nvPr>
+        </p:nvSpPr>
+        <p:spPr/>
+        <p:txBody>
+          <a:bodyPr/>
+          <a:lstStyle/>
+          <a:p>
+            <a:endParaRPr lang="en-US"/>
+          </a:p>
+        </p:txBody>
+      </p:sp>
+    </p:spTree>
+    <p:extLst>
+      <p:ext uri="{BB962C8B-B14F-4D97-AF65-F5344CB8AC3E}">
+        <p14:creationId xmlns:p14="http://schemas.microsoft.com/office/powerpoint/2010/main" val="1847650062"/>
+      </p:ext>
+    </p:extLst>
+  </p:cSld>
+  <p:clrMapOvr>
+    <a:masterClrMapping/>
+  </p:clrMapOvr>
+</p:notes>
+</file>
+
 <file path=ppt/slideLayouts/slideLayout1.xml><?xml version="1.0" encoding="utf-8"?>
 <p:sldLayout xmlns:a="http://schemas.openxmlformats.org/drawingml/2006/main" xmlns:r="http://schemas.openxmlformats.org/officeDocument/2006/relationships" xmlns:p="http://schemas.openxmlformats.org/presentationml/2006/main" type="title" preserve="1">
   <p:cSld name="Title Slide">
@@ -753,7 +817,7 @@
           <a:p>
             <a:fld id="{EB1FAE4C-5332-014D-8E1B-BB8DA73EF81D}" type="datetimeFigureOut">
               <a:rPr lang="en-US"/>
-              <a:t>4/30/22</a:t>
+              <a:t>5/2/22</a:t>
             </a:fld>
             <a:endParaRPr lang="en-US"/>
           </a:p>
@@ -923,7 +987,7 @@
           <a:p>
             <a:fld id="{EB1FAE4C-5332-014D-8E1B-BB8DA73EF81D}" type="datetimeFigureOut">
               <a:rPr lang="en-US"/>
-              <a:t>4/30/22</a:t>
+              <a:t>5/2/22</a:t>
             </a:fld>
             <a:endParaRPr lang="en-US"/>
           </a:p>
@@ -1103,7 +1167,7 @@
           <a:p>
             <a:fld id="{EB1FAE4C-5332-014D-8E1B-BB8DA73EF81D}" type="datetimeFigureOut">
               <a:rPr lang="en-US"/>
-              <a:t>4/30/22</a:t>
+              <a:t>5/2/22</a:t>
             </a:fld>
             <a:endParaRPr lang="en-US"/>
           </a:p>
@@ -1273,7 +1337,7 @@
           <a:p>
             <a:fld id="{EB1FAE4C-5332-014D-8E1B-BB8DA73EF81D}" type="datetimeFigureOut">
               <a:rPr lang="en-US"/>
-              <a:t>4/30/22</a:t>
+              <a:t>5/2/22</a:t>
             </a:fld>
             <a:endParaRPr lang="en-US"/>
           </a:p>
@@ -1520,7 +1584,7 @@
           <a:p>
             <a:fld id="{EB1FAE4C-5332-014D-8E1B-BB8DA73EF81D}" type="datetimeFigureOut">
               <a:rPr lang="en-US"/>
-              <a:t>4/30/22</a:t>
+              <a:t>5/2/22</a:t>
             </a:fld>
             <a:endParaRPr lang="en-US"/>
           </a:p>
@@ -1751,7 +1815,7 @@
           <a:p>
             <a:fld id="{EB1FAE4C-5332-014D-8E1B-BB8DA73EF81D}" type="datetimeFigureOut">
               <a:rPr lang="en-US"/>
-              <a:t>4/30/22</a:t>
+              <a:t>5/2/22</a:t>
             </a:fld>
             <a:endParaRPr lang="en-US"/>
           </a:p>
@@ -2117,7 +2181,7 @@
           <a:p>
             <a:fld id="{EB1FAE4C-5332-014D-8E1B-BB8DA73EF81D}" type="datetimeFigureOut">
               <a:rPr lang="en-US"/>
-              <a:t>4/30/22</a:t>
+              <a:t>5/2/22</a:t>
             </a:fld>
             <a:endParaRPr lang="en-US"/>
           </a:p>
@@ -2236,7 +2300,7 @@
           <a:p>
             <a:fld id="{EB1FAE4C-5332-014D-8E1B-BB8DA73EF81D}" type="datetimeFigureOut">
               <a:rPr lang="en-US"/>
-              <a:t>4/30/22</a:t>
+              <a:t>5/2/22</a:t>
             </a:fld>
             <a:endParaRPr lang="en-US"/>
           </a:p>
@@ -2333,7 +2397,7 @@
           <a:p>
             <a:fld id="{EB1FAE4C-5332-014D-8E1B-BB8DA73EF81D}" type="datetimeFigureOut">
               <a:rPr lang="en-US"/>
-              <a:t>4/30/22</a:t>
+              <a:t>5/2/22</a:t>
             </a:fld>
             <a:endParaRPr lang="en-US"/>
           </a:p>
@@ -2609,7 +2673,7 @@
           <a:p>
             <a:fld id="{EB1FAE4C-5332-014D-8E1B-BB8DA73EF81D}" type="datetimeFigureOut">
               <a:rPr lang="en-US"/>
-              <a:t>4/30/22</a:t>
+              <a:t>5/2/22</a:t>
             </a:fld>
             <a:endParaRPr lang="en-US"/>
           </a:p>
@@ -2866,7 +2930,7 @@
           <a:p>
             <a:fld id="{EB1FAE4C-5332-014D-8E1B-BB8DA73EF81D}" type="datetimeFigureOut">
               <a:rPr lang="en-US"/>
-              <a:t>4/30/22</a:t>
+              <a:t>5/2/22</a:t>
             </a:fld>
             <a:endParaRPr lang="en-US"/>
           </a:p>
@@ -3079,7 +3143,7 @@
           <a:p>
             <a:fld id="{EB1FAE4C-5332-014D-8E1B-BB8DA73EF81D}" type="datetimeFigureOut">
               <a:rPr lang="en-US"/>
-              <a:t>4/30/22</a:t>
+              <a:t>5/2/22</a:t>
             </a:fld>
             <a:endParaRPr lang="en-US"/>
           </a:p>
@@ -3576,6 +3640,1692 @@
 </p:sld>
 </file>
 
+<file path=ppt/slides/slide10.xml><?xml version="1.0" encoding="utf-8"?>
+<p:sld xmlns:a="http://schemas.openxmlformats.org/drawingml/2006/main" xmlns:r="http://schemas.openxmlformats.org/officeDocument/2006/relationships" xmlns:p="http://schemas.openxmlformats.org/presentationml/2006/main">
+  <p:cSld>
+    <p:spTree>
+      <p:nvGrpSpPr>
+        <p:cNvPr id="1" name=""/>
+        <p:cNvGrpSpPr/>
+        <p:nvPr/>
+      </p:nvGrpSpPr>
+      <p:grpSpPr>
+        <a:xfrm>
+          <a:off x="0" y="0"/>
+          <a:ext cx="0" cy="0"/>
+          <a:chOff x="0" y="0"/>
+          <a:chExt cx="0" cy="0"/>
+        </a:xfrm>
+      </p:grpSpPr>
+      <p:sp>
+        <p:nvSpPr>
+          <p:cNvPr id="2" name="Title 1">
+            <a:extLst>
+              <a:ext uri="{FF2B5EF4-FFF2-40B4-BE49-F238E27FC236}">
+                <a16:creationId xmlns:a16="http://schemas.microsoft.com/office/drawing/2014/main" id="{59CD814F-0488-4942-8BF6-DC490A8C6AA1}"/>
+              </a:ext>
+            </a:extLst>
+          </p:cNvPr>
+          <p:cNvSpPr>
+            <a:spLocks noGrp="1"/>
+          </p:cNvSpPr>
+          <p:nvPr>
+            <p:ph type="title"/>
+          </p:nvPr>
+        </p:nvSpPr>
+        <p:spPr/>
+        <p:txBody>
+          <a:bodyPr/>
+          <a:lstStyle/>
+          <a:p>
+            <a:r>
+              <a:rPr lang="en-US" dirty="0"/>
+              <a:t>2. Public vs Private Key</a:t>
+            </a:r>
+          </a:p>
+        </p:txBody>
+      </p:sp>
+      <p:pic>
+        <p:nvPicPr>
+          <p:cNvPr id="5" name="Graphic 4" descr="Old Key with solid fill">
+            <a:extLst>
+              <a:ext uri="{FF2B5EF4-FFF2-40B4-BE49-F238E27FC236}">
+                <a16:creationId xmlns:a16="http://schemas.microsoft.com/office/drawing/2014/main" id="{6FC820C6-7F2A-1649-AA6A-0DE2E659E5FA}"/>
+              </a:ext>
+            </a:extLst>
+          </p:cNvPr>
+          <p:cNvPicPr>
+            <a:picLocks noChangeAspect="1"/>
+          </p:cNvPicPr>
+          <p:nvPr/>
+        </p:nvPicPr>
+        <p:blipFill>
+          <a:blip r:embed="rId2" cstate="email">
+            <a:extLst>
+              <a:ext uri="{28A0092B-C50C-407E-A947-70E740481C1C}">
+                <a14:useLocalDpi xmlns:a14="http://schemas.microsoft.com/office/drawing/2010/main"/>
+              </a:ext>
+              <a:ext uri="{96DAC541-7B7A-43D3-8B79-37D633B846F1}">
+                <asvg:svgBlip xmlns:asvg="http://schemas.microsoft.com/office/drawing/2016/SVG/main" r:embed="rId3"/>
+              </a:ext>
+            </a:extLst>
+          </a:blip>
+          <a:stretch>
+            <a:fillRect/>
+          </a:stretch>
+        </p:blipFill>
+        <p:spPr>
+          <a:xfrm>
+            <a:off x="7532339" y="2147332"/>
+            <a:ext cx="538166" cy="538166"/>
+          </a:xfrm>
+          <a:prstGeom prst="rect">
+            <a:avLst/>
+          </a:prstGeom>
+        </p:spPr>
+      </p:pic>
+      <p:pic>
+        <p:nvPicPr>
+          <p:cNvPr id="6" name="Graphic 5" descr="Old Key outline">
+            <a:extLst>
+              <a:ext uri="{FF2B5EF4-FFF2-40B4-BE49-F238E27FC236}">
+                <a16:creationId xmlns:a16="http://schemas.microsoft.com/office/drawing/2014/main" id="{416A130C-B6D0-0C47-87B6-7BE24CE1B653}"/>
+              </a:ext>
+            </a:extLst>
+          </p:cNvPr>
+          <p:cNvPicPr>
+            <a:picLocks noChangeAspect="1"/>
+          </p:cNvPicPr>
+          <p:nvPr/>
+        </p:nvPicPr>
+        <p:blipFill>
+          <a:blip r:embed="rId4" cstate="email">
+            <a:extLst>
+              <a:ext uri="{28A0092B-C50C-407E-A947-70E740481C1C}">
+                <a14:useLocalDpi xmlns:a14="http://schemas.microsoft.com/office/drawing/2010/main"/>
+              </a:ext>
+              <a:ext uri="{96DAC541-7B7A-43D3-8B79-37D633B846F1}">
+                <asvg:svgBlip xmlns:asvg="http://schemas.microsoft.com/office/drawing/2016/SVG/main" r:embed="rId5"/>
+              </a:ext>
+            </a:extLst>
+          </a:blip>
+          <a:stretch>
+            <a:fillRect/>
+          </a:stretch>
+        </p:blipFill>
+        <p:spPr>
+          <a:xfrm>
+            <a:off x="9265892" y="2147332"/>
+            <a:ext cx="538166" cy="538166"/>
+          </a:xfrm>
+          <a:prstGeom prst="rect">
+            <a:avLst/>
+          </a:prstGeom>
+        </p:spPr>
+      </p:pic>
+      <p:cxnSp>
+        <p:nvCxnSpPr>
+          <p:cNvPr id="7" name="Straight Arrow Connector 6">
+            <a:extLst>
+              <a:ext uri="{FF2B5EF4-FFF2-40B4-BE49-F238E27FC236}">
+                <a16:creationId xmlns:a16="http://schemas.microsoft.com/office/drawing/2014/main" id="{30B2A087-0A52-9440-9E45-F31E5F617841}"/>
+              </a:ext>
+            </a:extLst>
+          </p:cNvPr>
+          <p:cNvCxnSpPr>
+            <a:stCxn id="5" idx="3"/>
+            <a:endCxn id="6" idx="1"/>
+          </p:cNvCxnSpPr>
+          <p:nvPr/>
+        </p:nvCxnSpPr>
+        <p:spPr>
+          <a:xfrm>
+            <a:off x="8070505" y="2416415"/>
+            <a:ext cx="1195387" cy="0"/>
+          </a:xfrm>
+          <a:prstGeom prst="straightConnector1">
+            <a:avLst/>
+          </a:prstGeom>
+          <a:ln w="38100">
+            <a:headEnd type="triangle"/>
+            <a:tailEnd type="triangle"/>
+          </a:ln>
+        </p:spPr>
+        <p:style>
+          <a:lnRef idx="1">
+            <a:schemeClr val="dk1"/>
+          </a:lnRef>
+          <a:fillRef idx="0">
+            <a:schemeClr val="dk1"/>
+          </a:fillRef>
+          <a:effectRef idx="0">
+            <a:schemeClr val="dk1"/>
+          </a:effectRef>
+          <a:fontRef idx="minor">
+            <a:schemeClr val="tx1"/>
+          </a:fontRef>
+        </p:style>
+      </p:cxnSp>
+      <p:pic>
+        <p:nvPicPr>
+          <p:cNvPr id="8" name="Graphic 7" descr="Mailbox with solid fill">
+            <a:extLst>
+              <a:ext uri="{FF2B5EF4-FFF2-40B4-BE49-F238E27FC236}">
+                <a16:creationId xmlns:a16="http://schemas.microsoft.com/office/drawing/2014/main" id="{D9E3BCAF-D57D-2E44-9402-8F77AAD0E88C}"/>
+              </a:ext>
+            </a:extLst>
+          </p:cNvPr>
+          <p:cNvPicPr>
+            <a:picLocks noChangeAspect="1"/>
+          </p:cNvPicPr>
+          <p:nvPr/>
+        </p:nvPicPr>
+        <p:blipFill>
+          <a:blip r:embed="rId6" cstate="email">
+            <a:extLst>
+              <a:ext uri="{28A0092B-C50C-407E-A947-70E740481C1C}">
+                <a14:useLocalDpi xmlns:a14="http://schemas.microsoft.com/office/drawing/2010/main"/>
+              </a:ext>
+              <a:ext uri="{96DAC541-7B7A-43D3-8B79-37D633B846F1}">
+                <asvg:svgBlip xmlns:asvg="http://schemas.microsoft.com/office/drawing/2016/SVG/main" r:embed="rId7"/>
+              </a:ext>
+            </a:extLst>
+          </a:blip>
+          <a:stretch>
+            <a:fillRect/>
+          </a:stretch>
+        </p:blipFill>
+        <p:spPr>
+          <a:xfrm>
+            <a:off x="7580756" y="3258072"/>
+            <a:ext cx="430719" cy="430719"/>
+          </a:xfrm>
+          <a:prstGeom prst="rect">
+            <a:avLst/>
+          </a:prstGeom>
+        </p:spPr>
+      </p:pic>
+      <p:pic>
+        <p:nvPicPr>
+          <p:cNvPr id="9" name="Graphic 8" descr="Employee badge outline">
+            <a:extLst>
+              <a:ext uri="{FF2B5EF4-FFF2-40B4-BE49-F238E27FC236}">
+                <a16:creationId xmlns:a16="http://schemas.microsoft.com/office/drawing/2014/main" id="{C9353079-AB35-E14A-9C24-0DB177CD6FED}"/>
+              </a:ext>
+            </a:extLst>
+          </p:cNvPr>
+          <p:cNvPicPr>
+            <a:picLocks noChangeAspect="1"/>
+          </p:cNvPicPr>
+          <p:nvPr/>
+        </p:nvPicPr>
+        <p:blipFill>
+          <a:blip r:embed="rId8" cstate="email">
+            <a:extLst>
+              <a:ext uri="{28A0092B-C50C-407E-A947-70E740481C1C}">
+                <a14:useLocalDpi xmlns:a14="http://schemas.microsoft.com/office/drawing/2010/main"/>
+              </a:ext>
+              <a:ext uri="{96DAC541-7B7A-43D3-8B79-37D633B846F1}">
+                <asvg:svgBlip xmlns:asvg="http://schemas.microsoft.com/office/drawing/2016/SVG/main" r:embed="rId9"/>
+              </a:ext>
+            </a:extLst>
+          </a:blip>
+          <a:stretch>
+            <a:fillRect/>
+          </a:stretch>
+        </p:blipFill>
+        <p:spPr>
+          <a:xfrm>
+            <a:off x="9328730" y="3257137"/>
+            <a:ext cx="431654" cy="431654"/>
+          </a:xfrm>
+          <a:prstGeom prst="rect">
+            <a:avLst/>
+          </a:prstGeom>
+        </p:spPr>
+      </p:pic>
+      <p:cxnSp>
+        <p:nvCxnSpPr>
+          <p:cNvPr id="10" name="Straight Arrow Connector 9">
+            <a:extLst>
+              <a:ext uri="{FF2B5EF4-FFF2-40B4-BE49-F238E27FC236}">
+                <a16:creationId xmlns:a16="http://schemas.microsoft.com/office/drawing/2014/main" id="{F631E980-EEA0-AD45-9DC8-2EE705A20563}"/>
+              </a:ext>
+            </a:extLst>
+          </p:cNvPr>
+          <p:cNvCxnSpPr>
+            <a:stCxn id="5" idx="2"/>
+            <a:endCxn id="8" idx="0"/>
+          </p:cNvCxnSpPr>
+          <p:nvPr/>
+        </p:nvCxnSpPr>
+        <p:spPr>
+          <a:xfrm flipH="1">
+            <a:off x="7796116" y="2685498"/>
+            <a:ext cx="5306" cy="572574"/>
+          </a:xfrm>
+          <a:prstGeom prst="straightConnector1">
+            <a:avLst/>
+          </a:prstGeom>
+          <a:ln w="38100">
+            <a:tailEnd type="triangle"/>
+          </a:ln>
+        </p:spPr>
+        <p:style>
+          <a:lnRef idx="1">
+            <a:schemeClr val="dk1"/>
+          </a:lnRef>
+          <a:fillRef idx="0">
+            <a:schemeClr val="dk1"/>
+          </a:fillRef>
+          <a:effectRef idx="0">
+            <a:schemeClr val="dk1"/>
+          </a:effectRef>
+          <a:fontRef idx="minor">
+            <a:schemeClr val="tx1"/>
+          </a:fontRef>
+        </p:style>
+      </p:cxnSp>
+      <p:cxnSp>
+        <p:nvCxnSpPr>
+          <p:cNvPr id="11" name="Straight Arrow Connector 10">
+            <a:extLst>
+              <a:ext uri="{FF2B5EF4-FFF2-40B4-BE49-F238E27FC236}">
+                <a16:creationId xmlns:a16="http://schemas.microsoft.com/office/drawing/2014/main" id="{C1CBDA0D-2E00-4849-9D6D-DD0446FA7BC4}"/>
+              </a:ext>
+            </a:extLst>
+          </p:cNvPr>
+          <p:cNvCxnSpPr>
+            <a:stCxn id="6" idx="2"/>
+            <a:endCxn id="9" idx="0"/>
+          </p:cNvCxnSpPr>
+          <p:nvPr/>
+        </p:nvCxnSpPr>
+        <p:spPr>
+          <a:xfrm>
+            <a:off x="9534975" y="2685498"/>
+            <a:ext cx="9582" cy="571639"/>
+          </a:xfrm>
+          <a:prstGeom prst="straightConnector1">
+            <a:avLst/>
+          </a:prstGeom>
+          <a:ln w="38100">
+            <a:tailEnd type="triangle"/>
+          </a:ln>
+        </p:spPr>
+        <p:style>
+          <a:lnRef idx="1">
+            <a:schemeClr val="dk1"/>
+          </a:lnRef>
+          <a:fillRef idx="0">
+            <a:schemeClr val="dk1"/>
+          </a:fillRef>
+          <a:effectRef idx="0">
+            <a:schemeClr val="dk1"/>
+          </a:effectRef>
+          <a:fontRef idx="minor">
+            <a:schemeClr val="tx1"/>
+          </a:fontRef>
+        </p:style>
+      </p:cxnSp>
+      <p:sp>
+        <p:nvSpPr>
+          <p:cNvPr id="4" name="TextBox 3">
+            <a:extLst>
+              <a:ext uri="{FF2B5EF4-FFF2-40B4-BE49-F238E27FC236}">
+                <a16:creationId xmlns:a16="http://schemas.microsoft.com/office/drawing/2014/main" id="{363089A5-F958-7E4B-B562-F7C474EDDB06}"/>
+              </a:ext>
+            </a:extLst>
+          </p:cNvPr>
+          <p:cNvSpPr txBox="1"/>
+          <p:nvPr/>
+        </p:nvSpPr>
+        <p:spPr>
+          <a:xfrm>
+            <a:off x="7496094" y="1690688"/>
+            <a:ext cx="750526" cy="369332"/>
+          </a:xfrm>
+          <a:prstGeom prst="rect">
+            <a:avLst/>
+          </a:prstGeom>
+          <a:noFill/>
+        </p:spPr>
+        <p:txBody>
+          <a:bodyPr wrap="none" rtlCol="0">
+            <a:spAutoFit/>
+          </a:bodyPr>
+          <a:lstStyle/>
+          <a:p>
+            <a:r>
+              <a:rPr lang="en-US" dirty="0"/>
+              <a:t>Public</a:t>
+            </a:r>
+          </a:p>
+        </p:txBody>
+      </p:sp>
+      <p:sp>
+        <p:nvSpPr>
+          <p:cNvPr id="13" name="TextBox 12">
+            <a:extLst>
+              <a:ext uri="{FF2B5EF4-FFF2-40B4-BE49-F238E27FC236}">
+                <a16:creationId xmlns:a16="http://schemas.microsoft.com/office/drawing/2014/main" id="{D53AE619-26D9-534C-BDD3-B2FDD674062E}"/>
+              </a:ext>
+            </a:extLst>
+          </p:cNvPr>
+          <p:cNvSpPr txBox="1"/>
+          <p:nvPr/>
+        </p:nvSpPr>
+        <p:spPr>
+          <a:xfrm>
+            <a:off x="9117232" y="1695590"/>
+            <a:ext cx="835485" cy="369332"/>
+          </a:xfrm>
+          <a:prstGeom prst="rect">
+            <a:avLst/>
+          </a:prstGeom>
+          <a:noFill/>
+        </p:spPr>
+        <p:txBody>
+          <a:bodyPr wrap="none" rtlCol="0">
+            <a:spAutoFit/>
+          </a:bodyPr>
+          <a:lstStyle/>
+          <a:p>
+            <a:r>
+              <a:rPr lang="en-US" dirty="0"/>
+              <a:t>Private</a:t>
+            </a:r>
+          </a:p>
+        </p:txBody>
+      </p:sp>
+      <p:sp>
+        <p:nvSpPr>
+          <p:cNvPr id="14" name="TextBox 13">
+            <a:extLst>
+              <a:ext uri="{FF2B5EF4-FFF2-40B4-BE49-F238E27FC236}">
+                <a16:creationId xmlns:a16="http://schemas.microsoft.com/office/drawing/2014/main" id="{5C1800A6-7E7C-2345-9A41-61EADE78D4DC}"/>
+              </a:ext>
+            </a:extLst>
+          </p:cNvPr>
+          <p:cNvSpPr txBox="1"/>
+          <p:nvPr/>
+        </p:nvSpPr>
+        <p:spPr>
+          <a:xfrm>
+            <a:off x="7244489" y="3796238"/>
+            <a:ext cx="1103251" cy="369332"/>
+          </a:xfrm>
+          <a:prstGeom prst="rect">
+            <a:avLst/>
+          </a:prstGeom>
+          <a:noFill/>
+        </p:spPr>
+        <p:txBody>
+          <a:bodyPr wrap="none" rtlCol="0">
+            <a:spAutoFit/>
+          </a:bodyPr>
+          <a:lstStyle/>
+          <a:p>
+            <a:r>
+              <a:rPr lang="en-US" dirty="0"/>
+              <a:t>“Address”</a:t>
+            </a:r>
+          </a:p>
+        </p:txBody>
+      </p:sp>
+      <p:sp>
+        <p:nvSpPr>
+          <p:cNvPr id="15" name="TextBox 14">
+            <a:extLst>
+              <a:ext uri="{FF2B5EF4-FFF2-40B4-BE49-F238E27FC236}">
+                <a16:creationId xmlns:a16="http://schemas.microsoft.com/office/drawing/2014/main" id="{37121F2A-6C02-9548-B423-89AB267A0D46}"/>
+              </a:ext>
+            </a:extLst>
+          </p:cNvPr>
+          <p:cNvSpPr txBox="1"/>
+          <p:nvPr/>
+        </p:nvSpPr>
+        <p:spPr>
+          <a:xfrm>
+            <a:off x="8852864" y="3828776"/>
+            <a:ext cx="1364220" cy="369332"/>
+          </a:xfrm>
+          <a:prstGeom prst="rect">
+            <a:avLst/>
+          </a:prstGeom>
+          <a:noFill/>
+        </p:spPr>
+        <p:txBody>
+          <a:bodyPr wrap="none" rtlCol="0">
+            <a:spAutoFit/>
+          </a:bodyPr>
+          <a:lstStyle/>
+          <a:p>
+            <a:r>
+              <a:rPr lang="en-US" dirty="0"/>
+              <a:t>“House Key”</a:t>
+            </a:r>
+          </a:p>
+        </p:txBody>
+      </p:sp>
+      <p:sp>
+        <p:nvSpPr>
+          <p:cNvPr id="12" name="TextBox 11">
+            <a:extLst>
+              <a:ext uri="{FF2B5EF4-FFF2-40B4-BE49-F238E27FC236}">
+                <a16:creationId xmlns:a16="http://schemas.microsoft.com/office/drawing/2014/main" id="{F391AC64-BFA1-184A-BA49-BF2D2BB4C6CE}"/>
+              </a:ext>
+            </a:extLst>
+          </p:cNvPr>
+          <p:cNvSpPr txBox="1"/>
+          <p:nvPr/>
+        </p:nvSpPr>
+        <p:spPr>
+          <a:xfrm>
+            <a:off x="671991" y="2039167"/>
+            <a:ext cx="5650906" cy="923330"/>
+          </a:xfrm>
+          <a:prstGeom prst="rect">
+            <a:avLst/>
+          </a:prstGeom>
+          <a:noFill/>
+        </p:spPr>
+        <p:txBody>
+          <a:bodyPr wrap="none" rtlCol="0">
+            <a:spAutoFit/>
+          </a:bodyPr>
+          <a:lstStyle/>
+          <a:p>
+            <a:pPr marL="285750" indent="-285750">
+              <a:buFont typeface="Arial" panose="020B0604020202020204" pitchFamily="34" charset="0"/>
+              <a:buChar char="•"/>
+            </a:pPr>
+            <a:r>
+              <a:rPr lang="en-US" dirty="0"/>
+              <a:t>Symmetric vs Asymmetric encryption</a:t>
+            </a:r>
+          </a:p>
+          <a:p>
+            <a:pPr marL="285750" indent="-285750">
+              <a:buFont typeface="Arial" panose="020B0604020202020204" pitchFamily="34" charset="0"/>
+              <a:buChar char="•"/>
+            </a:pPr>
+            <a:r>
+              <a:rPr lang="en-US" dirty="0"/>
+              <a:t>Private key enables send &amp; Public key enables receiving</a:t>
+            </a:r>
+          </a:p>
+          <a:p>
+            <a:pPr marL="285750" indent="-285750">
+              <a:buFont typeface="Arial" panose="020B0604020202020204" pitchFamily="34" charset="0"/>
+              <a:buChar char="•"/>
+            </a:pPr>
+            <a:r>
+              <a:rPr lang="en-US" dirty="0"/>
+              <a:t>Public key generates from private key. No vice versa</a:t>
+            </a:r>
+          </a:p>
+        </p:txBody>
+      </p:sp>
+      <p:sp>
+        <p:nvSpPr>
+          <p:cNvPr id="16" name="TextBox 15">
+            <a:extLst>
+              <a:ext uri="{FF2B5EF4-FFF2-40B4-BE49-F238E27FC236}">
+                <a16:creationId xmlns:a16="http://schemas.microsoft.com/office/drawing/2014/main" id="{19112EFC-66A8-7147-9611-1CE15DBED304}"/>
+              </a:ext>
+            </a:extLst>
+          </p:cNvPr>
+          <p:cNvSpPr txBox="1"/>
+          <p:nvPr/>
+        </p:nvSpPr>
+        <p:spPr>
+          <a:xfrm>
+            <a:off x="1759147" y="4557009"/>
+            <a:ext cx="4563750" cy="369332"/>
+          </a:xfrm>
+          <a:prstGeom prst="rect">
+            <a:avLst/>
+          </a:prstGeom>
+          <a:noFill/>
+        </p:spPr>
+        <p:txBody>
+          <a:bodyPr wrap="none" rtlCol="0">
+            <a:spAutoFit/>
+          </a:bodyPr>
+          <a:lstStyle/>
+          <a:p>
+            <a:r>
+              <a:rPr lang="en-US" dirty="0"/>
+              <a:t>01- </a:t>
+            </a:r>
+            <a:r>
+              <a:rPr lang="en-US" dirty="0">
+                <a:solidFill>
+                  <a:schemeClr val="accent1">
+                    <a:lumMod val="50000"/>
+                  </a:schemeClr>
+                </a:solidFill>
+                <a:highlight>
+                  <a:srgbClr val="FFFF00"/>
+                </a:highlight>
+              </a:rPr>
+              <a:t>Malte sends 1 BTC to Martin</a:t>
+            </a:r>
+            <a:r>
+              <a:rPr lang="en-US" dirty="0"/>
+              <a:t>-</a:t>
+            </a:r>
+            <a:r>
+              <a:rPr lang="en-US" dirty="0">
+                <a:solidFill>
+                  <a:srgbClr val="C00000"/>
+                </a:solidFill>
+              </a:rPr>
+              <a:t>473ms22akkq</a:t>
+            </a:r>
+          </a:p>
+        </p:txBody>
+      </p:sp>
+      <p:cxnSp>
+        <p:nvCxnSpPr>
+          <p:cNvPr id="18" name="Straight Arrow Connector 17">
+            <a:extLst>
+              <a:ext uri="{FF2B5EF4-FFF2-40B4-BE49-F238E27FC236}">
+                <a16:creationId xmlns:a16="http://schemas.microsoft.com/office/drawing/2014/main" id="{4B5F7D46-66E7-EE4E-8FFA-91BB1BC6089F}"/>
+              </a:ext>
+            </a:extLst>
+          </p:cNvPr>
+          <p:cNvCxnSpPr/>
+          <p:nvPr/>
+        </p:nvCxnSpPr>
+        <p:spPr>
+          <a:xfrm flipV="1">
+            <a:off x="1759147" y="4926341"/>
+            <a:ext cx="174584" cy="784911"/>
+          </a:xfrm>
+          <a:prstGeom prst="straightConnector1">
+            <a:avLst/>
+          </a:prstGeom>
+          <a:ln>
+            <a:tailEnd type="triangle"/>
+          </a:ln>
+        </p:spPr>
+        <p:style>
+          <a:lnRef idx="1">
+            <a:schemeClr val="accent1"/>
+          </a:lnRef>
+          <a:fillRef idx="0">
+            <a:schemeClr val="accent1"/>
+          </a:fillRef>
+          <a:effectRef idx="0">
+            <a:schemeClr val="accent1"/>
+          </a:effectRef>
+          <a:fontRef idx="minor">
+            <a:schemeClr val="tx1"/>
+          </a:fontRef>
+        </p:style>
+      </p:cxnSp>
+      <p:cxnSp>
+        <p:nvCxnSpPr>
+          <p:cNvPr id="20" name="Straight Arrow Connector 19">
+            <a:extLst>
+              <a:ext uri="{FF2B5EF4-FFF2-40B4-BE49-F238E27FC236}">
+                <a16:creationId xmlns:a16="http://schemas.microsoft.com/office/drawing/2014/main" id="{C14761E8-67C6-D843-AD68-63B980694FC9}"/>
+              </a:ext>
+            </a:extLst>
+          </p:cNvPr>
+          <p:cNvCxnSpPr/>
+          <p:nvPr/>
+        </p:nvCxnSpPr>
+        <p:spPr>
+          <a:xfrm flipV="1">
+            <a:off x="3612630" y="4926341"/>
+            <a:ext cx="119921" cy="784911"/>
+          </a:xfrm>
+          <a:prstGeom prst="straightConnector1">
+            <a:avLst/>
+          </a:prstGeom>
+          <a:ln>
+            <a:tailEnd type="triangle"/>
+          </a:ln>
+        </p:spPr>
+        <p:style>
+          <a:lnRef idx="1">
+            <a:schemeClr val="accent1"/>
+          </a:lnRef>
+          <a:fillRef idx="0">
+            <a:schemeClr val="accent1"/>
+          </a:fillRef>
+          <a:effectRef idx="0">
+            <a:schemeClr val="accent1"/>
+          </a:effectRef>
+          <a:fontRef idx="minor">
+            <a:schemeClr val="tx1"/>
+          </a:fontRef>
+        </p:style>
+      </p:cxnSp>
+      <p:cxnSp>
+        <p:nvCxnSpPr>
+          <p:cNvPr id="22" name="Straight Arrow Connector 21">
+            <a:extLst>
+              <a:ext uri="{FF2B5EF4-FFF2-40B4-BE49-F238E27FC236}">
+                <a16:creationId xmlns:a16="http://schemas.microsoft.com/office/drawing/2014/main" id="{16662B9F-7BC2-CE48-903B-F00807619D59}"/>
+              </a:ext>
+            </a:extLst>
+          </p:cNvPr>
+          <p:cNvCxnSpPr/>
+          <p:nvPr/>
+        </p:nvCxnSpPr>
+        <p:spPr>
+          <a:xfrm flipV="1">
+            <a:off x="5411450" y="4926341"/>
+            <a:ext cx="119921" cy="784911"/>
+          </a:xfrm>
+          <a:prstGeom prst="straightConnector1">
+            <a:avLst/>
+          </a:prstGeom>
+          <a:ln>
+            <a:tailEnd type="triangle"/>
+          </a:ln>
+        </p:spPr>
+        <p:style>
+          <a:lnRef idx="1">
+            <a:schemeClr val="accent1"/>
+          </a:lnRef>
+          <a:fillRef idx="0">
+            <a:schemeClr val="accent1"/>
+          </a:fillRef>
+          <a:effectRef idx="0">
+            <a:schemeClr val="accent1"/>
+          </a:effectRef>
+          <a:fontRef idx="minor">
+            <a:schemeClr val="tx1"/>
+          </a:fontRef>
+        </p:style>
+      </p:cxnSp>
+      <p:sp>
+        <p:nvSpPr>
+          <p:cNvPr id="21" name="TextBox 20">
+            <a:extLst>
+              <a:ext uri="{FF2B5EF4-FFF2-40B4-BE49-F238E27FC236}">
+                <a16:creationId xmlns:a16="http://schemas.microsoft.com/office/drawing/2014/main" id="{8298E2C6-E805-C24D-9AB6-A71DC5C08D63}"/>
+              </a:ext>
+            </a:extLst>
+          </p:cNvPr>
+          <p:cNvSpPr txBox="1"/>
+          <p:nvPr/>
+        </p:nvSpPr>
+        <p:spPr>
+          <a:xfrm>
+            <a:off x="744738" y="5895918"/>
+            <a:ext cx="1777538" cy="369332"/>
+          </a:xfrm>
+          <a:prstGeom prst="rect">
+            <a:avLst/>
+          </a:prstGeom>
+          <a:noFill/>
+        </p:spPr>
+        <p:txBody>
+          <a:bodyPr wrap="none" rtlCol="0">
+            <a:spAutoFit/>
+          </a:bodyPr>
+          <a:lstStyle/>
+          <a:p>
+            <a:r>
+              <a:rPr lang="en-US" dirty="0"/>
+              <a:t>Unique identifier</a:t>
+            </a:r>
+          </a:p>
+        </p:txBody>
+      </p:sp>
+      <p:sp>
+        <p:nvSpPr>
+          <p:cNvPr id="24" name="TextBox 23">
+            <a:extLst>
+              <a:ext uri="{FF2B5EF4-FFF2-40B4-BE49-F238E27FC236}">
+                <a16:creationId xmlns:a16="http://schemas.microsoft.com/office/drawing/2014/main" id="{DD693D81-F26A-2F4C-B366-C8BE792D3410}"/>
+              </a:ext>
+            </a:extLst>
+          </p:cNvPr>
+          <p:cNvSpPr txBox="1"/>
+          <p:nvPr/>
+        </p:nvSpPr>
+        <p:spPr>
+          <a:xfrm>
+            <a:off x="3077296" y="5921115"/>
+            <a:ext cx="1241109" cy="369332"/>
+          </a:xfrm>
+          <a:prstGeom prst="rect">
+            <a:avLst/>
+          </a:prstGeom>
+          <a:noFill/>
+        </p:spPr>
+        <p:txBody>
+          <a:bodyPr wrap="none" rtlCol="0">
+            <a:spAutoFit/>
+          </a:bodyPr>
+          <a:lstStyle/>
+          <a:p>
+            <a:r>
+              <a:rPr lang="en-US" dirty="0">
+                <a:highlight>
+                  <a:srgbClr val="FFFF00"/>
+                </a:highlight>
+              </a:rPr>
+              <a:t>transaction</a:t>
+            </a:r>
+          </a:p>
+        </p:txBody>
+      </p:sp>
+      <p:sp>
+        <p:nvSpPr>
+          <p:cNvPr id="25" name="TextBox 24">
+            <a:extLst>
+              <a:ext uri="{FF2B5EF4-FFF2-40B4-BE49-F238E27FC236}">
+                <a16:creationId xmlns:a16="http://schemas.microsoft.com/office/drawing/2014/main" id="{F8B25983-DCCF-8C44-9508-E19A15A8DC5E}"/>
+              </a:ext>
+            </a:extLst>
+          </p:cNvPr>
+          <p:cNvSpPr txBox="1"/>
+          <p:nvPr/>
+        </p:nvSpPr>
+        <p:spPr>
+          <a:xfrm>
+            <a:off x="4850855" y="5921115"/>
+            <a:ext cx="762773" cy="369332"/>
+          </a:xfrm>
+          <a:prstGeom prst="rect">
+            <a:avLst/>
+          </a:prstGeom>
+          <a:noFill/>
+        </p:spPr>
+        <p:txBody>
+          <a:bodyPr wrap="none" rtlCol="0">
+            <a:spAutoFit/>
+          </a:bodyPr>
+          <a:lstStyle/>
+          <a:p>
+            <a:r>
+              <a:rPr lang="en-US" dirty="0">
+                <a:solidFill>
+                  <a:srgbClr val="C00000"/>
+                </a:solidFill>
+              </a:rPr>
+              <a:t>stamp</a:t>
+            </a:r>
+          </a:p>
+        </p:txBody>
+      </p:sp>
+      <p:cxnSp>
+        <p:nvCxnSpPr>
+          <p:cNvPr id="26" name="Straight Arrow Connector 25">
+            <a:extLst>
+              <a:ext uri="{FF2B5EF4-FFF2-40B4-BE49-F238E27FC236}">
+                <a16:creationId xmlns:a16="http://schemas.microsoft.com/office/drawing/2014/main" id="{7DA55EA8-940B-C142-8619-CFD889578CDB}"/>
+              </a:ext>
+            </a:extLst>
+          </p:cNvPr>
+          <p:cNvCxnSpPr>
+            <a:cxnSpLocks/>
+          </p:cNvCxnSpPr>
+          <p:nvPr/>
+        </p:nvCxnSpPr>
+        <p:spPr>
+          <a:xfrm>
+            <a:off x="5662572" y="6107854"/>
+            <a:ext cx="433428" cy="0"/>
+          </a:xfrm>
+          <a:prstGeom prst="straightConnector1">
+            <a:avLst/>
+          </a:prstGeom>
+          <a:ln>
+            <a:tailEnd type="triangle"/>
+          </a:ln>
+        </p:spPr>
+        <p:style>
+          <a:lnRef idx="1">
+            <a:schemeClr val="accent1"/>
+          </a:lnRef>
+          <a:fillRef idx="0">
+            <a:schemeClr val="accent1"/>
+          </a:fillRef>
+          <a:effectRef idx="0">
+            <a:schemeClr val="accent1"/>
+          </a:effectRef>
+          <a:fontRef idx="minor">
+            <a:schemeClr val="tx1"/>
+          </a:fontRef>
+        </p:style>
+      </p:cxnSp>
+      <p:sp>
+        <p:nvSpPr>
+          <p:cNvPr id="27" name="TextBox 26">
+            <a:extLst>
+              <a:ext uri="{FF2B5EF4-FFF2-40B4-BE49-F238E27FC236}">
+                <a16:creationId xmlns:a16="http://schemas.microsoft.com/office/drawing/2014/main" id="{41F6604F-6D88-974C-8C4E-6AA69DA5E0AB}"/>
+              </a:ext>
+            </a:extLst>
+          </p:cNvPr>
+          <p:cNvSpPr txBox="1"/>
+          <p:nvPr/>
+        </p:nvSpPr>
+        <p:spPr>
+          <a:xfrm>
+            <a:off x="6322897" y="5955880"/>
+            <a:ext cx="2936253" cy="369332"/>
+          </a:xfrm>
+          <a:prstGeom prst="rect">
+            <a:avLst/>
+          </a:prstGeom>
+          <a:noFill/>
+        </p:spPr>
+        <p:txBody>
+          <a:bodyPr wrap="none" rtlCol="0">
+            <a:spAutoFit/>
+          </a:bodyPr>
+          <a:lstStyle/>
+          <a:p>
+            <a:r>
+              <a:rPr lang="en-US" dirty="0" err="1"/>
+              <a:t>PrivateKey</a:t>
+            </a:r>
+            <a:r>
+              <a:rPr lang="en-US" dirty="0"/>
+              <a:t>(UID + transaction)</a:t>
+            </a:r>
+          </a:p>
+        </p:txBody>
+      </p:sp>
+      <p:pic>
+        <p:nvPicPr>
+          <p:cNvPr id="29" name="Graphic 28" descr="Old Key with solid fill">
+            <a:extLst>
+              <a:ext uri="{FF2B5EF4-FFF2-40B4-BE49-F238E27FC236}">
+                <a16:creationId xmlns:a16="http://schemas.microsoft.com/office/drawing/2014/main" id="{2333B70C-50DE-2E44-A79B-EB013737E8AE}"/>
+              </a:ext>
+            </a:extLst>
+          </p:cNvPr>
+          <p:cNvPicPr>
+            <a:picLocks noChangeAspect="1"/>
+          </p:cNvPicPr>
+          <p:nvPr/>
+        </p:nvPicPr>
+        <p:blipFill>
+          <a:blip r:embed="rId2" cstate="email">
+            <a:extLst>
+              <a:ext uri="{28A0092B-C50C-407E-A947-70E740481C1C}">
+                <a14:useLocalDpi xmlns:a14="http://schemas.microsoft.com/office/drawing/2010/main"/>
+              </a:ext>
+              <a:ext uri="{96DAC541-7B7A-43D3-8B79-37D633B846F1}">
+                <asvg:svgBlip xmlns:asvg="http://schemas.microsoft.com/office/drawing/2016/SVG/main" r:embed="rId3"/>
+              </a:ext>
+            </a:extLst>
+          </a:blip>
+          <a:stretch>
+            <a:fillRect/>
+          </a:stretch>
+        </p:blipFill>
+        <p:spPr>
+          <a:xfrm>
+            <a:off x="9805096" y="5173086"/>
+            <a:ext cx="538166" cy="538166"/>
+          </a:xfrm>
+          <a:prstGeom prst="rect">
+            <a:avLst/>
+          </a:prstGeom>
+        </p:spPr>
+      </p:pic>
+      <p:pic>
+        <p:nvPicPr>
+          <p:cNvPr id="30" name="Graphic 29" descr="Users with solid fill">
+            <a:extLst>
+              <a:ext uri="{FF2B5EF4-FFF2-40B4-BE49-F238E27FC236}">
+                <a16:creationId xmlns:a16="http://schemas.microsoft.com/office/drawing/2014/main" id="{C948B39E-ECC7-034B-9C00-D1AA6BDD5626}"/>
+              </a:ext>
+            </a:extLst>
+          </p:cNvPr>
+          <p:cNvPicPr>
+            <a:picLocks noChangeAspect="1"/>
+          </p:cNvPicPr>
+          <p:nvPr/>
+        </p:nvPicPr>
+        <p:blipFill>
+          <a:blip r:embed="rId10">
+            <a:extLst>
+              <a:ext uri="{96DAC541-7B7A-43D3-8B79-37D633B846F1}">
+                <asvg:svgBlip xmlns:asvg="http://schemas.microsoft.com/office/drawing/2016/SVG/main" r:embed="rId11"/>
+              </a:ext>
+            </a:extLst>
+          </a:blip>
+          <a:stretch>
+            <a:fillRect/>
+          </a:stretch>
+        </p:blipFill>
+        <p:spPr>
+          <a:xfrm>
+            <a:off x="10392114" y="5041480"/>
+            <a:ext cx="914400" cy="914400"/>
+          </a:xfrm>
+          <a:prstGeom prst="rect">
+            <a:avLst/>
+          </a:prstGeom>
+        </p:spPr>
+      </p:pic>
+      <p:cxnSp>
+        <p:nvCxnSpPr>
+          <p:cNvPr id="32" name="Straight Arrow Connector 31">
+            <a:extLst>
+              <a:ext uri="{FF2B5EF4-FFF2-40B4-BE49-F238E27FC236}">
+                <a16:creationId xmlns:a16="http://schemas.microsoft.com/office/drawing/2014/main" id="{67AD8ED7-F7DD-6440-A712-E200BAD56D09}"/>
+              </a:ext>
+            </a:extLst>
+          </p:cNvPr>
+          <p:cNvCxnSpPr>
+            <a:cxnSpLocks/>
+            <a:stCxn id="29" idx="2"/>
+            <a:endCxn id="27" idx="3"/>
+          </p:cNvCxnSpPr>
+          <p:nvPr/>
+        </p:nvCxnSpPr>
+        <p:spPr>
+          <a:xfrm flipH="1">
+            <a:off x="9259150" y="5711252"/>
+            <a:ext cx="815029" cy="429294"/>
+          </a:xfrm>
+          <a:prstGeom prst="straightConnector1">
+            <a:avLst/>
+          </a:prstGeom>
+          <a:ln>
+            <a:tailEnd type="triangle"/>
+          </a:ln>
+        </p:spPr>
+        <p:style>
+          <a:lnRef idx="1">
+            <a:schemeClr val="accent1"/>
+          </a:lnRef>
+          <a:fillRef idx="0">
+            <a:schemeClr val="accent1"/>
+          </a:fillRef>
+          <a:effectRef idx="0">
+            <a:schemeClr val="accent1"/>
+          </a:effectRef>
+          <a:fontRef idx="minor">
+            <a:schemeClr val="tx1"/>
+          </a:fontRef>
+        </p:style>
+      </p:cxnSp>
+      <p:sp>
+        <p:nvSpPr>
+          <p:cNvPr id="34" name="TextBox 33">
+            <a:extLst>
+              <a:ext uri="{FF2B5EF4-FFF2-40B4-BE49-F238E27FC236}">
+                <a16:creationId xmlns:a16="http://schemas.microsoft.com/office/drawing/2014/main" id="{7669DC17-CE2B-E64C-9935-706CD126CDD5}"/>
+              </a:ext>
+            </a:extLst>
+          </p:cNvPr>
+          <p:cNvSpPr txBox="1"/>
+          <p:nvPr/>
+        </p:nvSpPr>
+        <p:spPr>
+          <a:xfrm rot="19843804">
+            <a:off x="9548549" y="5851623"/>
+            <a:ext cx="922047" cy="369332"/>
+          </a:xfrm>
+          <a:prstGeom prst="rect">
+            <a:avLst/>
+          </a:prstGeom>
+          <a:noFill/>
+        </p:spPr>
+        <p:txBody>
+          <a:bodyPr wrap="none" rtlCol="0">
+            <a:spAutoFit/>
+          </a:bodyPr>
+          <a:lstStyle/>
+          <a:p>
+            <a:r>
+              <a:rPr lang="en-US" dirty="0"/>
+              <a:t>validate</a:t>
+            </a:r>
+          </a:p>
+        </p:txBody>
+      </p:sp>
+      <p:sp>
+        <p:nvSpPr>
+          <p:cNvPr id="35" name="TextBox 34">
+            <a:extLst>
+              <a:ext uri="{FF2B5EF4-FFF2-40B4-BE49-F238E27FC236}">
+                <a16:creationId xmlns:a16="http://schemas.microsoft.com/office/drawing/2014/main" id="{937094D4-C58C-9844-B226-17B63D0EE261}"/>
+              </a:ext>
+            </a:extLst>
+          </p:cNvPr>
+          <p:cNvSpPr txBox="1"/>
+          <p:nvPr/>
+        </p:nvSpPr>
+        <p:spPr>
+          <a:xfrm>
+            <a:off x="934192" y="4014653"/>
+            <a:ext cx="3057184" cy="369332"/>
+          </a:xfrm>
+          <a:prstGeom prst="rect">
+            <a:avLst/>
+          </a:prstGeom>
+          <a:noFill/>
+        </p:spPr>
+        <p:txBody>
+          <a:bodyPr wrap="none" rtlCol="0">
+            <a:spAutoFit/>
+          </a:bodyPr>
+          <a:lstStyle/>
+          <a:p>
+            <a:r>
+              <a:rPr lang="en-US" dirty="0"/>
+              <a:t>Example transaction structure:</a:t>
+            </a:r>
+          </a:p>
+        </p:txBody>
+      </p:sp>
+      <p:cxnSp>
+        <p:nvCxnSpPr>
+          <p:cNvPr id="37" name="Straight Arrow Connector 36">
+            <a:extLst>
+              <a:ext uri="{FF2B5EF4-FFF2-40B4-BE49-F238E27FC236}">
+                <a16:creationId xmlns:a16="http://schemas.microsoft.com/office/drawing/2014/main" id="{094C86D8-5894-2840-86B0-7D72E9B55C91}"/>
+              </a:ext>
+            </a:extLst>
+          </p:cNvPr>
+          <p:cNvCxnSpPr>
+            <a:cxnSpLocks/>
+          </p:cNvCxnSpPr>
+          <p:nvPr/>
+        </p:nvCxnSpPr>
+        <p:spPr>
+          <a:xfrm flipV="1">
+            <a:off x="9534974" y="852974"/>
+            <a:ext cx="0" cy="568130"/>
+          </a:xfrm>
+          <a:prstGeom prst="straightConnector1">
+            <a:avLst/>
+          </a:prstGeom>
+          <a:ln w="38100">
+            <a:tailEnd type="triangle"/>
+          </a:ln>
+        </p:spPr>
+        <p:style>
+          <a:lnRef idx="1">
+            <a:schemeClr val="dk1"/>
+          </a:lnRef>
+          <a:fillRef idx="0">
+            <a:schemeClr val="dk1"/>
+          </a:fillRef>
+          <a:effectRef idx="0">
+            <a:schemeClr val="dk1"/>
+          </a:effectRef>
+          <a:fontRef idx="minor">
+            <a:schemeClr val="tx1"/>
+          </a:fontRef>
+        </p:style>
+      </p:cxnSp>
+      <p:cxnSp>
+        <p:nvCxnSpPr>
+          <p:cNvPr id="39" name="Straight Arrow Connector 38">
+            <a:extLst>
+              <a:ext uri="{FF2B5EF4-FFF2-40B4-BE49-F238E27FC236}">
+                <a16:creationId xmlns:a16="http://schemas.microsoft.com/office/drawing/2014/main" id="{3CFFA514-D14B-A948-AB40-1F8EA2A13B00}"/>
+              </a:ext>
+            </a:extLst>
+          </p:cNvPr>
+          <p:cNvCxnSpPr>
+            <a:cxnSpLocks/>
+          </p:cNvCxnSpPr>
+          <p:nvPr/>
+        </p:nvCxnSpPr>
+        <p:spPr>
+          <a:xfrm flipV="1">
+            <a:off x="7786080" y="852974"/>
+            <a:ext cx="0" cy="568130"/>
+          </a:xfrm>
+          <a:prstGeom prst="straightConnector1">
+            <a:avLst/>
+          </a:prstGeom>
+          <a:ln w="38100">
+            <a:tailEnd type="triangle"/>
+          </a:ln>
+        </p:spPr>
+        <p:style>
+          <a:lnRef idx="1">
+            <a:schemeClr val="dk1"/>
+          </a:lnRef>
+          <a:fillRef idx="0">
+            <a:schemeClr val="dk1"/>
+          </a:fillRef>
+          <a:effectRef idx="0">
+            <a:schemeClr val="dk1"/>
+          </a:effectRef>
+          <a:fontRef idx="minor">
+            <a:schemeClr val="tx1"/>
+          </a:fontRef>
+        </p:style>
+      </p:cxnSp>
+      <p:sp>
+        <p:nvSpPr>
+          <p:cNvPr id="40" name="TextBox 39">
+            <a:extLst>
+              <a:ext uri="{FF2B5EF4-FFF2-40B4-BE49-F238E27FC236}">
+                <a16:creationId xmlns:a16="http://schemas.microsoft.com/office/drawing/2014/main" id="{01C089D3-CA54-AB41-BFD4-CE556B55C9B2}"/>
+              </a:ext>
+            </a:extLst>
+          </p:cNvPr>
+          <p:cNvSpPr txBox="1"/>
+          <p:nvPr/>
+        </p:nvSpPr>
+        <p:spPr>
+          <a:xfrm>
+            <a:off x="7469358" y="462017"/>
+            <a:ext cx="653512" cy="369332"/>
+          </a:xfrm>
+          <a:prstGeom prst="rect">
+            <a:avLst/>
+          </a:prstGeom>
+          <a:noFill/>
+        </p:spPr>
+        <p:txBody>
+          <a:bodyPr wrap="none" rtlCol="0">
+            <a:spAutoFit/>
+          </a:bodyPr>
+          <a:lstStyle/>
+          <a:p>
+            <a:r>
+              <a:rPr lang="en-US" dirty="0"/>
+              <a:t>Read</a:t>
+            </a:r>
+          </a:p>
+        </p:txBody>
+      </p:sp>
+      <p:sp>
+        <p:nvSpPr>
+          <p:cNvPr id="41" name="TextBox 40">
+            <a:extLst>
+              <a:ext uri="{FF2B5EF4-FFF2-40B4-BE49-F238E27FC236}">
+                <a16:creationId xmlns:a16="http://schemas.microsoft.com/office/drawing/2014/main" id="{D46DFD0B-2435-194A-AC9E-D5FE3D84EEF6}"/>
+              </a:ext>
+            </a:extLst>
+          </p:cNvPr>
+          <p:cNvSpPr txBox="1"/>
+          <p:nvPr/>
+        </p:nvSpPr>
+        <p:spPr>
+          <a:xfrm>
+            <a:off x="9208218" y="434263"/>
+            <a:ext cx="706027" cy="369332"/>
+          </a:xfrm>
+          <a:prstGeom prst="rect">
+            <a:avLst/>
+          </a:prstGeom>
+          <a:noFill/>
+        </p:spPr>
+        <p:txBody>
+          <a:bodyPr wrap="none" rtlCol="0">
+            <a:spAutoFit/>
+          </a:bodyPr>
+          <a:lstStyle/>
+          <a:p>
+            <a:r>
+              <a:rPr lang="en-US" dirty="0"/>
+              <a:t>Write</a:t>
+            </a:r>
+          </a:p>
+        </p:txBody>
+      </p:sp>
+      <p:sp>
+        <p:nvSpPr>
+          <p:cNvPr id="38" name="TextBox 37">
+            <a:extLst>
+              <a:ext uri="{FF2B5EF4-FFF2-40B4-BE49-F238E27FC236}">
+                <a16:creationId xmlns:a16="http://schemas.microsoft.com/office/drawing/2014/main" id="{CDDE0C2A-7806-324F-BD36-6751C0204289}"/>
+              </a:ext>
+            </a:extLst>
+          </p:cNvPr>
+          <p:cNvSpPr txBox="1"/>
+          <p:nvPr/>
+        </p:nvSpPr>
+        <p:spPr>
+          <a:xfrm>
+            <a:off x="8418579" y="6447147"/>
+            <a:ext cx="3803605" cy="584775"/>
+          </a:xfrm>
+          <a:prstGeom prst="rect">
+            <a:avLst/>
+          </a:prstGeom>
+          <a:noFill/>
+        </p:spPr>
+        <p:txBody>
+          <a:bodyPr wrap="none" rtlCol="0">
+            <a:spAutoFit/>
+          </a:bodyPr>
+          <a:lstStyle/>
+          <a:p>
+            <a:r>
+              <a:rPr lang="en-US" sz="1400" dirty="0"/>
+              <a:t>02- </a:t>
+            </a:r>
+            <a:r>
+              <a:rPr lang="en-US" sz="1400" dirty="0">
+                <a:solidFill>
+                  <a:schemeClr val="accent1">
+                    <a:lumMod val="50000"/>
+                  </a:schemeClr>
+                </a:solidFill>
+                <a:highlight>
+                  <a:srgbClr val="FFFF00"/>
+                </a:highlight>
+              </a:rPr>
+              <a:t>Malte sends 1 BTC to Martin-</a:t>
+            </a:r>
+            <a:r>
+              <a:rPr lang="en-US" sz="1400" dirty="0">
+                <a:solidFill>
+                  <a:srgbClr val="C00000"/>
+                </a:solidFill>
+              </a:rPr>
+              <a:t>df3mfssfak7dfd</a:t>
+            </a:r>
+          </a:p>
+          <a:p>
+            <a:endParaRPr lang="en-US" dirty="0"/>
+          </a:p>
+        </p:txBody>
+      </p:sp>
+    </p:spTree>
+    <p:extLst>
+      <p:ext uri="{BB962C8B-B14F-4D97-AF65-F5344CB8AC3E}">
+        <p14:creationId xmlns:p14="http://schemas.microsoft.com/office/powerpoint/2010/main" val="3493101456"/>
+      </p:ext>
+    </p:extLst>
+  </p:cSld>
+  <p:clrMapOvr>
+    <a:masterClrMapping/>
+  </p:clrMapOvr>
+</p:sld>
+</file>
+
+<file path=ppt/slides/slide11.xml><?xml version="1.0" encoding="utf-8"?>
+<p:sld xmlns:a="http://schemas.openxmlformats.org/drawingml/2006/main" xmlns:r="http://schemas.openxmlformats.org/officeDocument/2006/relationships" xmlns:p="http://schemas.openxmlformats.org/presentationml/2006/main">
+  <p:cSld>
+    <p:spTree>
+      <p:nvGrpSpPr>
+        <p:cNvPr id="1" name=""/>
+        <p:cNvGrpSpPr/>
+        <p:nvPr/>
+      </p:nvGrpSpPr>
+      <p:grpSpPr>
+        <a:xfrm>
+          <a:off x="0" y="0"/>
+          <a:ext cx="0" cy="0"/>
+          <a:chOff x="0" y="0"/>
+          <a:chExt cx="0" cy="0"/>
+        </a:xfrm>
+      </p:grpSpPr>
+      <p:sp>
+        <p:nvSpPr>
+          <p:cNvPr id="2" name="TextBox 1">
+            <a:extLst>
+              <a:ext uri="{FF2B5EF4-FFF2-40B4-BE49-F238E27FC236}">
+                <a16:creationId xmlns:a16="http://schemas.microsoft.com/office/drawing/2014/main" id="{891D3C3A-6600-6447-9C42-BB332A743826}"/>
+              </a:ext>
+            </a:extLst>
+          </p:cNvPr>
+          <p:cNvSpPr txBox="1"/>
+          <p:nvPr/>
+        </p:nvSpPr>
+        <p:spPr>
+          <a:xfrm>
+            <a:off x="1" y="120415"/>
+            <a:ext cx="3769360" cy="523220"/>
+          </a:xfrm>
+          <a:prstGeom prst="rect">
+            <a:avLst/>
+          </a:prstGeom>
+          <a:noFill/>
+        </p:spPr>
+        <p:txBody>
+          <a:bodyPr wrap="square" rtlCol="0">
+            <a:spAutoFit/>
+          </a:bodyPr>
+          <a:lstStyle/>
+          <a:p>
+            <a:r>
+              <a:rPr lang="en-US" sz="2800" b="1"/>
+              <a:t>Best Hardware Wallet</a:t>
+            </a:r>
+          </a:p>
+        </p:txBody>
+      </p:sp>
+      <p:sp>
+        <p:nvSpPr>
+          <p:cNvPr id="3" name="TextBox 2">
+            <a:extLst>
+              <a:ext uri="{FF2B5EF4-FFF2-40B4-BE49-F238E27FC236}">
+                <a16:creationId xmlns:a16="http://schemas.microsoft.com/office/drawing/2014/main" id="{E0AB3421-15B2-F64D-B4D9-A2655D111DC8}"/>
+              </a:ext>
+            </a:extLst>
+          </p:cNvPr>
+          <p:cNvSpPr txBox="1"/>
+          <p:nvPr/>
+        </p:nvSpPr>
+        <p:spPr>
+          <a:xfrm>
+            <a:off x="3971716" y="1717899"/>
+            <a:ext cx="4248567" cy="2893100"/>
+          </a:xfrm>
+          <a:prstGeom prst="rect">
+            <a:avLst/>
+          </a:prstGeom>
+          <a:noFill/>
+        </p:spPr>
+        <p:txBody>
+          <a:bodyPr wrap="square" rtlCol="0">
+            <a:spAutoFit/>
+          </a:bodyPr>
+          <a:lstStyle/>
+          <a:p>
+            <a:pPr marL="380990" indent="-380990">
+              <a:buFont typeface="Arial" panose="020B0604020202020204" pitchFamily="34" charset="0"/>
+              <a:buChar char="•"/>
+            </a:pPr>
+            <a:r>
+              <a:rPr lang="en-US" sz="1400"/>
+              <a:t>Ledger Nano X - </a:t>
+            </a:r>
+            <a:r>
+              <a:rPr lang="en-US" sz="1400">
+                <a:hlinkClick r:id="rId2"/>
+              </a:rPr>
+              <a:t>https://www.ledger.com</a:t>
+            </a:r>
+            <a:r>
+              <a:rPr lang="en-US" sz="1400"/>
+              <a:t> –</a:t>
+            </a:r>
+            <a:br>
+              <a:rPr lang="en-US" sz="1400"/>
+            </a:br>
+            <a:br>
+              <a:rPr lang="en-US" sz="1400"/>
+            </a:br>
+            <a:r>
+              <a:rPr lang="en-US" sz="1400"/>
+              <a:t> </a:t>
+            </a:r>
+          </a:p>
+          <a:p>
+            <a:endParaRPr lang="en-US" sz="1400"/>
+          </a:p>
+          <a:p>
+            <a:pPr marL="380990" indent="-380990">
+              <a:buFont typeface="Arial" panose="020B0604020202020204" pitchFamily="34" charset="0"/>
+              <a:buChar char="•"/>
+            </a:pPr>
+            <a:r>
+              <a:rPr lang="en-US" sz="1400"/>
+              <a:t>Trezor - </a:t>
+            </a:r>
+            <a:r>
+              <a:rPr lang="en-US" sz="1400">
+                <a:hlinkClick r:id="rId3"/>
+              </a:rPr>
+              <a:t>https://trezor.io</a:t>
+            </a:r>
+            <a:r>
+              <a:rPr lang="en-US" sz="1400"/>
+              <a:t> – </a:t>
+            </a:r>
+          </a:p>
+          <a:p>
+            <a:endParaRPr lang="en-US" sz="1400"/>
+          </a:p>
+          <a:p>
+            <a:endParaRPr lang="en-US" sz="1400"/>
+          </a:p>
+          <a:p>
+            <a:endParaRPr lang="en-US" sz="1400"/>
+          </a:p>
+          <a:p>
+            <a:pPr marL="380990" indent="-380990">
+              <a:buFont typeface="Arial" panose="020B0604020202020204" pitchFamily="34" charset="0"/>
+              <a:buChar char="•"/>
+            </a:pPr>
+            <a:r>
+              <a:rPr lang="en-US" sz="1400"/>
+              <a:t>Arculus - </a:t>
+            </a:r>
+            <a:r>
+              <a:rPr lang="en-US" sz="1400">
+                <a:hlinkClick r:id="rId4"/>
+              </a:rPr>
+              <a:t>https://www.getarculus.com</a:t>
+            </a:r>
+            <a:r>
+              <a:rPr lang="en-US" sz="1400"/>
+              <a:t> – </a:t>
+            </a:r>
+          </a:p>
+          <a:p>
+            <a:pPr marL="380990" indent="-380990">
+              <a:buFont typeface="Arial" panose="020B0604020202020204" pitchFamily="34" charset="0"/>
+              <a:buChar char="•"/>
+            </a:pPr>
+            <a:endParaRPr lang="en-US" sz="1400"/>
+          </a:p>
+          <a:p>
+            <a:pPr marL="380990" indent="-380990">
+              <a:buFont typeface="Arial" panose="020B0604020202020204" pitchFamily="34" charset="0"/>
+              <a:buChar char="•"/>
+            </a:pPr>
+            <a:endParaRPr lang="en-US" sz="1400"/>
+          </a:p>
+          <a:p>
+            <a:endParaRPr lang="en-US" sz="1400"/>
+          </a:p>
+          <a:p>
+            <a:pPr marL="380990" indent="-380990">
+              <a:buFont typeface="Arial" panose="020B0604020202020204" pitchFamily="34" charset="0"/>
+              <a:buChar char="•"/>
+            </a:pPr>
+            <a:r>
+              <a:rPr lang="en-US" sz="1400"/>
+              <a:t>SafePal - </a:t>
+            </a:r>
+            <a:r>
+              <a:rPr lang="en-US" sz="1400">
+                <a:hlinkClick r:id="rId5"/>
+              </a:rPr>
+              <a:t>https://safepal.io</a:t>
+            </a:r>
+            <a:r>
+              <a:rPr lang="en-US" sz="1400"/>
+              <a:t> - </a:t>
+            </a:r>
+          </a:p>
+        </p:txBody>
+      </p:sp>
+      <p:pic>
+        <p:nvPicPr>
+          <p:cNvPr id="4" name="Picture 3">
+            <a:extLst>
+              <a:ext uri="{FF2B5EF4-FFF2-40B4-BE49-F238E27FC236}">
+                <a16:creationId xmlns:a16="http://schemas.microsoft.com/office/drawing/2014/main" id="{442092FA-C9EC-9A42-8AF8-4A2E15786CF4}"/>
+              </a:ext>
+            </a:extLst>
+          </p:cNvPr>
+          <p:cNvPicPr>
+            <a:picLocks noChangeAspect="1"/>
+          </p:cNvPicPr>
+          <p:nvPr/>
+        </p:nvPicPr>
+        <p:blipFill>
+          <a:blip r:embed="rId6" cstate="email">
+            <a:extLst>
+              <a:ext uri="{28A0092B-C50C-407E-A947-70E740481C1C}">
+                <a14:useLocalDpi xmlns:a14="http://schemas.microsoft.com/office/drawing/2010/main"/>
+              </a:ext>
+            </a:extLst>
+          </a:blip>
+          <a:stretch>
+            <a:fillRect/>
+          </a:stretch>
+        </p:blipFill>
+        <p:spPr>
+          <a:xfrm rot="5400000">
+            <a:off x="9128242" y="562388"/>
+            <a:ext cx="1258880" cy="2574722"/>
+          </a:xfrm>
+          <a:prstGeom prst="rect">
+            <a:avLst/>
+          </a:prstGeom>
+        </p:spPr>
+      </p:pic>
+      <p:pic>
+        <p:nvPicPr>
+          <p:cNvPr id="5" name="Picture 4">
+            <a:extLst>
+              <a:ext uri="{FF2B5EF4-FFF2-40B4-BE49-F238E27FC236}">
+                <a16:creationId xmlns:a16="http://schemas.microsoft.com/office/drawing/2014/main" id="{AC926C88-FAFB-8944-BB3B-C61F2995F0F2}"/>
+              </a:ext>
+            </a:extLst>
+          </p:cNvPr>
+          <p:cNvPicPr>
+            <a:picLocks noChangeAspect="1"/>
+          </p:cNvPicPr>
+          <p:nvPr/>
+        </p:nvPicPr>
+        <p:blipFill>
+          <a:blip r:embed="rId7" cstate="email">
+            <a:extLst>
+              <a:ext uri="{28A0092B-C50C-407E-A947-70E740481C1C}">
+                <a14:useLocalDpi xmlns:a14="http://schemas.microsoft.com/office/drawing/2010/main"/>
+              </a:ext>
+            </a:extLst>
+          </a:blip>
+          <a:stretch>
+            <a:fillRect/>
+          </a:stretch>
+        </p:blipFill>
+        <p:spPr>
+          <a:xfrm>
+            <a:off x="2563438" y="2058425"/>
+            <a:ext cx="1041095" cy="1676568"/>
+          </a:xfrm>
+          <a:prstGeom prst="rect">
+            <a:avLst/>
+          </a:prstGeom>
+        </p:spPr>
+      </p:pic>
+      <p:pic>
+        <p:nvPicPr>
+          <p:cNvPr id="1026" name="Picture 2" descr="Cold Storage Wallet to Secure Your Crypto | Meet Arculus">
+            <a:extLst>
+              <a:ext uri="{FF2B5EF4-FFF2-40B4-BE49-F238E27FC236}">
+                <a16:creationId xmlns:a16="http://schemas.microsoft.com/office/drawing/2014/main" id="{77FFEF9A-863D-624D-9498-4BB97AC6CAF3}"/>
+              </a:ext>
+            </a:extLst>
+          </p:cNvPr>
+          <p:cNvPicPr>
+            <a:picLocks noChangeAspect="1" noChangeArrowheads="1"/>
+          </p:cNvPicPr>
+          <p:nvPr/>
+        </p:nvPicPr>
+        <p:blipFill rotWithShape="1">
+          <a:blip r:embed="rId8" cstate="email">
+            <a:extLst>
+              <a:ext uri="{28A0092B-C50C-407E-A947-70E740481C1C}">
+                <a14:useLocalDpi xmlns:a14="http://schemas.microsoft.com/office/drawing/2010/main"/>
+              </a:ext>
+            </a:extLst>
+          </a:blip>
+          <a:srcRect/>
+          <a:stretch/>
+        </p:blipFill>
+        <p:spPr bwMode="auto">
+          <a:xfrm>
+            <a:off x="8114721" y="2896709"/>
+            <a:ext cx="1741765" cy="1450240"/>
+          </a:xfrm>
+          <a:prstGeom prst="rect">
+            <a:avLst/>
+          </a:prstGeom>
+          <a:noFill/>
+          <a:extLst>
+            <a:ext uri="{909E8E84-426E-40DD-AFC4-6F175D3DCCD1}">
+              <a14:hiddenFill xmlns:a14="http://schemas.microsoft.com/office/drawing/2010/main">
+                <a:solidFill>
+                  <a:srgbClr val="FFFFFF"/>
+                </a:solidFill>
+              </a14:hiddenFill>
+            </a:ext>
+          </a:extLst>
+        </p:spPr>
+      </p:pic>
+      <p:pic>
+        <p:nvPicPr>
+          <p:cNvPr id="1028" name="Picture 4" descr="SafePal Crypto Hardware Wallet(Official) | The best wallet to protect your  assets">
+            <a:extLst>
+              <a:ext uri="{FF2B5EF4-FFF2-40B4-BE49-F238E27FC236}">
+                <a16:creationId xmlns:a16="http://schemas.microsoft.com/office/drawing/2014/main" id="{26AC31D8-2196-A043-BAFF-554D7C635991}"/>
+              </a:ext>
+            </a:extLst>
+          </p:cNvPr>
+          <p:cNvPicPr>
+            <a:picLocks noChangeAspect="1" noChangeArrowheads="1"/>
+          </p:cNvPicPr>
+          <p:nvPr/>
+        </p:nvPicPr>
+        <p:blipFill>
+          <a:blip r:embed="rId9" cstate="email">
+            <a:extLst>
+              <a:ext uri="{28A0092B-C50C-407E-A947-70E740481C1C}">
+                <a14:useLocalDpi xmlns:a14="http://schemas.microsoft.com/office/drawing/2010/main"/>
+              </a:ext>
+            </a:extLst>
+          </a:blip>
+          <a:srcRect/>
+          <a:stretch>
+            <a:fillRect/>
+          </a:stretch>
+        </p:blipFill>
+        <p:spPr bwMode="auto">
+          <a:xfrm>
+            <a:off x="2142224" y="4056480"/>
+            <a:ext cx="1883521" cy="1450240"/>
+          </a:xfrm>
+          <a:prstGeom prst="rect">
+            <a:avLst/>
+          </a:prstGeom>
+          <a:noFill/>
+          <a:extLst>
+            <a:ext uri="{909E8E84-426E-40DD-AFC4-6F175D3DCCD1}">
+              <a14:hiddenFill xmlns:a14="http://schemas.microsoft.com/office/drawing/2010/main">
+                <a:solidFill>
+                  <a:srgbClr val="FFFFFF"/>
+                </a:solidFill>
+              </a14:hiddenFill>
+            </a:ext>
+          </a:extLst>
+        </p:spPr>
+      </p:pic>
+    </p:spTree>
+    <p:extLst>
+      <p:ext uri="{BB962C8B-B14F-4D97-AF65-F5344CB8AC3E}">
+        <p14:creationId xmlns:p14="http://schemas.microsoft.com/office/powerpoint/2010/main" val="4212851956"/>
+      </p:ext>
+    </p:extLst>
+  </p:cSld>
+  <p:clrMapOvr>
+    <a:masterClrMapping/>
+  </p:clrMapOvr>
+</p:sld>
+</file>
+
 <file path=ppt/slides/slide2.xml><?xml version="1.0" encoding="utf-8"?>
 <p:sld xmlns:a="http://schemas.openxmlformats.org/drawingml/2006/main" xmlns:r="http://schemas.openxmlformats.org/officeDocument/2006/relationships" xmlns:p="http://schemas.openxmlformats.org/presentationml/2006/main">
   <p:cSld>
@@ -3712,7 +5462,7 @@
             </a:pPr>
             <a:r>
               <a:rPr lang="en-US" sz="1400"/>
-              <a:t>Paper (address, keys, QR-code)</a:t>
+              <a:t>Paper (addresses, keys, QR-codes)</a:t>
             </a:r>
           </a:p>
         </p:txBody>
@@ -3967,8 +5717,8 @@
         </p:nvSpPr>
         <p:spPr>
           <a:xfrm>
-            <a:off x="7756886" y="336474"/>
-            <a:ext cx="4106869" cy="2954655"/>
+            <a:off x="7361755" y="161445"/>
+            <a:ext cx="4594437" cy="3231654"/>
           </a:xfrm>
           <a:prstGeom prst="rect">
             <a:avLst/>
@@ -3987,7 +5737,17 @@
                   <a:srgbClr val="00B050"/>
                 </a:solidFill>
               </a:rPr>
-              <a:t>Account vs Wallet</a:t>
+              <a:t>Personal Wallet </a:t>
+            </a:r>
+          </a:p>
+          <a:p>
+            <a:r>
+              <a:rPr lang="en-US" b="1">
+                <a:solidFill>
+                  <a:srgbClr val="00B050"/>
+                </a:solidFill>
+              </a:rPr>
+              <a:t>vs Account (Custodial Wallet)</a:t>
             </a:r>
           </a:p>
           <a:p>
@@ -4005,7 +5765,7 @@
           <a:p>
             <a:r>
               <a:rPr lang="en-US" sz="1400"/>
-              <a:t>Typically what they call a wallet is not an actual wallet on a decentralized blockchain, but rather an account which is connected with several wallets owned by the company.</a:t>
+              <a:t>Typically what they call a wallet is not an actual personal wallet on a decentralized blockchain, but rather an account (a.k.a. custodial wallet) which is connected with several wallets owned by the company.</a:t>
             </a:r>
           </a:p>
           <a:p>
@@ -4014,7 +5774,7 @@
           <a:p>
             <a:r>
               <a:rPr lang="en-US" sz="1400"/>
-              <a:t>The transactions and storage is done using company's own wallets – for which they charge extra fees.</a:t>
+              <a:t>The transactions and storage is done using company owned wallets – for which they charge extra fees.</a:t>
             </a:r>
           </a:p>
         </p:txBody>
@@ -4034,14 +5794,14 @@
           <p:nvPr>
             <p:extLst>
               <p:ext uri="{D42A27DB-BD31-4B8C-83A1-F6EECF244321}">
-                <p14:modId xmlns:p14="http://schemas.microsoft.com/office/powerpoint/2010/main" val="238828613"/>
+                <p14:modId xmlns:p14="http://schemas.microsoft.com/office/powerpoint/2010/main" val="2132468290"/>
               </p:ext>
             </p:extLst>
           </p:nvPr>
         </p:nvGraphicFramePr>
         <p:xfrm>
-          <a:off x="7702149" y="3558088"/>
-          <a:ext cx="4161606" cy="2884472"/>
+          <a:off x="7497296" y="3429000"/>
+          <a:ext cx="4161606" cy="2555286"/>
         </p:xfrm>
         <a:graphic>
           <a:graphicData uri="http://schemas.openxmlformats.org/drawingml/2006/table">
@@ -4065,7 +5825,7 @@
                   </a:extLst>
                 </a:gridCol>
               </a:tblGrid>
-              <a:tr h="710716">
+              <a:tr h="546123">
                 <a:tc>
                   <a:txBody>
                     <a:bodyPr/>
@@ -4089,6 +5849,12 @@
                         <a:t>Crypto Exchange</a:t>
                       </a:r>
                     </a:p>
+                    <a:p>
+                      <a:r>
+                        <a:rPr lang="en-US" sz="1400"/>
+                        <a:t>(custodial wallet)</a:t>
+                      </a:r>
+                    </a:p>
                   </a:txBody>
                   <a:tcPr/>
                 </a:tc>
@@ -4098,7 +5864,7 @@
                   </a:ext>
                 </a:extLst>
               </a:tr>
-              <a:tr h="710716">
+              <a:tr h="651019">
                 <a:tc>
                   <a:txBody>
                     <a:bodyPr/>
@@ -4131,7 +5897,7 @@
                   </a:ext>
                 </a:extLst>
               </a:tr>
-              <a:tr h="710716">
+              <a:tr h="651019">
                 <a:tc>
                   <a:txBody>
                     <a:bodyPr/>
@@ -4164,7 +5930,7 @@
                   </a:ext>
                 </a:extLst>
               </a:tr>
-              <a:tr h="710716">
+              <a:tr h="546123">
                 <a:tc>
                   <a:txBody>
                     <a:bodyPr/>
@@ -4215,7 +5981,7 @@
         </p:nvCxnSpPr>
         <p:spPr>
           <a:xfrm>
-            <a:off x="7057292" y="234462"/>
+            <a:off x="6900876" y="234462"/>
             <a:ext cx="0" cy="6412523"/>
           </a:xfrm>
           <a:prstGeom prst="line">
@@ -4238,6 +6004,44 @@
           </a:fontRef>
         </p:style>
       </p:cxnSp>
+      <p:sp>
+        <p:nvSpPr>
+          <p:cNvPr id="10" name="TextBox 9">
+            <a:extLst>
+              <a:ext uri="{FF2B5EF4-FFF2-40B4-BE49-F238E27FC236}">
+                <a16:creationId xmlns:a16="http://schemas.microsoft.com/office/drawing/2014/main" id="{ACD88398-8FDE-8CAD-36D9-74700328444E}"/>
+              </a:ext>
+            </a:extLst>
+          </p:cNvPr>
+          <p:cNvSpPr txBox="1"/>
+          <p:nvPr/>
+        </p:nvSpPr>
+        <p:spPr>
+          <a:xfrm>
+            <a:off x="8061828" y="6185320"/>
+            <a:ext cx="3320590" cy="461665"/>
+          </a:xfrm>
+          <a:prstGeom prst="rect">
+            <a:avLst/>
+          </a:prstGeom>
+          <a:noFill/>
+        </p:spPr>
+        <p:txBody>
+          <a:bodyPr wrap="square" rtlCol="0">
+            <a:spAutoFit/>
+          </a:bodyPr>
+          <a:lstStyle/>
+          <a:p>
+            <a:r>
+              <a:rPr lang="en-US" sz="1200">
+                <a:hlinkClick r:id="rId4"/>
+              </a:rPr>
+              <a:t>https://www.gemini.com/cryptopedia/crypto-wallets-custodial-vs-noncustodial</a:t>
+            </a:r>
+            <a:endParaRPr lang="en-US" sz="1200"/>
+          </a:p>
+        </p:txBody>
+      </p:sp>
     </p:spTree>
     <p:extLst>
       <p:ext uri="{BB962C8B-B14F-4D97-AF65-F5344CB8AC3E}">
@@ -4580,10 +6384,10 @@
       </p:sp>
       <p:pic>
         <p:nvPicPr>
-          <p:cNvPr id="5" name="Picture 4">
+          <p:cNvPr id="6" name="Picture 5">
             <a:extLst>
               <a:ext uri="{FF2B5EF4-FFF2-40B4-BE49-F238E27FC236}">
-                <a16:creationId xmlns:a16="http://schemas.microsoft.com/office/drawing/2014/main" id="{A0C92002-0C3B-CB92-51EB-BAFE3187F797}"/>
+                <a16:creationId xmlns:a16="http://schemas.microsoft.com/office/drawing/2014/main" id="{A301D624-34CD-195A-EBBD-99512E73ABA7}"/>
               </a:ext>
             </a:extLst>
           </p:cNvPr>
@@ -4606,20 +6410,56 @@
         </p:blipFill>
         <p:spPr>
           <a:xfrm>
-            <a:off x="6222482" y="1019908"/>
-            <a:ext cx="5867918" cy="5735559"/>
+            <a:off x="7771397" y="4484277"/>
+            <a:ext cx="4381500" cy="2235200"/>
           </a:xfrm>
           <a:prstGeom prst="rect">
             <a:avLst/>
           </a:prstGeom>
         </p:spPr>
       </p:pic>
-      <p:sp>
-        <p:nvSpPr>
-          <p:cNvPr id="7" name="TextBox 6">
+      <p:pic>
+        <p:nvPicPr>
+          <p:cNvPr id="8" name="Picture 7">
             <a:extLst>
               <a:ext uri="{FF2B5EF4-FFF2-40B4-BE49-F238E27FC236}">
-                <a16:creationId xmlns:a16="http://schemas.microsoft.com/office/drawing/2014/main" id="{152A9575-F217-4A40-7E1E-C40A76B5548A}"/>
+                <a16:creationId xmlns:a16="http://schemas.microsoft.com/office/drawing/2014/main" id="{2BD80573-751B-D695-4922-FC19012E3899}"/>
+              </a:ext>
+            </a:extLst>
+          </p:cNvPr>
+          <p:cNvPicPr>
+            <a:picLocks noChangeAspect="1"/>
+          </p:cNvPicPr>
+          <p:nvPr/>
+        </p:nvPicPr>
+        <p:blipFill>
+          <a:blip r:embed="rId9" cstate="email">
+            <a:extLst>
+              <a:ext uri="{28A0092B-C50C-407E-A947-70E740481C1C}">
+                <a14:useLocalDpi xmlns:a14="http://schemas.microsoft.com/office/drawing/2010/main"/>
+              </a:ext>
+            </a:extLst>
+          </a:blip>
+          <a:stretch>
+            <a:fillRect/>
+          </a:stretch>
+        </p:blipFill>
+        <p:spPr>
+          <a:xfrm>
+            <a:off x="9371598" y="61055"/>
+            <a:ext cx="1729710" cy="1194039"/>
+          </a:xfrm>
+          <a:prstGeom prst="rect">
+            <a:avLst/>
+          </a:prstGeom>
+        </p:spPr>
+      </p:pic>
+      <p:sp>
+        <p:nvSpPr>
+          <p:cNvPr id="9" name="TextBox 8">
+            <a:extLst>
+              <a:ext uri="{FF2B5EF4-FFF2-40B4-BE49-F238E27FC236}">
+                <a16:creationId xmlns:a16="http://schemas.microsoft.com/office/drawing/2014/main" id="{C9584DD9-F481-714A-10E4-B6B5B5546560}"/>
               </a:ext>
             </a:extLst>
           </p:cNvPr>
@@ -4628,8 +6468,8 @@
         </p:nvSpPr>
         <p:spPr>
           <a:xfrm>
-            <a:off x="7405858" y="292387"/>
-            <a:ext cx="3830320" cy="461665"/>
+            <a:off x="11101308" y="443812"/>
+            <a:ext cx="769994" cy="369332"/>
           </a:xfrm>
           <a:prstGeom prst="rect">
             <a:avLst/>
@@ -4642,23 +6482,119 @@
           </a:bodyPr>
           <a:lstStyle/>
           <a:p>
-            <a:r>
-              <a:rPr lang="en-US" sz="1400" b="1">
-                <a:solidFill>
-                  <a:srgbClr val="00B050"/>
-                </a:solidFill>
-              </a:rPr>
-              <a:t>Choose your wallet – on bitcoin.org:</a:t>
-            </a:r>
-          </a:p>
-          <a:p>
-            <a:r>
-              <a:rPr lang="en-US" sz="1000">
-                <a:hlinkClick r:id="rId9"/>
-              </a:rPr>
-              <a:t>https://bitcoin.org/en/choose-your-wallet?step=5&amp;platform=mac</a:t>
-            </a:r>
-            <a:endParaRPr lang="en-US" sz="1000"/>
+            <a:pPr algn="ctr"/>
+            <a:r>
+              <a:rPr lang="en-US"/>
+              <a:t>Install</a:t>
+            </a:r>
+          </a:p>
+        </p:txBody>
+      </p:sp>
+      <p:sp>
+        <p:nvSpPr>
+          <p:cNvPr id="12" name="TextBox 11">
+            <a:extLst>
+              <a:ext uri="{FF2B5EF4-FFF2-40B4-BE49-F238E27FC236}">
+                <a16:creationId xmlns:a16="http://schemas.microsoft.com/office/drawing/2014/main" id="{416F192B-EE6F-95BC-FDBD-73B210950BF4}"/>
+              </a:ext>
+            </a:extLst>
+          </p:cNvPr>
+          <p:cNvSpPr txBox="1"/>
+          <p:nvPr/>
+        </p:nvSpPr>
+        <p:spPr>
+          <a:xfrm>
+            <a:off x="6942221" y="5444936"/>
+            <a:ext cx="719388" cy="369332"/>
+          </a:xfrm>
+          <a:prstGeom prst="rect">
+            <a:avLst/>
+          </a:prstGeom>
+          <a:noFill/>
+        </p:spPr>
+        <p:txBody>
+          <a:bodyPr wrap="square" rtlCol="0">
+            <a:spAutoFit/>
+          </a:bodyPr>
+          <a:lstStyle/>
+          <a:p>
+            <a:pPr algn="ctr"/>
+            <a:r>
+              <a:rPr lang="en-US"/>
+              <a:t>Use it</a:t>
+            </a:r>
+          </a:p>
+        </p:txBody>
+      </p:sp>
+      <p:pic>
+        <p:nvPicPr>
+          <p:cNvPr id="10" name="Picture 9">
+            <a:extLst>
+              <a:ext uri="{FF2B5EF4-FFF2-40B4-BE49-F238E27FC236}">
+                <a16:creationId xmlns:a16="http://schemas.microsoft.com/office/drawing/2014/main" id="{557E5C41-0ADD-6BD2-C2B5-A32DEF4C341F}"/>
+              </a:ext>
+            </a:extLst>
+          </p:cNvPr>
+          <p:cNvPicPr>
+            <a:picLocks noChangeAspect="1"/>
+          </p:cNvPicPr>
+          <p:nvPr/>
+        </p:nvPicPr>
+        <p:blipFill>
+          <a:blip r:embed="rId10" cstate="email">
+            <a:extLst>
+              <a:ext uri="{28A0092B-C50C-407E-A947-70E740481C1C}">
+                <a14:useLocalDpi xmlns:a14="http://schemas.microsoft.com/office/drawing/2010/main"/>
+              </a:ext>
+            </a:extLst>
+          </a:blip>
+          <a:stretch>
+            <a:fillRect/>
+          </a:stretch>
+        </p:blipFill>
+        <p:spPr>
+          <a:xfrm>
+            <a:off x="7167786" y="1673493"/>
+            <a:ext cx="4936958" cy="2159005"/>
+          </a:xfrm>
+          <a:prstGeom prst="rect">
+            <a:avLst/>
+          </a:prstGeom>
+        </p:spPr>
+      </p:pic>
+      <p:sp>
+        <p:nvSpPr>
+          <p:cNvPr id="15" name="TextBox 14">
+            <a:extLst>
+              <a:ext uri="{FF2B5EF4-FFF2-40B4-BE49-F238E27FC236}">
+                <a16:creationId xmlns:a16="http://schemas.microsoft.com/office/drawing/2014/main" id="{A367D71A-9893-BBBD-9E63-8D35BB0F314C}"/>
+              </a:ext>
+            </a:extLst>
+          </p:cNvPr>
+          <p:cNvSpPr txBox="1"/>
+          <p:nvPr/>
+        </p:nvSpPr>
+        <p:spPr>
+          <a:xfrm>
+            <a:off x="8047122" y="3733419"/>
+            <a:ext cx="2648952" cy="369332"/>
+          </a:xfrm>
+          <a:prstGeom prst="rect">
+            <a:avLst/>
+          </a:prstGeom>
+          <a:noFill/>
+        </p:spPr>
+        <p:txBody>
+          <a:bodyPr wrap="square" rtlCol="0">
+            <a:spAutoFit/>
+          </a:bodyPr>
+          <a:lstStyle/>
+          <a:p>
+            <a:pPr algn="ctr"/>
+            <a:r>
+              <a:rPr lang="en-US"/>
+              <a:t>Create new wallet</a:t>
+            </a:r>
           </a:p>
         </p:txBody>
       </p:sp>
@@ -4694,10 +6630,10 @@
       </p:grpSpPr>
       <p:sp>
         <p:nvSpPr>
-          <p:cNvPr id="2" name="TextBox 1">
+          <p:cNvPr id="3" name="TextBox 2">
             <a:extLst>
               <a:ext uri="{FF2B5EF4-FFF2-40B4-BE49-F238E27FC236}">
-                <a16:creationId xmlns:a16="http://schemas.microsoft.com/office/drawing/2014/main" id="{210D5B8D-BE4D-BB41-ABFF-EFE774092AF5}"/>
+                <a16:creationId xmlns:a16="http://schemas.microsoft.com/office/drawing/2014/main" id="{8C47D106-328D-1E16-FF20-B27EE1128845}"/>
               </a:ext>
             </a:extLst>
           </p:cNvPr>
@@ -4706,8 +6642,8 @@
         </p:nvSpPr>
         <p:spPr>
           <a:xfrm>
-            <a:off x="6754809" y="161226"/>
-            <a:ext cx="5440919" cy="3108543"/>
+            <a:off x="0" y="0"/>
+            <a:ext cx="4969042" cy="523220"/>
           </a:xfrm>
           <a:prstGeom prst="rect">
             <a:avLst/>
@@ -4720,167 +6656,19 @@
           </a:bodyPr>
           <a:lstStyle/>
           <a:p>
-            <a:pPr marL="380990" indent="-380990">
-              <a:buFont typeface="Arial" panose="020B0604020202020204" pitchFamily="34" charset="0"/>
-              <a:buChar char="•"/>
-            </a:pPr>
-            <a:r>
-              <a:rPr lang="en-US" sz="1400">
-                <a:hlinkClick r:id="rId2"/>
-              </a:rPr>
-              <a:t>https://metamask.io/</a:t>
-            </a:r>
-            <a:endParaRPr lang="en-US" sz="1400"/>
-          </a:p>
-          <a:p>
-            <a:pPr marL="380990" indent="-380990">
-              <a:buFont typeface="Arial" panose="020B0604020202020204" pitchFamily="34" charset="0"/>
-              <a:buChar char="•"/>
-            </a:pPr>
-            <a:r>
-              <a:rPr lang="en-US" sz="1400">
-                <a:hlinkClick r:id="rId3"/>
-              </a:rPr>
-              <a:t>https://en.wikipedia.org/wiki/MetaMask</a:t>
-            </a:r>
-            <a:endParaRPr lang="en-US" sz="1400"/>
-          </a:p>
-          <a:p>
-            <a:pPr marL="380990" indent="-380990">
-              <a:buFont typeface="Arial" panose="020B0604020202020204" pitchFamily="34" charset="0"/>
-              <a:buChar char="•"/>
-            </a:pPr>
-            <a:r>
-              <a:rPr lang="en-US" sz="1400" b="1">
-                <a:solidFill>
-                  <a:srgbClr val="00B050"/>
-                </a:solidFill>
-              </a:rPr>
-              <a:t>A software cryptocurrency wallet for Etherium blockchain</a:t>
-            </a:r>
-          </a:p>
-          <a:p>
-            <a:pPr marL="380990" indent="-380990">
-              <a:buFont typeface="Arial" panose="020B0604020202020204" pitchFamily="34" charset="0"/>
-              <a:buChar char="•"/>
-            </a:pPr>
-            <a:r>
-              <a:rPr lang="en-US" sz="1400"/>
-              <a:t>A secure browser extension or mobile app </a:t>
-            </a:r>
-            <a:br>
-              <a:rPr lang="en-US" sz="1400"/>
-            </a:br>
-            <a:r>
-              <a:rPr lang="en-US" sz="1400"/>
-              <a:t>(iOS, Android)</a:t>
-            </a:r>
-          </a:p>
-          <a:p>
-            <a:pPr marL="380990" indent="-380990">
-              <a:buFont typeface="Arial" panose="020B0604020202020204" pitchFamily="34" charset="0"/>
-              <a:buChar char="•"/>
-            </a:pPr>
-            <a:r>
-              <a:rPr lang="en-US" sz="1400"/>
-              <a:t>Allows to interact with decentralized applications</a:t>
-            </a:r>
-          </a:p>
-          <a:p>
-            <a:pPr marL="380990" indent="-380990">
-              <a:buFont typeface="Arial" panose="020B0604020202020204" pitchFamily="34" charset="0"/>
-              <a:buChar char="•"/>
-            </a:pPr>
-            <a:r>
-              <a:rPr lang="en-US" sz="1400"/>
-              <a:t>Since 2016 </a:t>
-            </a:r>
-          </a:p>
-          <a:p>
-            <a:pPr marL="380990" indent="-380990">
-              <a:buFont typeface="Arial" panose="020B0604020202020204" pitchFamily="34" charset="0"/>
-              <a:buChar char="•"/>
-            </a:pPr>
-            <a:r>
-              <a:rPr lang="en-US" sz="1400"/>
-              <a:t>More than 20 Mln users</a:t>
-            </a:r>
-          </a:p>
-          <a:p>
-            <a:pPr marL="380990" indent="-380990">
-              <a:buFont typeface="Arial" panose="020B0604020202020204" pitchFamily="34" charset="0"/>
-              <a:buChar char="•"/>
-            </a:pPr>
-            <a:r>
-              <a:rPr lang="en-US" sz="1400"/>
-              <a:t>Developed by ConsenSys - a blockchain software technology company founded by </a:t>
-            </a:r>
-            <a:r>
-              <a:rPr lang="en-US" sz="1400" b="1">
-                <a:solidFill>
-                  <a:srgbClr val="0070C0"/>
-                </a:solidFill>
-              </a:rPr>
-              <a:t>Joseph Lubin</a:t>
-            </a:r>
-            <a:r>
-              <a:rPr lang="en-US" sz="1400"/>
-              <a:t> with headquarters in Brooklyn, New York</a:t>
-            </a:r>
-          </a:p>
-          <a:p>
-            <a:pPr marL="380990" indent="-380990">
-              <a:buFont typeface="Arial" panose="020B0604020202020204" pitchFamily="34" charset="0"/>
-              <a:buChar char="•"/>
-            </a:pPr>
-            <a:r>
-              <a:rPr lang="en-US" sz="1400"/>
-              <a:t>Bitcoin cannot be stored on MetaMask, but you can store a "Wrapped Bitcoin" (WBTC) – which is an ERC-20 token that represents Bitcoin on the Ethereum blockchain</a:t>
-            </a:r>
-          </a:p>
-        </p:txBody>
-      </p:sp>
-      <p:sp>
-        <p:nvSpPr>
-          <p:cNvPr id="3" name="TextBox 2">
-            <a:extLst>
-              <a:ext uri="{FF2B5EF4-FFF2-40B4-BE49-F238E27FC236}">
-                <a16:creationId xmlns:a16="http://schemas.microsoft.com/office/drawing/2014/main" id="{E6BD177C-95D2-6D49-ABE7-6DD29457A006}"/>
-              </a:ext>
-            </a:extLst>
-          </p:cNvPr>
-          <p:cNvSpPr txBox="1"/>
-          <p:nvPr/>
-        </p:nvSpPr>
-        <p:spPr>
-          <a:xfrm>
-            <a:off x="-23443" y="1"/>
-            <a:ext cx="2157622" cy="523220"/>
-          </a:xfrm>
-          <a:prstGeom prst="rect">
-            <a:avLst/>
-          </a:prstGeom>
-          <a:noFill/>
-        </p:spPr>
-        <p:txBody>
-          <a:bodyPr wrap="square" rtlCol="0">
-            <a:spAutoFit/>
-          </a:bodyPr>
-          <a:lstStyle/>
-          <a:p>
             <a:r>
               <a:rPr lang="en-US" sz="2800" b="1"/>
-              <a:t>MetaMask</a:t>
+              <a:t>Bitcoin Wallets - continued</a:t>
             </a:r>
           </a:p>
         </p:txBody>
       </p:sp>
       <p:pic>
         <p:nvPicPr>
-          <p:cNvPr id="4" name="Picture 3">
+          <p:cNvPr id="5" name="Picture 4">
             <a:extLst>
               <a:ext uri="{FF2B5EF4-FFF2-40B4-BE49-F238E27FC236}">
-                <a16:creationId xmlns:a16="http://schemas.microsoft.com/office/drawing/2014/main" id="{5D282DCE-4D06-3D4E-A1E4-19542DA67CA6}"/>
+                <a16:creationId xmlns:a16="http://schemas.microsoft.com/office/drawing/2014/main" id="{A0C92002-0C3B-CB92-51EB-BAFE3187F797}"/>
               </a:ext>
             </a:extLst>
           </p:cNvPr>
@@ -4890,7 +6678,7 @@
           <p:nvPr/>
         </p:nvPicPr>
         <p:blipFill>
-          <a:blip r:embed="rId4" cstate="email">
+          <a:blip r:embed="rId3" cstate="email">
             <a:extLst>
               <a:ext uri="{28A0092B-C50C-407E-A947-70E740481C1C}">
                 <a14:useLocalDpi xmlns:a14="http://schemas.microsoft.com/office/drawing/2010/main"/>
@@ -4903,56 +6691,20 @@
         </p:blipFill>
         <p:spPr>
           <a:xfrm>
-            <a:off x="2541308" y="161226"/>
-            <a:ext cx="1443357" cy="1355348"/>
+            <a:off x="6222482" y="1019908"/>
+            <a:ext cx="5867918" cy="5735559"/>
           </a:xfrm>
           <a:prstGeom prst="rect">
             <a:avLst/>
           </a:prstGeom>
         </p:spPr>
       </p:pic>
-      <p:pic>
-        <p:nvPicPr>
-          <p:cNvPr id="5" name="Picture 4">
+      <p:sp>
+        <p:nvSpPr>
+          <p:cNvPr id="7" name="TextBox 6">
             <a:extLst>
               <a:ext uri="{FF2B5EF4-FFF2-40B4-BE49-F238E27FC236}">
-                <a16:creationId xmlns:a16="http://schemas.microsoft.com/office/drawing/2014/main" id="{43A3DE9F-6EE5-A747-B064-3CB275CD9991}"/>
-              </a:ext>
-            </a:extLst>
-          </p:cNvPr>
-          <p:cNvPicPr>
-            <a:picLocks noChangeAspect="1"/>
-          </p:cNvPicPr>
-          <p:nvPr/>
-        </p:nvPicPr>
-        <p:blipFill>
-          <a:blip r:embed="rId5" cstate="email">
-            <a:extLst>
-              <a:ext uri="{28A0092B-C50C-407E-A947-70E740481C1C}">
-                <a14:useLocalDpi xmlns:a14="http://schemas.microsoft.com/office/drawing/2010/main"/>
-              </a:ext>
-            </a:extLst>
-          </a:blip>
-          <a:stretch>
-            <a:fillRect/>
-          </a:stretch>
-        </p:blipFill>
-        <p:spPr>
-          <a:xfrm>
-            <a:off x="4434043" y="161226"/>
-            <a:ext cx="1811892" cy="2353377"/>
-          </a:xfrm>
-          <a:prstGeom prst="rect">
-            <a:avLst/>
-          </a:prstGeom>
-        </p:spPr>
-      </p:pic>
-      <p:sp>
-        <p:nvSpPr>
-          <p:cNvPr id="9" name="TextBox 8">
-            <a:extLst>
-              <a:ext uri="{FF2B5EF4-FFF2-40B4-BE49-F238E27FC236}">
-                <a16:creationId xmlns:a16="http://schemas.microsoft.com/office/drawing/2014/main" id="{BE060BD8-457B-0F41-9E84-E2B164D8C94E}"/>
+                <a16:creationId xmlns:a16="http://schemas.microsoft.com/office/drawing/2014/main" id="{152A9575-F217-4A40-7E1E-C40A76B5548A}"/>
               </a:ext>
             </a:extLst>
           </p:cNvPr>
@@ -4961,155 +6713,8 @@
         </p:nvSpPr>
         <p:spPr>
           <a:xfrm>
-            <a:off x="4158188" y="2514603"/>
-            <a:ext cx="2310064" cy="738664"/>
-          </a:xfrm>
-          <a:prstGeom prst="rect">
-            <a:avLst/>
-          </a:prstGeom>
-          <a:noFill/>
-        </p:spPr>
-        <p:txBody>
-          <a:bodyPr wrap="square" rtlCol="0">
-            <a:spAutoFit/>
-          </a:bodyPr>
-          <a:lstStyle/>
-          <a:p>
-            <a:pPr algn="ctr"/>
-            <a:r>
-              <a:rPr lang="en-US" sz="1400"/>
-              <a:t> </a:t>
-            </a:r>
-            <a:r>
-              <a:rPr lang="en-US" sz="1400" b="1">
-                <a:solidFill>
-                  <a:srgbClr val="0070C0"/>
-                </a:solidFill>
-              </a:rPr>
-              <a:t>Joseph Lubin</a:t>
-            </a:r>
-            <a:endParaRPr lang="en-US" sz="1400"/>
-          </a:p>
-          <a:p>
-            <a:pPr algn="ctr"/>
-            <a:r>
-              <a:rPr lang="en-US" sz="1400"/>
-              <a:t>ConsenSys</a:t>
-            </a:r>
-          </a:p>
-          <a:p>
-            <a:pPr algn="ctr"/>
-            <a:r>
-              <a:rPr lang="en-US" sz="1400"/>
-              <a:t>Brooklyn, New York</a:t>
-            </a:r>
-          </a:p>
-        </p:txBody>
-      </p:sp>
-      <p:pic>
-        <p:nvPicPr>
-          <p:cNvPr id="1032" name="Picture 8" descr="MetaMask – Get this Extension for 🦊 Firefox (en-US)">
-            <a:extLst>
-              <a:ext uri="{FF2B5EF4-FFF2-40B4-BE49-F238E27FC236}">
-                <a16:creationId xmlns:a16="http://schemas.microsoft.com/office/drawing/2014/main" id="{2D8924E9-3506-C949-A240-5CF490D28C07}"/>
-              </a:ext>
-            </a:extLst>
-          </p:cNvPr>
-          <p:cNvPicPr>
-            <a:picLocks noChangeAspect="1" noChangeArrowheads="1"/>
-          </p:cNvPicPr>
-          <p:nvPr/>
-        </p:nvPicPr>
-        <p:blipFill>
-          <a:blip r:embed="rId6" cstate="email">
-            <a:extLst>
-              <a:ext uri="{28A0092B-C50C-407E-A947-70E740481C1C}">
-                <a14:useLocalDpi xmlns:a14="http://schemas.microsoft.com/office/drawing/2010/main"/>
-              </a:ext>
-            </a:extLst>
-          </a:blip>
-          <a:srcRect/>
-          <a:stretch>
-            <a:fillRect/>
-          </a:stretch>
-        </p:blipFill>
-        <p:spPr bwMode="auto">
-          <a:xfrm>
-            <a:off x="98297" y="1758016"/>
-            <a:ext cx="3766817" cy="2353377"/>
-          </a:xfrm>
-          <a:prstGeom prst="rect">
-            <a:avLst/>
-          </a:prstGeom>
-          <a:noFill/>
-          <a:ln>
-            <a:solidFill>
-              <a:schemeClr val="accent1"/>
-            </a:solidFill>
-          </a:ln>
-          <a:extLst>
-            <a:ext uri="{909E8E84-426E-40DD-AFC4-6F175D3DCCD1}">
-              <a14:hiddenFill xmlns:a14="http://schemas.microsoft.com/office/drawing/2010/main">
-                <a:solidFill>
-                  <a:srgbClr val="FFFFFF"/>
-                </a:solidFill>
-              </a14:hiddenFill>
-            </a:ext>
-          </a:extLst>
-        </p:spPr>
-      </p:pic>
-      <p:pic>
-        <p:nvPicPr>
-          <p:cNvPr id="6" name="Picture 5">
-            <a:extLst>
-              <a:ext uri="{FF2B5EF4-FFF2-40B4-BE49-F238E27FC236}">
-                <a16:creationId xmlns:a16="http://schemas.microsoft.com/office/drawing/2014/main" id="{DA629FB8-3D9E-CA44-9067-60F4B592AA53}"/>
-              </a:ext>
-            </a:extLst>
-          </p:cNvPr>
-          <p:cNvPicPr>
-            <a:picLocks noChangeAspect="1"/>
-          </p:cNvPicPr>
-          <p:nvPr/>
-        </p:nvPicPr>
-        <p:blipFill>
-          <a:blip r:embed="rId7" cstate="email">
-            <a:extLst>
-              <a:ext uri="{28A0092B-C50C-407E-A947-70E740481C1C}">
-                <a14:useLocalDpi xmlns:a14="http://schemas.microsoft.com/office/drawing/2010/main"/>
-              </a:ext>
-            </a:extLst>
-          </a:blip>
-          <a:stretch>
-            <a:fillRect/>
-          </a:stretch>
-        </p:blipFill>
-        <p:spPr>
-          <a:xfrm>
-            <a:off x="134536" y="4481654"/>
-            <a:ext cx="3645952" cy="2106441"/>
-          </a:xfrm>
-          <a:prstGeom prst="rect">
-            <a:avLst/>
-          </a:prstGeom>
-        </p:spPr>
-      </p:pic>
-      <p:sp>
-        <p:nvSpPr>
-          <p:cNvPr id="7" name="TextBox 6">
-            <a:extLst>
-              <a:ext uri="{FF2B5EF4-FFF2-40B4-BE49-F238E27FC236}">
-                <a16:creationId xmlns:a16="http://schemas.microsoft.com/office/drawing/2014/main" id="{EF72CAD9-D640-5044-99D2-CF1C8DF2F0A2}"/>
-              </a:ext>
-            </a:extLst>
-          </p:cNvPr>
-          <p:cNvSpPr txBox="1"/>
-          <p:nvPr/>
-        </p:nvSpPr>
-        <p:spPr>
-          <a:xfrm>
-            <a:off x="10738" y="588610"/>
-            <a:ext cx="2462023" cy="523220"/>
+            <a:off x="7405858" y="292387"/>
+            <a:ext cx="3830320" cy="461665"/>
           </a:xfrm>
           <a:prstGeom prst="rect">
             <a:avLst/>
@@ -5128,15 +6733,109 @@
                   <a:srgbClr val="00B050"/>
                 </a:solidFill>
               </a:rPr>
-              <a:t>A software cryptocurrency wallet for Etherium blockchain</a:t>
-            </a:r>
+              <a:t>Choose your wallet – on bitcoin.org:</a:t>
+            </a:r>
+          </a:p>
+          <a:p>
+            <a:r>
+              <a:rPr lang="en-US" sz="1000">
+                <a:hlinkClick r:id="rId4"/>
+              </a:rPr>
+              <a:t>https://bitcoin.org/en/choose-your-wallet?step=5&amp;platform=mac</a:t>
+            </a:r>
+            <a:endParaRPr lang="en-US" sz="1000"/>
+          </a:p>
+        </p:txBody>
+      </p:sp>
+      <p:sp>
+        <p:nvSpPr>
+          <p:cNvPr id="6" name="TextBox 5">
+            <a:extLst>
+              <a:ext uri="{FF2B5EF4-FFF2-40B4-BE49-F238E27FC236}">
+                <a16:creationId xmlns:a16="http://schemas.microsoft.com/office/drawing/2014/main" id="{57DD1627-FC7E-8D85-351A-9FE366937B97}"/>
+              </a:ext>
+            </a:extLst>
+          </p:cNvPr>
+          <p:cNvSpPr txBox="1"/>
+          <p:nvPr/>
+        </p:nvSpPr>
+        <p:spPr>
+          <a:xfrm>
+            <a:off x="264695" y="1717740"/>
+            <a:ext cx="4283238" cy="369332"/>
+          </a:xfrm>
+          <a:prstGeom prst="rect">
+            <a:avLst/>
+          </a:prstGeom>
+          <a:noFill/>
+        </p:spPr>
+        <p:txBody>
+          <a:bodyPr wrap="square" rtlCol="0">
+            <a:spAutoFit/>
+          </a:bodyPr>
+          <a:lstStyle/>
+          <a:p>
+            <a:r>
+              <a:rPr lang="en-US" b="1">
+                <a:solidFill>
+                  <a:srgbClr val="00B050"/>
+                </a:solidFill>
+              </a:rPr>
+              <a:t>Some Bitcoin wallets listed on bitcoin.org</a:t>
+            </a:r>
+          </a:p>
+        </p:txBody>
+      </p:sp>
+      <p:sp>
+        <p:nvSpPr>
+          <p:cNvPr id="8" name="Right Arrow 7">
+            <a:extLst>
+              <a:ext uri="{FF2B5EF4-FFF2-40B4-BE49-F238E27FC236}">
+                <a16:creationId xmlns:a16="http://schemas.microsoft.com/office/drawing/2014/main" id="{EEC6C607-D29C-F6FA-253C-C979A538CBA3}"/>
+              </a:ext>
+            </a:extLst>
+          </p:cNvPr>
+          <p:cNvSpPr/>
+          <p:nvPr/>
+        </p:nvSpPr>
+        <p:spPr>
+          <a:xfrm>
+            <a:off x="4547933" y="1696485"/>
+            <a:ext cx="818147" cy="498875"/>
+          </a:xfrm>
+          <a:prstGeom prst="rightArrow">
+            <a:avLst/>
+          </a:prstGeom>
+        </p:spPr>
+        <p:style>
+          <a:lnRef idx="2">
+            <a:schemeClr val="accent1">
+              <a:shade val="50000"/>
+            </a:schemeClr>
+          </a:lnRef>
+          <a:fillRef idx="1">
+            <a:schemeClr val="accent1"/>
+          </a:fillRef>
+          <a:effectRef idx="0">
+            <a:schemeClr val="accent1"/>
+          </a:effectRef>
+          <a:fontRef idx="minor">
+            <a:schemeClr val="lt1"/>
+          </a:fontRef>
+        </p:style>
+        <p:txBody>
+          <a:bodyPr rtlCol="0" anchor="ctr"/>
+          <a:lstStyle/>
+          <a:p>
+            <a:pPr algn="ctr"/>
+            <a:endParaRPr lang="en-US"/>
           </a:p>
         </p:txBody>
       </p:sp>
     </p:spTree>
     <p:extLst>
       <p:ext uri="{BB962C8B-B14F-4D97-AF65-F5344CB8AC3E}">
-        <p14:creationId xmlns:p14="http://schemas.microsoft.com/office/powerpoint/2010/main" val="3657471056"/>
+        <p14:creationId xmlns:p14="http://schemas.microsoft.com/office/powerpoint/2010/main" val="2532496539"/>
       </p:ext>
     </p:extLst>
   </p:cSld>
@@ -5163,47 +6862,12 @@
           <a:chExt cx="0" cy="0"/>
         </a:xfrm>
       </p:grpSpPr>
-      <p:pic>
-        <p:nvPicPr>
-          <p:cNvPr id="4" name="Picture 3">
+      <p:sp>
+        <p:nvSpPr>
+          <p:cNvPr id="2" name="TextBox 1">
             <a:extLst>
               <a:ext uri="{FF2B5EF4-FFF2-40B4-BE49-F238E27FC236}">
-                <a16:creationId xmlns:a16="http://schemas.microsoft.com/office/drawing/2014/main" id="{796507CB-39E8-0348-90FA-E4E49712669F}"/>
-              </a:ext>
-            </a:extLst>
-          </p:cNvPr>
-          <p:cNvPicPr>
-            <a:picLocks noChangeAspect="1"/>
-          </p:cNvPicPr>
-          <p:nvPr/>
-        </p:nvPicPr>
-        <p:blipFill rotWithShape="1">
-          <a:blip r:embed="rId2" cstate="email">
-            <a:extLst>
-              <a:ext uri="{28A0092B-C50C-407E-A947-70E740481C1C}">
-                <a14:useLocalDpi xmlns:a14="http://schemas.microsoft.com/office/drawing/2010/main"/>
-              </a:ext>
-            </a:extLst>
-          </a:blip>
-          <a:srcRect/>
-          <a:stretch/>
-        </p:blipFill>
-        <p:spPr>
-          <a:xfrm>
-            <a:off x="416537" y="1069741"/>
-            <a:ext cx="11358925" cy="4718518"/>
-          </a:xfrm>
-          <a:prstGeom prst="rect">
-            <a:avLst/>
-          </a:prstGeom>
-        </p:spPr>
-      </p:pic>
-      <p:sp>
-        <p:nvSpPr>
-          <p:cNvPr id="5" name="TextBox 4">
-            <a:extLst>
-              <a:ext uri="{FF2B5EF4-FFF2-40B4-BE49-F238E27FC236}">
-                <a16:creationId xmlns:a16="http://schemas.microsoft.com/office/drawing/2014/main" id="{0CF475CF-2613-4840-95C2-352246822EC8}"/>
+                <a16:creationId xmlns:a16="http://schemas.microsoft.com/office/drawing/2014/main" id="{E0BCBDFC-7F1A-45BE-B181-F7F82DD0683C}"/>
               </a:ext>
             </a:extLst>
           </p:cNvPr>
@@ -5212,8 +6876,8 @@
         </p:nvSpPr>
         <p:spPr>
           <a:xfrm>
-            <a:off x="2547257" y="6841671"/>
-            <a:ext cx="184731" cy="369332"/>
+            <a:off x="0" y="0"/>
+            <a:ext cx="4969042" cy="523220"/>
           </a:xfrm>
           <a:prstGeom prst="rect">
             <a:avLst/>
@@ -5221,21 +6885,24 @@
           <a:noFill/>
         </p:spPr>
         <p:txBody>
-          <a:bodyPr wrap="none" rtlCol="0">
+          <a:bodyPr wrap="square" rtlCol="0">
             <a:spAutoFit/>
           </a:bodyPr>
           <a:lstStyle/>
           <a:p>
-            <a:endParaRPr lang="en-US" dirty="0"/>
-          </a:p>
-        </p:txBody>
-      </p:sp>
-      <p:sp>
-        <p:nvSpPr>
-          <p:cNvPr id="6" name="TextBox 5">
+            <a:r>
+              <a:rPr lang="en-US" sz="2800" b="1"/>
+              <a:t>Ethereum Wallets</a:t>
+            </a:r>
+          </a:p>
+        </p:txBody>
+      </p:sp>
+      <p:sp>
+        <p:nvSpPr>
+          <p:cNvPr id="3" name="TextBox 2">
             <a:extLst>
               <a:ext uri="{FF2B5EF4-FFF2-40B4-BE49-F238E27FC236}">
-                <a16:creationId xmlns:a16="http://schemas.microsoft.com/office/drawing/2014/main" id="{1C7F0B1C-221D-B845-9C05-E49E881FC13D}"/>
+                <a16:creationId xmlns:a16="http://schemas.microsoft.com/office/drawing/2014/main" id="{E328D1CC-A3F6-477F-EEA0-1E8F812E462F}"/>
               </a:ext>
             </a:extLst>
           </p:cNvPr>
@@ -5244,8 +6911,8 @@
         </p:nvSpPr>
         <p:spPr>
           <a:xfrm>
-            <a:off x="3885288" y="5991263"/>
-            <a:ext cx="3827330" cy="492443"/>
+            <a:off x="168443" y="523220"/>
+            <a:ext cx="3441032" cy="307777"/>
           </a:xfrm>
           <a:prstGeom prst="rect">
             <a:avLst/>
@@ -5253,70 +6920,31 @@
           <a:noFill/>
         </p:spPr>
         <p:txBody>
-          <a:bodyPr wrap="none" rtlCol="0">
+          <a:bodyPr wrap="square" rtlCol="0">
             <a:spAutoFit/>
           </a:bodyPr>
           <a:lstStyle/>
           <a:p>
-            <a:r>
-              <a:rPr lang="en-US" sz="1400" dirty="0"/>
-              <a:t>Analysis done by </a:t>
-            </a:r>
-            <a:r>
-              <a:rPr lang="en-US" sz="1400" dirty="0" err="1"/>
-              <a:t>Veriphi</a:t>
-            </a:r>
-            <a:r>
-              <a:rPr lang="en-US" sz="1400" dirty="0"/>
-              <a:t>: </a:t>
-            </a:r>
-            <a:br>
-              <a:rPr lang="en-US" dirty="0"/>
-            </a:br>
-            <a:r>
-              <a:rPr lang="en-US" sz="1200" dirty="0"/>
-              <a:t>.. </a:t>
-            </a:r>
-            <a:r>
-              <a:rPr lang="en-US" sz="1200" dirty="0">
-                <a:hlinkClick r:id="rId3"/>
+            <a:pPr marL="285750" indent="-285750">
+              <a:buFont typeface="Arial" panose="020B0604020202020204" pitchFamily="34" charset="0"/>
+              <a:buChar char="•"/>
+            </a:pPr>
+            <a:r>
+              <a:rPr lang="en-US" sz="1400">
+                <a:hlinkClick r:id="rId2"/>
               </a:rPr>
-              <a:t>https://</a:t>
-            </a:r>
-            <a:r>
-              <a:rPr lang="en-US" sz="1200" dirty="0" err="1">
-                <a:hlinkClick r:id="rId3"/>
-              </a:rPr>
-              <a:t>www.veriphi.io</a:t>
-            </a:r>
-            <a:r>
-              <a:rPr lang="en-US" sz="1200" dirty="0">
-                <a:hlinkClick r:id="rId3"/>
-              </a:rPr>
-              <a:t>/</a:t>
-            </a:r>
-            <a:r>
-              <a:rPr lang="en-US" sz="1200" dirty="0" err="1">
-                <a:hlinkClick r:id="rId3"/>
-              </a:rPr>
-              <a:t>en</a:t>
-            </a:r>
-            <a:r>
-              <a:rPr lang="en-US" sz="1200" dirty="0">
-                <a:hlinkClick r:id="rId3"/>
-              </a:rPr>
-              <a:t>/blog/software-wallet-analysis</a:t>
-            </a:r>
-            <a:endParaRPr lang="en-US" sz="1200" dirty="0"/>
-          </a:p>
-        </p:txBody>
-      </p:sp>
-      <p:sp>
-        <p:nvSpPr>
-          <p:cNvPr id="2" name="TextBox 1">
+              <a:t>https://ethereum.org/en/wallets/</a:t>
+            </a:r>
+            <a:endParaRPr lang="en-US" sz="1400"/>
+          </a:p>
+        </p:txBody>
+      </p:sp>
+      <p:sp>
+        <p:nvSpPr>
+          <p:cNvPr id="4" name="TextBox 3">
             <a:extLst>
               <a:ext uri="{FF2B5EF4-FFF2-40B4-BE49-F238E27FC236}">
-                <a16:creationId xmlns:a16="http://schemas.microsoft.com/office/drawing/2014/main" id="{4C398E17-E066-E0FC-7BD7-020BC9A6F35C}"/>
+                <a16:creationId xmlns:a16="http://schemas.microsoft.com/office/drawing/2014/main" id="{A2AF34B0-2B02-5B9E-8C98-355D80D9CE07}"/>
               </a:ext>
             </a:extLst>
           </p:cNvPr>
@@ -5325,8 +6953,8 @@
         </p:nvSpPr>
         <p:spPr>
           <a:xfrm>
-            <a:off x="98854" y="0"/>
-            <a:ext cx="4349578" cy="523220"/>
+            <a:off x="156412" y="1130969"/>
+            <a:ext cx="8386009" cy="1815882"/>
           </a:xfrm>
           <a:prstGeom prst="rect">
             <a:avLst/>
@@ -5339,19 +6967,172 @@
           </a:bodyPr>
           <a:lstStyle/>
           <a:p>
-            <a:r>
-              <a:rPr lang="en-US" sz="2800" b="1"/>
-              <a:t>Wallet Comparisons</a:t>
-            </a:r>
-          </a:p>
-        </p:txBody>
-      </p:sp>
-      <p:sp>
-        <p:nvSpPr>
-          <p:cNvPr id="3" name="TextBox 2">
+            <a:pPr marL="285750" indent="-285750">
+              <a:buFont typeface="Arial" panose="020B0604020202020204" pitchFamily="34" charset="0"/>
+              <a:buChar char="•"/>
+            </a:pPr>
+            <a:r>
+              <a:rPr lang="en-US" sz="1400"/>
+              <a:t>An </a:t>
+            </a:r>
+            <a:r>
+              <a:rPr lang="en-US" sz="1400" b="1">
+                <a:solidFill>
+                  <a:srgbClr val="00B050"/>
+                </a:solidFill>
+              </a:rPr>
+              <a:t>Ethereum account</a:t>
+            </a:r>
+            <a:r>
+              <a:rPr lang="en-US" sz="1400"/>
+              <a:t> is an entity that can send transactions and has a balance.</a:t>
+            </a:r>
+            <a:br>
+              <a:rPr lang="en-US" sz="1400"/>
+            </a:br>
+            <a:r>
+              <a:rPr lang="en-US" sz="1400"/>
+              <a:t>An </a:t>
+            </a:r>
+            <a:r>
+              <a:rPr lang="en-US" sz="1400" b="1">
+                <a:solidFill>
+                  <a:srgbClr val="00B050"/>
+                </a:solidFill>
+              </a:rPr>
+              <a:t>Ethereum account</a:t>
+            </a:r>
+            <a:r>
+              <a:rPr lang="en-US" sz="1400"/>
+              <a:t> has an Ethereum </a:t>
+            </a:r>
+            <a:r>
+              <a:rPr lang="en-US" sz="1400" b="1">
+                <a:solidFill>
+                  <a:srgbClr val="00B050"/>
+                </a:solidFill>
+              </a:rPr>
+              <a:t>address</a:t>
+            </a:r>
+            <a:r>
+              <a:rPr lang="en-US" sz="1400"/>
+              <a:t>, like an inbox has an email address. </a:t>
+            </a:r>
+            <a:br>
+              <a:rPr lang="en-US" sz="1400"/>
+            </a:br>
+            <a:r>
+              <a:rPr lang="en-US" sz="1400"/>
+              <a:t>You can use this to send funds to an account.</a:t>
+            </a:r>
+          </a:p>
+          <a:p>
+            <a:endParaRPr lang="en-US" sz="1400"/>
+          </a:p>
+          <a:p>
+            <a:pPr marL="285750" indent="-285750">
+              <a:buFont typeface="Arial" panose="020B0604020202020204" pitchFamily="34" charset="0"/>
+              <a:buChar char="•"/>
+            </a:pPr>
+            <a:r>
+              <a:rPr lang="en-US" sz="1400"/>
+              <a:t>A </a:t>
+            </a:r>
+            <a:r>
+              <a:rPr lang="en-US" sz="1400" b="1">
+                <a:solidFill>
+                  <a:srgbClr val="00B050"/>
+                </a:solidFill>
+              </a:rPr>
+              <a:t>wallet</a:t>
+            </a:r>
+            <a:r>
+              <a:rPr lang="en-US" sz="1400"/>
+              <a:t> is a product that lets you manage your </a:t>
+            </a:r>
+            <a:r>
+              <a:rPr lang="en-US" sz="1400" b="1">
+                <a:solidFill>
+                  <a:srgbClr val="00B050"/>
+                </a:solidFill>
+              </a:rPr>
+              <a:t>Ethereum account</a:t>
+            </a:r>
+            <a:r>
+              <a:rPr lang="en-US" sz="1400"/>
+              <a:t>. </a:t>
+            </a:r>
+            <a:br>
+              <a:rPr lang="en-US" sz="1400"/>
+            </a:br>
+            <a:r>
+              <a:rPr lang="en-US" sz="1400"/>
+              <a:t>A </a:t>
+            </a:r>
+            <a:r>
+              <a:rPr lang="en-US" sz="1400" b="1">
+                <a:solidFill>
+                  <a:srgbClr val="00B050"/>
+                </a:solidFill>
+              </a:rPr>
+              <a:t>wallet</a:t>
+            </a:r>
+            <a:r>
+              <a:rPr lang="en-US" sz="1400"/>
+              <a:t> allows you to view your account balance, send transactions, and more.</a:t>
+            </a:r>
+            <a:br>
+              <a:rPr lang="en-US" sz="1400"/>
+            </a:br>
+            <a:r>
+              <a:rPr lang="en-US" sz="1400"/>
+              <a:t>Most </a:t>
+            </a:r>
+            <a:r>
+              <a:rPr lang="en-US" sz="1400" b="1">
+                <a:solidFill>
+                  <a:srgbClr val="00B050"/>
+                </a:solidFill>
+              </a:rPr>
+              <a:t>wallet</a:t>
+            </a:r>
+            <a:r>
+              <a:rPr lang="en-US" sz="1400"/>
+              <a:t> products will let you generate an </a:t>
+            </a:r>
+            <a:r>
+              <a:rPr lang="en-US" sz="1400" b="1">
+                <a:solidFill>
+                  <a:srgbClr val="00B050"/>
+                </a:solidFill>
+              </a:rPr>
+              <a:t>Ethereum account</a:t>
+            </a:r>
+            <a:r>
+              <a:rPr lang="en-US" sz="1400"/>
+              <a:t> - so you don't need one before you download a </a:t>
+            </a:r>
+            <a:r>
+              <a:rPr lang="en-US" sz="1400" b="1">
+                <a:solidFill>
+                  <a:srgbClr val="00B050"/>
+                </a:solidFill>
+              </a:rPr>
+              <a:t>wallet</a:t>
+            </a:r>
+            <a:r>
+              <a:rPr lang="en-US" sz="1400"/>
+              <a:t>.</a:t>
+            </a:r>
+          </a:p>
+        </p:txBody>
+      </p:sp>
+      <p:sp>
+        <p:nvSpPr>
+          <p:cNvPr id="5" name="TextBox 4">
             <a:extLst>
               <a:ext uri="{FF2B5EF4-FFF2-40B4-BE49-F238E27FC236}">
-                <a16:creationId xmlns:a16="http://schemas.microsoft.com/office/drawing/2014/main" id="{F5FD4B5B-6802-2D92-635D-5C5EB1559385}"/>
+                <a16:creationId xmlns:a16="http://schemas.microsoft.com/office/drawing/2014/main" id="{4C5B2E8E-43B4-A1BC-D953-88AC6C6B5D5F}"/>
               </a:ext>
             </a:extLst>
           </p:cNvPr>
@@ -5360,8 +7141,8 @@
         </p:nvSpPr>
         <p:spPr>
           <a:xfrm>
-            <a:off x="10309813" y="645117"/>
-            <a:ext cx="897450" cy="369332"/>
+            <a:off x="776334" y="4047042"/>
+            <a:ext cx="2833141" cy="1384995"/>
           </a:xfrm>
           <a:prstGeom prst="rect">
             <a:avLst/>
@@ -5374,20 +7155,73 @@
           </a:bodyPr>
           <a:lstStyle/>
           <a:p>
-            <a:pPr algn="r"/>
-            <a:r>
-              <a:rPr lang="en-US"/>
-              <a:t>Worst</a:t>
-            </a:r>
-          </a:p>
-        </p:txBody>
-      </p:sp>
-      <p:sp>
-        <p:nvSpPr>
-          <p:cNvPr id="7" name="TextBox 6">
+            <a:pPr marL="285750" indent="-285750">
+              <a:buFont typeface="Arial" panose="020B0604020202020204" pitchFamily="34" charset="0"/>
+              <a:buChar char="•"/>
+            </a:pPr>
+            <a:r>
+              <a:rPr lang="en-US" sz="1400"/>
+              <a:t>AirGap</a:t>
+            </a:r>
+          </a:p>
+          <a:p>
+            <a:pPr marL="285750" indent="-285750">
+              <a:buFont typeface="Arial" panose="020B0604020202020204" pitchFamily="34" charset="0"/>
+              <a:buChar char="•"/>
+            </a:pPr>
+            <a:r>
+              <a:rPr lang="en-US" sz="1400"/>
+              <a:t>Argent</a:t>
+            </a:r>
+          </a:p>
+          <a:p>
+            <a:pPr marL="285750" indent="-285750">
+              <a:buFont typeface="Arial" panose="020B0604020202020204" pitchFamily="34" charset="0"/>
+              <a:buChar char="•"/>
+            </a:pPr>
+            <a:r>
+              <a:rPr lang="en-US" sz="1400"/>
+              <a:t>BitKeep</a:t>
+            </a:r>
+          </a:p>
+          <a:p>
+            <a:pPr marL="285750" indent="-285750">
+              <a:buFont typeface="Arial" panose="020B0604020202020204" pitchFamily="34" charset="0"/>
+              <a:buChar char="•"/>
+            </a:pPr>
+            <a:r>
+              <a:rPr lang="en-US" sz="1400"/>
+              <a:t>Pillar</a:t>
+            </a:r>
+          </a:p>
+          <a:p>
+            <a:pPr marL="285750" indent="-285750">
+              <a:buFont typeface="Arial" panose="020B0604020202020204" pitchFamily="34" charset="0"/>
+              <a:buChar char="•"/>
+            </a:pPr>
+            <a:r>
+              <a:rPr lang="en-US" sz="1400"/>
+              <a:t>Enjin</a:t>
+            </a:r>
+          </a:p>
+          <a:p>
+            <a:pPr marL="285750" indent="-285750">
+              <a:buFont typeface="Arial" panose="020B0604020202020204" pitchFamily="34" charset="0"/>
+              <a:buChar char="•"/>
+            </a:pPr>
+            <a:r>
+              <a:rPr lang="en-US" sz="1400"/>
+              <a:t>MyCrypto</a:t>
+            </a:r>
+          </a:p>
+        </p:txBody>
+      </p:sp>
+      <p:sp>
+        <p:nvSpPr>
+          <p:cNvPr id="6" name="TextBox 5">
             <a:extLst>
               <a:ext uri="{FF2B5EF4-FFF2-40B4-BE49-F238E27FC236}">
-                <a16:creationId xmlns:a16="http://schemas.microsoft.com/office/drawing/2014/main" id="{A64CD484-5760-B321-64A1-BC13B89A02B9}"/>
+                <a16:creationId xmlns:a16="http://schemas.microsoft.com/office/drawing/2014/main" id="{101E6DBF-817A-2836-E4B8-742C83D75E90}"/>
               </a:ext>
             </a:extLst>
           </p:cNvPr>
@@ -5396,8 +7230,8 @@
         </p:nvSpPr>
         <p:spPr>
           <a:xfrm>
-            <a:off x="2190897" y="678071"/>
-            <a:ext cx="897450" cy="369332"/>
+            <a:off x="558800" y="3568700"/>
+            <a:ext cx="4241800" cy="369332"/>
           </a:xfrm>
           <a:prstGeom prst="rect">
             <a:avLst/>
@@ -5411,8 +7245,29 @@
           <a:lstStyle/>
           <a:p>
             <a:r>
-              <a:rPr lang="en-US"/>
-              <a:t>Best</a:t>
+              <a:rPr lang="en-US" b="1">
+                <a:solidFill>
+                  <a:srgbClr val="00B050"/>
+                </a:solidFill>
+              </a:rPr>
+              <a:t>Some wallets on </a:t>
+            </a:r>
+            <a:r>
+              <a:rPr lang="en-US" b="1">
+                <a:solidFill>
+                  <a:srgbClr val="00B050"/>
+                </a:solidFill>
+                <a:hlinkClick r:id="rId3"/>
+              </a:rPr>
+              <a:t>ethereum.org</a:t>
+            </a:r>
+            <a:r>
+              <a:rPr lang="en-US" b="1">
+                <a:solidFill>
+                  <a:srgbClr val="00B050"/>
+                </a:solidFill>
+              </a:rPr>
+              <a:t> website:</a:t>
             </a:r>
           </a:p>
         </p:txBody>
@@ -5420,7 +7275,7 @@
     </p:spTree>
     <p:extLst>
       <p:ext uri="{BB962C8B-B14F-4D97-AF65-F5344CB8AC3E}">
-        <p14:creationId xmlns:p14="http://schemas.microsoft.com/office/powerpoint/2010/main" val="2522971255"/>
+        <p14:creationId xmlns:p14="http://schemas.microsoft.com/office/powerpoint/2010/main" val="3156701831"/>
       </p:ext>
     </p:extLst>
   </p:cSld>
@@ -5452,7 +7307,7 @@
           <p:cNvPr id="2" name="TextBox 1">
             <a:extLst>
               <a:ext uri="{FF2B5EF4-FFF2-40B4-BE49-F238E27FC236}">
-                <a16:creationId xmlns:a16="http://schemas.microsoft.com/office/drawing/2014/main" id="{360843F1-39FC-B446-BCF9-38C04967543B}"/>
+                <a16:creationId xmlns:a16="http://schemas.microsoft.com/office/drawing/2014/main" id="{210D5B8D-BE4D-BB41-ABFF-EFE774092AF5}"/>
               </a:ext>
             </a:extLst>
           </p:cNvPr>
@@ -5461,8 +7316,8 @@
         </p:nvSpPr>
         <p:spPr>
           <a:xfrm>
-            <a:off x="2" y="1"/>
-            <a:ext cx="4841629" cy="523220"/>
+            <a:off x="6754809" y="161226"/>
+            <a:ext cx="5440919" cy="3108543"/>
           </a:xfrm>
           <a:prstGeom prst="rect">
             <a:avLst/>
@@ -5475,19 +7330,132 @@
           </a:bodyPr>
           <a:lstStyle/>
           <a:p>
-            <a:r>
-              <a:rPr lang="en-US" sz="2800" b="1"/>
-              <a:t>Wallet – address, keys, signing</a:t>
-            </a:r>
-          </a:p>
-        </p:txBody>
-      </p:sp>
-      <p:sp>
-        <p:nvSpPr>
-          <p:cNvPr id="5" name="TextBox 4">
+            <a:pPr marL="380990" indent="-380990">
+              <a:buFont typeface="Arial" panose="020B0604020202020204" pitchFamily="34" charset="0"/>
+              <a:buChar char="•"/>
+            </a:pPr>
+            <a:r>
+              <a:rPr lang="en-US" sz="1400">
+                <a:hlinkClick r:id="rId2"/>
+              </a:rPr>
+              <a:t>https://metamask.io/</a:t>
+            </a:r>
+            <a:endParaRPr lang="en-US" sz="1400"/>
+          </a:p>
+          <a:p>
+            <a:pPr marL="380990" indent="-380990">
+              <a:buFont typeface="Arial" panose="020B0604020202020204" pitchFamily="34" charset="0"/>
+              <a:buChar char="•"/>
+            </a:pPr>
+            <a:r>
+              <a:rPr lang="en-US" sz="1400">
+                <a:hlinkClick r:id="rId3"/>
+              </a:rPr>
+              <a:t>https://en.wikipedia.org/wiki/MetaMask</a:t>
+            </a:r>
+            <a:endParaRPr lang="en-US" sz="1400"/>
+          </a:p>
+          <a:p>
+            <a:pPr marL="380990" indent="-380990">
+              <a:buFont typeface="Arial" panose="020B0604020202020204" pitchFamily="34" charset="0"/>
+              <a:buChar char="•"/>
+            </a:pPr>
+            <a:r>
+              <a:rPr lang="en-US" sz="1400" b="1">
+                <a:solidFill>
+                  <a:srgbClr val="00B050"/>
+                </a:solidFill>
+              </a:rPr>
+              <a:t>A software cryptocurrency wallet for Etherium blockchain</a:t>
+            </a:r>
+          </a:p>
+          <a:p>
+            <a:pPr marL="380990" indent="-380990">
+              <a:buFont typeface="Arial" panose="020B0604020202020204" pitchFamily="34" charset="0"/>
+              <a:buChar char="•"/>
+            </a:pPr>
+            <a:r>
+              <a:rPr lang="en-US" sz="1400"/>
+              <a:t>A secure browser extension or mobile app </a:t>
+            </a:r>
+            <a:br>
+              <a:rPr lang="en-US" sz="1400"/>
+            </a:br>
+            <a:r>
+              <a:rPr lang="en-US" sz="1400"/>
+              <a:t>(iOS, Android)</a:t>
+            </a:r>
+          </a:p>
+          <a:p>
+            <a:pPr marL="380990" indent="-380990">
+              <a:buFont typeface="Arial" panose="020B0604020202020204" pitchFamily="34" charset="0"/>
+              <a:buChar char="•"/>
+            </a:pPr>
+            <a:r>
+              <a:rPr lang="en-US" sz="1400"/>
+              <a:t>Allows to interact with decentralized applications</a:t>
+            </a:r>
+          </a:p>
+          <a:p>
+            <a:pPr marL="380990" indent="-380990">
+              <a:buFont typeface="Arial" panose="020B0604020202020204" pitchFamily="34" charset="0"/>
+              <a:buChar char="•"/>
+            </a:pPr>
+            <a:r>
+              <a:rPr lang="en-US" sz="1400"/>
+              <a:t>Since 2016 </a:t>
+            </a:r>
+          </a:p>
+          <a:p>
+            <a:pPr marL="380990" indent="-380990">
+              <a:buFont typeface="Arial" panose="020B0604020202020204" pitchFamily="34" charset="0"/>
+              <a:buChar char="•"/>
+            </a:pPr>
+            <a:r>
+              <a:rPr lang="en-US" sz="1400"/>
+              <a:t>More than 20 Mln users</a:t>
+            </a:r>
+          </a:p>
+          <a:p>
+            <a:pPr marL="380990" indent="-380990">
+              <a:buFont typeface="Arial" panose="020B0604020202020204" pitchFamily="34" charset="0"/>
+              <a:buChar char="•"/>
+            </a:pPr>
+            <a:r>
+              <a:rPr lang="en-US" sz="1400"/>
+              <a:t>Developed by ConsenSys - a blockchain software technology company founded by </a:t>
+            </a:r>
+            <a:r>
+              <a:rPr lang="en-US" sz="1400" b="1">
+                <a:solidFill>
+                  <a:srgbClr val="0070C0"/>
+                </a:solidFill>
+              </a:rPr>
+              <a:t>Joseph Lubin</a:t>
+            </a:r>
+            <a:r>
+              <a:rPr lang="en-US" sz="1400"/>
+              <a:t> with headquarters in Brooklyn, New York</a:t>
+            </a:r>
+          </a:p>
+          <a:p>
+            <a:pPr marL="380990" indent="-380990">
+              <a:buFont typeface="Arial" panose="020B0604020202020204" pitchFamily="34" charset="0"/>
+              <a:buChar char="•"/>
+            </a:pPr>
+            <a:r>
+              <a:rPr lang="en-US" sz="1400"/>
+              <a:t>Bitcoin cannot be stored on MetaMask, but you can store a "Wrapped Bitcoin" (WBTC) – which is an ERC-20 token that represents Bitcoin on the Ethereum blockchain</a:t>
+            </a:r>
+          </a:p>
+        </p:txBody>
+      </p:sp>
+      <p:sp>
+        <p:nvSpPr>
+          <p:cNvPr id="3" name="TextBox 2">
             <a:extLst>
               <a:ext uri="{FF2B5EF4-FFF2-40B4-BE49-F238E27FC236}">
-                <a16:creationId xmlns:a16="http://schemas.microsoft.com/office/drawing/2014/main" id="{817DA55C-C2D6-A2D4-DB7A-8AA34B531775}"/>
+                <a16:creationId xmlns:a16="http://schemas.microsoft.com/office/drawing/2014/main" id="{E6BD177C-95D2-6D49-ABE7-6DD29457A006}"/>
               </a:ext>
             </a:extLst>
           </p:cNvPr>
@@ -5496,8 +7464,8 @@
         </p:nvSpPr>
         <p:spPr>
           <a:xfrm>
-            <a:off x="185351" y="1025611"/>
-            <a:ext cx="11318789" cy="4401205"/>
+            <a:off x="-23443" y="1"/>
+            <a:ext cx="2157622" cy="523220"/>
           </a:xfrm>
           <a:prstGeom prst="rect">
             <a:avLst/>
@@ -5511,122 +7479,333 @@
           <a:lstStyle/>
           <a:p>
             <a:r>
-              <a:rPr lang="en-US" sz="1400"/>
-              <a:t>Bitcoin address and keys:</a:t>
-            </a:r>
-          </a:p>
-          <a:p>
-            <a:r>
-              <a:rPr lang="en-US" sz="1400"/>
-              <a:t>.. https://www.dummies.com/article/business-careers-money/personal-finance/cryptocurrency/bitcoin-public-private-keys-223627/</a:t>
-            </a:r>
-          </a:p>
-          <a:p>
+              <a:rPr lang="en-US" sz="2800" b="1"/>
+              <a:t>MetaMask</a:t>
+            </a:r>
+          </a:p>
+        </p:txBody>
+      </p:sp>
+      <p:pic>
+        <p:nvPicPr>
+          <p:cNvPr id="4" name="Picture 3">
+            <a:extLst>
+              <a:ext uri="{FF2B5EF4-FFF2-40B4-BE49-F238E27FC236}">
+                <a16:creationId xmlns:a16="http://schemas.microsoft.com/office/drawing/2014/main" id="{5D282DCE-4D06-3D4E-A1E4-19542DA67CA6}"/>
+              </a:ext>
+            </a:extLst>
+          </p:cNvPr>
+          <p:cNvPicPr>
+            <a:picLocks noChangeAspect="1"/>
+          </p:cNvPicPr>
+          <p:nvPr/>
+        </p:nvPicPr>
+        <p:blipFill>
+          <a:blip r:embed="rId4" cstate="email">
+            <a:extLst>
+              <a:ext uri="{28A0092B-C50C-407E-A947-70E740481C1C}">
+                <a14:useLocalDpi xmlns:a14="http://schemas.microsoft.com/office/drawing/2010/main"/>
+              </a:ext>
+            </a:extLst>
+          </a:blip>
+          <a:stretch>
+            <a:fillRect/>
+          </a:stretch>
+        </p:blipFill>
+        <p:spPr>
+          <a:xfrm>
+            <a:off x="2541308" y="161226"/>
+            <a:ext cx="1443357" cy="1355348"/>
+          </a:xfrm>
+          <a:prstGeom prst="rect">
+            <a:avLst/>
+          </a:prstGeom>
+        </p:spPr>
+      </p:pic>
+      <p:pic>
+        <p:nvPicPr>
+          <p:cNvPr id="5" name="Picture 4">
+            <a:extLst>
+              <a:ext uri="{FF2B5EF4-FFF2-40B4-BE49-F238E27FC236}">
+                <a16:creationId xmlns:a16="http://schemas.microsoft.com/office/drawing/2014/main" id="{43A3DE9F-6EE5-A747-B064-3CB275CD9991}"/>
+              </a:ext>
+            </a:extLst>
+          </p:cNvPr>
+          <p:cNvPicPr>
+            <a:picLocks noChangeAspect="1"/>
+          </p:cNvPicPr>
+          <p:nvPr/>
+        </p:nvPicPr>
+        <p:blipFill>
+          <a:blip r:embed="rId5" cstate="email">
+            <a:extLst>
+              <a:ext uri="{28A0092B-C50C-407E-A947-70E740481C1C}">
+                <a14:useLocalDpi xmlns:a14="http://schemas.microsoft.com/office/drawing/2010/main"/>
+              </a:ext>
+            </a:extLst>
+          </a:blip>
+          <a:stretch>
+            <a:fillRect/>
+          </a:stretch>
+        </p:blipFill>
+        <p:spPr>
+          <a:xfrm>
+            <a:off x="4434043" y="161226"/>
+            <a:ext cx="1811892" cy="2353377"/>
+          </a:xfrm>
+          <a:prstGeom prst="rect">
+            <a:avLst/>
+          </a:prstGeom>
+        </p:spPr>
+      </p:pic>
+      <p:sp>
+        <p:nvSpPr>
+          <p:cNvPr id="9" name="TextBox 8">
+            <a:extLst>
+              <a:ext uri="{FF2B5EF4-FFF2-40B4-BE49-F238E27FC236}">
+                <a16:creationId xmlns:a16="http://schemas.microsoft.com/office/drawing/2014/main" id="{BE060BD8-457B-0F41-9E84-E2B164D8C94E}"/>
+              </a:ext>
+            </a:extLst>
+          </p:cNvPr>
+          <p:cNvSpPr txBox="1"/>
+          <p:nvPr/>
+        </p:nvSpPr>
+        <p:spPr>
+          <a:xfrm>
+            <a:off x="4158188" y="2514603"/>
+            <a:ext cx="2310064" cy="738664"/>
+          </a:xfrm>
+          <a:prstGeom prst="rect">
+            <a:avLst/>
+          </a:prstGeom>
+          <a:noFill/>
+        </p:spPr>
+        <p:txBody>
+          <a:bodyPr wrap="square" rtlCol="0">
+            <a:spAutoFit/>
+          </a:bodyPr>
+          <a:lstStyle/>
+          <a:p>
+            <a:pPr algn="ctr"/>
+            <a:r>
+              <a:rPr lang="en-US" sz="1400"/>
+              <a:t> </a:t>
+            </a:r>
+            <a:r>
+              <a:rPr lang="en-US" sz="1400" b="1">
+                <a:solidFill>
+                  <a:srgbClr val="0070C0"/>
+                </a:solidFill>
+              </a:rPr>
+              <a:t>Joseph Lubin</a:t>
+            </a:r>
             <a:endParaRPr lang="en-US" sz="1400"/>
           </a:p>
           <a:p>
-            <a:r>
-              <a:rPr lang="en-US" sz="1400"/>
-              <a:t>Explanation: </a:t>
-            </a:r>
-          </a:p>
-          <a:p>
-            <a:r>
-              <a:rPr lang="en-US" sz="1400"/>
-              <a:t>.. private key</a:t>
-            </a:r>
-          </a:p>
-          <a:p>
-            <a:r>
-              <a:rPr lang="en-US" sz="1400"/>
-              <a:t>.. public key (256 bits)</a:t>
-            </a:r>
-          </a:p>
-          <a:p>
-            <a:r>
-              <a:rPr lang="en-US" sz="1400"/>
-              <a:t>.. wallet address (hashed public key, 160 bits)</a:t>
-            </a:r>
-          </a:p>
-          <a:p>
-            <a:endParaRPr lang="en-US" sz="1400"/>
-          </a:p>
-          <a:p>
-            <a:r>
-              <a:rPr lang="en-US" sz="1400"/>
-              <a:t>Signing a message with your bitcoin address</a:t>
-            </a:r>
-          </a:p>
-          <a:p>
-            <a:r>
-              <a:rPr lang="en-US" sz="1400"/>
-              <a:t>.. https://academy.bit2me.com/en/firmar-mensajes-bitcoin/</a:t>
-            </a:r>
-          </a:p>
-          <a:p>
-            <a:endParaRPr lang="en-US" sz="1400"/>
-          </a:p>
-          <a:p>
-            <a:r>
-              <a:rPr lang="en-US" sz="1400"/>
-              <a:t>Most of the encryption in modern cryptocurrencies are built on elliptic curve cryptography rather than RSA, </a:t>
-            </a:r>
-          </a:p>
-          <a:p>
-            <a:r>
-              <a:rPr lang="en-US" sz="1400"/>
-              <a:t>especially in the generation of signatures in bitcoin which requires ECDSA.</a:t>
-            </a:r>
-          </a:p>
-          <a:p>
-            <a:r>
-              <a:rPr lang="en-US" sz="1400"/>
-              <a:t>.. https://www.forbes.com/sites/rogerhuang/2020/12/21/heres-why-quantum-computing-will-not-break-cryptocurrencies/?sh=6d34a72a167b</a:t>
-            </a:r>
-          </a:p>
-          <a:p>
-            <a:endParaRPr lang="en-US" sz="1400"/>
-          </a:p>
-          <a:p>
-            <a:r>
-              <a:rPr lang="en-US" sz="1400" dirty="0"/>
-              <a:t>Elliptical Digital Signature Algorithm</a:t>
-            </a:r>
-            <a:endParaRPr lang="en-US" sz="1400"/>
-          </a:p>
-          <a:p>
-            <a:r>
-              <a:rPr lang="en-US" sz="1400"/>
-              <a:t>.. </a:t>
-            </a:r>
-            <a:r>
-              <a:rPr lang="en-US" sz="1400" dirty="0"/>
-              <a:t>https://en.wikipedia.org/wiki/</a:t>
-            </a:r>
-            <a:r>
-              <a:rPr lang="en-US" sz="1400" dirty="0" err="1"/>
-              <a:t>Elliptic_Curve_Digital_Signature_Algorithm</a:t>
-            </a:r>
-            <a:endParaRPr lang="en-US" sz="1400" dirty="0"/>
-          </a:p>
-          <a:p>
-            <a:endParaRPr lang="en-US" sz="1400"/>
-          </a:p>
-          <a:p>
-            <a:r>
-              <a:rPr lang="en-US" sz="1400"/>
-              <a:t>”Burning Coins”</a:t>
-            </a:r>
-          </a:p>
-          <a:p>
-            <a:endParaRPr lang="en-US" sz="1400"/>
+            <a:pPr algn="ctr"/>
+            <a:r>
+              <a:rPr lang="en-US" sz="1400"/>
+              <a:t>ConsenSys</a:t>
+            </a:r>
+          </a:p>
+          <a:p>
+            <a:pPr algn="ctr"/>
+            <a:r>
+              <a:rPr lang="en-US" sz="1400"/>
+              <a:t>Brooklyn, New York</a:t>
+            </a:r>
+          </a:p>
+        </p:txBody>
+      </p:sp>
+      <p:pic>
+        <p:nvPicPr>
+          <p:cNvPr id="1032" name="Picture 8" descr="MetaMask – Get this Extension for 🦊 Firefox (en-US)">
+            <a:extLst>
+              <a:ext uri="{FF2B5EF4-FFF2-40B4-BE49-F238E27FC236}">
+                <a16:creationId xmlns:a16="http://schemas.microsoft.com/office/drawing/2014/main" id="{2D8924E9-3506-C949-A240-5CF490D28C07}"/>
+              </a:ext>
+            </a:extLst>
+          </p:cNvPr>
+          <p:cNvPicPr>
+            <a:picLocks noChangeAspect="1" noChangeArrowheads="1"/>
+          </p:cNvPicPr>
+          <p:nvPr/>
+        </p:nvPicPr>
+        <p:blipFill>
+          <a:blip r:embed="rId6" cstate="email">
+            <a:extLst>
+              <a:ext uri="{28A0092B-C50C-407E-A947-70E740481C1C}">
+                <a14:useLocalDpi xmlns:a14="http://schemas.microsoft.com/office/drawing/2010/main"/>
+              </a:ext>
+            </a:extLst>
+          </a:blip>
+          <a:srcRect/>
+          <a:stretch>
+            <a:fillRect/>
+          </a:stretch>
+        </p:blipFill>
+        <p:spPr bwMode="auto">
+          <a:xfrm>
+            <a:off x="98297" y="1758016"/>
+            <a:ext cx="3766817" cy="2353377"/>
+          </a:xfrm>
+          <a:prstGeom prst="rect">
+            <a:avLst/>
+          </a:prstGeom>
+          <a:noFill/>
+          <a:ln>
+            <a:solidFill>
+              <a:schemeClr val="accent1"/>
+            </a:solidFill>
+          </a:ln>
+          <a:extLst>
+            <a:ext uri="{909E8E84-426E-40DD-AFC4-6F175D3DCCD1}">
+              <a14:hiddenFill xmlns:a14="http://schemas.microsoft.com/office/drawing/2010/main">
+                <a:solidFill>
+                  <a:srgbClr val="FFFFFF"/>
+                </a:solidFill>
+              </a14:hiddenFill>
+            </a:ext>
+          </a:extLst>
+        </p:spPr>
+      </p:pic>
+      <p:pic>
+        <p:nvPicPr>
+          <p:cNvPr id="6" name="Picture 5">
+            <a:extLst>
+              <a:ext uri="{FF2B5EF4-FFF2-40B4-BE49-F238E27FC236}">
+                <a16:creationId xmlns:a16="http://schemas.microsoft.com/office/drawing/2014/main" id="{DA629FB8-3D9E-CA44-9067-60F4B592AA53}"/>
+              </a:ext>
+            </a:extLst>
+          </p:cNvPr>
+          <p:cNvPicPr>
+            <a:picLocks noChangeAspect="1"/>
+          </p:cNvPicPr>
+          <p:nvPr/>
+        </p:nvPicPr>
+        <p:blipFill>
+          <a:blip r:embed="rId7" cstate="email">
+            <a:extLst>
+              <a:ext uri="{28A0092B-C50C-407E-A947-70E740481C1C}">
+                <a14:useLocalDpi xmlns:a14="http://schemas.microsoft.com/office/drawing/2010/main"/>
+              </a:ext>
+            </a:extLst>
+          </a:blip>
+          <a:stretch>
+            <a:fillRect/>
+          </a:stretch>
+        </p:blipFill>
+        <p:spPr>
+          <a:xfrm>
+            <a:off x="134536" y="4481654"/>
+            <a:ext cx="3645952" cy="2106441"/>
+          </a:xfrm>
+          <a:prstGeom prst="rect">
+            <a:avLst/>
+          </a:prstGeom>
+        </p:spPr>
+      </p:pic>
+      <p:sp>
+        <p:nvSpPr>
+          <p:cNvPr id="7" name="TextBox 6">
+            <a:extLst>
+              <a:ext uri="{FF2B5EF4-FFF2-40B4-BE49-F238E27FC236}">
+                <a16:creationId xmlns:a16="http://schemas.microsoft.com/office/drawing/2014/main" id="{EF72CAD9-D640-5044-99D2-CF1C8DF2F0A2}"/>
+              </a:ext>
+            </a:extLst>
+          </p:cNvPr>
+          <p:cNvSpPr txBox="1"/>
+          <p:nvPr/>
+        </p:nvSpPr>
+        <p:spPr>
+          <a:xfrm>
+            <a:off x="10738" y="588610"/>
+            <a:ext cx="2462023" cy="523220"/>
+          </a:xfrm>
+          <a:prstGeom prst="rect">
+            <a:avLst/>
+          </a:prstGeom>
+          <a:noFill/>
+        </p:spPr>
+        <p:txBody>
+          <a:bodyPr wrap="square" rtlCol="0">
+            <a:spAutoFit/>
+          </a:bodyPr>
+          <a:lstStyle/>
+          <a:p>
+            <a:r>
+              <a:rPr lang="en-US" sz="1400" b="1">
+                <a:solidFill>
+                  <a:srgbClr val="00B050"/>
+                </a:solidFill>
+              </a:rPr>
+              <a:t>A software cryptocurrency wallet for Etherium blockchain</a:t>
+            </a:r>
+          </a:p>
+        </p:txBody>
+      </p:sp>
+      <p:sp>
+        <p:nvSpPr>
+          <p:cNvPr id="8" name="TextBox 7">
+            <a:extLst>
+              <a:ext uri="{FF2B5EF4-FFF2-40B4-BE49-F238E27FC236}">
+                <a16:creationId xmlns:a16="http://schemas.microsoft.com/office/drawing/2014/main" id="{5FA31FC3-FBB8-7019-BF60-5E4408252DCF}"/>
+              </a:ext>
+            </a:extLst>
+          </p:cNvPr>
+          <p:cNvSpPr txBox="1"/>
+          <p:nvPr/>
+        </p:nvSpPr>
+        <p:spPr>
+          <a:xfrm>
+            <a:off x="5798398" y="4019989"/>
+            <a:ext cx="4572823" cy="800219"/>
+          </a:xfrm>
+          <a:prstGeom prst="rect">
+            <a:avLst/>
+          </a:prstGeom>
+          <a:noFill/>
+        </p:spPr>
+        <p:txBody>
+          <a:bodyPr wrap="square" rtlCol="0">
+            <a:spAutoFit/>
+          </a:bodyPr>
+          <a:lstStyle/>
+          <a:p>
+            <a:r>
+              <a:rPr lang="en-US" b="1">
+                <a:solidFill>
+                  <a:srgbClr val="00B050"/>
+                </a:solidFill>
+              </a:rPr>
+              <a:t>Browser-based wallets:</a:t>
+            </a:r>
+          </a:p>
+          <a:p>
+            <a:pPr marL="285750" indent="-285750">
+              <a:buFont typeface="Arial" panose="020B0604020202020204" pitchFamily="34" charset="0"/>
+              <a:buChar char="•"/>
+            </a:pPr>
+            <a:r>
+              <a:rPr lang="en-US" sz="1400"/>
+              <a:t>not very secure</a:t>
+            </a:r>
+          </a:p>
+          <a:p>
+            <a:pPr marL="285750" indent="-285750">
+              <a:buFont typeface="Arial" panose="020B0604020202020204" pitchFamily="34" charset="0"/>
+              <a:buChar char="•"/>
+            </a:pPr>
+            <a:r>
+              <a:rPr lang="en-US" sz="1400"/>
+              <a:t>very convenient, easilly connect to multiple exchanges</a:t>
+            </a:r>
           </a:p>
         </p:txBody>
       </p:sp>
     </p:spTree>
     <p:extLst>
       <p:ext uri="{BB962C8B-B14F-4D97-AF65-F5344CB8AC3E}">
-        <p14:creationId xmlns:p14="http://schemas.microsoft.com/office/powerpoint/2010/main" val="1027086850"/>
+        <p14:creationId xmlns:p14="http://schemas.microsoft.com/office/powerpoint/2010/main" val="3657471056"/>
       </p:ext>
     </p:extLst>
   </p:cSld>
@@ -5653,40 +7832,12 @@
           <a:chExt cx="0" cy="0"/>
         </a:xfrm>
       </p:grpSpPr>
-      <p:sp>
-        <p:nvSpPr>
-          <p:cNvPr id="2" name="Title 1">
-            <a:extLst>
-              <a:ext uri="{FF2B5EF4-FFF2-40B4-BE49-F238E27FC236}">
-                <a16:creationId xmlns:a16="http://schemas.microsoft.com/office/drawing/2014/main" id="{59CD814F-0488-4942-8BF6-DC490A8C6AA1}"/>
-              </a:ext>
-            </a:extLst>
-          </p:cNvPr>
-          <p:cNvSpPr>
-            <a:spLocks noGrp="1"/>
-          </p:cNvSpPr>
-          <p:nvPr>
-            <p:ph type="title"/>
-          </p:nvPr>
-        </p:nvSpPr>
-        <p:spPr/>
-        <p:txBody>
-          <a:bodyPr/>
-          <a:lstStyle/>
-          <a:p>
-            <a:r>
-              <a:rPr lang="en-US" dirty="0"/>
-              <a:t>2. Public vs Private Key</a:t>
-            </a:r>
-          </a:p>
-        </p:txBody>
-      </p:sp>
       <p:pic>
         <p:nvPicPr>
-          <p:cNvPr id="5" name="Graphic 4" descr="Old Key with solid fill">
+          <p:cNvPr id="4" name="Picture 3">
             <a:extLst>
               <a:ext uri="{FF2B5EF4-FFF2-40B4-BE49-F238E27FC236}">
-                <a16:creationId xmlns:a16="http://schemas.microsoft.com/office/drawing/2014/main" id="{6FC820C6-7F2A-1649-AA6A-0DE2E659E5FA}"/>
+                <a16:creationId xmlns:a16="http://schemas.microsoft.com/office/drawing/2014/main" id="{796507CB-39E8-0348-90FA-E4E49712669F}"/>
               </a:ext>
             </a:extLst>
           </p:cNvPr>
@@ -5695,281 +7846,33 @@
           </p:cNvPicPr>
           <p:nvPr/>
         </p:nvPicPr>
-        <p:blipFill>
+        <p:blipFill rotWithShape="1">
           <a:blip r:embed="rId2" cstate="email">
             <a:extLst>
               <a:ext uri="{28A0092B-C50C-407E-A947-70E740481C1C}">
                 <a14:useLocalDpi xmlns:a14="http://schemas.microsoft.com/office/drawing/2010/main"/>
               </a:ext>
-              <a:ext uri="{96DAC541-7B7A-43D3-8B79-37D633B846F1}">
-                <asvg:svgBlip xmlns:asvg="http://schemas.microsoft.com/office/drawing/2016/SVG/main" r:embed="rId3"/>
-              </a:ext>
             </a:extLst>
           </a:blip>
-          <a:stretch>
-            <a:fillRect/>
-          </a:stretch>
+          <a:srcRect/>
+          <a:stretch/>
         </p:blipFill>
         <p:spPr>
           <a:xfrm>
-            <a:off x="7532339" y="2147332"/>
-            <a:ext cx="538166" cy="538166"/>
+            <a:off x="416537" y="1069741"/>
+            <a:ext cx="11358925" cy="4718518"/>
           </a:xfrm>
           <a:prstGeom prst="rect">
             <a:avLst/>
           </a:prstGeom>
         </p:spPr>
       </p:pic>
-      <p:pic>
-        <p:nvPicPr>
-          <p:cNvPr id="6" name="Graphic 5" descr="Old Key outline">
+      <p:sp>
+        <p:nvSpPr>
+          <p:cNvPr id="5" name="TextBox 4">
             <a:extLst>
               <a:ext uri="{FF2B5EF4-FFF2-40B4-BE49-F238E27FC236}">
-                <a16:creationId xmlns:a16="http://schemas.microsoft.com/office/drawing/2014/main" id="{416A130C-B6D0-0C47-87B6-7BE24CE1B653}"/>
-              </a:ext>
-            </a:extLst>
-          </p:cNvPr>
-          <p:cNvPicPr>
-            <a:picLocks noChangeAspect="1"/>
-          </p:cNvPicPr>
-          <p:nvPr/>
-        </p:nvPicPr>
-        <p:blipFill>
-          <a:blip r:embed="rId4" cstate="email">
-            <a:extLst>
-              <a:ext uri="{28A0092B-C50C-407E-A947-70E740481C1C}">
-                <a14:useLocalDpi xmlns:a14="http://schemas.microsoft.com/office/drawing/2010/main"/>
-              </a:ext>
-              <a:ext uri="{96DAC541-7B7A-43D3-8B79-37D633B846F1}">
-                <asvg:svgBlip xmlns:asvg="http://schemas.microsoft.com/office/drawing/2016/SVG/main" r:embed="rId5"/>
-              </a:ext>
-            </a:extLst>
-          </a:blip>
-          <a:stretch>
-            <a:fillRect/>
-          </a:stretch>
-        </p:blipFill>
-        <p:spPr>
-          <a:xfrm>
-            <a:off x="9265892" y="2147332"/>
-            <a:ext cx="538166" cy="538166"/>
-          </a:xfrm>
-          <a:prstGeom prst="rect">
-            <a:avLst/>
-          </a:prstGeom>
-        </p:spPr>
-      </p:pic>
-      <p:cxnSp>
-        <p:nvCxnSpPr>
-          <p:cNvPr id="7" name="Straight Arrow Connector 6">
-            <a:extLst>
-              <a:ext uri="{FF2B5EF4-FFF2-40B4-BE49-F238E27FC236}">
-                <a16:creationId xmlns:a16="http://schemas.microsoft.com/office/drawing/2014/main" id="{30B2A087-0A52-9440-9E45-F31E5F617841}"/>
-              </a:ext>
-            </a:extLst>
-          </p:cNvPr>
-          <p:cNvCxnSpPr>
-            <a:stCxn id="5" idx="3"/>
-            <a:endCxn id="6" idx="1"/>
-          </p:cNvCxnSpPr>
-          <p:nvPr/>
-        </p:nvCxnSpPr>
-        <p:spPr>
-          <a:xfrm>
-            <a:off x="8070505" y="2416415"/>
-            <a:ext cx="1195387" cy="0"/>
-          </a:xfrm>
-          <a:prstGeom prst="straightConnector1">
-            <a:avLst/>
-          </a:prstGeom>
-          <a:ln w="38100">
-            <a:headEnd type="triangle"/>
-            <a:tailEnd type="triangle"/>
-          </a:ln>
-        </p:spPr>
-        <p:style>
-          <a:lnRef idx="1">
-            <a:schemeClr val="dk1"/>
-          </a:lnRef>
-          <a:fillRef idx="0">
-            <a:schemeClr val="dk1"/>
-          </a:fillRef>
-          <a:effectRef idx="0">
-            <a:schemeClr val="dk1"/>
-          </a:effectRef>
-          <a:fontRef idx="minor">
-            <a:schemeClr val="tx1"/>
-          </a:fontRef>
-        </p:style>
-      </p:cxnSp>
-      <p:pic>
-        <p:nvPicPr>
-          <p:cNvPr id="8" name="Graphic 7" descr="Mailbox with solid fill">
-            <a:extLst>
-              <a:ext uri="{FF2B5EF4-FFF2-40B4-BE49-F238E27FC236}">
-                <a16:creationId xmlns:a16="http://schemas.microsoft.com/office/drawing/2014/main" id="{D9E3BCAF-D57D-2E44-9402-8F77AAD0E88C}"/>
-              </a:ext>
-            </a:extLst>
-          </p:cNvPr>
-          <p:cNvPicPr>
-            <a:picLocks noChangeAspect="1"/>
-          </p:cNvPicPr>
-          <p:nvPr/>
-        </p:nvPicPr>
-        <p:blipFill>
-          <a:blip r:embed="rId6" cstate="email">
-            <a:extLst>
-              <a:ext uri="{28A0092B-C50C-407E-A947-70E740481C1C}">
-                <a14:useLocalDpi xmlns:a14="http://schemas.microsoft.com/office/drawing/2010/main"/>
-              </a:ext>
-              <a:ext uri="{96DAC541-7B7A-43D3-8B79-37D633B846F1}">
-                <asvg:svgBlip xmlns:asvg="http://schemas.microsoft.com/office/drawing/2016/SVG/main" r:embed="rId7"/>
-              </a:ext>
-            </a:extLst>
-          </a:blip>
-          <a:stretch>
-            <a:fillRect/>
-          </a:stretch>
-        </p:blipFill>
-        <p:spPr>
-          <a:xfrm>
-            <a:off x="7580756" y="3258072"/>
-            <a:ext cx="430719" cy="430719"/>
-          </a:xfrm>
-          <a:prstGeom prst="rect">
-            <a:avLst/>
-          </a:prstGeom>
-        </p:spPr>
-      </p:pic>
-      <p:pic>
-        <p:nvPicPr>
-          <p:cNvPr id="9" name="Graphic 8" descr="Employee badge outline">
-            <a:extLst>
-              <a:ext uri="{FF2B5EF4-FFF2-40B4-BE49-F238E27FC236}">
-                <a16:creationId xmlns:a16="http://schemas.microsoft.com/office/drawing/2014/main" id="{C9353079-AB35-E14A-9C24-0DB177CD6FED}"/>
-              </a:ext>
-            </a:extLst>
-          </p:cNvPr>
-          <p:cNvPicPr>
-            <a:picLocks noChangeAspect="1"/>
-          </p:cNvPicPr>
-          <p:nvPr/>
-        </p:nvPicPr>
-        <p:blipFill>
-          <a:blip r:embed="rId8" cstate="email">
-            <a:extLst>
-              <a:ext uri="{28A0092B-C50C-407E-A947-70E740481C1C}">
-                <a14:useLocalDpi xmlns:a14="http://schemas.microsoft.com/office/drawing/2010/main"/>
-              </a:ext>
-              <a:ext uri="{96DAC541-7B7A-43D3-8B79-37D633B846F1}">
-                <asvg:svgBlip xmlns:asvg="http://schemas.microsoft.com/office/drawing/2016/SVG/main" r:embed="rId9"/>
-              </a:ext>
-            </a:extLst>
-          </a:blip>
-          <a:stretch>
-            <a:fillRect/>
-          </a:stretch>
-        </p:blipFill>
-        <p:spPr>
-          <a:xfrm>
-            <a:off x="9328730" y="3257137"/>
-            <a:ext cx="431654" cy="431654"/>
-          </a:xfrm>
-          <a:prstGeom prst="rect">
-            <a:avLst/>
-          </a:prstGeom>
-        </p:spPr>
-      </p:pic>
-      <p:cxnSp>
-        <p:nvCxnSpPr>
-          <p:cNvPr id="10" name="Straight Arrow Connector 9">
-            <a:extLst>
-              <a:ext uri="{FF2B5EF4-FFF2-40B4-BE49-F238E27FC236}">
-                <a16:creationId xmlns:a16="http://schemas.microsoft.com/office/drawing/2014/main" id="{F631E980-EEA0-AD45-9DC8-2EE705A20563}"/>
-              </a:ext>
-            </a:extLst>
-          </p:cNvPr>
-          <p:cNvCxnSpPr>
-            <a:stCxn id="5" idx="2"/>
-            <a:endCxn id="8" idx="0"/>
-          </p:cNvCxnSpPr>
-          <p:nvPr/>
-        </p:nvCxnSpPr>
-        <p:spPr>
-          <a:xfrm flipH="1">
-            <a:off x="7796116" y="2685498"/>
-            <a:ext cx="5306" cy="572574"/>
-          </a:xfrm>
-          <a:prstGeom prst="straightConnector1">
-            <a:avLst/>
-          </a:prstGeom>
-          <a:ln w="38100">
-            <a:tailEnd type="triangle"/>
-          </a:ln>
-        </p:spPr>
-        <p:style>
-          <a:lnRef idx="1">
-            <a:schemeClr val="dk1"/>
-          </a:lnRef>
-          <a:fillRef idx="0">
-            <a:schemeClr val="dk1"/>
-          </a:fillRef>
-          <a:effectRef idx="0">
-            <a:schemeClr val="dk1"/>
-          </a:effectRef>
-          <a:fontRef idx="minor">
-            <a:schemeClr val="tx1"/>
-          </a:fontRef>
-        </p:style>
-      </p:cxnSp>
-      <p:cxnSp>
-        <p:nvCxnSpPr>
-          <p:cNvPr id="11" name="Straight Arrow Connector 10">
-            <a:extLst>
-              <a:ext uri="{FF2B5EF4-FFF2-40B4-BE49-F238E27FC236}">
-                <a16:creationId xmlns:a16="http://schemas.microsoft.com/office/drawing/2014/main" id="{C1CBDA0D-2E00-4849-9D6D-DD0446FA7BC4}"/>
-              </a:ext>
-            </a:extLst>
-          </p:cNvPr>
-          <p:cNvCxnSpPr>
-            <a:stCxn id="6" idx="2"/>
-            <a:endCxn id="9" idx="0"/>
-          </p:cNvCxnSpPr>
-          <p:nvPr/>
-        </p:nvCxnSpPr>
-        <p:spPr>
-          <a:xfrm>
-            <a:off x="9534975" y="2685498"/>
-            <a:ext cx="9582" cy="571639"/>
-          </a:xfrm>
-          <a:prstGeom prst="straightConnector1">
-            <a:avLst/>
-          </a:prstGeom>
-          <a:ln w="38100">
-            <a:tailEnd type="triangle"/>
-          </a:ln>
-        </p:spPr>
-        <p:style>
-          <a:lnRef idx="1">
-            <a:schemeClr val="dk1"/>
-          </a:lnRef>
-          <a:fillRef idx="0">
-            <a:schemeClr val="dk1"/>
-          </a:fillRef>
-          <a:effectRef idx="0">
-            <a:schemeClr val="dk1"/>
-          </a:effectRef>
-          <a:fontRef idx="minor">
-            <a:schemeClr val="tx1"/>
-          </a:fontRef>
-        </p:style>
-      </p:cxnSp>
-      <p:sp>
-        <p:nvSpPr>
-          <p:cNvPr id="4" name="TextBox 3">
-            <a:extLst>
-              <a:ext uri="{FF2B5EF4-FFF2-40B4-BE49-F238E27FC236}">
-                <a16:creationId xmlns:a16="http://schemas.microsoft.com/office/drawing/2014/main" id="{363089A5-F958-7E4B-B562-F7C474EDDB06}"/>
+                <a16:creationId xmlns:a16="http://schemas.microsoft.com/office/drawing/2014/main" id="{0CF475CF-2613-4840-95C2-352246822EC8}"/>
               </a:ext>
             </a:extLst>
           </p:cNvPr>
@@ -5978,8 +7881,8 @@
         </p:nvSpPr>
         <p:spPr>
           <a:xfrm>
-            <a:off x="7496094" y="1690688"/>
-            <a:ext cx="750526" cy="369332"/>
+            <a:off x="2547257" y="6841671"/>
+            <a:ext cx="184731" cy="369332"/>
           </a:xfrm>
           <a:prstGeom prst="rect">
             <a:avLst/>
@@ -5992,19 +7895,16 @@
           </a:bodyPr>
           <a:lstStyle/>
           <a:p>
-            <a:r>
-              <a:rPr lang="en-US" dirty="0"/>
-              <a:t>Public</a:t>
-            </a:r>
-          </a:p>
-        </p:txBody>
-      </p:sp>
-      <p:sp>
-        <p:nvSpPr>
-          <p:cNvPr id="13" name="TextBox 12">
+            <a:endParaRPr lang="en-US" dirty="0"/>
+          </a:p>
+        </p:txBody>
+      </p:sp>
+      <p:sp>
+        <p:nvSpPr>
+          <p:cNvPr id="6" name="TextBox 5">
             <a:extLst>
               <a:ext uri="{FF2B5EF4-FFF2-40B4-BE49-F238E27FC236}">
-                <a16:creationId xmlns:a16="http://schemas.microsoft.com/office/drawing/2014/main" id="{D53AE619-26D9-534C-BDD3-B2FDD674062E}"/>
+                <a16:creationId xmlns:a16="http://schemas.microsoft.com/office/drawing/2014/main" id="{1C7F0B1C-221D-B845-9C05-E49E881FC13D}"/>
               </a:ext>
             </a:extLst>
           </p:cNvPr>
@@ -6013,8 +7913,8 @@
         </p:nvSpPr>
         <p:spPr>
           <a:xfrm>
-            <a:off x="9117232" y="1695590"/>
-            <a:ext cx="835485" cy="369332"/>
+            <a:off x="3885288" y="5991263"/>
+            <a:ext cx="3827330" cy="492443"/>
           </a:xfrm>
           <a:prstGeom prst="rect">
             <a:avLst/>
@@ -6028,18 +7928,64 @@
           <a:lstStyle/>
           <a:p>
             <a:r>
+              <a:rPr lang="en-US" sz="1400" dirty="0"/>
+              <a:t>Analysis done by </a:t>
+            </a:r>
+            <a:r>
+              <a:rPr lang="en-US" sz="1400" dirty="0" err="1"/>
+              <a:t>Veriphi</a:t>
+            </a:r>
+            <a:r>
+              <a:rPr lang="en-US" sz="1400" dirty="0"/>
+              <a:t>: </a:t>
+            </a:r>
+            <a:br>
               <a:rPr lang="en-US" dirty="0"/>
-              <a:t>Private</a:t>
-            </a:r>
-          </a:p>
-        </p:txBody>
-      </p:sp>
-      <p:sp>
-        <p:nvSpPr>
-          <p:cNvPr id="14" name="TextBox 13">
+            </a:br>
+            <a:r>
+              <a:rPr lang="en-US" sz="1200" dirty="0"/>
+              <a:t>.. </a:t>
+            </a:r>
+            <a:r>
+              <a:rPr lang="en-US" sz="1200" dirty="0">
+                <a:hlinkClick r:id="rId3"/>
+              </a:rPr>
+              <a:t>https://</a:t>
+            </a:r>
+            <a:r>
+              <a:rPr lang="en-US" sz="1200" dirty="0" err="1">
+                <a:hlinkClick r:id="rId3"/>
+              </a:rPr>
+              <a:t>www.veriphi.io</a:t>
+            </a:r>
+            <a:r>
+              <a:rPr lang="en-US" sz="1200" dirty="0">
+                <a:hlinkClick r:id="rId3"/>
+              </a:rPr>
+              <a:t>/</a:t>
+            </a:r>
+            <a:r>
+              <a:rPr lang="en-US" sz="1200" dirty="0" err="1">
+                <a:hlinkClick r:id="rId3"/>
+              </a:rPr>
+              <a:t>en</a:t>
+            </a:r>
+            <a:r>
+              <a:rPr lang="en-US" sz="1200" dirty="0">
+                <a:hlinkClick r:id="rId3"/>
+              </a:rPr>
+              <a:t>/blog/software-wallet-analysis</a:t>
+            </a:r>
+            <a:endParaRPr lang="en-US" sz="1200" dirty="0"/>
+          </a:p>
+        </p:txBody>
+      </p:sp>
+      <p:sp>
+        <p:nvSpPr>
+          <p:cNvPr id="2" name="TextBox 1">
             <a:extLst>
               <a:ext uri="{FF2B5EF4-FFF2-40B4-BE49-F238E27FC236}">
-                <a16:creationId xmlns:a16="http://schemas.microsoft.com/office/drawing/2014/main" id="{5C1800A6-7E7C-2345-9A41-61EADE78D4DC}"/>
+                <a16:creationId xmlns:a16="http://schemas.microsoft.com/office/drawing/2014/main" id="{4C398E17-E066-E0FC-7BD7-020BC9A6F35C}"/>
               </a:ext>
             </a:extLst>
           </p:cNvPr>
@@ -6048,8 +7994,8 @@
         </p:nvSpPr>
         <p:spPr>
           <a:xfrm>
-            <a:off x="7244489" y="3796238"/>
-            <a:ext cx="1103251" cy="369332"/>
+            <a:off x="98854" y="0"/>
+            <a:ext cx="4349578" cy="523220"/>
           </a:xfrm>
           <a:prstGeom prst="rect">
             <a:avLst/>
@@ -6057,24 +8003,24 @@
           <a:noFill/>
         </p:spPr>
         <p:txBody>
-          <a:bodyPr wrap="none" rtlCol="0">
+          <a:bodyPr wrap="square" rtlCol="0">
             <a:spAutoFit/>
           </a:bodyPr>
           <a:lstStyle/>
           <a:p>
             <a:r>
-              <a:rPr lang="en-US" dirty="0"/>
-              <a:t>“Address”</a:t>
-            </a:r>
-          </a:p>
-        </p:txBody>
-      </p:sp>
-      <p:sp>
-        <p:nvSpPr>
-          <p:cNvPr id="15" name="TextBox 14">
+              <a:rPr lang="en-US" sz="2800" b="1"/>
+              <a:t>Wallet Comparisons</a:t>
+            </a:r>
+          </a:p>
+        </p:txBody>
+      </p:sp>
+      <p:sp>
+        <p:nvSpPr>
+          <p:cNvPr id="3" name="TextBox 2">
             <a:extLst>
               <a:ext uri="{FF2B5EF4-FFF2-40B4-BE49-F238E27FC236}">
-                <a16:creationId xmlns:a16="http://schemas.microsoft.com/office/drawing/2014/main" id="{37121F2A-6C02-9548-B423-89AB267A0D46}"/>
+                <a16:creationId xmlns:a16="http://schemas.microsoft.com/office/drawing/2014/main" id="{F5FD4B5B-6802-2D92-635D-5C5EB1559385}"/>
               </a:ext>
             </a:extLst>
           </p:cNvPr>
@@ -6083,8 +8029,8 @@
         </p:nvSpPr>
         <p:spPr>
           <a:xfrm>
-            <a:off x="8852864" y="3828776"/>
-            <a:ext cx="1364220" cy="369332"/>
+            <a:off x="10309813" y="645117"/>
+            <a:ext cx="897450" cy="369332"/>
           </a:xfrm>
           <a:prstGeom prst="rect">
             <a:avLst/>
@@ -6092,24 +8038,25 @@
           <a:noFill/>
         </p:spPr>
         <p:txBody>
-          <a:bodyPr wrap="none" rtlCol="0">
+          <a:bodyPr wrap="square" rtlCol="0">
             <a:spAutoFit/>
           </a:bodyPr>
           <a:lstStyle/>
           <a:p>
-            <a:r>
-              <a:rPr lang="en-US" dirty="0"/>
-              <a:t>“House Key”</a:t>
-            </a:r>
-          </a:p>
-        </p:txBody>
-      </p:sp>
-      <p:sp>
-        <p:nvSpPr>
-          <p:cNvPr id="12" name="TextBox 11">
+            <a:pPr algn="r"/>
+            <a:r>
+              <a:rPr lang="en-US"/>
+              <a:t>Worst</a:t>
+            </a:r>
+          </a:p>
+        </p:txBody>
+      </p:sp>
+      <p:sp>
+        <p:nvSpPr>
+          <p:cNvPr id="7" name="TextBox 6">
             <a:extLst>
               <a:ext uri="{FF2B5EF4-FFF2-40B4-BE49-F238E27FC236}">
-                <a16:creationId xmlns:a16="http://schemas.microsoft.com/office/drawing/2014/main" id="{F391AC64-BFA1-184A-BA49-BF2D2BB4C6CE}"/>
+                <a16:creationId xmlns:a16="http://schemas.microsoft.com/office/drawing/2014/main" id="{A64CD484-5760-B321-64A1-BC13B89A02B9}"/>
               </a:ext>
             </a:extLst>
           </p:cNvPr>
@@ -6118,8 +8065,8 @@
         </p:nvSpPr>
         <p:spPr>
           <a:xfrm>
-            <a:off x="671991" y="2039167"/>
-            <a:ext cx="5650906" cy="923330"/>
+            <a:off x="2190897" y="678071"/>
+            <a:ext cx="897450" cy="369332"/>
           </a:xfrm>
           <a:prstGeom prst="rect">
             <a:avLst/>
@@ -6127,815 +8074,22 @@
           <a:noFill/>
         </p:spPr>
         <p:txBody>
-          <a:bodyPr wrap="none" rtlCol="0">
+          <a:bodyPr wrap="square" rtlCol="0">
             <a:spAutoFit/>
           </a:bodyPr>
           <a:lstStyle/>
           <a:p>
-            <a:pPr marL="285750" indent="-285750">
-              <a:buFont typeface="Arial" panose="020B0604020202020204" pitchFamily="34" charset="0"/>
-              <a:buChar char="•"/>
-            </a:pPr>
-            <a:r>
-              <a:rPr lang="en-US" dirty="0"/>
-              <a:t>Symmetric vs Asymmetric encryption</a:t>
-            </a:r>
-          </a:p>
-          <a:p>
-            <a:pPr marL="285750" indent="-285750">
-              <a:buFont typeface="Arial" panose="020B0604020202020204" pitchFamily="34" charset="0"/>
-              <a:buChar char="•"/>
-            </a:pPr>
-            <a:r>
-              <a:rPr lang="en-US" dirty="0"/>
-              <a:t>Private key enables send &amp; Public key enables receiving</a:t>
-            </a:r>
-          </a:p>
-          <a:p>
-            <a:pPr marL="285750" indent="-285750">
-              <a:buFont typeface="Arial" panose="020B0604020202020204" pitchFamily="34" charset="0"/>
-              <a:buChar char="•"/>
-            </a:pPr>
-            <a:r>
-              <a:rPr lang="en-US" dirty="0"/>
-              <a:t>Public key generates from private key. No vice versa</a:t>
-            </a:r>
-          </a:p>
-        </p:txBody>
-      </p:sp>
-      <p:sp>
-        <p:nvSpPr>
-          <p:cNvPr id="16" name="TextBox 15">
-            <a:extLst>
-              <a:ext uri="{FF2B5EF4-FFF2-40B4-BE49-F238E27FC236}">
-                <a16:creationId xmlns:a16="http://schemas.microsoft.com/office/drawing/2014/main" id="{19112EFC-66A8-7147-9611-1CE15DBED304}"/>
-              </a:ext>
-            </a:extLst>
-          </p:cNvPr>
-          <p:cNvSpPr txBox="1"/>
-          <p:nvPr/>
-        </p:nvSpPr>
-        <p:spPr>
-          <a:xfrm>
-            <a:off x="1759147" y="4557009"/>
-            <a:ext cx="4563750" cy="369332"/>
-          </a:xfrm>
-          <a:prstGeom prst="rect">
-            <a:avLst/>
-          </a:prstGeom>
-          <a:noFill/>
-        </p:spPr>
-        <p:txBody>
-          <a:bodyPr wrap="none" rtlCol="0">
-            <a:spAutoFit/>
-          </a:bodyPr>
-          <a:lstStyle/>
-          <a:p>
-            <a:r>
-              <a:rPr lang="en-US" dirty="0"/>
-              <a:t>01- </a:t>
-            </a:r>
-            <a:r>
-              <a:rPr lang="en-US" dirty="0">
-                <a:solidFill>
-                  <a:schemeClr val="accent1">
-                    <a:lumMod val="50000"/>
-                  </a:schemeClr>
-                </a:solidFill>
-                <a:highlight>
-                  <a:srgbClr val="FFFF00"/>
-                </a:highlight>
-              </a:rPr>
-              <a:t>Malte sends 1 BTC to Martin</a:t>
-            </a:r>
-            <a:r>
-              <a:rPr lang="en-US" dirty="0"/>
-              <a:t>-</a:t>
-            </a:r>
-            <a:r>
-              <a:rPr lang="en-US" dirty="0">
-                <a:solidFill>
-                  <a:srgbClr val="C00000"/>
-                </a:solidFill>
-              </a:rPr>
-              <a:t>473ms22akkq</a:t>
-            </a:r>
-          </a:p>
-        </p:txBody>
-      </p:sp>
-      <p:cxnSp>
-        <p:nvCxnSpPr>
-          <p:cNvPr id="18" name="Straight Arrow Connector 17">
-            <a:extLst>
-              <a:ext uri="{FF2B5EF4-FFF2-40B4-BE49-F238E27FC236}">
-                <a16:creationId xmlns:a16="http://schemas.microsoft.com/office/drawing/2014/main" id="{4B5F7D46-66E7-EE4E-8FFA-91BB1BC6089F}"/>
-              </a:ext>
-            </a:extLst>
-          </p:cNvPr>
-          <p:cNvCxnSpPr/>
-          <p:nvPr/>
-        </p:nvCxnSpPr>
-        <p:spPr>
-          <a:xfrm flipV="1">
-            <a:off x="1759147" y="4926341"/>
-            <a:ext cx="174584" cy="784911"/>
-          </a:xfrm>
-          <a:prstGeom prst="straightConnector1">
-            <a:avLst/>
-          </a:prstGeom>
-          <a:ln>
-            <a:tailEnd type="triangle"/>
-          </a:ln>
-        </p:spPr>
-        <p:style>
-          <a:lnRef idx="1">
-            <a:schemeClr val="accent1"/>
-          </a:lnRef>
-          <a:fillRef idx="0">
-            <a:schemeClr val="accent1"/>
-          </a:fillRef>
-          <a:effectRef idx="0">
-            <a:schemeClr val="accent1"/>
-          </a:effectRef>
-          <a:fontRef idx="minor">
-            <a:schemeClr val="tx1"/>
-          </a:fontRef>
-        </p:style>
-      </p:cxnSp>
-      <p:cxnSp>
-        <p:nvCxnSpPr>
-          <p:cNvPr id="20" name="Straight Arrow Connector 19">
-            <a:extLst>
-              <a:ext uri="{FF2B5EF4-FFF2-40B4-BE49-F238E27FC236}">
-                <a16:creationId xmlns:a16="http://schemas.microsoft.com/office/drawing/2014/main" id="{C14761E8-67C6-D843-AD68-63B980694FC9}"/>
-              </a:ext>
-            </a:extLst>
-          </p:cNvPr>
-          <p:cNvCxnSpPr/>
-          <p:nvPr/>
-        </p:nvCxnSpPr>
-        <p:spPr>
-          <a:xfrm flipV="1">
-            <a:off x="3612630" y="4926341"/>
-            <a:ext cx="119921" cy="784911"/>
-          </a:xfrm>
-          <a:prstGeom prst="straightConnector1">
-            <a:avLst/>
-          </a:prstGeom>
-          <a:ln>
-            <a:tailEnd type="triangle"/>
-          </a:ln>
-        </p:spPr>
-        <p:style>
-          <a:lnRef idx="1">
-            <a:schemeClr val="accent1"/>
-          </a:lnRef>
-          <a:fillRef idx="0">
-            <a:schemeClr val="accent1"/>
-          </a:fillRef>
-          <a:effectRef idx="0">
-            <a:schemeClr val="accent1"/>
-          </a:effectRef>
-          <a:fontRef idx="minor">
-            <a:schemeClr val="tx1"/>
-          </a:fontRef>
-        </p:style>
-      </p:cxnSp>
-      <p:cxnSp>
-        <p:nvCxnSpPr>
-          <p:cNvPr id="22" name="Straight Arrow Connector 21">
-            <a:extLst>
-              <a:ext uri="{FF2B5EF4-FFF2-40B4-BE49-F238E27FC236}">
-                <a16:creationId xmlns:a16="http://schemas.microsoft.com/office/drawing/2014/main" id="{16662B9F-7BC2-CE48-903B-F00807619D59}"/>
-              </a:ext>
-            </a:extLst>
-          </p:cNvPr>
-          <p:cNvCxnSpPr/>
-          <p:nvPr/>
-        </p:nvCxnSpPr>
-        <p:spPr>
-          <a:xfrm flipV="1">
-            <a:off x="5411450" y="4926341"/>
-            <a:ext cx="119921" cy="784911"/>
-          </a:xfrm>
-          <a:prstGeom prst="straightConnector1">
-            <a:avLst/>
-          </a:prstGeom>
-          <a:ln>
-            <a:tailEnd type="triangle"/>
-          </a:ln>
-        </p:spPr>
-        <p:style>
-          <a:lnRef idx="1">
-            <a:schemeClr val="accent1"/>
-          </a:lnRef>
-          <a:fillRef idx="0">
-            <a:schemeClr val="accent1"/>
-          </a:fillRef>
-          <a:effectRef idx="0">
-            <a:schemeClr val="accent1"/>
-          </a:effectRef>
-          <a:fontRef idx="minor">
-            <a:schemeClr val="tx1"/>
-          </a:fontRef>
-        </p:style>
-      </p:cxnSp>
-      <p:sp>
-        <p:nvSpPr>
-          <p:cNvPr id="21" name="TextBox 20">
-            <a:extLst>
-              <a:ext uri="{FF2B5EF4-FFF2-40B4-BE49-F238E27FC236}">
-                <a16:creationId xmlns:a16="http://schemas.microsoft.com/office/drawing/2014/main" id="{8298E2C6-E805-C24D-9AB6-A71DC5C08D63}"/>
-              </a:ext>
-            </a:extLst>
-          </p:cNvPr>
-          <p:cNvSpPr txBox="1"/>
-          <p:nvPr/>
-        </p:nvSpPr>
-        <p:spPr>
-          <a:xfrm>
-            <a:off x="744738" y="5895918"/>
-            <a:ext cx="1777538" cy="369332"/>
-          </a:xfrm>
-          <a:prstGeom prst="rect">
-            <a:avLst/>
-          </a:prstGeom>
-          <a:noFill/>
-        </p:spPr>
-        <p:txBody>
-          <a:bodyPr wrap="none" rtlCol="0">
-            <a:spAutoFit/>
-          </a:bodyPr>
-          <a:lstStyle/>
-          <a:p>
-            <a:r>
-              <a:rPr lang="en-US" dirty="0"/>
-              <a:t>Unique identifier</a:t>
-            </a:r>
-          </a:p>
-        </p:txBody>
-      </p:sp>
-      <p:sp>
-        <p:nvSpPr>
-          <p:cNvPr id="24" name="TextBox 23">
-            <a:extLst>
-              <a:ext uri="{FF2B5EF4-FFF2-40B4-BE49-F238E27FC236}">
-                <a16:creationId xmlns:a16="http://schemas.microsoft.com/office/drawing/2014/main" id="{DD693D81-F26A-2F4C-B366-C8BE792D3410}"/>
-              </a:ext>
-            </a:extLst>
-          </p:cNvPr>
-          <p:cNvSpPr txBox="1"/>
-          <p:nvPr/>
-        </p:nvSpPr>
-        <p:spPr>
-          <a:xfrm>
-            <a:off x="3077296" y="5921115"/>
-            <a:ext cx="1241109" cy="369332"/>
-          </a:xfrm>
-          <a:prstGeom prst="rect">
-            <a:avLst/>
-          </a:prstGeom>
-          <a:noFill/>
-        </p:spPr>
-        <p:txBody>
-          <a:bodyPr wrap="none" rtlCol="0">
-            <a:spAutoFit/>
-          </a:bodyPr>
-          <a:lstStyle/>
-          <a:p>
-            <a:r>
-              <a:rPr lang="en-US" dirty="0">
-                <a:highlight>
-                  <a:srgbClr val="FFFF00"/>
-                </a:highlight>
-              </a:rPr>
-              <a:t>transaction</a:t>
-            </a:r>
-          </a:p>
-        </p:txBody>
-      </p:sp>
-      <p:sp>
-        <p:nvSpPr>
-          <p:cNvPr id="25" name="TextBox 24">
-            <a:extLst>
-              <a:ext uri="{FF2B5EF4-FFF2-40B4-BE49-F238E27FC236}">
-                <a16:creationId xmlns:a16="http://schemas.microsoft.com/office/drawing/2014/main" id="{F8B25983-DCCF-8C44-9508-E19A15A8DC5E}"/>
-              </a:ext>
-            </a:extLst>
-          </p:cNvPr>
-          <p:cNvSpPr txBox="1"/>
-          <p:nvPr/>
-        </p:nvSpPr>
-        <p:spPr>
-          <a:xfrm>
-            <a:off x="4850855" y="5921115"/>
-            <a:ext cx="762773" cy="369332"/>
-          </a:xfrm>
-          <a:prstGeom prst="rect">
-            <a:avLst/>
-          </a:prstGeom>
-          <a:noFill/>
-        </p:spPr>
-        <p:txBody>
-          <a:bodyPr wrap="none" rtlCol="0">
-            <a:spAutoFit/>
-          </a:bodyPr>
-          <a:lstStyle/>
-          <a:p>
-            <a:r>
-              <a:rPr lang="en-US" dirty="0">
-                <a:solidFill>
-                  <a:srgbClr val="C00000"/>
-                </a:solidFill>
-              </a:rPr>
-              <a:t>stamp</a:t>
-            </a:r>
-          </a:p>
-        </p:txBody>
-      </p:sp>
-      <p:cxnSp>
-        <p:nvCxnSpPr>
-          <p:cNvPr id="26" name="Straight Arrow Connector 25">
-            <a:extLst>
-              <a:ext uri="{FF2B5EF4-FFF2-40B4-BE49-F238E27FC236}">
-                <a16:creationId xmlns:a16="http://schemas.microsoft.com/office/drawing/2014/main" id="{7DA55EA8-940B-C142-8619-CFD889578CDB}"/>
-              </a:ext>
-            </a:extLst>
-          </p:cNvPr>
-          <p:cNvCxnSpPr>
-            <a:cxnSpLocks/>
-          </p:cNvCxnSpPr>
-          <p:nvPr/>
-        </p:nvCxnSpPr>
-        <p:spPr>
-          <a:xfrm>
-            <a:off x="5662572" y="6107854"/>
-            <a:ext cx="433428" cy="0"/>
-          </a:xfrm>
-          <a:prstGeom prst="straightConnector1">
-            <a:avLst/>
-          </a:prstGeom>
-          <a:ln>
-            <a:tailEnd type="triangle"/>
-          </a:ln>
-        </p:spPr>
-        <p:style>
-          <a:lnRef idx="1">
-            <a:schemeClr val="accent1"/>
-          </a:lnRef>
-          <a:fillRef idx="0">
-            <a:schemeClr val="accent1"/>
-          </a:fillRef>
-          <a:effectRef idx="0">
-            <a:schemeClr val="accent1"/>
-          </a:effectRef>
-          <a:fontRef idx="minor">
-            <a:schemeClr val="tx1"/>
-          </a:fontRef>
-        </p:style>
-      </p:cxnSp>
-      <p:sp>
-        <p:nvSpPr>
-          <p:cNvPr id="27" name="TextBox 26">
-            <a:extLst>
-              <a:ext uri="{FF2B5EF4-FFF2-40B4-BE49-F238E27FC236}">
-                <a16:creationId xmlns:a16="http://schemas.microsoft.com/office/drawing/2014/main" id="{41F6604F-6D88-974C-8C4E-6AA69DA5E0AB}"/>
-              </a:ext>
-            </a:extLst>
-          </p:cNvPr>
-          <p:cNvSpPr txBox="1"/>
-          <p:nvPr/>
-        </p:nvSpPr>
-        <p:spPr>
-          <a:xfrm>
-            <a:off x="6322897" y="5955880"/>
-            <a:ext cx="2936253" cy="369332"/>
-          </a:xfrm>
-          <a:prstGeom prst="rect">
-            <a:avLst/>
-          </a:prstGeom>
-          <a:noFill/>
-        </p:spPr>
-        <p:txBody>
-          <a:bodyPr wrap="none" rtlCol="0">
-            <a:spAutoFit/>
-          </a:bodyPr>
-          <a:lstStyle/>
-          <a:p>
-            <a:r>
-              <a:rPr lang="en-US" dirty="0" err="1"/>
-              <a:t>PrivateKey</a:t>
-            </a:r>
-            <a:r>
-              <a:rPr lang="en-US" dirty="0"/>
-              <a:t>(UID + transaction)</a:t>
-            </a:r>
-          </a:p>
-        </p:txBody>
-      </p:sp>
-      <p:pic>
-        <p:nvPicPr>
-          <p:cNvPr id="29" name="Graphic 28" descr="Old Key with solid fill">
-            <a:extLst>
-              <a:ext uri="{FF2B5EF4-FFF2-40B4-BE49-F238E27FC236}">
-                <a16:creationId xmlns:a16="http://schemas.microsoft.com/office/drawing/2014/main" id="{2333B70C-50DE-2E44-A79B-EB013737E8AE}"/>
-              </a:ext>
-            </a:extLst>
-          </p:cNvPr>
-          <p:cNvPicPr>
-            <a:picLocks noChangeAspect="1"/>
-          </p:cNvPicPr>
-          <p:nvPr/>
-        </p:nvPicPr>
-        <p:blipFill>
-          <a:blip r:embed="rId2" cstate="email">
-            <a:extLst>
-              <a:ext uri="{28A0092B-C50C-407E-A947-70E740481C1C}">
-                <a14:useLocalDpi xmlns:a14="http://schemas.microsoft.com/office/drawing/2010/main"/>
-              </a:ext>
-              <a:ext uri="{96DAC541-7B7A-43D3-8B79-37D633B846F1}">
-                <asvg:svgBlip xmlns:asvg="http://schemas.microsoft.com/office/drawing/2016/SVG/main" r:embed="rId3"/>
-              </a:ext>
-            </a:extLst>
-          </a:blip>
-          <a:stretch>
-            <a:fillRect/>
-          </a:stretch>
-        </p:blipFill>
-        <p:spPr>
-          <a:xfrm>
-            <a:off x="9805096" y="5173086"/>
-            <a:ext cx="538166" cy="538166"/>
-          </a:xfrm>
-          <a:prstGeom prst="rect">
-            <a:avLst/>
-          </a:prstGeom>
-        </p:spPr>
-      </p:pic>
-      <p:pic>
-        <p:nvPicPr>
-          <p:cNvPr id="30" name="Graphic 29" descr="Users with solid fill">
-            <a:extLst>
-              <a:ext uri="{FF2B5EF4-FFF2-40B4-BE49-F238E27FC236}">
-                <a16:creationId xmlns:a16="http://schemas.microsoft.com/office/drawing/2014/main" id="{C948B39E-ECC7-034B-9C00-D1AA6BDD5626}"/>
-              </a:ext>
-            </a:extLst>
-          </p:cNvPr>
-          <p:cNvPicPr>
-            <a:picLocks noChangeAspect="1"/>
-          </p:cNvPicPr>
-          <p:nvPr/>
-        </p:nvPicPr>
-        <p:blipFill>
-          <a:blip r:embed="rId10">
-            <a:extLst>
-              <a:ext uri="{96DAC541-7B7A-43D3-8B79-37D633B846F1}">
-                <asvg:svgBlip xmlns:asvg="http://schemas.microsoft.com/office/drawing/2016/SVG/main" r:embed="rId11"/>
-              </a:ext>
-            </a:extLst>
-          </a:blip>
-          <a:stretch>
-            <a:fillRect/>
-          </a:stretch>
-        </p:blipFill>
-        <p:spPr>
-          <a:xfrm>
-            <a:off x="10392114" y="5041480"/>
-            <a:ext cx="914400" cy="914400"/>
-          </a:xfrm>
-          <a:prstGeom prst="rect">
-            <a:avLst/>
-          </a:prstGeom>
-        </p:spPr>
-      </p:pic>
-      <p:cxnSp>
-        <p:nvCxnSpPr>
-          <p:cNvPr id="32" name="Straight Arrow Connector 31">
-            <a:extLst>
-              <a:ext uri="{FF2B5EF4-FFF2-40B4-BE49-F238E27FC236}">
-                <a16:creationId xmlns:a16="http://schemas.microsoft.com/office/drawing/2014/main" id="{67AD8ED7-F7DD-6440-A712-E200BAD56D09}"/>
-              </a:ext>
-            </a:extLst>
-          </p:cNvPr>
-          <p:cNvCxnSpPr>
-            <a:cxnSpLocks/>
-            <a:stCxn id="29" idx="2"/>
-            <a:endCxn id="27" idx="3"/>
-          </p:cNvCxnSpPr>
-          <p:nvPr/>
-        </p:nvCxnSpPr>
-        <p:spPr>
-          <a:xfrm flipH="1">
-            <a:off x="9259150" y="5711252"/>
-            <a:ext cx="815029" cy="429294"/>
-          </a:xfrm>
-          <a:prstGeom prst="straightConnector1">
-            <a:avLst/>
-          </a:prstGeom>
-          <a:ln>
-            <a:tailEnd type="triangle"/>
-          </a:ln>
-        </p:spPr>
-        <p:style>
-          <a:lnRef idx="1">
-            <a:schemeClr val="accent1"/>
-          </a:lnRef>
-          <a:fillRef idx="0">
-            <a:schemeClr val="accent1"/>
-          </a:fillRef>
-          <a:effectRef idx="0">
-            <a:schemeClr val="accent1"/>
-          </a:effectRef>
-          <a:fontRef idx="minor">
-            <a:schemeClr val="tx1"/>
-          </a:fontRef>
-        </p:style>
-      </p:cxnSp>
-      <p:sp>
-        <p:nvSpPr>
-          <p:cNvPr id="34" name="TextBox 33">
-            <a:extLst>
-              <a:ext uri="{FF2B5EF4-FFF2-40B4-BE49-F238E27FC236}">
-                <a16:creationId xmlns:a16="http://schemas.microsoft.com/office/drawing/2014/main" id="{7669DC17-CE2B-E64C-9935-706CD126CDD5}"/>
-              </a:ext>
-            </a:extLst>
-          </p:cNvPr>
-          <p:cNvSpPr txBox="1"/>
-          <p:nvPr/>
-        </p:nvSpPr>
-        <p:spPr>
-          <a:xfrm rot="19843804">
-            <a:off x="9548549" y="5851623"/>
-            <a:ext cx="922047" cy="369332"/>
-          </a:xfrm>
-          <a:prstGeom prst="rect">
-            <a:avLst/>
-          </a:prstGeom>
-          <a:noFill/>
-        </p:spPr>
-        <p:txBody>
-          <a:bodyPr wrap="none" rtlCol="0">
-            <a:spAutoFit/>
-          </a:bodyPr>
-          <a:lstStyle/>
-          <a:p>
-            <a:r>
-              <a:rPr lang="en-US" dirty="0"/>
-              <a:t>validate</a:t>
-            </a:r>
-          </a:p>
-        </p:txBody>
-      </p:sp>
-      <p:sp>
-        <p:nvSpPr>
-          <p:cNvPr id="35" name="TextBox 34">
-            <a:extLst>
-              <a:ext uri="{FF2B5EF4-FFF2-40B4-BE49-F238E27FC236}">
-                <a16:creationId xmlns:a16="http://schemas.microsoft.com/office/drawing/2014/main" id="{937094D4-C58C-9844-B226-17B63D0EE261}"/>
-              </a:ext>
-            </a:extLst>
-          </p:cNvPr>
-          <p:cNvSpPr txBox="1"/>
-          <p:nvPr/>
-        </p:nvSpPr>
-        <p:spPr>
-          <a:xfrm>
-            <a:off x="934192" y="4014653"/>
-            <a:ext cx="3057184" cy="369332"/>
-          </a:xfrm>
-          <a:prstGeom prst="rect">
-            <a:avLst/>
-          </a:prstGeom>
-          <a:noFill/>
-        </p:spPr>
-        <p:txBody>
-          <a:bodyPr wrap="none" rtlCol="0">
-            <a:spAutoFit/>
-          </a:bodyPr>
-          <a:lstStyle/>
-          <a:p>
-            <a:r>
-              <a:rPr lang="en-US" dirty="0"/>
-              <a:t>Example transaction structure:</a:t>
-            </a:r>
-          </a:p>
-        </p:txBody>
-      </p:sp>
-      <p:cxnSp>
-        <p:nvCxnSpPr>
-          <p:cNvPr id="37" name="Straight Arrow Connector 36">
-            <a:extLst>
-              <a:ext uri="{FF2B5EF4-FFF2-40B4-BE49-F238E27FC236}">
-                <a16:creationId xmlns:a16="http://schemas.microsoft.com/office/drawing/2014/main" id="{094C86D8-5894-2840-86B0-7D72E9B55C91}"/>
-              </a:ext>
-            </a:extLst>
-          </p:cNvPr>
-          <p:cNvCxnSpPr>
-            <a:cxnSpLocks/>
-          </p:cNvCxnSpPr>
-          <p:nvPr/>
-        </p:nvCxnSpPr>
-        <p:spPr>
-          <a:xfrm flipV="1">
-            <a:off x="9534974" y="852974"/>
-            <a:ext cx="0" cy="568130"/>
-          </a:xfrm>
-          <a:prstGeom prst="straightConnector1">
-            <a:avLst/>
-          </a:prstGeom>
-          <a:ln w="38100">
-            <a:tailEnd type="triangle"/>
-          </a:ln>
-        </p:spPr>
-        <p:style>
-          <a:lnRef idx="1">
-            <a:schemeClr val="dk1"/>
-          </a:lnRef>
-          <a:fillRef idx="0">
-            <a:schemeClr val="dk1"/>
-          </a:fillRef>
-          <a:effectRef idx="0">
-            <a:schemeClr val="dk1"/>
-          </a:effectRef>
-          <a:fontRef idx="minor">
-            <a:schemeClr val="tx1"/>
-          </a:fontRef>
-        </p:style>
-      </p:cxnSp>
-      <p:cxnSp>
-        <p:nvCxnSpPr>
-          <p:cNvPr id="39" name="Straight Arrow Connector 38">
-            <a:extLst>
-              <a:ext uri="{FF2B5EF4-FFF2-40B4-BE49-F238E27FC236}">
-                <a16:creationId xmlns:a16="http://schemas.microsoft.com/office/drawing/2014/main" id="{3CFFA514-D14B-A948-AB40-1F8EA2A13B00}"/>
-              </a:ext>
-            </a:extLst>
-          </p:cNvPr>
-          <p:cNvCxnSpPr>
-            <a:cxnSpLocks/>
-          </p:cNvCxnSpPr>
-          <p:nvPr/>
-        </p:nvCxnSpPr>
-        <p:spPr>
-          <a:xfrm flipV="1">
-            <a:off x="7786080" y="852974"/>
-            <a:ext cx="0" cy="568130"/>
-          </a:xfrm>
-          <a:prstGeom prst="straightConnector1">
-            <a:avLst/>
-          </a:prstGeom>
-          <a:ln w="38100">
-            <a:tailEnd type="triangle"/>
-          </a:ln>
-        </p:spPr>
-        <p:style>
-          <a:lnRef idx="1">
-            <a:schemeClr val="dk1"/>
-          </a:lnRef>
-          <a:fillRef idx="0">
-            <a:schemeClr val="dk1"/>
-          </a:fillRef>
-          <a:effectRef idx="0">
-            <a:schemeClr val="dk1"/>
-          </a:effectRef>
-          <a:fontRef idx="minor">
-            <a:schemeClr val="tx1"/>
-          </a:fontRef>
-        </p:style>
-      </p:cxnSp>
-      <p:sp>
-        <p:nvSpPr>
-          <p:cNvPr id="40" name="TextBox 39">
-            <a:extLst>
-              <a:ext uri="{FF2B5EF4-FFF2-40B4-BE49-F238E27FC236}">
-                <a16:creationId xmlns:a16="http://schemas.microsoft.com/office/drawing/2014/main" id="{01C089D3-CA54-AB41-BFD4-CE556B55C9B2}"/>
-              </a:ext>
-            </a:extLst>
-          </p:cNvPr>
-          <p:cNvSpPr txBox="1"/>
-          <p:nvPr/>
-        </p:nvSpPr>
-        <p:spPr>
-          <a:xfrm>
-            <a:off x="7469358" y="462017"/>
-            <a:ext cx="653512" cy="369332"/>
-          </a:xfrm>
-          <a:prstGeom prst="rect">
-            <a:avLst/>
-          </a:prstGeom>
-          <a:noFill/>
-        </p:spPr>
-        <p:txBody>
-          <a:bodyPr wrap="none" rtlCol="0">
-            <a:spAutoFit/>
-          </a:bodyPr>
-          <a:lstStyle/>
-          <a:p>
-            <a:r>
-              <a:rPr lang="en-US" dirty="0"/>
-              <a:t>Read</a:t>
-            </a:r>
-          </a:p>
-        </p:txBody>
-      </p:sp>
-      <p:sp>
-        <p:nvSpPr>
-          <p:cNvPr id="41" name="TextBox 40">
-            <a:extLst>
-              <a:ext uri="{FF2B5EF4-FFF2-40B4-BE49-F238E27FC236}">
-                <a16:creationId xmlns:a16="http://schemas.microsoft.com/office/drawing/2014/main" id="{D46DFD0B-2435-194A-AC9E-D5FE3D84EEF6}"/>
-              </a:ext>
-            </a:extLst>
-          </p:cNvPr>
-          <p:cNvSpPr txBox="1"/>
-          <p:nvPr/>
-        </p:nvSpPr>
-        <p:spPr>
-          <a:xfrm>
-            <a:off x="9208218" y="434263"/>
-            <a:ext cx="706027" cy="369332"/>
-          </a:xfrm>
-          <a:prstGeom prst="rect">
-            <a:avLst/>
-          </a:prstGeom>
-          <a:noFill/>
-        </p:spPr>
-        <p:txBody>
-          <a:bodyPr wrap="none" rtlCol="0">
-            <a:spAutoFit/>
-          </a:bodyPr>
-          <a:lstStyle/>
-          <a:p>
-            <a:r>
-              <a:rPr lang="en-US" dirty="0"/>
-              <a:t>Write</a:t>
-            </a:r>
-          </a:p>
-        </p:txBody>
-      </p:sp>
-      <p:sp>
-        <p:nvSpPr>
-          <p:cNvPr id="38" name="TextBox 37">
-            <a:extLst>
-              <a:ext uri="{FF2B5EF4-FFF2-40B4-BE49-F238E27FC236}">
-                <a16:creationId xmlns:a16="http://schemas.microsoft.com/office/drawing/2014/main" id="{CDDE0C2A-7806-324F-BD36-6751C0204289}"/>
-              </a:ext>
-            </a:extLst>
-          </p:cNvPr>
-          <p:cNvSpPr txBox="1"/>
-          <p:nvPr/>
-        </p:nvSpPr>
-        <p:spPr>
-          <a:xfrm>
-            <a:off x="8418579" y="6447147"/>
-            <a:ext cx="3803605" cy="584775"/>
-          </a:xfrm>
-          <a:prstGeom prst="rect">
-            <a:avLst/>
-          </a:prstGeom>
-          <a:noFill/>
-        </p:spPr>
-        <p:txBody>
-          <a:bodyPr wrap="none" rtlCol="0">
-            <a:spAutoFit/>
-          </a:bodyPr>
-          <a:lstStyle/>
-          <a:p>
-            <a:r>
-              <a:rPr lang="en-US" sz="1400" dirty="0"/>
-              <a:t>02- </a:t>
-            </a:r>
-            <a:r>
-              <a:rPr lang="en-US" sz="1400" dirty="0">
-                <a:solidFill>
-                  <a:schemeClr val="accent1">
-                    <a:lumMod val="50000"/>
-                  </a:schemeClr>
-                </a:solidFill>
-                <a:highlight>
-                  <a:srgbClr val="FFFF00"/>
-                </a:highlight>
-              </a:rPr>
-              <a:t>Malte sends 1 BTC to Martin-</a:t>
-            </a:r>
-            <a:r>
-              <a:rPr lang="en-US" sz="1400" dirty="0">
-                <a:solidFill>
-                  <a:srgbClr val="C00000"/>
-                </a:solidFill>
-              </a:rPr>
-              <a:t>df3mfssfak7dfd</a:t>
-            </a:r>
-          </a:p>
-          <a:p>
-            <a:endParaRPr lang="en-US" dirty="0"/>
+            <a:r>
+              <a:rPr lang="en-US"/>
+              <a:t>Best</a:t>
+            </a:r>
           </a:p>
         </p:txBody>
       </p:sp>
     </p:spTree>
     <p:extLst>
       <p:ext uri="{BB962C8B-B14F-4D97-AF65-F5344CB8AC3E}">
-        <p14:creationId xmlns:p14="http://schemas.microsoft.com/office/powerpoint/2010/main" val="3493101456"/>
+        <p14:creationId xmlns:p14="http://schemas.microsoft.com/office/powerpoint/2010/main" val="2522971255"/>
       </p:ext>
     </p:extLst>
   </p:cSld>
@@ -6967,7 +8121,7 @@
           <p:cNvPr id="2" name="TextBox 1">
             <a:extLst>
               <a:ext uri="{FF2B5EF4-FFF2-40B4-BE49-F238E27FC236}">
-                <a16:creationId xmlns:a16="http://schemas.microsoft.com/office/drawing/2014/main" id="{891D3C3A-6600-6447-9C42-BB332A743826}"/>
+                <a16:creationId xmlns:a16="http://schemas.microsoft.com/office/drawing/2014/main" id="{A265FDC2-6E9C-698D-39CF-DB1EA17648BE}"/>
               </a:ext>
             </a:extLst>
           </p:cNvPr>
@@ -6976,8 +8130,8 @@
         </p:nvSpPr>
         <p:spPr>
           <a:xfrm>
-            <a:off x="1" y="120415"/>
-            <a:ext cx="3769360" cy="523220"/>
+            <a:off x="0" y="0"/>
+            <a:ext cx="3296653" cy="523220"/>
           </a:xfrm>
           <a:prstGeom prst="rect">
             <a:avLst/>
@@ -6992,7 +8146,7 @@
           <a:p>
             <a:r>
               <a:rPr lang="en-US" sz="2800" b="1"/>
-              <a:t>Best Hardware Wallet</a:t>
+              <a:t>Some Good Wallets</a:t>
             </a:r>
           </a:p>
         </p:txBody>
@@ -7002,7 +8156,7 @@
           <p:cNvPr id="3" name="TextBox 2">
             <a:extLst>
               <a:ext uri="{FF2B5EF4-FFF2-40B4-BE49-F238E27FC236}">
-                <a16:creationId xmlns:a16="http://schemas.microsoft.com/office/drawing/2014/main" id="{E0AB3421-15B2-F64D-B4D9-A2655D111DC8}"/>
+                <a16:creationId xmlns:a16="http://schemas.microsoft.com/office/drawing/2014/main" id="{4D115049-B40A-32D5-AD94-5F5FC99B21A4}"/>
               </a:ext>
             </a:extLst>
           </p:cNvPr>
@@ -7011,8 +8165,8 @@
         </p:nvSpPr>
         <p:spPr>
           <a:xfrm>
-            <a:off x="3971716" y="1717899"/>
-            <a:ext cx="4248567" cy="2893100"/>
+            <a:off x="637673" y="757990"/>
+            <a:ext cx="4728410" cy="2769989"/>
           </a:xfrm>
           <a:prstGeom prst="rect">
             <a:avLst/>
@@ -7025,132 +8179,208 @@
           </a:bodyPr>
           <a:lstStyle/>
           <a:p>
-            <a:pPr marL="380990" indent="-380990">
+            <a:pPr marL="285750" indent="-285750">
               <a:buFont typeface="Arial" panose="020B0604020202020204" pitchFamily="34" charset="0"/>
               <a:buChar char="•"/>
             </a:pPr>
             <a:r>
-              <a:rPr lang="en-US" sz="1400"/>
-              <a:t>Ledger Noan X - </a:t>
+              <a:rPr lang="en-US" b="1">
+                <a:solidFill>
+                  <a:srgbClr val="FF0000"/>
+                </a:solidFill>
+              </a:rPr>
+              <a:t>Exodus</a:t>
+            </a:r>
+            <a:r>
+              <a:rPr lang="en-US"/>
+              <a:t> – free Bitcoin and 180+ crypto</a:t>
+            </a:r>
+            <a:br>
+              <a:rPr lang="en-US"/>
+            </a:br>
+            <a:r>
+              <a:rPr lang="en-US" sz="1400"/>
+              <a:t>Desktop, Mobile and </a:t>
+            </a:r>
+            <a:r>
+              <a:rPr lang="en-US" sz="1400" b="1">
+                <a:solidFill>
+                  <a:srgbClr val="00B050"/>
+                </a:solidFill>
+              </a:rPr>
+              <a:t>hardware</a:t>
+            </a:r>
+            <a:r>
+              <a:rPr lang="en-US" sz="1400"/>
+              <a:t> crypto wallets</a:t>
+            </a:r>
+            <a:br>
+              <a:rPr lang="en-US" sz="1400"/>
+            </a:br>
+            <a:r>
+              <a:rPr lang="en-US" sz="1400"/>
+              <a:t> - </a:t>
             </a:r>
             <a:r>
               <a:rPr lang="en-US" sz="1400">
                 <a:hlinkClick r:id="rId2"/>
               </a:rPr>
-              <a:t>https://www.ledger.com</a:t>
-            </a:r>
-            <a:r>
-              <a:rPr lang="en-US" sz="1400"/>
-              <a:t> –</a:t>
-            </a:r>
-            <a:br>
-              <a:rPr lang="en-US" sz="1400"/>
-            </a:br>
-            <a:br>
-              <a:rPr lang="en-US" sz="1400"/>
-            </a:br>
-            <a:r>
-              <a:rPr lang="en-US" sz="1400"/>
-              <a:t> </a:t>
-            </a:r>
-          </a:p>
-          <a:p>
+              <a:t>https://www.exodus.com</a:t>
+            </a:r>
             <a:endParaRPr lang="en-US" sz="1400"/>
           </a:p>
           <a:p>
-            <a:pPr marL="380990" indent="-380990">
+            <a:pPr marL="285750" indent="-285750">
               <a:buFont typeface="Arial" panose="020B0604020202020204" pitchFamily="34" charset="0"/>
               <a:buChar char="•"/>
             </a:pPr>
-            <a:r>
-              <a:rPr lang="en-US" sz="1400"/>
-              <a:t>Trezor - </a:t>
+            <a:endParaRPr lang="en-US"/>
+          </a:p>
+          <a:p>
+            <a:pPr marL="285750" indent="-285750">
+              <a:buFont typeface="Arial" panose="020B0604020202020204" pitchFamily="34" charset="0"/>
+              <a:buChar char="•"/>
+            </a:pPr>
+            <a:r>
+              <a:rPr lang="en-US" b="1">
+                <a:solidFill>
+                  <a:srgbClr val="FF0000"/>
+                </a:solidFill>
+              </a:rPr>
+              <a:t>Ledger Nano X</a:t>
+            </a:r>
+            <a:r>
+              <a:rPr lang="en-US"/>
+              <a:t> - $150, </a:t>
+            </a:r>
+            <a:r>
+              <a:rPr lang="en-US" b="1">
+                <a:solidFill>
+                  <a:srgbClr val="00B050"/>
+                </a:solidFill>
+              </a:rPr>
+              <a:t>hardware wallet</a:t>
+            </a:r>
+            <a:br>
+              <a:rPr lang="en-US"/>
+            </a:br>
+            <a:r>
+              <a:rPr lang="en-US" sz="1400"/>
+              <a:t>1000+ coins and tokens, </a:t>
+            </a:r>
+            <a:br>
+              <a:rPr lang="en-US" sz="1400"/>
+            </a:br>
+            <a:r>
+              <a:rPr lang="en-US" sz="1400"/>
+              <a:t> - </a:t>
             </a:r>
             <a:r>
               <a:rPr lang="en-US" sz="1400">
                 <a:hlinkClick r:id="rId3"/>
               </a:rPr>
-              <a:t>https://trezor.io</a:t>
-            </a:r>
-            <a:r>
-              <a:rPr lang="en-US" sz="1400"/>
-              <a:t> – </a:t>
-            </a:r>
-          </a:p>
-          <a:p>
-            <a:endParaRPr lang="en-US" sz="1400"/>
-          </a:p>
-          <a:p>
-            <a:endParaRPr lang="en-US" sz="1400"/>
-          </a:p>
-          <a:p>
-            <a:endParaRPr lang="en-US" sz="1400"/>
-          </a:p>
-          <a:p>
-            <a:pPr marL="380990" indent="-380990">
+              <a:t>https://www.ledger.com</a:t>
+            </a:r>
+            <a:br>
+              <a:rPr lang="en-US"/>
+            </a:br>
+            <a:endParaRPr lang="en-US"/>
+          </a:p>
+          <a:p>
+            <a:pPr marL="285750" indent="-285750">
               <a:buFont typeface="Arial" panose="020B0604020202020204" pitchFamily="34" charset="0"/>
               <a:buChar char="•"/>
             </a:pPr>
             <a:r>
-              <a:rPr lang="en-US" sz="1400"/>
-              <a:t>Arculus - </a:t>
+              <a:rPr lang="en-US" b="1">
+                <a:solidFill>
+                  <a:srgbClr val="FF0000"/>
+                </a:solidFill>
+              </a:rPr>
+              <a:t>Trezor One</a:t>
+            </a:r>
+            <a:r>
+              <a:rPr lang="en-US"/>
+              <a:t> – open source </a:t>
+            </a:r>
+            <a:r>
+              <a:rPr lang="en-US" b="1">
+                <a:solidFill>
+                  <a:srgbClr val="00B050"/>
+                </a:solidFill>
+              </a:rPr>
+              <a:t>hardware wallet</a:t>
+            </a:r>
+            <a:r>
+              <a:rPr lang="en-US"/>
+              <a:t> </a:t>
+            </a:r>
+            <a:br>
+              <a:rPr lang="en-US"/>
+            </a:br>
+            <a:r>
+              <a:rPr lang="en-US" sz="1400"/>
+              <a:t>doesn't support XMR (Monero), XRP (Ripple), EOS</a:t>
+            </a:r>
+            <a:br>
+              <a:rPr lang="en-US" sz="1400"/>
+            </a:br>
+            <a:r>
+              <a:rPr lang="en-US" sz="1400"/>
+              <a:t> - </a:t>
             </a:r>
             <a:r>
               <a:rPr lang="en-US" sz="1400">
                 <a:hlinkClick r:id="rId4"/>
               </a:rPr>
-              <a:t>https://www.getarculus.com</a:t>
-            </a:r>
-            <a:r>
-              <a:rPr lang="en-US" sz="1400"/>
-              <a:t> – </a:t>
-            </a:r>
-          </a:p>
-          <a:p>
-            <a:pPr marL="380990" indent="-380990">
-              <a:buFont typeface="Arial" panose="020B0604020202020204" pitchFamily="34" charset="0"/>
-              <a:buChar char="•"/>
-            </a:pPr>
+              <a:t>https://trezor.io</a:t>
+            </a:r>
             <a:endParaRPr lang="en-US" sz="1400"/>
-          </a:p>
-          <a:p>
-            <a:pPr marL="380990" indent="-380990">
-              <a:buFont typeface="Arial" panose="020B0604020202020204" pitchFamily="34" charset="0"/>
-              <a:buChar char="•"/>
-            </a:pPr>
-            <a:endParaRPr lang="en-US" sz="1400"/>
-          </a:p>
-          <a:p>
-            <a:endParaRPr lang="en-US" sz="1400"/>
-          </a:p>
-          <a:p>
-            <a:pPr marL="380990" indent="-380990">
-              <a:buFont typeface="Arial" panose="020B0604020202020204" pitchFamily="34" charset="0"/>
-              <a:buChar char="•"/>
-            </a:pPr>
-            <a:r>
-              <a:rPr lang="en-US" sz="1400"/>
-              <a:t>SafePal - </a:t>
-            </a:r>
-            <a:r>
-              <a:rPr lang="en-US" sz="1400">
-                <a:hlinkClick r:id="rId5"/>
-              </a:rPr>
-              <a:t>https://safepal.io</a:t>
-            </a:r>
-            <a:r>
-              <a:rPr lang="en-US" sz="1400"/>
-              <a:t> - </a:t>
-            </a:r>
           </a:p>
         </p:txBody>
       </p:sp>
       <p:pic>
         <p:nvPicPr>
-          <p:cNvPr id="4" name="Picture 3">
+          <p:cNvPr id="6" name="Picture 5">
             <a:extLst>
               <a:ext uri="{FF2B5EF4-FFF2-40B4-BE49-F238E27FC236}">
-                <a16:creationId xmlns:a16="http://schemas.microsoft.com/office/drawing/2014/main" id="{442092FA-C9EC-9A42-8AF8-4A2E15786CF4}"/>
+                <a16:creationId xmlns:a16="http://schemas.microsoft.com/office/drawing/2014/main" id="{4AC3E2B6-86C0-6814-7881-05E5AB36A71D}"/>
+              </a:ext>
+            </a:extLst>
+          </p:cNvPr>
+          <p:cNvPicPr>
+            <a:picLocks noChangeAspect="1"/>
+          </p:cNvPicPr>
+          <p:nvPr/>
+        </p:nvPicPr>
+        <p:blipFill>
+          <a:blip r:embed="rId5" cstate="email">
+            <a:extLst>
+              <a:ext uri="{28A0092B-C50C-407E-A947-70E740481C1C}">
+                <a14:useLocalDpi xmlns:a14="http://schemas.microsoft.com/office/drawing/2010/main"/>
+              </a:ext>
+            </a:extLst>
+          </a:blip>
+          <a:stretch>
+            <a:fillRect/>
+          </a:stretch>
+        </p:blipFill>
+        <p:spPr>
+          <a:xfrm>
+            <a:off x="8895349" y="523220"/>
+            <a:ext cx="2401113" cy="692484"/>
+          </a:xfrm>
+          <a:prstGeom prst="rect">
+            <a:avLst/>
+          </a:prstGeom>
+        </p:spPr>
+      </p:pic>
+      <p:pic>
+        <p:nvPicPr>
+          <p:cNvPr id="7" name="Picture 6">
+            <a:extLst>
+              <a:ext uri="{FF2B5EF4-FFF2-40B4-BE49-F238E27FC236}">
+                <a16:creationId xmlns:a16="http://schemas.microsoft.com/office/drawing/2014/main" id="{E00C420A-26B5-5C5A-6AEB-00BBAAC54133}"/>
               </a:ext>
             </a:extLst>
           </p:cNvPr>
@@ -7172,9 +8402,9 @@
           </a:stretch>
         </p:blipFill>
         <p:spPr>
-          <a:xfrm rot="5400000">
-            <a:off x="9128242" y="562388"/>
-            <a:ext cx="1258880" cy="2574722"/>
+          <a:xfrm>
+            <a:off x="7793217" y="1255987"/>
+            <a:ext cx="1263613" cy="2322095"/>
           </a:xfrm>
           <a:prstGeom prst="rect">
             <a:avLst/>
@@ -7183,10 +8413,10 @@
       </p:pic>
       <p:pic>
         <p:nvPicPr>
-          <p:cNvPr id="5" name="Picture 4">
+          <p:cNvPr id="8" name="Picture 7">
             <a:extLst>
               <a:ext uri="{FF2B5EF4-FFF2-40B4-BE49-F238E27FC236}">
-                <a16:creationId xmlns:a16="http://schemas.microsoft.com/office/drawing/2014/main" id="{AC926C88-FAFB-8944-BB3B-C61F2995F0F2}"/>
+                <a16:creationId xmlns:a16="http://schemas.microsoft.com/office/drawing/2014/main" id="{DFBABB54-1997-AE0A-4093-AD9AA2D8EC1A}"/>
               </a:ext>
             </a:extLst>
           </p:cNvPr>
@@ -7209,110 +8439,342 @@
         </p:blipFill>
         <p:spPr>
           <a:xfrm>
-            <a:off x="2563438" y="2058425"/>
-            <a:ext cx="1041095" cy="1676568"/>
+            <a:off x="6478255" y="2632179"/>
+            <a:ext cx="1009462" cy="1891807"/>
           </a:xfrm>
           <a:prstGeom prst="rect">
             <a:avLst/>
           </a:prstGeom>
         </p:spPr>
       </p:pic>
-      <p:pic>
-        <p:nvPicPr>
-          <p:cNvPr id="1026" name="Picture 2" descr="Cold Storage Wallet to Secure Your Crypto | Meet Arculus">
+      <p:sp>
+        <p:nvSpPr>
+          <p:cNvPr id="4" name="TextBox 3">
             <a:extLst>
               <a:ext uri="{FF2B5EF4-FFF2-40B4-BE49-F238E27FC236}">
-                <a16:creationId xmlns:a16="http://schemas.microsoft.com/office/drawing/2014/main" id="{77FFEF9A-863D-624D-9498-4BB97AC6CAF3}"/>
+                <a16:creationId xmlns:a16="http://schemas.microsoft.com/office/drawing/2014/main" id="{3BC6F632-8098-72D5-EB09-D91F6B9927F8}"/>
               </a:ext>
             </a:extLst>
           </p:cNvPr>
-          <p:cNvPicPr>
-            <a:picLocks noChangeAspect="1" noChangeArrowheads="1"/>
-          </p:cNvPicPr>
+          <p:cNvSpPr txBox="1"/>
           <p:nvPr/>
-        </p:nvPicPr>
-        <p:blipFill rotWithShape="1">
-          <a:blip r:embed="rId8" cstate="email">
-            <a:extLst>
-              <a:ext uri="{28A0092B-C50C-407E-A947-70E740481C1C}">
-                <a14:useLocalDpi xmlns:a14="http://schemas.microsoft.com/office/drawing/2010/main"/>
-              </a:ext>
-            </a:extLst>
-          </a:blip>
-          <a:srcRect/>
-          <a:stretch/>
-        </p:blipFill>
-        <p:spPr bwMode="auto">
-          <a:xfrm>
-            <a:off x="8114721" y="2896709"/>
-            <a:ext cx="1741765" cy="1450240"/>
+        </p:nvSpPr>
+        <p:spPr>
+          <a:xfrm>
+            <a:off x="637672" y="4264008"/>
+            <a:ext cx="4728411" cy="1446550"/>
           </a:xfrm>
           <a:prstGeom prst="rect">
             <a:avLst/>
           </a:prstGeom>
           <a:noFill/>
-          <a:extLst>
-            <a:ext uri="{909E8E84-426E-40DD-AFC4-6F175D3DCCD1}">
-              <a14:hiddenFill xmlns:a14="http://schemas.microsoft.com/office/drawing/2010/main">
+        </p:spPr>
+        <p:txBody>
+          <a:bodyPr wrap="square" rtlCol="0">
+            <a:spAutoFit/>
+          </a:bodyPr>
+          <a:lstStyle/>
+          <a:p>
+            <a:r>
+              <a:rPr lang="en-US" b="1">
                 <a:solidFill>
-                  <a:srgbClr val="FFFFFF"/>
+                  <a:srgbClr val="00B050"/>
                 </a:solidFill>
-              </a14:hiddenFill>
-            </a:ext>
-          </a:extLst>
-        </p:spPr>
-      </p:pic>
-      <p:pic>
-        <p:nvPicPr>
-          <p:cNvPr id="1028" name="Picture 4" descr="SafePal Crypto Hardware Wallet(Official) | The best wallet to protect your  assets">
-            <a:extLst>
-              <a:ext uri="{FF2B5EF4-FFF2-40B4-BE49-F238E27FC236}">
-                <a16:creationId xmlns:a16="http://schemas.microsoft.com/office/drawing/2014/main" id="{26AC31D8-2196-A043-BAFF-554D7C635991}"/>
-              </a:ext>
-            </a:extLst>
-          </p:cNvPr>
-          <p:cNvPicPr>
-            <a:picLocks noChangeAspect="1" noChangeArrowheads="1"/>
-          </p:cNvPicPr>
-          <p:nvPr/>
-        </p:nvPicPr>
-        <p:blipFill>
-          <a:blip r:embed="rId9" cstate="email">
-            <a:extLst>
-              <a:ext uri="{28A0092B-C50C-407E-A947-70E740481C1C}">
-                <a14:useLocalDpi xmlns:a14="http://schemas.microsoft.com/office/drawing/2010/main"/>
-              </a:ext>
-            </a:extLst>
-          </a:blip>
-          <a:srcRect/>
-          <a:stretch>
-            <a:fillRect/>
-          </a:stretch>
-        </p:blipFill>
-        <p:spPr bwMode="auto">
-          <a:xfrm>
-            <a:off x="2142224" y="4056480"/>
-            <a:ext cx="1883521" cy="1450240"/>
-          </a:xfrm>
-          <a:prstGeom prst="rect">
-            <a:avLst/>
-          </a:prstGeom>
-          <a:noFill/>
-          <a:extLst>
-            <a:ext uri="{909E8E84-426E-40DD-AFC4-6F175D3DCCD1}">
-              <a14:hiddenFill xmlns:a14="http://schemas.microsoft.com/office/drawing/2010/main">
+              </a:rPr>
+              <a:t>Exchange-hosted wallets:</a:t>
+            </a:r>
+          </a:p>
+          <a:p>
+            <a:pPr marL="285750" indent="-285750">
+              <a:buFont typeface="Arial" panose="020B0604020202020204" pitchFamily="34" charset="0"/>
+              <a:buChar char="•"/>
+            </a:pPr>
+            <a:r>
+              <a:rPr lang="en-US" sz="1400" b="1">
                 <a:solidFill>
-                  <a:srgbClr val="FFFFFF"/>
+                  <a:srgbClr val="00B050"/>
                 </a:solidFill>
-              </a14:hiddenFill>
-            </a:ext>
-          </a:extLst>
-        </p:spPr>
-      </p:pic>
+              </a:rPr>
+              <a:t>Coinbase</a:t>
+            </a:r>
+            <a:r>
+              <a:rPr lang="en-US" sz="1400"/>
+              <a:t> (50+ cryptos, 90 Mln users)</a:t>
+            </a:r>
+            <a:br>
+              <a:rPr lang="en-US" sz="1400"/>
+            </a:br>
+            <a:r>
+              <a:rPr lang="en-US" sz="1400"/>
+              <a:t>- </a:t>
+            </a:r>
+            <a:r>
+              <a:rPr lang="en-US" sz="1400">
+                <a:hlinkClick r:id="rId8"/>
+              </a:rPr>
+              <a:t>https://www.coinbase.com</a:t>
+            </a:r>
+            <a:endParaRPr lang="en-US" sz="1400"/>
+          </a:p>
+          <a:p>
+            <a:pPr marL="285750" indent="-285750">
+              <a:buFont typeface="Arial" panose="020B0604020202020204" pitchFamily="34" charset="0"/>
+              <a:buChar char="•"/>
+            </a:pPr>
+            <a:r>
+              <a:rPr lang="en-US" sz="1400" b="1">
+                <a:solidFill>
+                  <a:srgbClr val="00B050"/>
+                </a:solidFill>
+              </a:rPr>
+              <a:t>KuCoin</a:t>
+            </a:r>
+            <a:r>
+              <a:rPr lang="en-US" sz="1400"/>
+              <a:t> (380+ cryptos, 10+ Mln users)</a:t>
+            </a:r>
+            <a:br>
+              <a:rPr lang="en-US" sz="1400"/>
+            </a:br>
+            <a:r>
+              <a:rPr lang="en-US" sz="1400" b="1">
+                <a:solidFill>
+                  <a:srgbClr val="00B050"/>
+                </a:solidFill>
+              </a:rPr>
+              <a:t>KuCoin</a:t>
+            </a:r>
+            <a:r>
+              <a:rPr lang="en-US" sz="1400"/>
+              <a:t> isn’t licensed to operate in the US</a:t>
+            </a:r>
+            <a:br>
+              <a:rPr lang="en-US" sz="1400"/>
+            </a:br>
+            <a:r>
+              <a:rPr lang="en-US" sz="1400"/>
+              <a:t>- </a:t>
+            </a:r>
+            <a:r>
+              <a:rPr lang="en-US" sz="1400">
+                <a:hlinkClick r:id="rId9"/>
+              </a:rPr>
+              <a:t>https://www.kucoin.com</a:t>
+            </a:r>
+            <a:endParaRPr lang="en-US" sz="1400"/>
+          </a:p>
+        </p:txBody>
+      </p:sp>
     </p:spTree>
     <p:extLst>
       <p:ext uri="{BB962C8B-B14F-4D97-AF65-F5344CB8AC3E}">
-        <p14:creationId xmlns:p14="http://schemas.microsoft.com/office/powerpoint/2010/main" val="4212851956"/>
+        <p14:creationId xmlns:p14="http://schemas.microsoft.com/office/powerpoint/2010/main" val="2741948107"/>
+      </p:ext>
+    </p:extLst>
+  </p:cSld>
+  <p:clrMapOvr>
+    <a:masterClrMapping/>
+  </p:clrMapOvr>
+</p:sld>
+</file>
+
+<file path=ppt/slides/slide9.xml><?xml version="1.0" encoding="utf-8"?>
+<p:sld xmlns:a="http://schemas.openxmlformats.org/drawingml/2006/main" xmlns:r="http://schemas.openxmlformats.org/officeDocument/2006/relationships" xmlns:p="http://schemas.openxmlformats.org/presentationml/2006/main">
+  <p:cSld>
+    <p:spTree>
+      <p:nvGrpSpPr>
+        <p:cNvPr id="1" name=""/>
+        <p:cNvGrpSpPr/>
+        <p:nvPr/>
+      </p:nvGrpSpPr>
+      <p:grpSpPr>
+        <a:xfrm>
+          <a:off x="0" y="0"/>
+          <a:ext cx="0" cy="0"/>
+          <a:chOff x="0" y="0"/>
+          <a:chExt cx="0" cy="0"/>
+        </a:xfrm>
+      </p:grpSpPr>
+      <p:sp>
+        <p:nvSpPr>
+          <p:cNvPr id="2" name="TextBox 1">
+            <a:extLst>
+              <a:ext uri="{FF2B5EF4-FFF2-40B4-BE49-F238E27FC236}">
+                <a16:creationId xmlns:a16="http://schemas.microsoft.com/office/drawing/2014/main" id="{360843F1-39FC-B446-BCF9-38C04967543B}"/>
+              </a:ext>
+            </a:extLst>
+          </p:cNvPr>
+          <p:cNvSpPr txBox="1"/>
+          <p:nvPr/>
+        </p:nvSpPr>
+        <p:spPr>
+          <a:xfrm>
+            <a:off x="2" y="1"/>
+            <a:ext cx="4841629" cy="523220"/>
+          </a:xfrm>
+          <a:prstGeom prst="rect">
+            <a:avLst/>
+          </a:prstGeom>
+          <a:noFill/>
+        </p:spPr>
+        <p:txBody>
+          <a:bodyPr wrap="square" rtlCol="0">
+            <a:spAutoFit/>
+          </a:bodyPr>
+          <a:lstStyle/>
+          <a:p>
+            <a:r>
+              <a:rPr lang="en-US" sz="2800" b="1"/>
+              <a:t>Wallet – address, keys, signing</a:t>
+            </a:r>
+          </a:p>
+        </p:txBody>
+      </p:sp>
+      <p:sp>
+        <p:nvSpPr>
+          <p:cNvPr id="5" name="TextBox 4">
+            <a:extLst>
+              <a:ext uri="{FF2B5EF4-FFF2-40B4-BE49-F238E27FC236}">
+                <a16:creationId xmlns:a16="http://schemas.microsoft.com/office/drawing/2014/main" id="{817DA55C-C2D6-A2D4-DB7A-8AA34B531775}"/>
+              </a:ext>
+            </a:extLst>
+          </p:cNvPr>
+          <p:cNvSpPr txBox="1"/>
+          <p:nvPr/>
+        </p:nvSpPr>
+        <p:spPr>
+          <a:xfrm>
+            <a:off x="185351" y="1025611"/>
+            <a:ext cx="11318789" cy="4401205"/>
+          </a:xfrm>
+          <a:prstGeom prst="rect">
+            <a:avLst/>
+          </a:prstGeom>
+          <a:noFill/>
+        </p:spPr>
+        <p:txBody>
+          <a:bodyPr wrap="square" rtlCol="0">
+            <a:spAutoFit/>
+          </a:bodyPr>
+          <a:lstStyle/>
+          <a:p>
+            <a:r>
+              <a:rPr lang="en-US" sz="1400"/>
+              <a:t>Bitcoin address and keys:</a:t>
+            </a:r>
+          </a:p>
+          <a:p>
+            <a:r>
+              <a:rPr lang="en-US" sz="1400"/>
+              <a:t>.. https://www.dummies.com/article/business-careers-money/personal-finance/cryptocurrency/bitcoin-public-private-keys-223627/</a:t>
+            </a:r>
+          </a:p>
+          <a:p>
+            <a:endParaRPr lang="en-US" sz="1400"/>
+          </a:p>
+          <a:p>
+            <a:r>
+              <a:rPr lang="en-US" sz="1400"/>
+              <a:t>Explanation: </a:t>
+            </a:r>
+          </a:p>
+          <a:p>
+            <a:r>
+              <a:rPr lang="en-US" sz="1400"/>
+              <a:t>.. private key</a:t>
+            </a:r>
+          </a:p>
+          <a:p>
+            <a:r>
+              <a:rPr lang="en-US" sz="1400"/>
+              <a:t>.. public key (256 bits)</a:t>
+            </a:r>
+          </a:p>
+          <a:p>
+            <a:r>
+              <a:rPr lang="en-US" sz="1400"/>
+              <a:t>.. wallet address (hashed public key, 160 bits)</a:t>
+            </a:r>
+          </a:p>
+          <a:p>
+            <a:endParaRPr lang="en-US" sz="1400"/>
+          </a:p>
+          <a:p>
+            <a:r>
+              <a:rPr lang="en-US" sz="1400"/>
+              <a:t>Signing a message with your bitcoin address</a:t>
+            </a:r>
+          </a:p>
+          <a:p>
+            <a:r>
+              <a:rPr lang="en-US" sz="1400"/>
+              <a:t>.. https://academy.bit2me.com/en/firmar-mensajes-bitcoin/</a:t>
+            </a:r>
+          </a:p>
+          <a:p>
+            <a:endParaRPr lang="en-US" sz="1400"/>
+          </a:p>
+          <a:p>
+            <a:r>
+              <a:rPr lang="en-US" sz="1400"/>
+              <a:t>Most of the encryption in modern cryptocurrencies are built on elliptic curve cryptography rather than RSA, </a:t>
+            </a:r>
+          </a:p>
+          <a:p>
+            <a:r>
+              <a:rPr lang="en-US" sz="1400"/>
+              <a:t>especially in the generation of signatures in bitcoin which requires ECDSA.</a:t>
+            </a:r>
+          </a:p>
+          <a:p>
+            <a:r>
+              <a:rPr lang="en-US" sz="1400"/>
+              <a:t>.. https://www.forbes.com/sites/rogerhuang/2020/12/21/heres-why-quantum-computing-will-not-break-cryptocurrencies/?sh=6d34a72a167b</a:t>
+            </a:r>
+          </a:p>
+          <a:p>
+            <a:endParaRPr lang="en-US" sz="1400"/>
+          </a:p>
+          <a:p>
+            <a:r>
+              <a:rPr lang="en-US" sz="1400" dirty="0"/>
+              <a:t>Elliptical Digital Signature Algorithm</a:t>
+            </a:r>
+            <a:endParaRPr lang="en-US" sz="1400"/>
+          </a:p>
+          <a:p>
+            <a:r>
+              <a:rPr lang="en-US" sz="1400"/>
+              <a:t>.. </a:t>
+            </a:r>
+            <a:r>
+              <a:rPr lang="en-US" sz="1400" dirty="0"/>
+              <a:t>https://en.wikipedia.org/wiki/</a:t>
+            </a:r>
+            <a:r>
+              <a:rPr lang="en-US" sz="1400" dirty="0" err="1"/>
+              <a:t>Elliptic_Curve_Digital_Signature_Algorithm</a:t>
+            </a:r>
+            <a:endParaRPr lang="en-US" sz="1400" dirty="0"/>
+          </a:p>
+          <a:p>
+            <a:endParaRPr lang="en-US" sz="1400"/>
+          </a:p>
+          <a:p>
+            <a:r>
+              <a:rPr lang="en-US" sz="1400"/>
+              <a:t>”Burning Coins”</a:t>
+            </a:r>
+          </a:p>
+          <a:p>
+            <a:endParaRPr lang="en-US" sz="1400"/>
+          </a:p>
+        </p:txBody>
+      </p:sp>
+    </p:spTree>
+    <p:extLst>
+      <p:ext uri="{BB962C8B-B14F-4D97-AF65-F5344CB8AC3E}">
+        <p14:creationId xmlns:p14="http://schemas.microsoft.com/office/powerpoint/2010/main" val="1027086850"/>
       </p:ext>
     </p:extLst>
   </p:cSld>

--- a/crypto_07_wallets.pptx
+++ b/crypto_07_wallets.pptx
@@ -17,7 +17,7 @@
     <p:sldId id="266" r:id="rId8"/>
     <p:sldId id="318" r:id="rId9"/>
     <p:sldId id="281" r:id="rId10"/>
-    <p:sldId id="264" r:id="rId11"/>
+    <p:sldId id="322" r:id="rId11"/>
     <p:sldId id="283" r:id="rId12"/>
   </p:sldIdLst>
   <p:sldSz cx="12192000" cy="6858000"/>
@@ -3627,6 +3627,65 @@
           </a:p>
         </p:txBody>
       </p:sp>
+      <p:sp>
+        <p:nvSpPr>
+          <p:cNvPr id="4" name="TextBox 3">
+            <a:extLst>
+              <a:ext uri="{FF2B5EF4-FFF2-40B4-BE49-F238E27FC236}">
+                <a16:creationId xmlns:a16="http://schemas.microsoft.com/office/drawing/2014/main" id="{52F0BB38-6561-1837-4294-AD39B469CCFD}"/>
+              </a:ext>
+            </a:extLst>
+          </p:cNvPr>
+          <p:cNvSpPr txBox="1"/>
+          <p:nvPr/>
+        </p:nvSpPr>
+        <p:spPr>
+          <a:xfrm>
+            <a:off x="4004153" y="4328610"/>
+            <a:ext cx="4183693" cy="923330"/>
+          </a:xfrm>
+          <a:prstGeom prst="rect">
+            <a:avLst/>
+          </a:prstGeom>
+          <a:noFill/>
+        </p:spPr>
+        <p:txBody>
+          <a:bodyPr wrap="square" rtlCol="0">
+            <a:spAutoFit/>
+          </a:bodyPr>
+          <a:lstStyle/>
+          <a:p>
+            <a:r>
+              <a:rPr lang="en-US">
+                <a:solidFill>
+                  <a:srgbClr val="00B0F0"/>
+                </a:solidFill>
+              </a:rPr>
+              <a:t>"The only thing that ever gets kept in your </a:t>
+            </a:r>
+          </a:p>
+          <a:p>
+            <a:r>
+              <a:rPr lang="en-US">
+                <a:solidFill>
+                  <a:srgbClr val="00B0F0"/>
+                </a:solidFill>
+              </a:rPr>
+              <a:t>hardware / cryptocurrency wallet, </a:t>
+            </a:r>
+          </a:p>
+          <a:p>
+            <a:r>
+              <a:rPr lang="en-US">
+                <a:solidFill>
+                  <a:srgbClr val="00B0F0"/>
+                </a:solidFill>
+              </a:rPr>
+              <a:t>is your private key"</a:t>
+            </a:r>
+          </a:p>
+        </p:txBody>
+      </p:sp>
     </p:spTree>
     <p:extLst>
       <p:ext uri="{BB962C8B-B14F-4D97-AF65-F5344CB8AC3E}">
@@ -3659,38 +3718,158 @@
       </p:grpSpPr>
       <p:sp>
         <p:nvSpPr>
-          <p:cNvPr id="2" name="Title 1">
+          <p:cNvPr id="3" name="TextBox 2">
             <a:extLst>
               <a:ext uri="{FF2B5EF4-FFF2-40B4-BE49-F238E27FC236}">
-                <a16:creationId xmlns:a16="http://schemas.microsoft.com/office/drawing/2014/main" id="{59CD814F-0488-4942-8BF6-DC490A8C6AA1}"/>
+                <a16:creationId xmlns:a16="http://schemas.microsoft.com/office/drawing/2014/main" id="{5E38D92C-1DE3-24D6-2F68-18B06740579F}"/>
               </a:ext>
             </a:extLst>
           </p:cNvPr>
-          <p:cNvSpPr>
-            <a:spLocks noGrp="1"/>
-          </p:cNvSpPr>
-          <p:nvPr>
-            <p:ph type="title"/>
-          </p:nvPr>
-        </p:nvSpPr>
-        <p:spPr/>
-        <p:txBody>
-          <a:bodyPr/>
-          <a:lstStyle/>
-          <a:p>
-            <a:r>
-              <a:rPr lang="en-US" dirty="0"/>
-              <a:t>2. Public vs Private Key</a:t>
+          <p:cNvSpPr txBox="1"/>
+          <p:nvPr/>
+        </p:nvSpPr>
+        <p:spPr>
+          <a:xfrm>
+            <a:off x="50440" y="546278"/>
+            <a:ext cx="5862917" cy="2154436"/>
+          </a:xfrm>
+          <a:prstGeom prst="rect">
+            <a:avLst/>
+          </a:prstGeom>
+          <a:solidFill>
+            <a:schemeClr val="accent4">
+              <a:lumMod val="20000"/>
+              <a:lumOff val="80000"/>
+            </a:schemeClr>
+          </a:solidFill>
+        </p:spPr>
+        <p:txBody>
+          <a:bodyPr wrap="square" rtlCol="0">
+            <a:spAutoFit/>
+          </a:bodyPr>
+          <a:lstStyle/>
+          <a:p>
+            <a:r>
+              <a:rPr lang="en-US" b="1">
+                <a:solidFill>
+                  <a:srgbClr val="00B050"/>
+                </a:solidFill>
+              </a:rPr>
+              <a:t>To sign a message: </a:t>
+            </a:r>
+            <a:r>
+              <a:rPr lang="en-US" sz="1400"/>
+              <a:t> (to prove that it is your bitcoin address), open your wallet and go to "Sign/Verify message":</a:t>
+            </a:r>
+          </a:p>
+          <a:p>
+            <a:pPr marL="285750" indent="-285750">
+              <a:buFont typeface="Arial" panose="020B0604020202020204" pitchFamily="34" charset="0"/>
+              <a:buChar char="•"/>
+            </a:pPr>
+            <a:r>
+              <a:rPr lang="en-US" sz="1400"/>
+              <a:t>Enter your public wallet address for which you wish to sign</a:t>
+            </a:r>
+          </a:p>
+          <a:p>
+            <a:pPr marL="285750" indent="-285750">
+              <a:buFont typeface="Arial" panose="020B0604020202020204" pitchFamily="34" charset="0"/>
+              <a:buChar char="•"/>
+            </a:pPr>
+            <a:r>
+              <a:rPr lang="en-US" sz="1400"/>
+              <a:t>Enter your custom message</a:t>
+            </a:r>
+          </a:p>
+          <a:p>
+            <a:pPr marL="285750" indent="-285750">
+              <a:buFont typeface="Arial" panose="020B0604020202020204" pitchFamily="34" charset="0"/>
+              <a:buChar char="•"/>
+            </a:pPr>
+            <a:r>
+              <a:rPr lang="en-US" sz="1400"/>
+              <a:t>Click on "sign" - the signature will be generated in 3</a:t>
+            </a:r>
+            <a:r>
+              <a:rPr lang="en-US" sz="1400" baseline="30000"/>
+              <a:t>rd</a:t>
+            </a:r>
+            <a:r>
+              <a:rPr lang="en-US" sz="1400"/>
+              <a:t> field</a:t>
+            </a:r>
+          </a:p>
+          <a:p>
+            <a:pPr marL="285750" indent="-285750">
+              <a:buFont typeface="Arial" panose="020B0604020202020204" pitchFamily="34" charset="0"/>
+              <a:buChar char="•"/>
+            </a:pPr>
+            <a:r>
+              <a:rPr lang="en-US" sz="1400"/>
+              <a:t>Share contents of all 3 fields with the recipient</a:t>
+            </a:r>
+          </a:p>
+          <a:p>
+            <a:endParaRPr lang="en-US" sz="1400"/>
+          </a:p>
+          <a:p>
+            <a:r>
+              <a:rPr lang="en-US" b="1">
+                <a:solidFill>
+                  <a:srgbClr val="00B050"/>
+                </a:solidFill>
+              </a:rPr>
+              <a:t>To verifty the signature:</a:t>
+            </a:r>
+            <a:r>
+              <a:rPr lang="en-US" sz="1400"/>
+              <a:t> the recipient enters the provided information using his client and verifies the ownership</a:t>
+            </a:r>
+          </a:p>
+        </p:txBody>
+      </p:sp>
+      <p:sp>
+        <p:nvSpPr>
+          <p:cNvPr id="7" name="TextBox 6">
+            <a:extLst>
+              <a:ext uri="{FF2B5EF4-FFF2-40B4-BE49-F238E27FC236}">
+                <a16:creationId xmlns:a16="http://schemas.microsoft.com/office/drawing/2014/main" id="{CF16A812-F5F9-E72F-16F0-9709BAF63108}"/>
+              </a:ext>
+            </a:extLst>
+          </p:cNvPr>
+          <p:cNvSpPr txBox="1"/>
+          <p:nvPr/>
+        </p:nvSpPr>
+        <p:spPr>
+          <a:xfrm>
+            <a:off x="2" y="1"/>
+            <a:ext cx="6311151" cy="523220"/>
+          </a:xfrm>
+          <a:prstGeom prst="rect">
+            <a:avLst/>
+          </a:prstGeom>
+          <a:noFill/>
+        </p:spPr>
+        <p:txBody>
+          <a:bodyPr wrap="square" rtlCol="0">
+            <a:spAutoFit/>
+          </a:bodyPr>
+          <a:lstStyle/>
+          <a:p>
+            <a:r>
+              <a:rPr lang="en-US" sz="2800" b="1"/>
+              <a:t>Wallet – signing messages, transactions</a:t>
             </a:r>
           </a:p>
         </p:txBody>
       </p:sp>
       <p:pic>
         <p:nvPicPr>
-          <p:cNvPr id="5" name="Graphic 4" descr="Old Key with solid fill">
+          <p:cNvPr id="6" name="Picture 5">
             <a:extLst>
               <a:ext uri="{FF2B5EF4-FFF2-40B4-BE49-F238E27FC236}">
-                <a16:creationId xmlns:a16="http://schemas.microsoft.com/office/drawing/2014/main" id="{6FC820C6-7F2A-1649-AA6A-0DE2E659E5FA}"/>
+                <a16:creationId xmlns:a16="http://schemas.microsoft.com/office/drawing/2014/main" id="{C96DFBC0-3161-AE73-E314-1AA40A828B19}"/>
               </a:ext>
             </a:extLst>
           </p:cNvPr>
@@ -3700,1246 +3879,25 @@
           <p:nvPr/>
         </p:nvPicPr>
         <p:blipFill>
-          <a:blip r:embed="rId2" cstate="email">
-            <a:extLst>
-              <a:ext uri="{28A0092B-C50C-407E-A947-70E740481C1C}">
-                <a14:useLocalDpi xmlns:a14="http://schemas.microsoft.com/office/drawing/2010/main"/>
-              </a:ext>
-              <a:ext uri="{96DAC541-7B7A-43D3-8B79-37D633B846F1}">
-                <asvg:svgBlip xmlns:asvg="http://schemas.microsoft.com/office/drawing/2016/SVG/main" r:embed="rId3"/>
-              </a:ext>
-            </a:extLst>
-          </a:blip>
+          <a:blip r:embed="rId2"/>
           <a:stretch>
             <a:fillRect/>
           </a:stretch>
         </p:blipFill>
         <p:spPr>
           <a:xfrm>
-            <a:off x="7532339" y="2147332"/>
-            <a:ext cx="538166" cy="538166"/>
+            <a:off x="50440" y="2892954"/>
+            <a:ext cx="9577084" cy="3833727"/>
           </a:xfrm>
           <a:prstGeom prst="rect">
             <a:avLst/>
           </a:prstGeom>
         </p:spPr>
       </p:pic>
-      <p:pic>
-        <p:nvPicPr>
-          <p:cNvPr id="6" name="Graphic 5" descr="Old Key outline">
-            <a:extLst>
-              <a:ext uri="{FF2B5EF4-FFF2-40B4-BE49-F238E27FC236}">
-                <a16:creationId xmlns:a16="http://schemas.microsoft.com/office/drawing/2014/main" id="{416A130C-B6D0-0C47-87B6-7BE24CE1B653}"/>
-              </a:ext>
-            </a:extLst>
-          </p:cNvPr>
-          <p:cNvPicPr>
-            <a:picLocks noChangeAspect="1"/>
-          </p:cNvPicPr>
-          <p:nvPr/>
-        </p:nvPicPr>
-        <p:blipFill>
-          <a:blip r:embed="rId4" cstate="email">
-            <a:extLst>
-              <a:ext uri="{28A0092B-C50C-407E-A947-70E740481C1C}">
-                <a14:useLocalDpi xmlns:a14="http://schemas.microsoft.com/office/drawing/2010/main"/>
-              </a:ext>
-              <a:ext uri="{96DAC541-7B7A-43D3-8B79-37D633B846F1}">
-                <asvg:svgBlip xmlns:asvg="http://schemas.microsoft.com/office/drawing/2016/SVG/main" r:embed="rId5"/>
-              </a:ext>
-            </a:extLst>
-          </a:blip>
-          <a:stretch>
-            <a:fillRect/>
-          </a:stretch>
-        </p:blipFill>
-        <p:spPr>
-          <a:xfrm>
-            <a:off x="9265892" y="2147332"/>
-            <a:ext cx="538166" cy="538166"/>
-          </a:xfrm>
-          <a:prstGeom prst="rect">
-            <a:avLst/>
-          </a:prstGeom>
-        </p:spPr>
-      </p:pic>
-      <p:cxnSp>
-        <p:nvCxnSpPr>
-          <p:cNvPr id="7" name="Straight Arrow Connector 6">
-            <a:extLst>
-              <a:ext uri="{FF2B5EF4-FFF2-40B4-BE49-F238E27FC236}">
-                <a16:creationId xmlns:a16="http://schemas.microsoft.com/office/drawing/2014/main" id="{30B2A087-0A52-9440-9E45-F31E5F617841}"/>
-              </a:ext>
-            </a:extLst>
-          </p:cNvPr>
-          <p:cNvCxnSpPr>
-            <a:stCxn id="5" idx="3"/>
-            <a:endCxn id="6" idx="1"/>
-          </p:cNvCxnSpPr>
-          <p:nvPr/>
-        </p:nvCxnSpPr>
-        <p:spPr>
-          <a:xfrm>
-            <a:off x="8070505" y="2416415"/>
-            <a:ext cx="1195387" cy="0"/>
-          </a:xfrm>
-          <a:prstGeom prst="straightConnector1">
-            <a:avLst/>
-          </a:prstGeom>
-          <a:ln w="38100">
-            <a:headEnd type="triangle"/>
-            <a:tailEnd type="triangle"/>
-          </a:ln>
-        </p:spPr>
-        <p:style>
-          <a:lnRef idx="1">
-            <a:schemeClr val="dk1"/>
-          </a:lnRef>
-          <a:fillRef idx="0">
-            <a:schemeClr val="dk1"/>
-          </a:fillRef>
-          <a:effectRef idx="0">
-            <a:schemeClr val="dk1"/>
-          </a:effectRef>
-          <a:fontRef idx="minor">
-            <a:schemeClr val="tx1"/>
-          </a:fontRef>
-        </p:style>
-      </p:cxnSp>
-      <p:pic>
-        <p:nvPicPr>
-          <p:cNvPr id="8" name="Graphic 7" descr="Mailbox with solid fill">
-            <a:extLst>
-              <a:ext uri="{FF2B5EF4-FFF2-40B4-BE49-F238E27FC236}">
-                <a16:creationId xmlns:a16="http://schemas.microsoft.com/office/drawing/2014/main" id="{D9E3BCAF-D57D-2E44-9402-8F77AAD0E88C}"/>
-              </a:ext>
-            </a:extLst>
-          </p:cNvPr>
-          <p:cNvPicPr>
-            <a:picLocks noChangeAspect="1"/>
-          </p:cNvPicPr>
-          <p:nvPr/>
-        </p:nvPicPr>
-        <p:blipFill>
-          <a:blip r:embed="rId6" cstate="email">
-            <a:extLst>
-              <a:ext uri="{28A0092B-C50C-407E-A947-70E740481C1C}">
-                <a14:useLocalDpi xmlns:a14="http://schemas.microsoft.com/office/drawing/2010/main"/>
-              </a:ext>
-              <a:ext uri="{96DAC541-7B7A-43D3-8B79-37D633B846F1}">
-                <asvg:svgBlip xmlns:asvg="http://schemas.microsoft.com/office/drawing/2016/SVG/main" r:embed="rId7"/>
-              </a:ext>
-            </a:extLst>
-          </a:blip>
-          <a:stretch>
-            <a:fillRect/>
-          </a:stretch>
-        </p:blipFill>
-        <p:spPr>
-          <a:xfrm>
-            <a:off x="7580756" y="3258072"/>
-            <a:ext cx="430719" cy="430719"/>
-          </a:xfrm>
-          <a:prstGeom prst="rect">
-            <a:avLst/>
-          </a:prstGeom>
-        </p:spPr>
-      </p:pic>
-      <p:pic>
-        <p:nvPicPr>
-          <p:cNvPr id="9" name="Graphic 8" descr="Employee badge outline">
-            <a:extLst>
-              <a:ext uri="{FF2B5EF4-FFF2-40B4-BE49-F238E27FC236}">
-                <a16:creationId xmlns:a16="http://schemas.microsoft.com/office/drawing/2014/main" id="{C9353079-AB35-E14A-9C24-0DB177CD6FED}"/>
-              </a:ext>
-            </a:extLst>
-          </p:cNvPr>
-          <p:cNvPicPr>
-            <a:picLocks noChangeAspect="1"/>
-          </p:cNvPicPr>
-          <p:nvPr/>
-        </p:nvPicPr>
-        <p:blipFill>
-          <a:blip r:embed="rId8" cstate="email">
-            <a:extLst>
-              <a:ext uri="{28A0092B-C50C-407E-A947-70E740481C1C}">
-                <a14:useLocalDpi xmlns:a14="http://schemas.microsoft.com/office/drawing/2010/main"/>
-              </a:ext>
-              <a:ext uri="{96DAC541-7B7A-43D3-8B79-37D633B846F1}">
-                <asvg:svgBlip xmlns:asvg="http://schemas.microsoft.com/office/drawing/2016/SVG/main" r:embed="rId9"/>
-              </a:ext>
-            </a:extLst>
-          </a:blip>
-          <a:stretch>
-            <a:fillRect/>
-          </a:stretch>
-        </p:blipFill>
-        <p:spPr>
-          <a:xfrm>
-            <a:off x="9328730" y="3257137"/>
-            <a:ext cx="431654" cy="431654"/>
-          </a:xfrm>
-          <a:prstGeom prst="rect">
-            <a:avLst/>
-          </a:prstGeom>
-        </p:spPr>
-      </p:pic>
-      <p:cxnSp>
-        <p:nvCxnSpPr>
-          <p:cNvPr id="10" name="Straight Arrow Connector 9">
-            <a:extLst>
-              <a:ext uri="{FF2B5EF4-FFF2-40B4-BE49-F238E27FC236}">
-                <a16:creationId xmlns:a16="http://schemas.microsoft.com/office/drawing/2014/main" id="{F631E980-EEA0-AD45-9DC8-2EE705A20563}"/>
-              </a:ext>
-            </a:extLst>
-          </p:cNvPr>
-          <p:cNvCxnSpPr>
-            <a:stCxn id="5" idx="2"/>
-            <a:endCxn id="8" idx="0"/>
-          </p:cNvCxnSpPr>
-          <p:nvPr/>
-        </p:nvCxnSpPr>
-        <p:spPr>
-          <a:xfrm flipH="1">
-            <a:off x="7796116" y="2685498"/>
-            <a:ext cx="5306" cy="572574"/>
-          </a:xfrm>
-          <a:prstGeom prst="straightConnector1">
-            <a:avLst/>
-          </a:prstGeom>
-          <a:ln w="38100">
-            <a:tailEnd type="triangle"/>
-          </a:ln>
-        </p:spPr>
-        <p:style>
-          <a:lnRef idx="1">
-            <a:schemeClr val="dk1"/>
-          </a:lnRef>
-          <a:fillRef idx="0">
-            <a:schemeClr val="dk1"/>
-          </a:fillRef>
-          <a:effectRef idx="0">
-            <a:schemeClr val="dk1"/>
-          </a:effectRef>
-          <a:fontRef idx="minor">
-            <a:schemeClr val="tx1"/>
-          </a:fontRef>
-        </p:style>
-      </p:cxnSp>
-      <p:cxnSp>
-        <p:nvCxnSpPr>
-          <p:cNvPr id="11" name="Straight Arrow Connector 10">
-            <a:extLst>
-              <a:ext uri="{FF2B5EF4-FFF2-40B4-BE49-F238E27FC236}">
-                <a16:creationId xmlns:a16="http://schemas.microsoft.com/office/drawing/2014/main" id="{C1CBDA0D-2E00-4849-9D6D-DD0446FA7BC4}"/>
-              </a:ext>
-            </a:extLst>
-          </p:cNvPr>
-          <p:cNvCxnSpPr>
-            <a:stCxn id="6" idx="2"/>
-            <a:endCxn id="9" idx="0"/>
-          </p:cNvCxnSpPr>
-          <p:nvPr/>
-        </p:nvCxnSpPr>
-        <p:spPr>
-          <a:xfrm>
-            <a:off x="9534975" y="2685498"/>
-            <a:ext cx="9582" cy="571639"/>
-          </a:xfrm>
-          <a:prstGeom prst="straightConnector1">
-            <a:avLst/>
-          </a:prstGeom>
-          <a:ln w="38100">
-            <a:tailEnd type="triangle"/>
-          </a:ln>
-        </p:spPr>
-        <p:style>
-          <a:lnRef idx="1">
-            <a:schemeClr val="dk1"/>
-          </a:lnRef>
-          <a:fillRef idx="0">
-            <a:schemeClr val="dk1"/>
-          </a:fillRef>
-          <a:effectRef idx="0">
-            <a:schemeClr val="dk1"/>
-          </a:effectRef>
-          <a:fontRef idx="minor">
-            <a:schemeClr val="tx1"/>
-          </a:fontRef>
-        </p:style>
-      </p:cxnSp>
-      <p:sp>
-        <p:nvSpPr>
-          <p:cNvPr id="4" name="TextBox 3">
-            <a:extLst>
-              <a:ext uri="{FF2B5EF4-FFF2-40B4-BE49-F238E27FC236}">
-                <a16:creationId xmlns:a16="http://schemas.microsoft.com/office/drawing/2014/main" id="{363089A5-F958-7E4B-B562-F7C474EDDB06}"/>
-              </a:ext>
-            </a:extLst>
-          </p:cNvPr>
-          <p:cNvSpPr txBox="1"/>
-          <p:nvPr/>
-        </p:nvSpPr>
-        <p:spPr>
-          <a:xfrm>
-            <a:off x="7496094" y="1690688"/>
-            <a:ext cx="750526" cy="369332"/>
-          </a:xfrm>
-          <a:prstGeom prst="rect">
-            <a:avLst/>
-          </a:prstGeom>
-          <a:noFill/>
-        </p:spPr>
-        <p:txBody>
-          <a:bodyPr wrap="none" rtlCol="0">
-            <a:spAutoFit/>
-          </a:bodyPr>
-          <a:lstStyle/>
-          <a:p>
-            <a:r>
-              <a:rPr lang="en-US" dirty="0"/>
-              <a:t>Public</a:t>
-            </a:r>
-          </a:p>
-        </p:txBody>
-      </p:sp>
-      <p:sp>
-        <p:nvSpPr>
-          <p:cNvPr id="13" name="TextBox 12">
-            <a:extLst>
-              <a:ext uri="{FF2B5EF4-FFF2-40B4-BE49-F238E27FC236}">
-                <a16:creationId xmlns:a16="http://schemas.microsoft.com/office/drawing/2014/main" id="{D53AE619-26D9-534C-BDD3-B2FDD674062E}"/>
-              </a:ext>
-            </a:extLst>
-          </p:cNvPr>
-          <p:cNvSpPr txBox="1"/>
-          <p:nvPr/>
-        </p:nvSpPr>
-        <p:spPr>
-          <a:xfrm>
-            <a:off x="9117232" y="1695590"/>
-            <a:ext cx="835485" cy="369332"/>
-          </a:xfrm>
-          <a:prstGeom prst="rect">
-            <a:avLst/>
-          </a:prstGeom>
-          <a:noFill/>
-        </p:spPr>
-        <p:txBody>
-          <a:bodyPr wrap="none" rtlCol="0">
-            <a:spAutoFit/>
-          </a:bodyPr>
-          <a:lstStyle/>
-          <a:p>
-            <a:r>
-              <a:rPr lang="en-US" dirty="0"/>
-              <a:t>Private</a:t>
-            </a:r>
-          </a:p>
-        </p:txBody>
-      </p:sp>
-      <p:sp>
-        <p:nvSpPr>
-          <p:cNvPr id="14" name="TextBox 13">
-            <a:extLst>
-              <a:ext uri="{FF2B5EF4-FFF2-40B4-BE49-F238E27FC236}">
-                <a16:creationId xmlns:a16="http://schemas.microsoft.com/office/drawing/2014/main" id="{5C1800A6-7E7C-2345-9A41-61EADE78D4DC}"/>
-              </a:ext>
-            </a:extLst>
-          </p:cNvPr>
-          <p:cNvSpPr txBox="1"/>
-          <p:nvPr/>
-        </p:nvSpPr>
-        <p:spPr>
-          <a:xfrm>
-            <a:off x="7244489" y="3796238"/>
-            <a:ext cx="1103251" cy="369332"/>
-          </a:xfrm>
-          <a:prstGeom prst="rect">
-            <a:avLst/>
-          </a:prstGeom>
-          <a:noFill/>
-        </p:spPr>
-        <p:txBody>
-          <a:bodyPr wrap="none" rtlCol="0">
-            <a:spAutoFit/>
-          </a:bodyPr>
-          <a:lstStyle/>
-          <a:p>
-            <a:r>
-              <a:rPr lang="en-US" dirty="0"/>
-              <a:t>“Address”</a:t>
-            </a:r>
-          </a:p>
-        </p:txBody>
-      </p:sp>
-      <p:sp>
-        <p:nvSpPr>
-          <p:cNvPr id="15" name="TextBox 14">
-            <a:extLst>
-              <a:ext uri="{FF2B5EF4-FFF2-40B4-BE49-F238E27FC236}">
-                <a16:creationId xmlns:a16="http://schemas.microsoft.com/office/drawing/2014/main" id="{37121F2A-6C02-9548-B423-89AB267A0D46}"/>
-              </a:ext>
-            </a:extLst>
-          </p:cNvPr>
-          <p:cNvSpPr txBox="1"/>
-          <p:nvPr/>
-        </p:nvSpPr>
-        <p:spPr>
-          <a:xfrm>
-            <a:off x="8852864" y="3828776"/>
-            <a:ext cx="1364220" cy="369332"/>
-          </a:xfrm>
-          <a:prstGeom prst="rect">
-            <a:avLst/>
-          </a:prstGeom>
-          <a:noFill/>
-        </p:spPr>
-        <p:txBody>
-          <a:bodyPr wrap="none" rtlCol="0">
-            <a:spAutoFit/>
-          </a:bodyPr>
-          <a:lstStyle/>
-          <a:p>
-            <a:r>
-              <a:rPr lang="en-US" dirty="0"/>
-              <a:t>“House Key”</a:t>
-            </a:r>
-          </a:p>
-        </p:txBody>
-      </p:sp>
-      <p:sp>
-        <p:nvSpPr>
-          <p:cNvPr id="12" name="TextBox 11">
-            <a:extLst>
-              <a:ext uri="{FF2B5EF4-FFF2-40B4-BE49-F238E27FC236}">
-                <a16:creationId xmlns:a16="http://schemas.microsoft.com/office/drawing/2014/main" id="{F391AC64-BFA1-184A-BA49-BF2D2BB4C6CE}"/>
-              </a:ext>
-            </a:extLst>
-          </p:cNvPr>
-          <p:cNvSpPr txBox="1"/>
-          <p:nvPr/>
-        </p:nvSpPr>
-        <p:spPr>
-          <a:xfrm>
-            <a:off x="671991" y="2039167"/>
-            <a:ext cx="5650906" cy="923330"/>
-          </a:xfrm>
-          <a:prstGeom prst="rect">
-            <a:avLst/>
-          </a:prstGeom>
-          <a:noFill/>
-        </p:spPr>
-        <p:txBody>
-          <a:bodyPr wrap="none" rtlCol="0">
-            <a:spAutoFit/>
-          </a:bodyPr>
-          <a:lstStyle/>
-          <a:p>
-            <a:pPr marL="285750" indent="-285750">
-              <a:buFont typeface="Arial" panose="020B0604020202020204" pitchFamily="34" charset="0"/>
-              <a:buChar char="•"/>
-            </a:pPr>
-            <a:r>
-              <a:rPr lang="en-US" dirty="0"/>
-              <a:t>Symmetric vs Asymmetric encryption</a:t>
-            </a:r>
-          </a:p>
-          <a:p>
-            <a:pPr marL="285750" indent="-285750">
-              <a:buFont typeface="Arial" panose="020B0604020202020204" pitchFamily="34" charset="0"/>
-              <a:buChar char="•"/>
-            </a:pPr>
-            <a:r>
-              <a:rPr lang="en-US" dirty="0"/>
-              <a:t>Private key enables send &amp; Public key enables receiving</a:t>
-            </a:r>
-          </a:p>
-          <a:p>
-            <a:pPr marL="285750" indent="-285750">
-              <a:buFont typeface="Arial" panose="020B0604020202020204" pitchFamily="34" charset="0"/>
-              <a:buChar char="•"/>
-            </a:pPr>
-            <a:r>
-              <a:rPr lang="en-US" dirty="0"/>
-              <a:t>Public key generates from private key. No vice versa</a:t>
-            </a:r>
-          </a:p>
-        </p:txBody>
-      </p:sp>
-      <p:sp>
-        <p:nvSpPr>
-          <p:cNvPr id="16" name="TextBox 15">
-            <a:extLst>
-              <a:ext uri="{FF2B5EF4-FFF2-40B4-BE49-F238E27FC236}">
-                <a16:creationId xmlns:a16="http://schemas.microsoft.com/office/drawing/2014/main" id="{19112EFC-66A8-7147-9611-1CE15DBED304}"/>
-              </a:ext>
-            </a:extLst>
-          </p:cNvPr>
-          <p:cNvSpPr txBox="1"/>
-          <p:nvPr/>
-        </p:nvSpPr>
-        <p:spPr>
-          <a:xfrm>
-            <a:off x="1759147" y="4557009"/>
-            <a:ext cx="4563750" cy="369332"/>
-          </a:xfrm>
-          <a:prstGeom prst="rect">
-            <a:avLst/>
-          </a:prstGeom>
-          <a:noFill/>
-        </p:spPr>
-        <p:txBody>
-          <a:bodyPr wrap="none" rtlCol="0">
-            <a:spAutoFit/>
-          </a:bodyPr>
-          <a:lstStyle/>
-          <a:p>
-            <a:r>
-              <a:rPr lang="en-US" dirty="0"/>
-              <a:t>01- </a:t>
-            </a:r>
-            <a:r>
-              <a:rPr lang="en-US" dirty="0">
-                <a:solidFill>
-                  <a:schemeClr val="accent1">
-                    <a:lumMod val="50000"/>
-                  </a:schemeClr>
-                </a:solidFill>
-                <a:highlight>
-                  <a:srgbClr val="FFFF00"/>
-                </a:highlight>
-              </a:rPr>
-              <a:t>Malte sends 1 BTC to Martin</a:t>
-            </a:r>
-            <a:r>
-              <a:rPr lang="en-US" dirty="0"/>
-              <a:t>-</a:t>
-            </a:r>
-            <a:r>
-              <a:rPr lang="en-US" dirty="0">
-                <a:solidFill>
-                  <a:srgbClr val="C00000"/>
-                </a:solidFill>
-              </a:rPr>
-              <a:t>473ms22akkq</a:t>
-            </a:r>
-          </a:p>
-        </p:txBody>
-      </p:sp>
-      <p:cxnSp>
-        <p:nvCxnSpPr>
-          <p:cNvPr id="18" name="Straight Arrow Connector 17">
-            <a:extLst>
-              <a:ext uri="{FF2B5EF4-FFF2-40B4-BE49-F238E27FC236}">
-                <a16:creationId xmlns:a16="http://schemas.microsoft.com/office/drawing/2014/main" id="{4B5F7D46-66E7-EE4E-8FFA-91BB1BC6089F}"/>
-              </a:ext>
-            </a:extLst>
-          </p:cNvPr>
-          <p:cNvCxnSpPr/>
-          <p:nvPr/>
-        </p:nvCxnSpPr>
-        <p:spPr>
-          <a:xfrm flipV="1">
-            <a:off x="1759147" y="4926341"/>
-            <a:ext cx="174584" cy="784911"/>
-          </a:xfrm>
-          <a:prstGeom prst="straightConnector1">
-            <a:avLst/>
-          </a:prstGeom>
-          <a:ln>
-            <a:tailEnd type="triangle"/>
-          </a:ln>
-        </p:spPr>
-        <p:style>
-          <a:lnRef idx="1">
-            <a:schemeClr val="accent1"/>
-          </a:lnRef>
-          <a:fillRef idx="0">
-            <a:schemeClr val="accent1"/>
-          </a:fillRef>
-          <a:effectRef idx="0">
-            <a:schemeClr val="accent1"/>
-          </a:effectRef>
-          <a:fontRef idx="minor">
-            <a:schemeClr val="tx1"/>
-          </a:fontRef>
-        </p:style>
-      </p:cxnSp>
-      <p:cxnSp>
-        <p:nvCxnSpPr>
-          <p:cNvPr id="20" name="Straight Arrow Connector 19">
-            <a:extLst>
-              <a:ext uri="{FF2B5EF4-FFF2-40B4-BE49-F238E27FC236}">
-                <a16:creationId xmlns:a16="http://schemas.microsoft.com/office/drawing/2014/main" id="{C14761E8-67C6-D843-AD68-63B980694FC9}"/>
-              </a:ext>
-            </a:extLst>
-          </p:cNvPr>
-          <p:cNvCxnSpPr/>
-          <p:nvPr/>
-        </p:nvCxnSpPr>
-        <p:spPr>
-          <a:xfrm flipV="1">
-            <a:off x="3612630" y="4926341"/>
-            <a:ext cx="119921" cy="784911"/>
-          </a:xfrm>
-          <a:prstGeom prst="straightConnector1">
-            <a:avLst/>
-          </a:prstGeom>
-          <a:ln>
-            <a:tailEnd type="triangle"/>
-          </a:ln>
-        </p:spPr>
-        <p:style>
-          <a:lnRef idx="1">
-            <a:schemeClr val="accent1"/>
-          </a:lnRef>
-          <a:fillRef idx="0">
-            <a:schemeClr val="accent1"/>
-          </a:fillRef>
-          <a:effectRef idx="0">
-            <a:schemeClr val="accent1"/>
-          </a:effectRef>
-          <a:fontRef idx="minor">
-            <a:schemeClr val="tx1"/>
-          </a:fontRef>
-        </p:style>
-      </p:cxnSp>
-      <p:cxnSp>
-        <p:nvCxnSpPr>
-          <p:cNvPr id="22" name="Straight Arrow Connector 21">
-            <a:extLst>
-              <a:ext uri="{FF2B5EF4-FFF2-40B4-BE49-F238E27FC236}">
-                <a16:creationId xmlns:a16="http://schemas.microsoft.com/office/drawing/2014/main" id="{16662B9F-7BC2-CE48-903B-F00807619D59}"/>
-              </a:ext>
-            </a:extLst>
-          </p:cNvPr>
-          <p:cNvCxnSpPr/>
-          <p:nvPr/>
-        </p:nvCxnSpPr>
-        <p:spPr>
-          <a:xfrm flipV="1">
-            <a:off x="5411450" y="4926341"/>
-            <a:ext cx="119921" cy="784911"/>
-          </a:xfrm>
-          <a:prstGeom prst="straightConnector1">
-            <a:avLst/>
-          </a:prstGeom>
-          <a:ln>
-            <a:tailEnd type="triangle"/>
-          </a:ln>
-        </p:spPr>
-        <p:style>
-          <a:lnRef idx="1">
-            <a:schemeClr val="accent1"/>
-          </a:lnRef>
-          <a:fillRef idx="0">
-            <a:schemeClr val="accent1"/>
-          </a:fillRef>
-          <a:effectRef idx="0">
-            <a:schemeClr val="accent1"/>
-          </a:effectRef>
-          <a:fontRef idx="minor">
-            <a:schemeClr val="tx1"/>
-          </a:fontRef>
-        </p:style>
-      </p:cxnSp>
-      <p:sp>
-        <p:nvSpPr>
-          <p:cNvPr id="21" name="TextBox 20">
-            <a:extLst>
-              <a:ext uri="{FF2B5EF4-FFF2-40B4-BE49-F238E27FC236}">
-                <a16:creationId xmlns:a16="http://schemas.microsoft.com/office/drawing/2014/main" id="{8298E2C6-E805-C24D-9AB6-A71DC5C08D63}"/>
-              </a:ext>
-            </a:extLst>
-          </p:cNvPr>
-          <p:cNvSpPr txBox="1"/>
-          <p:nvPr/>
-        </p:nvSpPr>
-        <p:spPr>
-          <a:xfrm>
-            <a:off x="744738" y="5895918"/>
-            <a:ext cx="1777538" cy="369332"/>
-          </a:xfrm>
-          <a:prstGeom prst="rect">
-            <a:avLst/>
-          </a:prstGeom>
-          <a:noFill/>
-        </p:spPr>
-        <p:txBody>
-          <a:bodyPr wrap="none" rtlCol="0">
-            <a:spAutoFit/>
-          </a:bodyPr>
-          <a:lstStyle/>
-          <a:p>
-            <a:r>
-              <a:rPr lang="en-US" dirty="0"/>
-              <a:t>Unique identifier</a:t>
-            </a:r>
-          </a:p>
-        </p:txBody>
-      </p:sp>
-      <p:sp>
-        <p:nvSpPr>
-          <p:cNvPr id="24" name="TextBox 23">
-            <a:extLst>
-              <a:ext uri="{FF2B5EF4-FFF2-40B4-BE49-F238E27FC236}">
-                <a16:creationId xmlns:a16="http://schemas.microsoft.com/office/drawing/2014/main" id="{DD693D81-F26A-2F4C-B366-C8BE792D3410}"/>
-              </a:ext>
-            </a:extLst>
-          </p:cNvPr>
-          <p:cNvSpPr txBox="1"/>
-          <p:nvPr/>
-        </p:nvSpPr>
-        <p:spPr>
-          <a:xfrm>
-            <a:off x="3077296" y="5921115"/>
-            <a:ext cx="1241109" cy="369332"/>
-          </a:xfrm>
-          <a:prstGeom prst="rect">
-            <a:avLst/>
-          </a:prstGeom>
-          <a:noFill/>
-        </p:spPr>
-        <p:txBody>
-          <a:bodyPr wrap="none" rtlCol="0">
-            <a:spAutoFit/>
-          </a:bodyPr>
-          <a:lstStyle/>
-          <a:p>
-            <a:r>
-              <a:rPr lang="en-US" dirty="0">
-                <a:highlight>
-                  <a:srgbClr val="FFFF00"/>
-                </a:highlight>
-              </a:rPr>
-              <a:t>transaction</a:t>
-            </a:r>
-          </a:p>
-        </p:txBody>
-      </p:sp>
-      <p:sp>
-        <p:nvSpPr>
-          <p:cNvPr id="25" name="TextBox 24">
-            <a:extLst>
-              <a:ext uri="{FF2B5EF4-FFF2-40B4-BE49-F238E27FC236}">
-                <a16:creationId xmlns:a16="http://schemas.microsoft.com/office/drawing/2014/main" id="{F8B25983-DCCF-8C44-9508-E19A15A8DC5E}"/>
-              </a:ext>
-            </a:extLst>
-          </p:cNvPr>
-          <p:cNvSpPr txBox="1"/>
-          <p:nvPr/>
-        </p:nvSpPr>
-        <p:spPr>
-          <a:xfrm>
-            <a:off x="4850855" y="5921115"/>
-            <a:ext cx="762773" cy="369332"/>
-          </a:xfrm>
-          <a:prstGeom prst="rect">
-            <a:avLst/>
-          </a:prstGeom>
-          <a:noFill/>
-        </p:spPr>
-        <p:txBody>
-          <a:bodyPr wrap="none" rtlCol="0">
-            <a:spAutoFit/>
-          </a:bodyPr>
-          <a:lstStyle/>
-          <a:p>
-            <a:r>
-              <a:rPr lang="en-US" dirty="0">
-                <a:solidFill>
-                  <a:srgbClr val="C00000"/>
-                </a:solidFill>
-              </a:rPr>
-              <a:t>stamp</a:t>
-            </a:r>
-          </a:p>
-        </p:txBody>
-      </p:sp>
-      <p:cxnSp>
-        <p:nvCxnSpPr>
-          <p:cNvPr id="26" name="Straight Arrow Connector 25">
-            <a:extLst>
-              <a:ext uri="{FF2B5EF4-FFF2-40B4-BE49-F238E27FC236}">
-                <a16:creationId xmlns:a16="http://schemas.microsoft.com/office/drawing/2014/main" id="{7DA55EA8-940B-C142-8619-CFD889578CDB}"/>
-              </a:ext>
-            </a:extLst>
-          </p:cNvPr>
-          <p:cNvCxnSpPr>
-            <a:cxnSpLocks/>
-          </p:cNvCxnSpPr>
-          <p:nvPr/>
-        </p:nvCxnSpPr>
-        <p:spPr>
-          <a:xfrm>
-            <a:off x="5662572" y="6107854"/>
-            <a:ext cx="433428" cy="0"/>
-          </a:xfrm>
-          <a:prstGeom prst="straightConnector1">
-            <a:avLst/>
-          </a:prstGeom>
-          <a:ln>
-            <a:tailEnd type="triangle"/>
-          </a:ln>
-        </p:spPr>
-        <p:style>
-          <a:lnRef idx="1">
-            <a:schemeClr val="accent1"/>
-          </a:lnRef>
-          <a:fillRef idx="0">
-            <a:schemeClr val="accent1"/>
-          </a:fillRef>
-          <a:effectRef idx="0">
-            <a:schemeClr val="accent1"/>
-          </a:effectRef>
-          <a:fontRef idx="minor">
-            <a:schemeClr val="tx1"/>
-          </a:fontRef>
-        </p:style>
-      </p:cxnSp>
-      <p:sp>
-        <p:nvSpPr>
-          <p:cNvPr id="27" name="TextBox 26">
-            <a:extLst>
-              <a:ext uri="{FF2B5EF4-FFF2-40B4-BE49-F238E27FC236}">
-                <a16:creationId xmlns:a16="http://schemas.microsoft.com/office/drawing/2014/main" id="{41F6604F-6D88-974C-8C4E-6AA69DA5E0AB}"/>
-              </a:ext>
-            </a:extLst>
-          </p:cNvPr>
-          <p:cNvSpPr txBox="1"/>
-          <p:nvPr/>
-        </p:nvSpPr>
-        <p:spPr>
-          <a:xfrm>
-            <a:off x="6322897" y="5955880"/>
-            <a:ext cx="2936253" cy="369332"/>
-          </a:xfrm>
-          <a:prstGeom prst="rect">
-            <a:avLst/>
-          </a:prstGeom>
-          <a:noFill/>
-        </p:spPr>
-        <p:txBody>
-          <a:bodyPr wrap="none" rtlCol="0">
-            <a:spAutoFit/>
-          </a:bodyPr>
-          <a:lstStyle/>
-          <a:p>
-            <a:r>
-              <a:rPr lang="en-US" dirty="0" err="1"/>
-              <a:t>PrivateKey</a:t>
-            </a:r>
-            <a:r>
-              <a:rPr lang="en-US" dirty="0"/>
-              <a:t>(UID + transaction)</a:t>
-            </a:r>
-          </a:p>
-        </p:txBody>
-      </p:sp>
-      <p:pic>
-        <p:nvPicPr>
-          <p:cNvPr id="29" name="Graphic 28" descr="Old Key with solid fill">
-            <a:extLst>
-              <a:ext uri="{FF2B5EF4-FFF2-40B4-BE49-F238E27FC236}">
-                <a16:creationId xmlns:a16="http://schemas.microsoft.com/office/drawing/2014/main" id="{2333B70C-50DE-2E44-A79B-EB013737E8AE}"/>
-              </a:ext>
-            </a:extLst>
-          </p:cNvPr>
-          <p:cNvPicPr>
-            <a:picLocks noChangeAspect="1"/>
-          </p:cNvPicPr>
-          <p:nvPr/>
-        </p:nvPicPr>
-        <p:blipFill>
-          <a:blip r:embed="rId2" cstate="email">
-            <a:extLst>
-              <a:ext uri="{28A0092B-C50C-407E-A947-70E740481C1C}">
-                <a14:useLocalDpi xmlns:a14="http://schemas.microsoft.com/office/drawing/2010/main"/>
-              </a:ext>
-              <a:ext uri="{96DAC541-7B7A-43D3-8B79-37D633B846F1}">
-                <asvg:svgBlip xmlns:asvg="http://schemas.microsoft.com/office/drawing/2016/SVG/main" r:embed="rId3"/>
-              </a:ext>
-            </a:extLst>
-          </a:blip>
-          <a:stretch>
-            <a:fillRect/>
-          </a:stretch>
-        </p:blipFill>
-        <p:spPr>
-          <a:xfrm>
-            <a:off x="9805096" y="5173086"/>
-            <a:ext cx="538166" cy="538166"/>
-          </a:xfrm>
-          <a:prstGeom prst="rect">
-            <a:avLst/>
-          </a:prstGeom>
-        </p:spPr>
-      </p:pic>
-      <p:pic>
-        <p:nvPicPr>
-          <p:cNvPr id="30" name="Graphic 29" descr="Users with solid fill">
-            <a:extLst>
-              <a:ext uri="{FF2B5EF4-FFF2-40B4-BE49-F238E27FC236}">
-                <a16:creationId xmlns:a16="http://schemas.microsoft.com/office/drawing/2014/main" id="{C948B39E-ECC7-034B-9C00-D1AA6BDD5626}"/>
-              </a:ext>
-            </a:extLst>
-          </p:cNvPr>
-          <p:cNvPicPr>
-            <a:picLocks noChangeAspect="1"/>
-          </p:cNvPicPr>
-          <p:nvPr/>
-        </p:nvPicPr>
-        <p:blipFill>
-          <a:blip r:embed="rId10">
-            <a:extLst>
-              <a:ext uri="{96DAC541-7B7A-43D3-8B79-37D633B846F1}">
-                <asvg:svgBlip xmlns:asvg="http://schemas.microsoft.com/office/drawing/2016/SVG/main" r:embed="rId11"/>
-              </a:ext>
-            </a:extLst>
-          </a:blip>
-          <a:stretch>
-            <a:fillRect/>
-          </a:stretch>
-        </p:blipFill>
-        <p:spPr>
-          <a:xfrm>
-            <a:off x="10392114" y="5041480"/>
-            <a:ext cx="914400" cy="914400"/>
-          </a:xfrm>
-          <a:prstGeom prst="rect">
-            <a:avLst/>
-          </a:prstGeom>
-        </p:spPr>
-      </p:pic>
-      <p:cxnSp>
-        <p:nvCxnSpPr>
-          <p:cNvPr id="32" name="Straight Arrow Connector 31">
-            <a:extLst>
-              <a:ext uri="{FF2B5EF4-FFF2-40B4-BE49-F238E27FC236}">
-                <a16:creationId xmlns:a16="http://schemas.microsoft.com/office/drawing/2014/main" id="{67AD8ED7-F7DD-6440-A712-E200BAD56D09}"/>
-              </a:ext>
-            </a:extLst>
-          </p:cNvPr>
-          <p:cNvCxnSpPr>
-            <a:cxnSpLocks/>
-            <a:stCxn id="29" idx="2"/>
-            <a:endCxn id="27" idx="3"/>
-          </p:cNvCxnSpPr>
-          <p:nvPr/>
-        </p:nvCxnSpPr>
-        <p:spPr>
-          <a:xfrm flipH="1">
-            <a:off x="9259150" y="5711252"/>
-            <a:ext cx="815029" cy="429294"/>
-          </a:xfrm>
-          <a:prstGeom prst="straightConnector1">
-            <a:avLst/>
-          </a:prstGeom>
-          <a:ln>
-            <a:tailEnd type="triangle"/>
-          </a:ln>
-        </p:spPr>
-        <p:style>
-          <a:lnRef idx="1">
-            <a:schemeClr val="accent1"/>
-          </a:lnRef>
-          <a:fillRef idx="0">
-            <a:schemeClr val="accent1"/>
-          </a:fillRef>
-          <a:effectRef idx="0">
-            <a:schemeClr val="accent1"/>
-          </a:effectRef>
-          <a:fontRef idx="minor">
-            <a:schemeClr val="tx1"/>
-          </a:fontRef>
-        </p:style>
-      </p:cxnSp>
-      <p:sp>
-        <p:nvSpPr>
-          <p:cNvPr id="34" name="TextBox 33">
-            <a:extLst>
-              <a:ext uri="{FF2B5EF4-FFF2-40B4-BE49-F238E27FC236}">
-                <a16:creationId xmlns:a16="http://schemas.microsoft.com/office/drawing/2014/main" id="{7669DC17-CE2B-E64C-9935-706CD126CDD5}"/>
-              </a:ext>
-            </a:extLst>
-          </p:cNvPr>
-          <p:cNvSpPr txBox="1"/>
-          <p:nvPr/>
-        </p:nvSpPr>
-        <p:spPr>
-          <a:xfrm rot="19843804">
-            <a:off x="9548549" y="5851623"/>
-            <a:ext cx="922047" cy="369332"/>
-          </a:xfrm>
-          <a:prstGeom prst="rect">
-            <a:avLst/>
-          </a:prstGeom>
-          <a:noFill/>
-        </p:spPr>
-        <p:txBody>
-          <a:bodyPr wrap="none" rtlCol="0">
-            <a:spAutoFit/>
-          </a:bodyPr>
-          <a:lstStyle/>
-          <a:p>
-            <a:r>
-              <a:rPr lang="en-US" dirty="0"/>
-              <a:t>validate</a:t>
-            </a:r>
-          </a:p>
-        </p:txBody>
-      </p:sp>
-      <p:sp>
-        <p:nvSpPr>
-          <p:cNvPr id="35" name="TextBox 34">
-            <a:extLst>
-              <a:ext uri="{FF2B5EF4-FFF2-40B4-BE49-F238E27FC236}">
-                <a16:creationId xmlns:a16="http://schemas.microsoft.com/office/drawing/2014/main" id="{937094D4-C58C-9844-B226-17B63D0EE261}"/>
-              </a:ext>
-            </a:extLst>
-          </p:cNvPr>
-          <p:cNvSpPr txBox="1"/>
-          <p:nvPr/>
-        </p:nvSpPr>
-        <p:spPr>
-          <a:xfrm>
-            <a:off x="934192" y="4014653"/>
-            <a:ext cx="3057184" cy="369332"/>
-          </a:xfrm>
-          <a:prstGeom prst="rect">
-            <a:avLst/>
-          </a:prstGeom>
-          <a:noFill/>
-        </p:spPr>
-        <p:txBody>
-          <a:bodyPr wrap="none" rtlCol="0">
-            <a:spAutoFit/>
-          </a:bodyPr>
-          <a:lstStyle/>
-          <a:p>
-            <a:r>
-              <a:rPr lang="en-US" dirty="0"/>
-              <a:t>Example transaction structure:</a:t>
-            </a:r>
-          </a:p>
-        </p:txBody>
-      </p:sp>
-      <p:cxnSp>
-        <p:nvCxnSpPr>
-          <p:cNvPr id="37" name="Straight Arrow Connector 36">
-            <a:extLst>
-              <a:ext uri="{FF2B5EF4-FFF2-40B4-BE49-F238E27FC236}">
-                <a16:creationId xmlns:a16="http://schemas.microsoft.com/office/drawing/2014/main" id="{094C86D8-5894-2840-86B0-7D72E9B55C91}"/>
-              </a:ext>
-            </a:extLst>
-          </p:cNvPr>
-          <p:cNvCxnSpPr>
-            <a:cxnSpLocks/>
-          </p:cNvCxnSpPr>
-          <p:nvPr/>
-        </p:nvCxnSpPr>
-        <p:spPr>
-          <a:xfrm flipV="1">
-            <a:off x="9534974" y="852974"/>
-            <a:ext cx="0" cy="568130"/>
-          </a:xfrm>
-          <a:prstGeom prst="straightConnector1">
-            <a:avLst/>
-          </a:prstGeom>
-          <a:ln w="38100">
-            <a:tailEnd type="triangle"/>
-          </a:ln>
-        </p:spPr>
-        <p:style>
-          <a:lnRef idx="1">
-            <a:schemeClr val="dk1"/>
-          </a:lnRef>
-          <a:fillRef idx="0">
-            <a:schemeClr val="dk1"/>
-          </a:fillRef>
-          <a:effectRef idx="0">
-            <a:schemeClr val="dk1"/>
-          </a:effectRef>
-          <a:fontRef idx="minor">
-            <a:schemeClr val="tx1"/>
-          </a:fontRef>
-        </p:style>
-      </p:cxnSp>
-      <p:cxnSp>
-        <p:nvCxnSpPr>
-          <p:cNvPr id="39" name="Straight Arrow Connector 38">
-            <a:extLst>
-              <a:ext uri="{FF2B5EF4-FFF2-40B4-BE49-F238E27FC236}">
-                <a16:creationId xmlns:a16="http://schemas.microsoft.com/office/drawing/2014/main" id="{3CFFA514-D14B-A948-AB40-1F8EA2A13B00}"/>
-              </a:ext>
-            </a:extLst>
-          </p:cNvPr>
-          <p:cNvCxnSpPr>
-            <a:cxnSpLocks/>
-          </p:cNvCxnSpPr>
-          <p:nvPr/>
-        </p:nvCxnSpPr>
-        <p:spPr>
-          <a:xfrm flipV="1">
-            <a:off x="7786080" y="852974"/>
-            <a:ext cx="0" cy="568130"/>
-          </a:xfrm>
-          <a:prstGeom prst="straightConnector1">
-            <a:avLst/>
-          </a:prstGeom>
-          <a:ln w="38100">
-            <a:tailEnd type="triangle"/>
-          </a:ln>
-        </p:spPr>
-        <p:style>
-          <a:lnRef idx="1">
-            <a:schemeClr val="dk1"/>
-          </a:lnRef>
-          <a:fillRef idx="0">
-            <a:schemeClr val="dk1"/>
-          </a:fillRef>
-          <a:effectRef idx="0">
-            <a:schemeClr val="dk1"/>
-          </a:effectRef>
-          <a:fontRef idx="minor">
-            <a:schemeClr val="tx1"/>
-          </a:fontRef>
-        </p:style>
-      </p:cxnSp>
-      <p:sp>
-        <p:nvSpPr>
-          <p:cNvPr id="40" name="TextBox 39">
-            <a:extLst>
-              <a:ext uri="{FF2B5EF4-FFF2-40B4-BE49-F238E27FC236}">
-                <a16:creationId xmlns:a16="http://schemas.microsoft.com/office/drawing/2014/main" id="{01C089D3-CA54-AB41-BFD4-CE556B55C9B2}"/>
-              </a:ext>
-            </a:extLst>
-          </p:cNvPr>
-          <p:cNvSpPr txBox="1"/>
-          <p:nvPr/>
-        </p:nvSpPr>
-        <p:spPr>
-          <a:xfrm>
-            <a:off x="7469358" y="462017"/>
-            <a:ext cx="653512" cy="369332"/>
-          </a:xfrm>
-          <a:prstGeom prst="rect">
-            <a:avLst/>
-          </a:prstGeom>
-          <a:noFill/>
-        </p:spPr>
-        <p:txBody>
-          <a:bodyPr wrap="none" rtlCol="0">
-            <a:spAutoFit/>
-          </a:bodyPr>
-          <a:lstStyle/>
-          <a:p>
-            <a:r>
-              <a:rPr lang="en-US" dirty="0"/>
-              <a:t>Read</a:t>
-            </a:r>
-          </a:p>
-        </p:txBody>
-      </p:sp>
-      <p:sp>
-        <p:nvSpPr>
-          <p:cNvPr id="41" name="TextBox 40">
-            <a:extLst>
-              <a:ext uri="{FF2B5EF4-FFF2-40B4-BE49-F238E27FC236}">
-                <a16:creationId xmlns:a16="http://schemas.microsoft.com/office/drawing/2014/main" id="{D46DFD0B-2435-194A-AC9E-D5FE3D84EEF6}"/>
-              </a:ext>
-            </a:extLst>
-          </p:cNvPr>
-          <p:cNvSpPr txBox="1"/>
-          <p:nvPr/>
-        </p:nvSpPr>
-        <p:spPr>
-          <a:xfrm>
-            <a:off x="9208218" y="434263"/>
-            <a:ext cx="706027" cy="369332"/>
-          </a:xfrm>
-          <a:prstGeom prst="rect">
-            <a:avLst/>
-          </a:prstGeom>
-          <a:noFill/>
-        </p:spPr>
-        <p:txBody>
-          <a:bodyPr wrap="none" rtlCol="0">
-            <a:spAutoFit/>
-          </a:bodyPr>
-          <a:lstStyle/>
-          <a:p>
-            <a:r>
-              <a:rPr lang="en-US" dirty="0"/>
-              <a:t>Write</a:t>
-            </a:r>
-          </a:p>
-        </p:txBody>
-      </p:sp>
-      <p:sp>
-        <p:nvSpPr>
-          <p:cNvPr id="38" name="TextBox 37">
-            <a:extLst>
-              <a:ext uri="{FF2B5EF4-FFF2-40B4-BE49-F238E27FC236}">
-                <a16:creationId xmlns:a16="http://schemas.microsoft.com/office/drawing/2014/main" id="{CDDE0C2A-7806-324F-BD36-6751C0204289}"/>
-              </a:ext>
-            </a:extLst>
-          </p:cNvPr>
-          <p:cNvSpPr txBox="1"/>
-          <p:nvPr/>
-        </p:nvSpPr>
-        <p:spPr>
-          <a:xfrm>
-            <a:off x="8418579" y="6447147"/>
-            <a:ext cx="3803605" cy="584775"/>
-          </a:xfrm>
-          <a:prstGeom prst="rect">
-            <a:avLst/>
-          </a:prstGeom>
-          <a:noFill/>
-        </p:spPr>
-        <p:txBody>
-          <a:bodyPr wrap="none" rtlCol="0">
-            <a:spAutoFit/>
-          </a:bodyPr>
-          <a:lstStyle/>
-          <a:p>
-            <a:r>
-              <a:rPr lang="en-US" sz="1400" dirty="0"/>
-              <a:t>02- </a:t>
-            </a:r>
-            <a:r>
-              <a:rPr lang="en-US" sz="1400" dirty="0">
-                <a:solidFill>
-                  <a:schemeClr val="accent1">
-                    <a:lumMod val="50000"/>
-                  </a:schemeClr>
-                </a:solidFill>
-                <a:highlight>
-                  <a:srgbClr val="FFFF00"/>
-                </a:highlight>
-              </a:rPr>
-              <a:t>Malte sends 1 BTC to Martin-</a:t>
-            </a:r>
-            <a:r>
-              <a:rPr lang="en-US" sz="1400" dirty="0">
-                <a:solidFill>
-                  <a:srgbClr val="C00000"/>
-                </a:solidFill>
-              </a:rPr>
-              <a:t>df3mfssfak7dfd</a:t>
-            </a:r>
-          </a:p>
-          <a:p>
-            <a:endParaRPr lang="en-US" dirty="0"/>
-          </a:p>
-        </p:txBody>
-      </p:sp>
     </p:spTree>
     <p:extLst>
       <p:ext uri="{BB962C8B-B14F-4D97-AF65-F5344CB8AC3E}">
-        <p14:creationId xmlns:p14="http://schemas.microsoft.com/office/powerpoint/2010/main" val="3493101456"/>
+        <p14:creationId xmlns:p14="http://schemas.microsoft.com/office/powerpoint/2010/main" val="3950937477"/>
       </p:ext>
     </p:extLst>
   </p:cSld>
@@ -4980,8 +3938,8 @@
         </p:nvSpPr>
         <p:spPr>
           <a:xfrm>
-            <a:off x="1" y="120415"/>
-            <a:ext cx="3769360" cy="523220"/>
+            <a:off x="0" y="120415"/>
+            <a:ext cx="5023555" cy="523220"/>
           </a:xfrm>
           <a:prstGeom prst="rect">
             <a:avLst/>
@@ -4996,7 +3954,7 @@
           <a:p>
             <a:r>
               <a:rPr lang="en-US" sz="2800" b="1"/>
-              <a:t>Best Hardware Wallet</a:t>
+              <a:t>Some Good Hardware Wallets</a:t>
             </a:r>
           </a:p>
         </p:txBody>
@@ -5528,7 +4486,7 @@
         </p:nvSpPr>
         <p:spPr>
           <a:xfrm>
-            <a:off x="269631" y="3537137"/>
+            <a:off x="269631" y="3327337"/>
             <a:ext cx="4423719" cy="2154436"/>
           </a:xfrm>
           <a:prstGeom prst="rect">
@@ -5747,7 +4705,7 @@
                   <a:srgbClr val="00B050"/>
                 </a:solidFill>
               </a:rPr>
-              <a:t>vs Account (Custodial Wallet)</a:t>
+              <a:t>vs Exchange Account (Custodial Wallet)</a:t>
             </a:r>
           </a:p>
           <a:p>
@@ -7757,7 +6715,7 @@
         </p:nvSpPr>
         <p:spPr>
           <a:xfrm>
-            <a:off x="5798398" y="4019989"/>
+            <a:off x="6125102" y="3711283"/>
             <a:ext cx="4572823" cy="800219"/>
           </a:xfrm>
           <a:prstGeom prst="rect">
@@ -8565,6 +7523,48 @@
           </a:p>
         </p:txBody>
       </p:sp>
+      <p:sp>
+        <p:nvSpPr>
+          <p:cNvPr id="5" name="TextBox 4">
+            <a:extLst>
+              <a:ext uri="{FF2B5EF4-FFF2-40B4-BE49-F238E27FC236}">
+                <a16:creationId xmlns:a16="http://schemas.microsoft.com/office/drawing/2014/main" id="{2C6AC7F8-E269-B9C7-95A1-4305BE9D1A9A}"/>
+              </a:ext>
+            </a:extLst>
+          </p:cNvPr>
+          <p:cNvSpPr txBox="1"/>
+          <p:nvPr/>
+        </p:nvSpPr>
+        <p:spPr>
+          <a:xfrm>
+            <a:off x="7468778" y="4987283"/>
+            <a:ext cx="4301067" cy="954107"/>
+          </a:xfrm>
+          <a:prstGeom prst="rect">
+            <a:avLst/>
+          </a:prstGeom>
+          <a:noFill/>
+        </p:spPr>
+        <p:txBody>
+          <a:bodyPr wrap="square" rtlCol="0">
+            <a:spAutoFit/>
+          </a:bodyPr>
+          <a:lstStyle/>
+          <a:p>
+            <a:r>
+              <a:rPr lang="en-US" sz="1400"/>
+              <a:t>Note:</a:t>
+            </a:r>
+            <a:br>
+              <a:rPr lang="en-US" sz="1400"/>
+            </a:br>
+            <a:r>
+              <a:rPr lang="en-US" sz="1400"/>
+              <a:t>You can access the hardware wallets from other types of wallets. For example, you can access your Ledger wallet from your Metamask or Coinbase wallet.</a:t>
+            </a:r>
+          </a:p>
+        </p:txBody>
+      </p:sp>
     </p:spTree>
     <p:extLst>
       <p:ext uri="{BB962C8B-B14F-4D97-AF65-F5344CB8AC3E}">
@@ -8609,8 +7609,8 @@
         </p:nvSpPr>
         <p:spPr>
           <a:xfrm>
-            <a:off x="2" y="1"/>
-            <a:ext cx="4841629" cy="523220"/>
+            <a:off x="3" y="1"/>
+            <a:ext cx="3729316" cy="523220"/>
           </a:xfrm>
           <a:prstGeom prst="rect">
             <a:avLst/>
@@ -8625,7 +7625,7 @@
           <a:p>
             <a:r>
               <a:rPr lang="en-US" sz="2800" b="1"/>
-              <a:t>Wallet – address, keys, signing</a:t>
+              <a:t>Wallet – keys, address</a:t>
             </a:r>
           </a:p>
         </p:txBody>
@@ -8644,13 +7644,18 @@
         </p:nvSpPr>
         <p:spPr>
           <a:xfrm>
-            <a:off x="185351" y="1025611"/>
-            <a:ext cx="11318789" cy="4401205"/>
+            <a:off x="159894" y="3822845"/>
+            <a:ext cx="5591992" cy="1815882"/>
           </a:xfrm>
           <a:prstGeom prst="rect">
             <a:avLst/>
           </a:prstGeom>
-          <a:noFill/>
+          <a:solidFill>
+            <a:schemeClr val="accent4">
+              <a:lumMod val="20000"/>
+              <a:lumOff val="80000"/>
+            </a:schemeClr>
+          </a:solidFill>
         </p:spPr>
         <p:txBody>
           <a:bodyPr wrap="square" rtlCol="0">
@@ -8660,76 +7665,506 @@
           <a:p>
             <a:r>
               <a:rPr lang="en-US" sz="1400"/>
-              <a:t>Bitcoin address and keys:</a:t>
-            </a:r>
-          </a:p>
-          <a:p>
-            <a:r>
-              <a:rPr lang="en-US" sz="1400"/>
-              <a:t>.. https://www.dummies.com/article/business-careers-money/personal-finance/cryptocurrency/bitcoin-public-private-keys-223627/</a:t>
-            </a:r>
-          </a:p>
-          <a:p>
+              <a:t>Most of the encryption in modern cryptocurrencies </a:t>
+            </a:r>
+          </a:p>
+          <a:p>
+            <a:r>
+              <a:rPr lang="en-US" sz="1400"/>
+              <a:t>are built on </a:t>
+            </a:r>
+            <a:r>
+              <a:rPr lang="en-US" sz="1400" b="1">
+                <a:solidFill>
+                  <a:srgbClr val="00B050"/>
+                </a:solidFill>
+              </a:rPr>
+              <a:t>elliptic curve cryptography</a:t>
+            </a:r>
+            <a:r>
+              <a:rPr lang="en-US" sz="1400"/>
+              <a:t> rather than RSA, </a:t>
+            </a:r>
+          </a:p>
+          <a:p>
+            <a:r>
+              <a:rPr lang="en-US" sz="1400"/>
+              <a:t>especially in the generation of signatures in bitcoin which requires ECDSA. </a:t>
+            </a:r>
+            <a:r>
+              <a:rPr lang="en-US" sz="1400">
+                <a:hlinkClick r:id="rId2"/>
+              </a:rPr>
+              <a:t>https://www.forbes.com/sites/rogerhuang/2020/12/21/heres-why-quantum-computing-will-not-break-cryptocurrencies/?sh=6d34a72a167b</a:t>
+            </a:r>
             <a:endParaRPr lang="en-US" sz="1400"/>
           </a:p>
           <a:p>
-            <a:r>
-              <a:rPr lang="en-US" sz="1400"/>
-              <a:t>Explanation: </a:t>
-            </a:r>
-          </a:p>
-          <a:p>
-            <a:r>
-              <a:rPr lang="en-US" sz="1400"/>
-              <a:t>.. private key</a:t>
-            </a:r>
-          </a:p>
-          <a:p>
-            <a:r>
-              <a:rPr lang="en-US" sz="1400"/>
-              <a:t>.. public key (256 bits)</a:t>
-            </a:r>
-          </a:p>
-          <a:p>
-            <a:r>
-              <a:rPr lang="en-US" sz="1400"/>
-              <a:t>.. wallet address (hashed public key, 160 bits)</a:t>
-            </a:r>
-          </a:p>
-          <a:p>
             <a:endParaRPr lang="en-US" sz="1400"/>
           </a:p>
           <a:p>
             <a:r>
-              <a:rPr lang="en-US" sz="1400"/>
-              <a:t>Signing a message with your bitcoin address</a:t>
-            </a:r>
-          </a:p>
-          <a:p>
-            <a:r>
-              <a:rPr lang="en-US" sz="1400"/>
-              <a:t>.. https://academy.bit2me.com/en/firmar-mensajes-bitcoin/</a:t>
-            </a:r>
-          </a:p>
-          <a:p>
+              <a:rPr lang="en-US" sz="1400" b="1" dirty="0">
+                <a:solidFill>
+                  <a:srgbClr val="00B050"/>
+                </a:solidFill>
+              </a:rPr>
+              <a:t>Elliptical Digital Signature Algorithm</a:t>
+            </a:r>
+            <a:endParaRPr lang="en-US" sz="1400" b="1">
+              <a:solidFill>
+                <a:srgbClr val="00B050"/>
+              </a:solidFill>
+            </a:endParaRPr>
+          </a:p>
+          <a:p>
+            <a:r>
+              <a:rPr lang="en-US" sz="1400" dirty="0">
+                <a:hlinkClick r:id="rId3"/>
+              </a:rPr>
+              <a:t>https://en.wikipedia.org/wiki/</a:t>
+            </a:r>
+            <a:r>
+              <a:rPr lang="en-US" sz="1400" dirty="0" err="1">
+                <a:hlinkClick r:id="rId3"/>
+              </a:rPr>
+              <a:t>Elliptic_Curve_Digital_Signature_Algorithm</a:t>
+            </a:r>
+            <a:endParaRPr lang="en-US" sz="1400" dirty="0"/>
+          </a:p>
+        </p:txBody>
+      </p:sp>
+      <p:pic>
+        <p:nvPicPr>
+          <p:cNvPr id="3" name="Picture 2">
+            <a:extLst>
+              <a:ext uri="{FF2B5EF4-FFF2-40B4-BE49-F238E27FC236}">
+                <a16:creationId xmlns:a16="http://schemas.microsoft.com/office/drawing/2014/main" id="{B3BBFD21-0DE1-2AD1-E88C-8384B0379BBB}"/>
+              </a:ext>
+            </a:extLst>
+          </p:cNvPr>
+          <p:cNvPicPr>
+            <a:picLocks noChangeAspect="1"/>
+          </p:cNvPicPr>
+          <p:nvPr/>
+        </p:nvPicPr>
+        <p:blipFill>
+          <a:blip r:embed="rId4" cstate="email">
+            <a:extLst>
+              <a:ext uri="{28A0092B-C50C-407E-A947-70E740481C1C}">
+                <a14:useLocalDpi xmlns:a14="http://schemas.microsoft.com/office/drawing/2010/main"/>
+              </a:ext>
+            </a:extLst>
+          </a:blip>
+          <a:stretch>
+            <a:fillRect/>
+          </a:stretch>
+        </p:blipFill>
+        <p:spPr>
+          <a:xfrm>
+            <a:off x="6288069" y="151932"/>
+            <a:ext cx="5365869" cy="1988323"/>
+          </a:xfrm>
+          <a:prstGeom prst="rect">
+            <a:avLst/>
+          </a:prstGeom>
+          <a:ln>
+            <a:solidFill>
+              <a:schemeClr val="accent1"/>
+            </a:solidFill>
+          </a:ln>
+        </p:spPr>
+      </p:pic>
+      <p:sp>
+        <p:nvSpPr>
+          <p:cNvPr id="4" name="TextBox 3">
+            <a:extLst>
+              <a:ext uri="{FF2B5EF4-FFF2-40B4-BE49-F238E27FC236}">
+                <a16:creationId xmlns:a16="http://schemas.microsoft.com/office/drawing/2014/main" id="{A8E052B3-509D-B5D9-1033-C39CC9C68274}"/>
+              </a:ext>
+            </a:extLst>
+          </p:cNvPr>
+          <p:cNvSpPr txBox="1"/>
+          <p:nvPr/>
+        </p:nvSpPr>
+        <p:spPr>
+          <a:xfrm>
+            <a:off x="159895" y="1144944"/>
+            <a:ext cx="5591990" cy="1446550"/>
+          </a:xfrm>
+          <a:prstGeom prst="rect">
+            <a:avLst/>
+          </a:prstGeom>
+          <a:solidFill>
+            <a:schemeClr val="accent4">
+              <a:lumMod val="20000"/>
+              <a:lumOff val="80000"/>
+            </a:schemeClr>
+          </a:solidFill>
+        </p:spPr>
+        <p:txBody>
+          <a:bodyPr wrap="square" rtlCol="0">
+            <a:spAutoFit/>
+          </a:bodyPr>
+          <a:lstStyle/>
+          <a:p>
+            <a:r>
+              <a:rPr lang="en-US" b="1">
+                <a:solidFill>
+                  <a:srgbClr val="00B050"/>
+                </a:solidFill>
+              </a:rPr>
+              <a:t>Bitcoin keys and address:</a:t>
+            </a:r>
+          </a:p>
+          <a:p>
+            <a:pPr marL="285750" indent="-285750">
+              <a:buFont typeface="Arial" panose="020B0604020202020204" pitchFamily="34" charset="0"/>
+              <a:buChar char="•"/>
+            </a:pPr>
+            <a:r>
+              <a:rPr lang="en-US" sz="1400"/>
+              <a:t>private key (256 bits = 32 bytes, randomly generated)</a:t>
+            </a:r>
+          </a:p>
+          <a:p>
+            <a:pPr marL="285750" indent="-285750">
+              <a:buFont typeface="Arial" panose="020B0604020202020204" pitchFamily="34" charset="0"/>
+              <a:buChar char="•"/>
+            </a:pPr>
+            <a:r>
+              <a:rPr lang="en-US" sz="1400"/>
+              <a:t>public key (256 bits = </a:t>
+            </a:r>
+            <a:r>
+              <a:rPr lang="en-US" sz="1400" b="1">
+                <a:solidFill>
+                  <a:srgbClr val="FF0000"/>
+                </a:solidFill>
+              </a:rPr>
+              <a:t>32</a:t>
+            </a:r>
+            <a:r>
+              <a:rPr lang="en-US" sz="1400"/>
+              <a:t> bytes, generated from private key)</a:t>
+            </a:r>
+          </a:p>
+          <a:p>
+            <a:pPr marL="285750" indent="-285750">
+              <a:buFont typeface="Arial" panose="020B0604020202020204" pitchFamily="34" charset="0"/>
+              <a:buChar char="•"/>
+            </a:pPr>
+            <a:r>
+              <a:rPr lang="en-US" sz="1400"/>
+              <a:t>address (from public key, 160 bits = 20 bytes)</a:t>
+            </a:r>
+          </a:p>
+          <a:p>
+            <a:pPr marL="285750" indent="-285750">
+              <a:buFont typeface="Arial" panose="020B0604020202020204" pitchFamily="34" charset="0"/>
+              <a:buChar char="•"/>
+            </a:pPr>
+            <a:r>
+              <a:rPr lang="en-US" sz="1400"/>
+              <a:t>Recovery Phrase - a seed (24 words?) that can be used to restore (regenerate) your private key</a:t>
+            </a:r>
+          </a:p>
+        </p:txBody>
+      </p:sp>
+      <p:sp>
+        <p:nvSpPr>
+          <p:cNvPr id="8" name="TextBox 7">
+            <a:extLst>
+              <a:ext uri="{FF2B5EF4-FFF2-40B4-BE49-F238E27FC236}">
+                <a16:creationId xmlns:a16="http://schemas.microsoft.com/office/drawing/2014/main" id="{7513321A-D987-4181-6C89-3CD7C3376213}"/>
+              </a:ext>
+            </a:extLst>
+          </p:cNvPr>
+          <p:cNvSpPr txBox="1"/>
+          <p:nvPr/>
+        </p:nvSpPr>
+        <p:spPr>
+          <a:xfrm>
+            <a:off x="159894" y="2703357"/>
+            <a:ext cx="5591989" cy="1015663"/>
+          </a:xfrm>
+          <a:prstGeom prst="rect">
+            <a:avLst/>
+          </a:prstGeom>
+          <a:solidFill>
+            <a:schemeClr val="accent4">
+              <a:lumMod val="20000"/>
+              <a:lumOff val="80000"/>
+            </a:schemeClr>
+          </a:solidFill>
+        </p:spPr>
+        <p:txBody>
+          <a:bodyPr wrap="square" rtlCol="0">
+            <a:spAutoFit/>
+          </a:bodyPr>
+          <a:lstStyle/>
+          <a:p>
+            <a:r>
+              <a:rPr lang="en-US" b="1">
+                <a:solidFill>
+                  <a:srgbClr val="00B050"/>
+                </a:solidFill>
+              </a:rPr>
+              <a:t>Ethereum keys and address:</a:t>
+            </a:r>
+          </a:p>
+          <a:p>
+            <a:pPr marL="285750" indent="-285750">
+              <a:buFont typeface="Arial" panose="020B0604020202020204" pitchFamily="34" charset="0"/>
+              <a:buChar char="•"/>
+            </a:pPr>
+            <a:r>
+              <a:rPr lang="en-US" sz="1400"/>
+              <a:t>private key (256 bits = 32 bytes, randomly generated)</a:t>
+            </a:r>
+          </a:p>
+          <a:p>
+            <a:pPr marL="285750" indent="-285750">
+              <a:buFont typeface="Arial" panose="020B0604020202020204" pitchFamily="34" charset="0"/>
+              <a:buChar char="•"/>
+            </a:pPr>
+            <a:r>
+              <a:rPr lang="en-US" sz="1400"/>
+              <a:t>public key (512 bits = </a:t>
+            </a:r>
+            <a:r>
+              <a:rPr lang="en-US" sz="1400" b="1">
+                <a:solidFill>
+                  <a:srgbClr val="FF0000"/>
+                </a:solidFill>
+              </a:rPr>
+              <a:t>64</a:t>
+            </a:r>
+            <a:r>
+              <a:rPr lang="en-US" sz="1400"/>
+              <a:t> bytes, generated from private key)</a:t>
+            </a:r>
+          </a:p>
+          <a:p>
+            <a:pPr marL="285750" indent="-285750">
+              <a:buFont typeface="Arial" panose="020B0604020202020204" pitchFamily="34" charset="0"/>
+              <a:buChar char="•"/>
+            </a:pPr>
+            <a:r>
+              <a:rPr lang="en-US" sz="1400"/>
+              <a:t>address (from public key, 160 bits = 20 bytes)</a:t>
+            </a:r>
+          </a:p>
+        </p:txBody>
+      </p:sp>
+      <p:sp>
+        <p:nvSpPr>
+          <p:cNvPr id="6" name="TextBox 5">
+            <a:extLst>
+              <a:ext uri="{FF2B5EF4-FFF2-40B4-BE49-F238E27FC236}">
+                <a16:creationId xmlns:a16="http://schemas.microsoft.com/office/drawing/2014/main" id="{515CF87C-3D81-53F2-2E3A-A02551AA464C}"/>
+              </a:ext>
+            </a:extLst>
+          </p:cNvPr>
+          <p:cNvSpPr txBox="1"/>
+          <p:nvPr/>
+        </p:nvSpPr>
+        <p:spPr>
+          <a:xfrm>
+            <a:off x="6288068" y="2392603"/>
+            <a:ext cx="5365869" cy="800219"/>
+          </a:xfrm>
+          <a:prstGeom prst="rect">
+            <a:avLst/>
+          </a:prstGeom>
+          <a:solidFill>
+            <a:schemeClr val="accent4">
+              <a:lumMod val="20000"/>
+              <a:lumOff val="80000"/>
+            </a:schemeClr>
+          </a:solidFill>
+        </p:spPr>
+        <p:txBody>
+          <a:bodyPr wrap="square" rtlCol="0">
+            <a:spAutoFit/>
+          </a:bodyPr>
+          <a:lstStyle/>
+          <a:p>
+            <a:r>
+              <a:rPr lang="en-US" b="1">
+                <a:solidFill>
+                  <a:srgbClr val="00B050"/>
+                </a:solidFill>
+              </a:rPr>
+              <a:t>WIF  = Wallet Import Format  </a:t>
+            </a:r>
+            <a:r>
+              <a:rPr lang="en-US" sz="1400"/>
+              <a:t>(a.k.a. wallet export format)</a:t>
+            </a:r>
+            <a:br>
+              <a:rPr lang="en-US" sz="1400"/>
+            </a:br>
+            <a:r>
+              <a:rPr lang="en-US" sz="1400"/>
+              <a:t>is a way of encoding a private ECDSA key so as to make it easier to copy.</a:t>
+            </a:r>
+          </a:p>
+          <a:p>
+            <a:r>
+              <a:rPr lang="en-US" sz="1400"/>
+              <a:t>.. </a:t>
+            </a:r>
+            <a:r>
+              <a:rPr lang="en-US" sz="1400">
+                <a:hlinkClick r:id="rId5"/>
+              </a:rPr>
+              <a:t>https://en.bitcoin.it/wiki/Wallet_import_format</a:t>
+            </a:r>
             <a:endParaRPr lang="en-US" sz="1400"/>
           </a:p>
-          <a:p>
-            <a:r>
-              <a:rPr lang="en-US" sz="1400"/>
-              <a:t>Most of the encryption in modern cryptocurrencies are built on elliptic curve cryptography rather than RSA, </a:t>
-            </a:r>
-          </a:p>
-          <a:p>
-            <a:r>
-              <a:rPr lang="en-US" sz="1400"/>
-              <a:t>especially in the generation of signatures in bitcoin which requires ECDSA.</a:t>
-            </a:r>
-          </a:p>
-          <a:p>
-            <a:r>
-              <a:rPr lang="en-US" sz="1400"/>
-              <a:t>.. https://www.forbes.com/sites/rogerhuang/2020/12/21/heres-why-quantum-computing-will-not-break-cryptocurrencies/?sh=6d34a72a167b</a:t>
+        </p:txBody>
+      </p:sp>
+      <p:sp>
+        <p:nvSpPr>
+          <p:cNvPr id="10" name="TextBox 9">
+            <a:extLst>
+              <a:ext uri="{FF2B5EF4-FFF2-40B4-BE49-F238E27FC236}">
+                <a16:creationId xmlns:a16="http://schemas.microsoft.com/office/drawing/2014/main" id="{AF04A95C-B2F5-4768-DF59-8F1157206E91}"/>
+              </a:ext>
+            </a:extLst>
+          </p:cNvPr>
+          <p:cNvSpPr txBox="1"/>
+          <p:nvPr/>
+        </p:nvSpPr>
+        <p:spPr>
+          <a:xfrm>
+            <a:off x="159894" y="560905"/>
+            <a:ext cx="5591989" cy="523220"/>
+          </a:xfrm>
+          <a:prstGeom prst="rect">
+            <a:avLst/>
+          </a:prstGeom>
+          <a:solidFill>
+            <a:schemeClr val="accent4">
+              <a:lumMod val="20000"/>
+              <a:lumOff val="80000"/>
+            </a:schemeClr>
+          </a:solidFill>
+        </p:spPr>
+        <p:txBody>
+          <a:bodyPr wrap="square" rtlCol="0">
+            <a:spAutoFit/>
+          </a:bodyPr>
+          <a:lstStyle/>
+          <a:p>
+            <a:r>
+              <a:rPr lang="en-US" sz="1400"/>
+              <a:t>public key or address – it is like a user name</a:t>
+            </a:r>
+          </a:p>
+          <a:p>
+            <a:r>
+              <a:rPr lang="en-US" sz="1400"/>
+              <a:t>private key – like a password (to confirm transactions)</a:t>
+            </a:r>
+          </a:p>
+        </p:txBody>
+      </p:sp>
+      <p:sp>
+        <p:nvSpPr>
+          <p:cNvPr id="12" name="TextBox 11">
+            <a:extLst>
+              <a:ext uri="{FF2B5EF4-FFF2-40B4-BE49-F238E27FC236}">
+                <a16:creationId xmlns:a16="http://schemas.microsoft.com/office/drawing/2014/main" id="{1B47DF35-CAA5-6D39-2A4E-44FA13F04B32}"/>
+              </a:ext>
+            </a:extLst>
+          </p:cNvPr>
+          <p:cNvSpPr txBox="1"/>
+          <p:nvPr/>
+        </p:nvSpPr>
+        <p:spPr>
+          <a:xfrm>
+            <a:off x="6288068" y="3445170"/>
+            <a:ext cx="5670850" cy="2135665"/>
+          </a:xfrm>
+          <a:prstGeom prst="rect">
+            <a:avLst/>
+          </a:prstGeom>
+          <a:solidFill>
+            <a:schemeClr val="accent4">
+              <a:lumMod val="20000"/>
+              <a:lumOff val="80000"/>
+            </a:schemeClr>
+          </a:solidFill>
+        </p:spPr>
+        <p:txBody>
+          <a:bodyPr wrap="square" rtlCol="0">
+            <a:spAutoFit/>
+          </a:bodyPr>
+          <a:lstStyle/>
+          <a:p>
+            <a:r>
+              <a:rPr lang="en-US" b="1">
+                <a:solidFill>
+                  <a:srgbClr val="00B050"/>
+                </a:solidFill>
+              </a:rPr>
+              <a:t>To send Bitcoin:</a:t>
+            </a:r>
+          </a:p>
+          <a:p>
+            <a:pPr marL="285750" indent="-285750">
+              <a:buFont typeface="Arial" panose="020B0604020202020204" pitchFamily="34" charset="0"/>
+              <a:buChar char="•"/>
+            </a:pPr>
+            <a:r>
+              <a:rPr lang="en-US" sz="1400"/>
+              <a:t>Enter the "Recipient" Bitcoin </a:t>
+            </a:r>
+            <a:r>
+              <a:rPr lang="en-US" sz="1400" b="1">
+                <a:solidFill>
+                  <a:srgbClr val="00B050"/>
+                </a:solidFill>
+              </a:rPr>
+              <a:t>public key</a:t>
+            </a:r>
+            <a:r>
+              <a:rPr lang="en-US" sz="1400"/>
+              <a:t> or </a:t>
+            </a:r>
+            <a:r>
+              <a:rPr lang="en-US" sz="1400" b="1">
+                <a:solidFill>
+                  <a:srgbClr val="00B050"/>
+                </a:solidFill>
+              </a:rPr>
+              <a:t>address</a:t>
+            </a:r>
+            <a:r>
+              <a:rPr lang="en-US" sz="1400"/>
+              <a:t> </a:t>
+            </a:r>
+          </a:p>
+          <a:p>
+            <a:pPr marL="285750" indent="-285750">
+              <a:buFont typeface="Arial" panose="020B0604020202020204" pitchFamily="34" charset="0"/>
+              <a:buChar char="•"/>
+            </a:pPr>
+            <a:r>
+              <a:rPr lang="en-US" sz="1400"/>
+              <a:t>Enter the amount you’d like to send</a:t>
+            </a:r>
+          </a:p>
+          <a:p>
+            <a:pPr marL="285750" indent="-285750">
+              <a:buFont typeface="Arial" panose="020B0604020202020204" pitchFamily="34" charset="0"/>
+              <a:buChar char="•"/>
+            </a:pPr>
+            <a:r>
+              <a:rPr lang="en-US" sz="1400"/>
+              <a:t>Click "Send"</a:t>
             </a:r>
           </a:p>
           <a:p>
@@ -8737,36 +8172,165 @@
           </a:p>
           <a:p>
             <a:r>
-              <a:rPr lang="en-US" sz="1400" dirty="0"/>
-              <a:t>Elliptical Digital Signature Algorithm</a:t>
-            </a:r>
-            <a:endParaRPr lang="en-US" sz="1400"/>
-          </a:p>
-          <a:p>
-            <a:r>
-              <a:rPr lang="en-US" sz="1400"/>
-              <a:t>.. </a:t>
-            </a:r>
-            <a:r>
-              <a:rPr lang="en-US" sz="1400" dirty="0"/>
-              <a:t>https://en.wikipedia.org/wiki/</a:t>
-            </a:r>
-            <a:r>
-              <a:rPr lang="en-US" sz="1400" dirty="0" err="1"/>
-              <a:t>Elliptic_Curve_Digital_Signature_Algorithm</a:t>
-            </a:r>
-            <a:endParaRPr lang="en-US" sz="1400" dirty="0"/>
-          </a:p>
-          <a:p>
-            <a:endParaRPr lang="en-US" sz="1400"/>
-          </a:p>
-          <a:p>
-            <a:r>
-              <a:rPr lang="en-US" sz="1400"/>
-              <a:t>”Burning Coins”</a:t>
-            </a:r>
-          </a:p>
-          <a:p>
+              <a:rPr lang="en-US" b="1">
+                <a:solidFill>
+                  <a:srgbClr val="00B050"/>
+                </a:solidFill>
+              </a:rPr>
+              <a:t>To receive Bitcoin:</a:t>
+            </a:r>
+          </a:p>
+          <a:p>
+            <a:pPr marL="285750" indent="-285750">
+              <a:buFont typeface="Arial" panose="020B0604020202020204" pitchFamily="34" charset="0"/>
+              <a:buChar char="•"/>
+            </a:pPr>
+            <a:r>
+              <a:rPr lang="en-US" sz="1400"/>
+              <a:t>Open your crypto wallet and select "Receive" to access your public key</a:t>
+            </a:r>
+          </a:p>
+          <a:p>
+            <a:pPr marL="285750" indent="-285750">
+              <a:buFont typeface="Arial" panose="020B0604020202020204" pitchFamily="34" charset="0"/>
+              <a:buChar char="•"/>
+            </a:pPr>
+            <a:r>
+              <a:rPr lang="en-US" sz="1400"/>
+              <a:t>Share your </a:t>
+            </a:r>
+            <a:r>
+              <a:rPr lang="en-US" sz="1400" b="1">
+                <a:solidFill>
+                  <a:srgbClr val="00B050"/>
+                </a:solidFill>
+              </a:rPr>
+              <a:t>public key</a:t>
+            </a:r>
+            <a:r>
+              <a:rPr lang="en-US" sz="1400"/>
+              <a:t> with the sender</a:t>
+            </a:r>
+          </a:p>
+          <a:p>
+            <a:pPr marL="285750" indent="-285750">
+              <a:buFont typeface="Arial" panose="020B0604020202020204" pitchFamily="34" charset="0"/>
+              <a:buChar char="•"/>
+            </a:pPr>
+            <a:r>
+              <a:rPr lang="en-US" sz="1400"/>
+              <a:t>Sit back and wait for the Bitcoins to appear in your wallet</a:t>
+            </a:r>
+          </a:p>
+        </p:txBody>
+      </p:sp>
+      <p:sp>
+        <p:nvSpPr>
+          <p:cNvPr id="13" name="TextBox 12">
+            <a:extLst>
+              <a:ext uri="{FF2B5EF4-FFF2-40B4-BE49-F238E27FC236}">
+                <a16:creationId xmlns:a16="http://schemas.microsoft.com/office/drawing/2014/main" id="{15660542-7257-4B22-DCB1-6ACF644CD0E1}"/>
+              </a:ext>
+            </a:extLst>
+          </p:cNvPr>
+          <p:cNvSpPr txBox="1"/>
+          <p:nvPr/>
+        </p:nvSpPr>
+        <p:spPr>
+          <a:xfrm>
+            <a:off x="159894" y="5742552"/>
+            <a:ext cx="5591989" cy="800219"/>
+          </a:xfrm>
+          <a:prstGeom prst="rect">
+            <a:avLst/>
+          </a:prstGeom>
+          <a:solidFill>
+            <a:schemeClr val="accent4">
+              <a:lumMod val="20000"/>
+              <a:lumOff val="80000"/>
+            </a:schemeClr>
+          </a:solidFill>
+        </p:spPr>
+        <p:txBody>
+          <a:bodyPr wrap="square" rtlCol="0">
+            <a:spAutoFit/>
+          </a:bodyPr>
+          <a:lstStyle/>
+          <a:p>
+            <a:r>
+              <a:rPr lang="en-US" b="1">
+                <a:solidFill>
+                  <a:srgbClr val="00B050"/>
+                </a:solidFill>
+              </a:rPr>
+              <a:t>Keep your private key safe:</a:t>
+            </a:r>
+          </a:p>
+          <a:p>
+            <a:r>
+              <a:rPr lang="en-US" sz="1400"/>
+              <a:t>Never share your private key with anyone, keep offline (to avoid hacking), backup (seed phrase, a wallet file backup, keeping a copy in a safe)</a:t>
+            </a:r>
+          </a:p>
+        </p:txBody>
+      </p:sp>
+      <p:sp>
+        <p:nvSpPr>
+          <p:cNvPr id="14" name="TextBox 13">
+            <a:extLst>
+              <a:ext uri="{FF2B5EF4-FFF2-40B4-BE49-F238E27FC236}">
+                <a16:creationId xmlns:a16="http://schemas.microsoft.com/office/drawing/2014/main" id="{BC89C26B-59D5-F31B-5C4D-4EFD9D053E55}"/>
+              </a:ext>
+            </a:extLst>
+          </p:cNvPr>
+          <p:cNvSpPr txBox="1"/>
+          <p:nvPr/>
+        </p:nvSpPr>
+        <p:spPr>
+          <a:xfrm>
+            <a:off x="6288068" y="5742552"/>
+            <a:ext cx="5670850" cy="738664"/>
+          </a:xfrm>
+          <a:prstGeom prst="rect">
+            <a:avLst/>
+          </a:prstGeom>
+          <a:solidFill>
+            <a:schemeClr val="accent5">
+              <a:lumMod val="20000"/>
+              <a:lumOff val="80000"/>
+            </a:schemeClr>
+          </a:solidFill>
+        </p:spPr>
+        <p:txBody>
+          <a:bodyPr wrap="square" rtlCol="0">
+            <a:spAutoFit/>
+          </a:bodyPr>
+          <a:lstStyle/>
+          <a:p>
+            <a:r>
+              <a:rPr lang="en-US" sz="1400"/>
+              <a:t>Note: you almost never need to explicitly use your private key. </a:t>
+            </a:r>
+            <a:br>
+              <a:rPr lang="en-US" sz="1400"/>
+            </a:br>
+            <a:r>
+              <a:rPr lang="en-US" sz="1400"/>
+              <a:t>Private keys are used to sign messages and transaction messages. </a:t>
+            </a:r>
+            <a:br>
+              <a:rPr lang="en-US" sz="1400"/>
+            </a:br>
+            <a:r>
+              <a:rPr lang="en-US" sz="1400"/>
+              <a:t>Your wallet will do it for you - </a:t>
+            </a:r>
+            <a:r>
+              <a:rPr lang="en-US" sz="1400">
+                <a:hlinkClick r:id="rId6"/>
+              </a:rPr>
+              <a:t>https://en.bitcoin.it/wiki/Transaction</a:t>
+            </a:r>
             <a:endParaRPr lang="en-US" sz="1400"/>
           </a:p>
         </p:txBody>
